--- a/lesson_03-dart_101_part_1/lesson_03-dart_101_part_1.pptx
+++ b/lesson_03-dart_101_part_1/lesson_03-dart_101_part_1.pptx
@@ -249,7 +249,7 @@
           <a:p>
             <a:fld id="{81C4B3FE-0320-8142-8396-5C3025C019EC}" type="datetimeFigureOut">
               <a:rPr lang="en-IT" smtClean="0"/>
-              <a:t>2/10/26</a:t>
+              <a:t>2/19/26</a:t>
             </a:fld>
             <a:endParaRPr lang="en-IT"/>
           </a:p>
@@ -5583,7 +5583,9 @@
             <a:pPr lvl="1"/>
             <a:r>
               <a:rPr lang="en-GB" dirty="0">
-                <a:latin typeface="Courier" pitchFamily="2" charset="0"/>
+                <a:latin typeface="Menlo" panose="020B0609030804020204" pitchFamily="49" charset="0"/>
+                <a:ea typeface="Menlo" panose="020B0609030804020204" pitchFamily="49" charset="0"/>
+                <a:cs typeface="Menlo" panose="020B0609030804020204" pitchFamily="49" charset="0"/>
               </a:rPr>
               <a:t>int a; //Non-nullable int type</a:t>
             </a:r>
@@ -5592,7 +5594,9 @@
             <a:pPr lvl="1"/>
             <a:r>
               <a:rPr lang="en-GB" dirty="0">
-                <a:latin typeface="Courier" pitchFamily="2" charset="0"/>
+                <a:latin typeface="Menlo" panose="020B0609030804020204" pitchFamily="49" charset="0"/>
+                <a:ea typeface="Menlo" panose="020B0609030804020204" pitchFamily="49" charset="0"/>
+                <a:cs typeface="Menlo" panose="020B0609030804020204" pitchFamily="49" charset="0"/>
               </a:rPr>
               <a:t>int? b; //Nullable int type</a:t>
             </a:r>
@@ -6262,7 +6266,7 @@
         <p:spPr>
           <a:xfrm>
             <a:off x="428171" y="1361167"/>
-            <a:ext cx="8101679" cy="5334907"/>
+            <a:ext cx="8634806" cy="5334907"/>
           </a:xfrm>
         </p:spPr>
         <p:txBody>
@@ -6280,19 +6284,25 @@
             <a:pPr lvl="1"/>
             <a:r>
               <a:rPr lang="en-GB" dirty="0">
-                <a:latin typeface="Courier" pitchFamily="2" charset="0"/>
+                <a:latin typeface="Menlo" panose="020B0609030804020204" pitchFamily="49" charset="0"/>
+                <a:ea typeface="Menlo" panose="020B0609030804020204" pitchFamily="49" charset="0"/>
+                <a:cs typeface="Menlo" panose="020B0609030804020204" pitchFamily="49" charset="0"/>
               </a:rPr>
               <a:t>int </a:t>
             </a:r>
             <a:r>
               <a:rPr lang="en-GB" dirty="0" err="1">
-                <a:latin typeface="Courier" pitchFamily="2" charset="0"/>
+                <a:latin typeface="Menlo" panose="020B0609030804020204" pitchFamily="49" charset="0"/>
+                <a:ea typeface="Menlo" panose="020B0609030804020204" pitchFamily="49" charset="0"/>
+                <a:cs typeface="Menlo" panose="020B0609030804020204" pitchFamily="49" charset="0"/>
               </a:rPr>
               <a:t>anInteger</a:t>
             </a:r>
             <a:r>
               <a:rPr lang="en-GB" dirty="0">
-                <a:latin typeface="Courier" pitchFamily="2" charset="0"/>
+                <a:latin typeface="Menlo" panose="020B0609030804020204" pitchFamily="49" charset="0"/>
+                <a:ea typeface="Menlo" panose="020B0609030804020204" pitchFamily="49" charset="0"/>
+                <a:cs typeface="Menlo" panose="020B0609030804020204" pitchFamily="49" charset="0"/>
               </a:rPr>
               <a:t> = 3; </a:t>
             </a:r>
@@ -6307,19 +6317,25 @@
             <a:pPr lvl="1"/>
             <a:r>
               <a:rPr lang="en-GB" dirty="0">
-                <a:latin typeface="Courier" pitchFamily="2" charset="0"/>
+                <a:latin typeface="Menlo" panose="020B0609030804020204" pitchFamily="49" charset="0"/>
+                <a:ea typeface="Menlo" panose="020B0609030804020204" pitchFamily="49" charset="0"/>
+                <a:cs typeface="Menlo" panose="020B0609030804020204" pitchFamily="49" charset="0"/>
               </a:rPr>
               <a:t>double </a:t>
             </a:r>
             <a:r>
               <a:rPr lang="en-GB" dirty="0" err="1">
-                <a:latin typeface="Courier" pitchFamily="2" charset="0"/>
+                <a:latin typeface="Menlo" panose="020B0609030804020204" pitchFamily="49" charset="0"/>
+                <a:ea typeface="Menlo" panose="020B0609030804020204" pitchFamily="49" charset="0"/>
+                <a:cs typeface="Menlo" panose="020B0609030804020204" pitchFamily="49" charset="0"/>
               </a:rPr>
               <a:t>aDouble</a:t>
             </a:r>
             <a:r>
               <a:rPr lang="en-GB" dirty="0">
-                <a:latin typeface="Courier" pitchFamily="2" charset="0"/>
+                <a:latin typeface="Menlo" panose="020B0609030804020204" pitchFamily="49" charset="0"/>
+                <a:ea typeface="Menlo" panose="020B0609030804020204" pitchFamily="49" charset="0"/>
+                <a:cs typeface="Menlo" panose="020B0609030804020204" pitchFamily="49" charset="0"/>
               </a:rPr>
               <a:t> = 3.0; </a:t>
             </a:r>
@@ -6328,19 +6344,25 @@
             <a:pPr lvl="1"/>
             <a:r>
               <a:rPr lang="en-GB" dirty="0">
-                <a:latin typeface="Courier" pitchFamily="2" charset="0"/>
+                <a:latin typeface="Menlo" panose="020B0609030804020204" pitchFamily="49" charset="0"/>
+                <a:ea typeface="Menlo" panose="020B0609030804020204" pitchFamily="49" charset="0"/>
+                <a:cs typeface="Menlo" panose="020B0609030804020204" pitchFamily="49" charset="0"/>
               </a:rPr>
               <a:t>print(</a:t>
             </a:r>
             <a:r>
               <a:rPr lang="en-GB" dirty="0" err="1">
-                <a:latin typeface="Courier" pitchFamily="2" charset="0"/>
+                <a:latin typeface="Menlo" panose="020B0609030804020204" pitchFamily="49" charset="0"/>
+                <a:ea typeface="Menlo" panose="020B0609030804020204" pitchFamily="49" charset="0"/>
+                <a:cs typeface="Menlo" panose="020B0609030804020204" pitchFamily="49" charset="0"/>
               </a:rPr>
               <a:t>double.nan</a:t>
             </a:r>
             <a:r>
               <a:rPr lang="en-GB" dirty="0">
-                <a:latin typeface="Courier" pitchFamily="2" charset="0"/>
+                <a:latin typeface="Menlo" panose="020B0609030804020204" pitchFamily="49" charset="0"/>
+                <a:ea typeface="Menlo" panose="020B0609030804020204" pitchFamily="49" charset="0"/>
+                <a:cs typeface="Menlo" panose="020B0609030804020204" pitchFamily="49" charset="0"/>
               </a:rPr>
               <a:t>); //Special constant 1: not-a-number</a:t>
             </a:r>
@@ -6349,19 +6371,25 @@
             <a:pPr lvl="1"/>
             <a:r>
               <a:rPr lang="en-GB" dirty="0">
-                <a:latin typeface="Courier" pitchFamily="2" charset="0"/>
+                <a:latin typeface="Menlo" panose="020B0609030804020204" pitchFamily="49" charset="0"/>
+                <a:ea typeface="Menlo" panose="020B0609030804020204" pitchFamily="49" charset="0"/>
+                <a:cs typeface="Menlo" panose="020B0609030804020204" pitchFamily="49" charset="0"/>
               </a:rPr>
               <a:t>print(</a:t>
             </a:r>
             <a:r>
               <a:rPr lang="en-GB" dirty="0" err="1">
-                <a:latin typeface="Courier" pitchFamily="2" charset="0"/>
+                <a:latin typeface="Menlo" panose="020B0609030804020204" pitchFamily="49" charset="0"/>
+                <a:ea typeface="Menlo" panose="020B0609030804020204" pitchFamily="49" charset="0"/>
+                <a:cs typeface="Menlo" panose="020B0609030804020204" pitchFamily="49" charset="0"/>
               </a:rPr>
               <a:t>double.negativeInfinity</a:t>
             </a:r>
             <a:r>
               <a:rPr lang="en-GB" dirty="0">
-                <a:latin typeface="Courier" pitchFamily="2" charset="0"/>
+                <a:latin typeface="Menlo" panose="020B0609030804020204" pitchFamily="49" charset="0"/>
+                <a:ea typeface="Menlo" panose="020B0609030804020204" pitchFamily="49" charset="0"/>
+                <a:cs typeface="Menlo" panose="020B0609030804020204" pitchFamily="49" charset="0"/>
               </a:rPr>
               <a:t>); //Special constant 2: -inf</a:t>
             </a:r>
@@ -6370,19 +6398,25 @@
             <a:pPr lvl="1"/>
             <a:r>
               <a:rPr lang="en-GB" dirty="0">
-                <a:latin typeface="Courier" pitchFamily="2" charset="0"/>
+                <a:latin typeface="Menlo" panose="020B0609030804020204" pitchFamily="49" charset="0"/>
+                <a:ea typeface="Menlo" panose="020B0609030804020204" pitchFamily="49" charset="0"/>
+                <a:cs typeface="Menlo" panose="020B0609030804020204" pitchFamily="49" charset="0"/>
               </a:rPr>
               <a:t>print(</a:t>
             </a:r>
             <a:r>
               <a:rPr lang="en-GB" dirty="0" err="1">
-                <a:latin typeface="Courier" pitchFamily="2" charset="0"/>
+                <a:latin typeface="Menlo" panose="020B0609030804020204" pitchFamily="49" charset="0"/>
+                <a:ea typeface="Menlo" panose="020B0609030804020204" pitchFamily="49" charset="0"/>
+                <a:cs typeface="Menlo" panose="020B0609030804020204" pitchFamily="49" charset="0"/>
               </a:rPr>
               <a:t>double.infinity</a:t>
             </a:r>
             <a:r>
               <a:rPr lang="en-GB" dirty="0">
-                <a:latin typeface="Courier" pitchFamily="2" charset="0"/>
+                <a:latin typeface="Menlo" panose="020B0609030804020204" pitchFamily="49" charset="0"/>
+                <a:ea typeface="Menlo" panose="020B0609030804020204" pitchFamily="49" charset="0"/>
+                <a:cs typeface="Menlo" panose="020B0609030804020204" pitchFamily="49" charset="0"/>
               </a:rPr>
               <a:t>); //Special constant 3: inf</a:t>
             </a:r>
@@ -6391,19 +6425,25 @@
             <a:pPr lvl="1"/>
             <a:r>
               <a:rPr lang="en-GB" dirty="0">
-                <a:latin typeface="Courier" pitchFamily="2" charset="0"/>
+                <a:latin typeface="Menlo" panose="020B0609030804020204" pitchFamily="49" charset="0"/>
+                <a:ea typeface="Menlo" panose="020B0609030804020204" pitchFamily="49" charset="0"/>
+                <a:cs typeface="Menlo" panose="020B0609030804020204" pitchFamily="49" charset="0"/>
               </a:rPr>
               <a:t>print(</a:t>
             </a:r>
             <a:r>
               <a:rPr lang="en-GB" dirty="0" err="1">
-                <a:latin typeface="Courier" pitchFamily="2" charset="0"/>
+                <a:latin typeface="Menlo" panose="020B0609030804020204" pitchFamily="49" charset="0"/>
+                <a:ea typeface="Menlo" panose="020B0609030804020204" pitchFamily="49" charset="0"/>
+                <a:cs typeface="Menlo" panose="020B0609030804020204" pitchFamily="49" charset="0"/>
               </a:rPr>
               <a:t>double.minPositive</a:t>
             </a:r>
             <a:r>
               <a:rPr lang="en-GB" dirty="0">
-                <a:latin typeface="Courier" pitchFamily="2" charset="0"/>
+                <a:latin typeface="Menlo" panose="020B0609030804020204" pitchFamily="49" charset="0"/>
+                <a:ea typeface="Menlo" panose="020B0609030804020204" pitchFamily="49" charset="0"/>
+                <a:cs typeface="Menlo" panose="020B0609030804020204" pitchFamily="49" charset="0"/>
               </a:rPr>
               <a:t>); //Special constant 4: minimum representable number</a:t>
             </a:r>
@@ -6412,19 +6452,25 @@
             <a:pPr lvl="1"/>
             <a:r>
               <a:rPr lang="en-GB" dirty="0">
-                <a:latin typeface="Courier" pitchFamily="2" charset="0"/>
+                <a:latin typeface="Menlo" panose="020B0609030804020204" pitchFamily="49" charset="0"/>
+                <a:ea typeface="Menlo" panose="020B0609030804020204" pitchFamily="49" charset="0"/>
+                <a:cs typeface="Menlo" panose="020B0609030804020204" pitchFamily="49" charset="0"/>
               </a:rPr>
               <a:t>print(</a:t>
             </a:r>
             <a:r>
               <a:rPr lang="en-GB" dirty="0" err="1">
-                <a:latin typeface="Courier" pitchFamily="2" charset="0"/>
+                <a:latin typeface="Menlo" panose="020B0609030804020204" pitchFamily="49" charset="0"/>
+                <a:ea typeface="Menlo" panose="020B0609030804020204" pitchFamily="49" charset="0"/>
+                <a:cs typeface="Menlo" panose="020B0609030804020204" pitchFamily="49" charset="0"/>
               </a:rPr>
               <a:t>double.maxFinite</a:t>
             </a:r>
             <a:r>
               <a:rPr lang="en-GB" dirty="0">
-                <a:latin typeface="Courier" pitchFamily="2" charset="0"/>
+                <a:latin typeface="Menlo" panose="020B0609030804020204" pitchFamily="49" charset="0"/>
+                <a:ea typeface="Menlo" panose="020B0609030804020204" pitchFamily="49" charset="0"/>
+                <a:cs typeface="Menlo" panose="020B0609030804020204" pitchFamily="49" charset="0"/>
               </a:rPr>
               <a:t>); //Special constant 5: maximum representable positive number</a:t>
             </a:r>
@@ -6775,26 +6821,18 @@
         <p:spPr>
           <a:xfrm>
             <a:off x="428171" y="1361167"/>
-            <a:ext cx="8101679" cy="5334907"/>
+            <a:ext cx="8970472" cy="5334907"/>
           </a:xfrm>
         </p:spPr>
         <p:txBody>
-          <a:bodyPr>
+          <a:bodyPr vert="horz" lIns="91440" tIns="45720" rIns="91440" bIns="45720" rtlCol="0">
             <a:normAutofit/>
           </a:bodyPr>
           <a:lstStyle/>
           <a:p>
             <a:r>
               <a:rPr lang="en-GB" dirty="0"/>
-              <a:t>Useful thing to know: how to </a:t>
-            </a:r>
-            <a:r>
-              <a:rPr lang="en-GB" b="1" dirty="0"/>
-              <a:t>parse</a:t>
-            </a:r>
-            <a:r>
-              <a:rPr lang="en-GB" dirty="0"/>
-              <a:t> numbers to strings and </a:t>
+              <a:t>Useful thing to know: how to parse numbers to strings and </a:t>
             </a:r>
             <a:r>
               <a:rPr lang="en-GB" dirty="0" err="1"/>
@@ -6812,19 +6850,25 @@
             <a:pPr lvl="1"/>
             <a:r>
               <a:rPr lang="en-GB" dirty="0">
-                <a:latin typeface="Courier" pitchFamily="2" charset="0"/>
+                <a:latin typeface="Menlo" panose="020B0609030804020204" pitchFamily="49" charset="0"/>
+                <a:ea typeface="Menlo" panose="020B0609030804020204" pitchFamily="49" charset="0"/>
+                <a:cs typeface="Menlo" panose="020B0609030804020204" pitchFamily="49" charset="0"/>
               </a:rPr>
               <a:t>var one = </a:t>
             </a:r>
             <a:r>
               <a:rPr lang="en-GB" dirty="0" err="1">
-                <a:latin typeface="Courier" pitchFamily="2" charset="0"/>
+                <a:latin typeface="Menlo" panose="020B0609030804020204" pitchFamily="49" charset="0"/>
+                <a:ea typeface="Menlo" panose="020B0609030804020204" pitchFamily="49" charset="0"/>
+                <a:cs typeface="Menlo" panose="020B0609030804020204" pitchFamily="49" charset="0"/>
               </a:rPr>
               <a:t>int.parse</a:t>
             </a:r>
             <a:r>
               <a:rPr lang="en-GB" dirty="0">
-                <a:latin typeface="Courier" pitchFamily="2" charset="0"/>
+                <a:latin typeface="Menlo" panose="020B0609030804020204" pitchFamily="49" charset="0"/>
+                <a:ea typeface="Menlo" panose="020B0609030804020204" pitchFamily="49" charset="0"/>
+                <a:cs typeface="Menlo" panose="020B0609030804020204" pitchFamily="49" charset="0"/>
               </a:rPr>
               <a:t>('1');</a:t>
             </a:r>
@@ -6839,31 +6883,41 @@
             <a:pPr lvl="1"/>
             <a:r>
               <a:rPr lang="en-GB" dirty="0">
-                <a:latin typeface="Courier" pitchFamily="2" charset="0"/>
+                <a:latin typeface="Menlo" panose="020B0609030804020204" pitchFamily="49" charset="0"/>
+                <a:ea typeface="Menlo" panose="020B0609030804020204" pitchFamily="49" charset="0"/>
+                <a:cs typeface="Menlo" panose="020B0609030804020204" pitchFamily="49" charset="0"/>
               </a:rPr>
               <a:t>var </a:t>
             </a:r>
             <a:r>
               <a:rPr lang="en-GB" dirty="0" err="1">
-                <a:latin typeface="Courier" pitchFamily="2" charset="0"/>
+                <a:latin typeface="Menlo" panose="020B0609030804020204" pitchFamily="49" charset="0"/>
+                <a:ea typeface="Menlo" panose="020B0609030804020204" pitchFamily="49" charset="0"/>
+                <a:cs typeface="Menlo" panose="020B0609030804020204" pitchFamily="49" charset="0"/>
               </a:rPr>
               <a:t>onePointOne</a:t>
             </a:r>
             <a:r>
               <a:rPr lang="en-GB" dirty="0">
-                <a:latin typeface="Courier" pitchFamily="2" charset="0"/>
+                <a:latin typeface="Menlo" panose="020B0609030804020204" pitchFamily="49" charset="0"/>
+                <a:ea typeface="Menlo" panose="020B0609030804020204" pitchFamily="49" charset="0"/>
+                <a:cs typeface="Menlo" panose="020B0609030804020204" pitchFamily="49" charset="0"/>
               </a:rPr>
               <a:t> = </a:t>
             </a:r>
             <a:r>
               <a:rPr lang="en-GB" dirty="0" err="1">
-                <a:latin typeface="Courier" pitchFamily="2" charset="0"/>
+                <a:latin typeface="Menlo" panose="020B0609030804020204" pitchFamily="49" charset="0"/>
+                <a:ea typeface="Menlo" panose="020B0609030804020204" pitchFamily="49" charset="0"/>
+                <a:cs typeface="Menlo" panose="020B0609030804020204" pitchFamily="49" charset="0"/>
               </a:rPr>
               <a:t>double.parse</a:t>
             </a:r>
             <a:r>
               <a:rPr lang="en-GB" dirty="0">
-                <a:latin typeface="Courier" pitchFamily="2" charset="0"/>
+                <a:latin typeface="Menlo" panose="020B0609030804020204" pitchFamily="49" charset="0"/>
+                <a:ea typeface="Menlo" panose="020B0609030804020204" pitchFamily="49" charset="0"/>
+                <a:cs typeface="Menlo" panose="020B0609030804020204" pitchFamily="49" charset="0"/>
               </a:rPr>
               <a:t>('1.1');</a:t>
             </a:r>
@@ -6878,31 +6932,41 @@
             <a:pPr lvl="1"/>
             <a:r>
               <a:rPr lang="en-GB" dirty="0">
-                <a:latin typeface="Courier" pitchFamily="2" charset="0"/>
+                <a:latin typeface="Menlo" panose="020B0609030804020204" pitchFamily="49" charset="0"/>
+                <a:ea typeface="Menlo" panose="020B0609030804020204" pitchFamily="49" charset="0"/>
+                <a:cs typeface="Menlo" panose="020B0609030804020204" pitchFamily="49" charset="0"/>
               </a:rPr>
               <a:t>String </a:t>
             </a:r>
             <a:r>
               <a:rPr lang="en-GB" dirty="0" err="1">
-                <a:latin typeface="Courier" pitchFamily="2" charset="0"/>
+                <a:latin typeface="Menlo" panose="020B0609030804020204" pitchFamily="49" charset="0"/>
+                <a:ea typeface="Menlo" panose="020B0609030804020204" pitchFamily="49" charset="0"/>
+                <a:cs typeface="Menlo" panose="020B0609030804020204" pitchFamily="49" charset="0"/>
               </a:rPr>
               <a:t>anIntegerAsString</a:t>
             </a:r>
             <a:r>
               <a:rPr lang="en-GB" dirty="0">
-                <a:latin typeface="Courier" pitchFamily="2" charset="0"/>
+                <a:latin typeface="Menlo" panose="020B0609030804020204" pitchFamily="49" charset="0"/>
+                <a:ea typeface="Menlo" panose="020B0609030804020204" pitchFamily="49" charset="0"/>
+                <a:cs typeface="Menlo" panose="020B0609030804020204" pitchFamily="49" charset="0"/>
               </a:rPr>
               <a:t> = </a:t>
             </a:r>
             <a:r>
               <a:rPr lang="en-GB" dirty="0" err="1">
-                <a:latin typeface="Courier" pitchFamily="2" charset="0"/>
+                <a:latin typeface="Menlo" panose="020B0609030804020204" pitchFamily="49" charset="0"/>
+                <a:ea typeface="Menlo" panose="020B0609030804020204" pitchFamily="49" charset="0"/>
+                <a:cs typeface="Menlo" panose="020B0609030804020204" pitchFamily="49" charset="0"/>
               </a:rPr>
               <a:t>anInteger.toString</a:t>
             </a:r>
             <a:r>
               <a:rPr lang="en-GB" dirty="0">
-                <a:latin typeface="Courier" pitchFamily="2" charset="0"/>
+                <a:latin typeface="Menlo" panose="020B0609030804020204" pitchFamily="49" charset="0"/>
+                <a:ea typeface="Menlo" panose="020B0609030804020204" pitchFamily="49" charset="0"/>
+                <a:cs typeface="Menlo" panose="020B0609030804020204" pitchFamily="49" charset="0"/>
               </a:rPr>
               <a:t>();</a:t>
             </a:r>
@@ -6917,31 +6981,41 @@
             <a:pPr lvl="1"/>
             <a:r>
               <a:rPr lang="en-GB" dirty="0">
-                <a:latin typeface="Courier" pitchFamily="2" charset="0"/>
+                <a:latin typeface="Menlo" panose="020B0609030804020204" pitchFamily="49" charset="0"/>
+                <a:ea typeface="Menlo" panose="020B0609030804020204" pitchFamily="49" charset="0"/>
+                <a:cs typeface="Menlo" panose="020B0609030804020204" pitchFamily="49" charset="0"/>
               </a:rPr>
               <a:t>String </a:t>
             </a:r>
             <a:r>
               <a:rPr lang="en-GB" dirty="0" err="1">
-                <a:latin typeface="Courier" pitchFamily="2" charset="0"/>
+                <a:latin typeface="Menlo" panose="020B0609030804020204" pitchFamily="49" charset="0"/>
+                <a:ea typeface="Menlo" panose="020B0609030804020204" pitchFamily="49" charset="0"/>
+                <a:cs typeface="Menlo" panose="020B0609030804020204" pitchFamily="49" charset="0"/>
               </a:rPr>
               <a:t>aDoubleAsString</a:t>
             </a:r>
             <a:r>
               <a:rPr lang="en-GB" dirty="0">
-                <a:latin typeface="Courier" pitchFamily="2" charset="0"/>
+                <a:latin typeface="Menlo" panose="020B0609030804020204" pitchFamily="49" charset="0"/>
+                <a:ea typeface="Menlo" panose="020B0609030804020204" pitchFamily="49" charset="0"/>
+                <a:cs typeface="Menlo" panose="020B0609030804020204" pitchFamily="49" charset="0"/>
               </a:rPr>
               <a:t> = </a:t>
             </a:r>
             <a:r>
               <a:rPr lang="en-GB" dirty="0" err="1">
-                <a:latin typeface="Courier" pitchFamily="2" charset="0"/>
+                <a:latin typeface="Menlo" panose="020B0609030804020204" pitchFamily="49" charset="0"/>
+                <a:ea typeface="Menlo" panose="020B0609030804020204" pitchFamily="49" charset="0"/>
+                <a:cs typeface="Menlo" panose="020B0609030804020204" pitchFamily="49" charset="0"/>
               </a:rPr>
               <a:t>aDouble.toString</a:t>
             </a:r>
             <a:r>
               <a:rPr lang="en-GB" dirty="0">
-                <a:latin typeface="Courier" pitchFamily="2" charset="0"/>
+                <a:latin typeface="Menlo" panose="020B0609030804020204" pitchFamily="49" charset="0"/>
+                <a:ea typeface="Menlo" panose="020B0609030804020204" pitchFamily="49" charset="0"/>
+                <a:cs typeface="Menlo" panose="020B0609030804020204" pitchFamily="49" charset="0"/>
               </a:rPr>
               <a:t>();</a:t>
             </a:r>
@@ -7067,7 +7141,9 @@
           <a:p>
             <a:r>
               <a:rPr lang="en-GB" dirty="0">
-                <a:latin typeface="Courier" pitchFamily="2" charset="0"/>
+                <a:latin typeface="Menlo" panose="020B0609030804020204" pitchFamily="49" charset="0"/>
+                <a:ea typeface="Menlo" panose="020B0609030804020204" pitchFamily="49" charset="0"/>
+                <a:cs typeface="Menlo" panose="020B0609030804020204" pitchFamily="49" charset="0"/>
               </a:rPr>
               <a:t>var s1 = 'Single quotes work well for string literals.';</a:t>
             </a:r>
@@ -7075,7 +7151,9 @@
           <a:p>
             <a:r>
               <a:rPr lang="en-GB" dirty="0">
-                <a:latin typeface="Courier" pitchFamily="2" charset="0"/>
+                <a:latin typeface="Menlo" panose="020B0609030804020204" pitchFamily="49" charset="0"/>
+                <a:ea typeface="Menlo" panose="020B0609030804020204" pitchFamily="49" charset="0"/>
+                <a:cs typeface="Menlo" panose="020B0609030804020204" pitchFamily="49" charset="0"/>
               </a:rPr>
               <a:t>var s2 = "Double quotes work just as well.";</a:t>
             </a:r>
@@ -7083,7 +7161,9 @@
           <a:p>
             <a:r>
               <a:rPr lang="en-GB" dirty="0">
-                <a:latin typeface="Courier" pitchFamily="2" charset="0"/>
+                <a:latin typeface="Menlo" panose="020B0609030804020204" pitchFamily="49" charset="0"/>
+                <a:ea typeface="Menlo" panose="020B0609030804020204" pitchFamily="49" charset="0"/>
+                <a:cs typeface="Menlo" panose="020B0609030804020204" pitchFamily="49" charset="0"/>
               </a:rPr>
               <a:t>var s3 = 'It\'s easy to escape the string delimiter.';</a:t>
             </a:r>
@@ -7091,7 +7171,9 @@
           <a:p>
             <a:r>
               <a:rPr lang="en-GB" dirty="0">
-                <a:latin typeface="Courier" pitchFamily="2" charset="0"/>
+                <a:latin typeface="Menlo" panose="020B0609030804020204" pitchFamily="49" charset="0"/>
+                <a:ea typeface="Menlo" panose="020B0609030804020204" pitchFamily="49" charset="0"/>
+                <a:cs typeface="Menlo" panose="020B0609030804020204" pitchFamily="49" charset="0"/>
               </a:rPr>
               <a:t>var s4 = "It's even easier to use the other delimiter.";</a:t>
             </a:r>
@@ -7102,11 +7184,25 @@
           <a:p>
             <a:r>
               <a:rPr lang="en-GB" dirty="0"/>
-              <a:t>It is possible to interpolate an expression inside a String using </a:t>
-            </a:r>
-            <a:r>
-              <a:rPr lang="en-GB" dirty="0">
-                <a:latin typeface="Courier" pitchFamily="2" charset="0"/>
+              <a:t>It is possible to interpolate an expression inside a </a:t>
+            </a:r>
+            <a:r>
+              <a:rPr lang="en-GB" dirty="0">
+                <a:latin typeface="Menlo" panose="020B0609030804020204" pitchFamily="49" charset="0"/>
+                <a:ea typeface="Menlo" panose="020B0609030804020204" pitchFamily="49" charset="0"/>
+                <a:cs typeface="Menlo" panose="020B0609030804020204" pitchFamily="49" charset="0"/>
+              </a:rPr>
+              <a:t>String</a:t>
+            </a:r>
+            <a:r>
+              <a:rPr lang="en-GB" dirty="0"/>
+              <a:t> using </a:t>
+            </a:r>
+            <a:r>
+              <a:rPr lang="en-GB" dirty="0">
+                <a:latin typeface="Menlo" panose="020B0609030804020204" pitchFamily="49" charset="0"/>
+                <a:ea typeface="Menlo" panose="020B0609030804020204" pitchFamily="49" charset="0"/>
+                <a:cs typeface="Menlo" panose="020B0609030804020204" pitchFamily="49" charset="0"/>
               </a:rPr>
               <a:t>${expression}</a:t>
             </a:r>
@@ -7115,41 +7211,55 @@
             <a:pPr lvl="1"/>
             <a:r>
               <a:rPr lang="en-GB" dirty="0">
-                <a:latin typeface="Courier" pitchFamily="2" charset="0"/>
+                <a:latin typeface="Menlo" panose="020B0609030804020204" pitchFamily="49" charset="0"/>
+                <a:ea typeface="Menlo" panose="020B0609030804020204" pitchFamily="49" charset="0"/>
+                <a:cs typeface="Menlo" panose="020B0609030804020204" pitchFamily="49" charset="0"/>
               </a:rPr>
               <a:t>int a = 4;</a:t>
             </a:r>
             <a:br>
               <a:rPr lang="en-GB" dirty="0">
-                <a:latin typeface="Courier" pitchFamily="2" charset="0"/>
+                <a:latin typeface="Menlo" panose="020B0609030804020204" pitchFamily="49" charset="0"/>
+                <a:ea typeface="Menlo" panose="020B0609030804020204" pitchFamily="49" charset="0"/>
+                <a:cs typeface="Menlo" panose="020B0609030804020204" pitchFamily="49" charset="0"/>
               </a:rPr>
             </a:br>
             <a:r>
               <a:rPr lang="en-GB" dirty="0">
-                <a:latin typeface="Courier" pitchFamily="2" charset="0"/>
+                <a:latin typeface="Menlo" panose="020B0609030804020204" pitchFamily="49" charset="0"/>
+                <a:ea typeface="Menlo" panose="020B0609030804020204" pitchFamily="49" charset="0"/>
+                <a:cs typeface="Menlo" panose="020B0609030804020204" pitchFamily="49" charset="0"/>
               </a:rPr>
               <a:t>int b = 3;</a:t>
             </a:r>
             <a:br>
               <a:rPr lang="en-GB" dirty="0">
-                <a:latin typeface="Courier" pitchFamily="2" charset="0"/>
+                <a:latin typeface="Menlo" panose="020B0609030804020204" pitchFamily="49" charset="0"/>
+                <a:ea typeface="Menlo" panose="020B0609030804020204" pitchFamily="49" charset="0"/>
+                <a:cs typeface="Menlo" panose="020B0609030804020204" pitchFamily="49" charset="0"/>
               </a:rPr>
             </a:br>
             <a:r>
               <a:rPr lang="en-GB" dirty="0">
-                <a:latin typeface="Courier" pitchFamily="2" charset="0"/>
+                <a:latin typeface="Menlo" panose="020B0609030804020204" pitchFamily="49" charset="0"/>
+                <a:ea typeface="Menlo" panose="020B0609030804020204" pitchFamily="49" charset="0"/>
+                <a:cs typeface="Menlo" panose="020B0609030804020204" pitchFamily="49" charset="0"/>
               </a:rPr>
               <a:t>print('a + b = ${</a:t>
             </a:r>
             <a:r>
               <a:rPr lang="en-GB" dirty="0" err="1">
-                <a:latin typeface="Courier" pitchFamily="2" charset="0"/>
+                <a:latin typeface="Menlo" panose="020B0609030804020204" pitchFamily="49" charset="0"/>
+                <a:ea typeface="Menlo" panose="020B0609030804020204" pitchFamily="49" charset="0"/>
+                <a:cs typeface="Menlo" panose="020B0609030804020204" pitchFamily="49" charset="0"/>
               </a:rPr>
               <a:t>a+b</a:t>
             </a:r>
             <a:r>
               <a:rPr lang="en-GB" dirty="0">
-                <a:latin typeface="Courier" pitchFamily="2" charset="0"/>
+                <a:latin typeface="Menlo" panose="020B0609030804020204" pitchFamily="49" charset="0"/>
+                <a:ea typeface="Menlo" panose="020B0609030804020204" pitchFamily="49" charset="0"/>
+                <a:cs typeface="Menlo" panose="020B0609030804020204" pitchFamily="49" charset="0"/>
               </a:rPr>
               <a:t>}');</a:t>
             </a:r>
@@ -7264,7 +7374,7 @@
         <p:spPr>
           <a:xfrm>
             <a:off x="428171" y="1361167"/>
-            <a:ext cx="8101679" cy="5334907"/>
+            <a:ext cx="11368314" cy="5334907"/>
           </a:xfrm>
         </p:spPr>
         <p:txBody>
@@ -7288,29 +7398,39 @@
             <a:pPr lvl="1"/>
             <a:r>
               <a:rPr lang="en-GB" dirty="0">
-                <a:latin typeface="Courier" pitchFamily="2" charset="0"/>
+                <a:latin typeface="Menlo" panose="020B0609030804020204" pitchFamily="49" charset="0"/>
+                <a:ea typeface="Menlo" panose="020B0609030804020204" pitchFamily="49" charset="0"/>
+                <a:cs typeface="Menlo" panose="020B0609030804020204" pitchFamily="49" charset="0"/>
               </a:rPr>
               <a:t>final hello = 'Hello’;</a:t>
             </a:r>
             <a:br>
               <a:rPr lang="en-GB" dirty="0">
-                <a:latin typeface="Courier" pitchFamily="2" charset="0"/>
+                <a:latin typeface="Menlo" panose="020B0609030804020204" pitchFamily="49" charset="0"/>
+                <a:ea typeface="Menlo" panose="020B0609030804020204" pitchFamily="49" charset="0"/>
+                <a:cs typeface="Menlo" panose="020B0609030804020204" pitchFamily="49" charset="0"/>
               </a:rPr>
             </a:br>
             <a:r>
               <a:rPr lang="en-GB" dirty="0">
-                <a:latin typeface="Courier" pitchFamily="2" charset="0"/>
+                <a:latin typeface="Menlo" panose="020B0609030804020204" pitchFamily="49" charset="0"/>
+                <a:ea typeface="Menlo" panose="020B0609030804020204" pitchFamily="49" charset="0"/>
+                <a:cs typeface="Menlo" panose="020B0609030804020204" pitchFamily="49" charset="0"/>
               </a:rPr>
               <a:t>final world = 'world’;</a:t>
             </a:r>
             <a:br>
               <a:rPr lang="en-GB" dirty="0">
-                <a:latin typeface="Courier" pitchFamily="2" charset="0"/>
+                <a:latin typeface="Menlo" panose="020B0609030804020204" pitchFamily="49" charset="0"/>
+                <a:ea typeface="Menlo" panose="020B0609030804020204" pitchFamily="49" charset="0"/>
+                <a:cs typeface="Menlo" panose="020B0609030804020204" pitchFamily="49" charset="0"/>
               </a:rPr>
             </a:br>
             <a:r>
               <a:rPr lang="en-GB" dirty="0">
-                <a:latin typeface="Courier" pitchFamily="2" charset="0"/>
+                <a:latin typeface="Menlo" panose="020B0609030804020204" pitchFamily="49" charset="0"/>
+                <a:ea typeface="Menlo" panose="020B0609030804020204" pitchFamily="49" charset="0"/>
+                <a:cs typeface="Menlo" panose="020B0609030804020204" pitchFamily="49" charset="0"/>
               </a:rPr>
               <a:t>print(hello + ' ' + world + '!');</a:t>
             </a:r>
@@ -7318,106 +7438,140 @@
           <a:p>
             <a:r>
               <a:rPr lang="en-GB" dirty="0"/>
-              <a:t>As you imagine, the String class has many handy methods and variables. Here's some examples:</a:t>
+              <a:t>As you can imagine, the String class has many handy methods and variables. Here's some examples:</a:t>
             </a:r>
           </a:p>
           <a:p>
             <a:pPr lvl="1"/>
             <a:r>
               <a:rPr lang="en-GB" dirty="0">
-                <a:latin typeface="Courier" pitchFamily="2" charset="0"/>
+                <a:latin typeface="Menlo" panose="020B0609030804020204" pitchFamily="49" charset="0"/>
+                <a:ea typeface="Menlo" panose="020B0609030804020204" pitchFamily="49" charset="0"/>
+                <a:cs typeface="Menlo" panose="020B0609030804020204" pitchFamily="49" charset="0"/>
               </a:rPr>
               <a:t>final str = 'test string’;</a:t>
             </a:r>
             <a:br>
               <a:rPr lang="en-GB" dirty="0">
-                <a:latin typeface="Courier" pitchFamily="2" charset="0"/>
+                <a:latin typeface="Menlo" panose="020B0609030804020204" pitchFamily="49" charset="0"/>
+                <a:ea typeface="Menlo" panose="020B0609030804020204" pitchFamily="49" charset="0"/>
+                <a:cs typeface="Menlo" panose="020B0609030804020204" pitchFamily="49" charset="0"/>
               </a:rPr>
             </a:br>
             <a:r>
               <a:rPr lang="en-GB" dirty="0">
-                <a:latin typeface="Courier" pitchFamily="2" charset="0"/>
+                <a:latin typeface="Menlo" panose="020B0609030804020204" pitchFamily="49" charset="0"/>
+                <a:ea typeface="Menlo" panose="020B0609030804020204" pitchFamily="49" charset="0"/>
+                <a:cs typeface="Menlo" panose="020B0609030804020204" pitchFamily="49" charset="0"/>
               </a:rPr>
               <a:t>print(</a:t>
             </a:r>
             <a:r>
               <a:rPr lang="en-GB" dirty="0" err="1">
-                <a:latin typeface="Courier" pitchFamily="2" charset="0"/>
+                <a:latin typeface="Menlo" panose="020B0609030804020204" pitchFamily="49" charset="0"/>
+                <a:ea typeface="Menlo" panose="020B0609030804020204" pitchFamily="49" charset="0"/>
+                <a:cs typeface="Menlo" panose="020B0609030804020204" pitchFamily="49" charset="0"/>
               </a:rPr>
               <a:t>str.length</a:t>
             </a:r>
             <a:r>
               <a:rPr lang="en-GB" dirty="0">
-                <a:latin typeface="Courier" pitchFamily="2" charset="0"/>
+                <a:latin typeface="Menlo" panose="020B0609030804020204" pitchFamily="49" charset="0"/>
+                <a:ea typeface="Menlo" panose="020B0609030804020204" pitchFamily="49" charset="0"/>
+                <a:cs typeface="Menlo" panose="020B0609030804020204" pitchFamily="49" charset="0"/>
               </a:rPr>
               <a:t>); //Gets the length of a string</a:t>
             </a:r>
             <a:br>
               <a:rPr lang="en-GB" dirty="0">
-                <a:latin typeface="Courier" pitchFamily="2" charset="0"/>
+                <a:latin typeface="Menlo" panose="020B0609030804020204" pitchFamily="49" charset="0"/>
+                <a:ea typeface="Menlo" panose="020B0609030804020204" pitchFamily="49" charset="0"/>
+                <a:cs typeface="Menlo" panose="020B0609030804020204" pitchFamily="49" charset="0"/>
               </a:rPr>
             </a:br>
             <a:r>
               <a:rPr lang="en-GB" dirty="0">
-                <a:latin typeface="Courier" pitchFamily="2" charset="0"/>
+                <a:latin typeface="Menlo" panose="020B0609030804020204" pitchFamily="49" charset="0"/>
+                <a:ea typeface="Menlo" panose="020B0609030804020204" pitchFamily="49" charset="0"/>
+                <a:cs typeface="Menlo" panose="020B0609030804020204" pitchFamily="49" charset="0"/>
               </a:rPr>
               <a:t>print(</a:t>
             </a:r>
             <a:r>
               <a:rPr lang="en-GB" dirty="0" err="1">
-                <a:latin typeface="Courier" pitchFamily="2" charset="0"/>
+                <a:latin typeface="Menlo" panose="020B0609030804020204" pitchFamily="49" charset="0"/>
+                <a:ea typeface="Menlo" panose="020B0609030804020204" pitchFamily="49" charset="0"/>
+                <a:cs typeface="Menlo" panose="020B0609030804020204" pitchFamily="49" charset="0"/>
               </a:rPr>
               <a:t>str.toUpperCase</a:t>
             </a:r>
             <a:r>
               <a:rPr lang="en-GB" dirty="0">
-                <a:latin typeface="Courier" pitchFamily="2" charset="0"/>
+                <a:latin typeface="Menlo" panose="020B0609030804020204" pitchFamily="49" charset="0"/>
+                <a:ea typeface="Menlo" panose="020B0609030804020204" pitchFamily="49" charset="0"/>
+                <a:cs typeface="Menlo" panose="020B0609030804020204" pitchFamily="49" charset="0"/>
               </a:rPr>
               <a:t>()); //Converts the whole string to upper case</a:t>
             </a:r>
             <a:br>
               <a:rPr lang="en-GB" dirty="0">
-                <a:latin typeface="Courier" pitchFamily="2" charset="0"/>
+                <a:latin typeface="Menlo" panose="020B0609030804020204" pitchFamily="49" charset="0"/>
+                <a:ea typeface="Menlo" panose="020B0609030804020204" pitchFamily="49" charset="0"/>
+                <a:cs typeface="Menlo" panose="020B0609030804020204" pitchFamily="49" charset="0"/>
               </a:rPr>
             </a:br>
             <a:r>
               <a:rPr lang="en-GB" dirty="0">
-                <a:latin typeface="Courier" pitchFamily="2" charset="0"/>
+                <a:latin typeface="Menlo" panose="020B0609030804020204" pitchFamily="49" charset="0"/>
+                <a:ea typeface="Menlo" panose="020B0609030804020204" pitchFamily="49" charset="0"/>
+                <a:cs typeface="Menlo" panose="020B0609030804020204" pitchFamily="49" charset="0"/>
               </a:rPr>
               <a:t>print(</a:t>
             </a:r>
             <a:r>
               <a:rPr lang="en-GB" dirty="0" err="1">
-                <a:latin typeface="Courier" pitchFamily="2" charset="0"/>
+                <a:latin typeface="Menlo" panose="020B0609030804020204" pitchFamily="49" charset="0"/>
+                <a:ea typeface="Menlo" panose="020B0609030804020204" pitchFamily="49" charset="0"/>
+                <a:cs typeface="Menlo" panose="020B0609030804020204" pitchFamily="49" charset="0"/>
               </a:rPr>
               <a:t>str.contains</a:t>
             </a:r>
             <a:r>
               <a:rPr lang="en-GB" dirty="0">
-                <a:latin typeface="Courier" pitchFamily="2" charset="0"/>
+                <a:latin typeface="Menlo" panose="020B0609030804020204" pitchFamily="49" charset="0"/>
+                <a:ea typeface="Menlo" panose="020B0609030804020204" pitchFamily="49" charset="0"/>
+                <a:cs typeface="Menlo" panose="020B0609030804020204" pitchFamily="49" charset="0"/>
               </a:rPr>
               <a:t>('str')); //Checks if a string contains a pattern</a:t>
             </a:r>
             <a:br>
               <a:rPr lang="en-GB" dirty="0">
-                <a:latin typeface="Courier" pitchFamily="2" charset="0"/>
+                <a:latin typeface="Menlo" panose="020B0609030804020204" pitchFamily="49" charset="0"/>
+                <a:ea typeface="Menlo" panose="020B0609030804020204" pitchFamily="49" charset="0"/>
+                <a:cs typeface="Menlo" panose="020B0609030804020204" pitchFamily="49" charset="0"/>
               </a:rPr>
             </a:br>
             <a:r>
               <a:rPr lang="en-GB" dirty="0">
-                <a:latin typeface="Courier" pitchFamily="2" charset="0"/>
+                <a:latin typeface="Menlo" panose="020B0609030804020204" pitchFamily="49" charset="0"/>
+                <a:ea typeface="Menlo" panose="020B0609030804020204" pitchFamily="49" charset="0"/>
+                <a:cs typeface="Menlo" panose="020B0609030804020204" pitchFamily="49" charset="0"/>
               </a:rPr>
               <a:t>print(</a:t>
             </a:r>
             <a:r>
               <a:rPr lang="en-GB" dirty="0" err="1">
-                <a:latin typeface="Courier" pitchFamily="2" charset="0"/>
+                <a:latin typeface="Menlo" panose="020B0609030804020204" pitchFamily="49" charset="0"/>
+                <a:ea typeface="Menlo" panose="020B0609030804020204" pitchFamily="49" charset="0"/>
+                <a:cs typeface="Menlo" panose="020B0609030804020204" pitchFamily="49" charset="0"/>
               </a:rPr>
               <a:t>str.indexOf</a:t>
             </a:r>
             <a:r>
               <a:rPr lang="en-GB" dirty="0">
-                <a:latin typeface="Courier" pitchFamily="2" charset="0"/>
+                <a:latin typeface="Menlo" panose="020B0609030804020204" pitchFamily="49" charset="0"/>
+                <a:ea typeface="Menlo" panose="020B0609030804020204" pitchFamily="49" charset="0"/>
+                <a:cs typeface="Menlo" panose="020B0609030804020204" pitchFamily="49" charset="0"/>
               </a:rPr>
               <a:t>('str')); //Tells where a pattern is within a string</a:t>
             </a:r>
@@ -7561,7 +7715,9 @@
             </a:r>
             <a:r>
               <a:rPr lang="en-GB" dirty="0">
-                <a:latin typeface="Courier" pitchFamily="2" charset="0"/>
+                <a:latin typeface="Menlo" panose="020B0609030804020204" pitchFamily="49" charset="0"/>
+                <a:ea typeface="Menlo" panose="020B0609030804020204" pitchFamily="49" charset="0"/>
+                <a:cs typeface="Menlo" panose="020B0609030804020204" pitchFamily="49" charset="0"/>
               </a:rPr>
               <a:t>bool</a:t>
             </a:r>
@@ -7574,7 +7730,9 @@
             <a:pPr lvl="1"/>
             <a:r>
               <a:rPr lang="en-GB" dirty="0">
-                <a:latin typeface="Courier" pitchFamily="2" charset="0"/>
+                <a:latin typeface="Menlo" panose="020B0609030804020204" pitchFamily="49" charset="0"/>
+                <a:ea typeface="Menlo" panose="020B0609030804020204" pitchFamily="49" charset="0"/>
+                <a:cs typeface="Menlo" panose="020B0609030804020204" pitchFamily="49" charset="0"/>
               </a:rPr>
               <a:t>bool flag = true; //or false</a:t>
             </a:r>
@@ -7700,90 +7858,130 @@
           <a:p>
             <a:r>
               <a:rPr lang="en-GB" dirty="0"/>
-              <a:t>Arrays, in Dart, are represented as List objects.</a:t>
+              <a:t>Arrays, in Dart, are represented as </a:t>
+            </a:r>
+            <a:r>
+              <a:rPr lang="en-GB" dirty="0">
+                <a:latin typeface="Menlo" panose="020B0609030804020204" pitchFamily="49" charset="0"/>
+                <a:ea typeface="Menlo" panose="020B0609030804020204" pitchFamily="49" charset="0"/>
+                <a:cs typeface="Menlo" panose="020B0609030804020204" pitchFamily="49" charset="0"/>
+              </a:rPr>
+              <a:t>List</a:t>
+            </a:r>
+            <a:r>
+              <a:rPr lang="en-GB" dirty="0"/>
+              <a:t> objects.</a:t>
             </a:r>
           </a:p>
           <a:p>
             <a:pPr lvl="1"/>
             <a:r>
               <a:rPr lang="en-GB" dirty="0">
-                <a:latin typeface="Courier" pitchFamily="2" charset="0"/>
+                <a:latin typeface="Menlo" panose="020B0609030804020204" pitchFamily="49" charset="0"/>
+                <a:ea typeface="Menlo" panose="020B0609030804020204" pitchFamily="49" charset="0"/>
+                <a:cs typeface="Menlo" panose="020B0609030804020204" pitchFamily="49" charset="0"/>
               </a:rPr>
               <a:t>var </a:t>
             </a:r>
             <a:r>
               <a:rPr lang="en-GB" dirty="0" err="1">
-                <a:latin typeface="Courier" pitchFamily="2" charset="0"/>
+                <a:latin typeface="Menlo" panose="020B0609030804020204" pitchFamily="49" charset="0"/>
+                <a:ea typeface="Menlo" panose="020B0609030804020204" pitchFamily="49" charset="0"/>
+                <a:cs typeface="Menlo" panose="020B0609030804020204" pitchFamily="49" charset="0"/>
               </a:rPr>
               <a:t>listInferred</a:t>
             </a:r>
             <a:r>
               <a:rPr lang="en-GB" dirty="0">
-                <a:latin typeface="Courier" pitchFamily="2" charset="0"/>
+                <a:latin typeface="Menlo" panose="020B0609030804020204" pitchFamily="49" charset="0"/>
+                <a:ea typeface="Menlo" panose="020B0609030804020204" pitchFamily="49" charset="0"/>
+                <a:cs typeface="Menlo" panose="020B0609030804020204" pitchFamily="49" charset="0"/>
               </a:rPr>
               <a:t> = [1,2,3]; //Type inferred</a:t>
             </a:r>
             <a:br>
               <a:rPr lang="en-GB" dirty="0">
-                <a:latin typeface="Courier" pitchFamily="2" charset="0"/>
+                <a:latin typeface="Menlo" panose="020B0609030804020204" pitchFamily="49" charset="0"/>
+                <a:ea typeface="Menlo" panose="020B0609030804020204" pitchFamily="49" charset="0"/>
+                <a:cs typeface="Menlo" panose="020B0609030804020204" pitchFamily="49" charset="0"/>
               </a:rPr>
             </a:br>
             <a:r>
               <a:rPr lang="en-GB" dirty="0">
-                <a:latin typeface="Courier" pitchFamily="2" charset="0"/>
+                <a:latin typeface="Menlo" panose="020B0609030804020204" pitchFamily="49" charset="0"/>
+                <a:ea typeface="Menlo" panose="020B0609030804020204" pitchFamily="49" charset="0"/>
+                <a:cs typeface="Menlo" panose="020B0609030804020204" pitchFamily="49" charset="0"/>
               </a:rPr>
               <a:t>List&lt;int&gt; </a:t>
             </a:r>
             <a:r>
               <a:rPr lang="en-GB" dirty="0" err="1">
-                <a:latin typeface="Courier" pitchFamily="2" charset="0"/>
+                <a:latin typeface="Menlo" panose="020B0609030804020204" pitchFamily="49" charset="0"/>
+                <a:ea typeface="Menlo" panose="020B0609030804020204" pitchFamily="49" charset="0"/>
+                <a:cs typeface="Menlo" panose="020B0609030804020204" pitchFamily="49" charset="0"/>
               </a:rPr>
               <a:t>listNotInferred</a:t>
             </a:r>
             <a:r>
               <a:rPr lang="en-GB" dirty="0">
-                <a:latin typeface="Courier" pitchFamily="2" charset="0"/>
+                <a:latin typeface="Menlo" panose="020B0609030804020204" pitchFamily="49" charset="0"/>
+                <a:ea typeface="Menlo" panose="020B0609030804020204" pitchFamily="49" charset="0"/>
+                <a:cs typeface="Menlo" panose="020B0609030804020204" pitchFamily="49" charset="0"/>
               </a:rPr>
               <a:t> = [1,2,3]; //Type </a:t>
             </a:r>
             <a:r>
               <a:rPr lang="en-GB" dirty="0" err="1">
-                <a:latin typeface="Courier" pitchFamily="2" charset="0"/>
+                <a:latin typeface="Menlo" panose="020B0609030804020204" pitchFamily="49" charset="0"/>
+                <a:ea typeface="Menlo" panose="020B0609030804020204" pitchFamily="49" charset="0"/>
+                <a:cs typeface="Menlo" panose="020B0609030804020204" pitchFamily="49" charset="0"/>
               </a:rPr>
               <a:t>explicited</a:t>
             </a:r>
             <a:br>
               <a:rPr lang="en-GB" dirty="0">
-                <a:latin typeface="Courier" pitchFamily="2" charset="0"/>
+                <a:latin typeface="Menlo" panose="020B0609030804020204" pitchFamily="49" charset="0"/>
+                <a:ea typeface="Menlo" panose="020B0609030804020204" pitchFamily="49" charset="0"/>
+                <a:cs typeface="Menlo" panose="020B0609030804020204" pitchFamily="49" charset="0"/>
               </a:rPr>
             </a:br>
             <a:r>
               <a:rPr lang="en-GB" dirty="0">
-                <a:latin typeface="Courier" pitchFamily="2" charset="0"/>
+                <a:latin typeface="Menlo" panose="020B0609030804020204" pitchFamily="49" charset="0"/>
+                <a:ea typeface="Menlo" panose="020B0609030804020204" pitchFamily="49" charset="0"/>
+                <a:cs typeface="Menlo" panose="020B0609030804020204" pitchFamily="49" charset="0"/>
               </a:rPr>
               <a:t>assert(</a:t>
             </a:r>
             <a:r>
               <a:rPr lang="en-GB" dirty="0" err="1">
-                <a:latin typeface="Courier" pitchFamily="2" charset="0"/>
+                <a:latin typeface="Menlo" panose="020B0609030804020204" pitchFamily="49" charset="0"/>
+                <a:ea typeface="Menlo" panose="020B0609030804020204" pitchFamily="49" charset="0"/>
+                <a:cs typeface="Menlo" panose="020B0609030804020204" pitchFamily="49" charset="0"/>
               </a:rPr>
               <a:t>listInferred</a:t>
             </a:r>
             <a:r>
               <a:rPr lang="en-GB" dirty="0">
-                <a:latin typeface="Courier" pitchFamily="2" charset="0"/>
+                <a:latin typeface="Menlo" panose="020B0609030804020204" pitchFamily="49" charset="0"/>
+                <a:ea typeface="Menlo" panose="020B0609030804020204" pitchFamily="49" charset="0"/>
+                <a:cs typeface="Menlo" panose="020B0609030804020204" pitchFamily="49" charset="0"/>
               </a:rPr>
               <a:t> != </a:t>
             </a:r>
             <a:r>
               <a:rPr lang="en-GB" dirty="0" err="1">
-                <a:latin typeface="Courier" pitchFamily="2" charset="0"/>
+                <a:latin typeface="Menlo" panose="020B0609030804020204" pitchFamily="49" charset="0"/>
+                <a:ea typeface="Menlo" panose="020B0609030804020204" pitchFamily="49" charset="0"/>
+                <a:cs typeface="Menlo" panose="020B0609030804020204" pitchFamily="49" charset="0"/>
               </a:rPr>
               <a:t>listNotInferred</a:t>
             </a:r>
             <a:r>
               <a:rPr lang="en-GB" dirty="0">
-                <a:latin typeface="Courier" pitchFamily="2" charset="0"/>
+                <a:latin typeface="Menlo" panose="020B0609030804020204" pitchFamily="49" charset="0"/>
+                <a:ea typeface="Menlo" panose="020B0609030804020204" pitchFamily="49" charset="0"/>
+                <a:cs typeface="Menlo" panose="020B0609030804020204" pitchFamily="49" charset="0"/>
               </a:rPr>
               <a:t>); //However they are not equal!</a:t>
             </a:r>
@@ -7798,19 +7996,25 @@
             <a:pPr lvl="1"/>
             <a:r>
               <a:rPr lang="en-GB" dirty="0">
-                <a:latin typeface="Courier" pitchFamily="2" charset="0"/>
+                <a:latin typeface="Menlo" panose="020B0609030804020204" pitchFamily="49" charset="0"/>
+                <a:ea typeface="Menlo" panose="020B0609030804020204" pitchFamily="49" charset="0"/>
+                <a:cs typeface="Menlo" panose="020B0609030804020204" pitchFamily="49" charset="0"/>
               </a:rPr>
               <a:t>print(</a:t>
             </a:r>
             <a:r>
               <a:rPr lang="en-GB" dirty="0" err="1">
-                <a:latin typeface="Courier" pitchFamily="2" charset="0"/>
+                <a:latin typeface="Menlo" panose="020B0609030804020204" pitchFamily="49" charset="0"/>
+                <a:ea typeface="Menlo" panose="020B0609030804020204" pitchFamily="49" charset="0"/>
+                <a:cs typeface="Menlo" panose="020B0609030804020204" pitchFamily="49" charset="0"/>
               </a:rPr>
               <a:t>listInferred</a:t>
             </a:r>
             <a:r>
               <a:rPr lang="en-GB" dirty="0">
-                <a:latin typeface="Courier" pitchFamily="2" charset="0"/>
+                <a:latin typeface="Menlo" panose="020B0609030804020204" pitchFamily="49" charset="0"/>
+                <a:ea typeface="Menlo" panose="020B0609030804020204" pitchFamily="49" charset="0"/>
+                <a:cs typeface="Menlo" panose="020B0609030804020204" pitchFamily="49" charset="0"/>
               </a:rPr>
               <a:t>[1]); //This will print '2'</a:t>
             </a:r>
@@ -7825,21 +8029,33 @@
             <a:pPr lvl="1"/>
             <a:r>
               <a:rPr lang="en-GB" dirty="0">
+                <a:latin typeface="Menlo" panose="020B0609030804020204" pitchFamily="49" charset="0"/>
+                <a:ea typeface="Menlo" panose="020B0609030804020204" pitchFamily="49" charset="0"/>
+                <a:cs typeface="Menlo" panose="020B0609030804020204" pitchFamily="49" charset="0"/>
+              </a:rPr>
+              <a:t>print(</a:t>
+            </a:r>
+            <a:r>
+              <a:rPr lang="en-GB" dirty="0" err="1">
+                <a:latin typeface="Menlo" panose="020B0609030804020204" pitchFamily="49" charset="0"/>
+                <a:ea typeface="Menlo" panose="020B0609030804020204" pitchFamily="49" charset="0"/>
+                <a:cs typeface="Menlo" panose="020B0609030804020204" pitchFamily="49" charset="0"/>
+              </a:rPr>
+              <a:t>listInferred.length</a:t>
+            </a:r>
+            <a:r>
+              <a:rPr lang="en-GB" dirty="0">
+                <a:latin typeface="Menlo" panose="020B0609030804020204" pitchFamily="49" charset="0"/>
+                <a:ea typeface="Menlo" panose="020B0609030804020204" pitchFamily="49" charset="0"/>
+                <a:cs typeface="Menlo" panose="020B0609030804020204" pitchFamily="49" charset="0"/>
+              </a:rPr>
+              <a:t>); //This will print '3'</a:t>
+            </a:r>
+            <a:r>
+              <a:rPr lang="en-GB" dirty="0">
                 <a:latin typeface="Courier" pitchFamily="2" charset="0"/>
               </a:rPr>
-              <a:t>print(</a:t>
-            </a:r>
-            <a:r>
-              <a:rPr lang="en-GB" dirty="0" err="1">
-                <a:latin typeface="Courier" pitchFamily="2" charset="0"/>
-              </a:rPr>
-              <a:t>listInferred.length</a:t>
-            </a:r>
-            <a:r>
-              <a:rPr lang="en-GB" dirty="0">
-                <a:latin typeface="Courier" pitchFamily="2" charset="0"/>
-              </a:rPr>
-              <a:t>); //This will print '3' </a:t>
+              <a:t> </a:t>
             </a:r>
           </a:p>
           <a:p>
@@ -7852,19 +8068,25 @@
             <a:pPr lvl="1"/>
             <a:r>
               <a:rPr lang="en-GB" dirty="0">
-                <a:latin typeface="Courier" pitchFamily="2" charset="0"/>
+                <a:latin typeface="Menlo" panose="020B0609030804020204" pitchFamily="49" charset="0"/>
+                <a:ea typeface="Menlo" panose="020B0609030804020204" pitchFamily="49" charset="0"/>
+                <a:cs typeface="Menlo" panose="020B0609030804020204" pitchFamily="49" charset="0"/>
               </a:rPr>
               <a:t>print(</a:t>
             </a:r>
             <a:r>
               <a:rPr lang="en-GB" dirty="0" err="1">
-                <a:latin typeface="Courier" pitchFamily="2" charset="0"/>
+                <a:latin typeface="Menlo" panose="020B0609030804020204" pitchFamily="49" charset="0"/>
+                <a:ea typeface="Menlo" panose="020B0609030804020204" pitchFamily="49" charset="0"/>
+                <a:cs typeface="Menlo" panose="020B0609030804020204" pitchFamily="49" charset="0"/>
               </a:rPr>
               <a:t>listInferred.reversed</a:t>
             </a:r>
             <a:r>
               <a:rPr lang="en-GB" dirty="0">
-                <a:latin typeface="Courier" pitchFamily="2" charset="0"/>
+                <a:latin typeface="Menlo" panose="020B0609030804020204" pitchFamily="49" charset="0"/>
+                <a:ea typeface="Menlo" panose="020B0609030804020204" pitchFamily="49" charset="0"/>
+                <a:cs typeface="Menlo" panose="020B0609030804020204" pitchFamily="49" charset="0"/>
               </a:rPr>
               <a:t>); //This will obtain the list in reversed order</a:t>
             </a:r>
@@ -7873,13 +8095,17 @@
             <a:pPr lvl="1"/>
             <a:r>
               <a:rPr lang="en-GB" dirty="0" err="1">
-                <a:latin typeface="Courier" pitchFamily="2" charset="0"/>
+                <a:latin typeface="Menlo" panose="020B0609030804020204" pitchFamily="49" charset="0"/>
+                <a:ea typeface="Menlo" panose="020B0609030804020204" pitchFamily="49" charset="0"/>
+                <a:cs typeface="Menlo" panose="020B0609030804020204" pitchFamily="49" charset="0"/>
               </a:rPr>
               <a:t>listInferred.add</a:t>
             </a:r>
             <a:r>
               <a:rPr lang="en-GB" dirty="0">
-                <a:latin typeface="Courier" pitchFamily="2" charset="0"/>
+                <a:latin typeface="Menlo" panose="020B0609030804020204" pitchFamily="49" charset="0"/>
+                <a:ea typeface="Menlo" panose="020B0609030804020204" pitchFamily="49" charset="0"/>
+                <a:cs typeface="Menlo" panose="020B0609030804020204" pitchFamily="49" charset="0"/>
               </a:rPr>
               <a:t>(4); //This will add a 4 to the tail of the list</a:t>
             </a:r>
@@ -7888,25 +8114,33 @@
             <a:pPr lvl="1"/>
             <a:r>
               <a:rPr lang="en-GB" dirty="0" err="1">
-                <a:latin typeface="Courier" pitchFamily="2" charset="0"/>
+                <a:latin typeface="Menlo" panose="020B0609030804020204" pitchFamily="49" charset="0"/>
+                <a:ea typeface="Menlo" panose="020B0609030804020204" pitchFamily="49" charset="0"/>
+                <a:cs typeface="Menlo" panose="020B0609030804020204" pitchFamily="49" charset="0"/>
               </a:rPr>
               <a:t>listInferred</a:t>
             </a:r>
             <a:r>
               <a:rPr lang="en-GB" dirty="0">
-                <a:latin typeface="Courier" pitchFamily="2" charset="0"/>
+                <a:latin typeface="Menlo" panose="020B0609030804020204" pitchFamily="49" charset="0"/>
+                <a:ea typeface="Menlo" panose="020B0609030804020204" pitchFamily="49" charset="0"/>
+                <a:cs typeface="Menlo" panose="020B0609030804020204" pitchFamily="49" charset="0"/>
               </a:rPr>
               <a:t> = [0, ...</a:t>
             </a:r>
             <a:r>
               <a:rPr lang="en-GB" dirty="0" err="1">
-                <a:latin typeface="Courier" pitchFamily="2" charset="0"/>
+                <a:latin typeface="Menlo" panose="020B0609030804020204" pitchFamily="49" charset="0"/>
+                <a:ea typeface="Menlo" panose="020B0609030804020204" pitchFamily="49" charset="0"/>
+                <a:cs typeface="Menlo" panose="020B0609030804020204" pitchFamily="49" charset="0"/>
               </a:rPr>
               <a:t>listInferred</a:t>
             </a:r>
             <a:r>
               <a:rPr lang="en-GB" dirty="0">
-                <a:latin typeface="Courier" pitchFamily="2" charset="0"/>
+                <a:latin typeface="Menlo" panose="020B0609030804020204" pitchFamily="49" charset="0"/>
+                <a:ea typeface="Menlo" panose="020B0609030804020204" pitchFamily="49" charset="0"/>
+                <a:cs typeface="Menlo" panose="020B0609030804020204" pitchFamily="49" charset="0"/>
               </a:rPr>
               <a:t>]; //This will add a 0 to the head of the list (using the spread operator ...)</a:t>
             </a:r>
@@ -7915,19 +8149,25 @@
             <a:pPr lvl="1"/>
             <a:r>
               <a:rPr lang="en-GB" dirty="0">
-                <a:latin typeface="Courier" pitchFamily="2" charset="0"/>
+                <a:latin typeface="Menlo" panose="020B0609030804020204" pitchFamily="49" charset="0"/>
+                <a:ea typeface="Menlo" panose="020B0609030804020204" pitchFamily="49" charset="0"/>
+                <a:cs typeface="Menlo" panose="020B0609030804020204" pitchFamily="49" charset="0"/>
               </a:rPr>
               <a:t>print(</a:t>
             </a:r>
             <a:r>
               <a:rPr lang="en-GB" dirty="0" err="1">
-                <a:latin typeface="Courier" pitchFamily="2" charset="0"/>
+                <a:latin typeface="Menlo" panose="020B0609030804020204" pitchFamily="49" charset="0"/>
+                <a:ea typeface="Menlo" panose="020B0609030804020204" pitchFamily="49" charset="0"/>
+                <a:cs typeface="Menlo" panose="020B0609030804020204" pitchFamily="49" charset="0"/>
               </a:rPr>
               <a:t>listInferred</a:t>
             </a:r>
             <a:r>
               <a:rPr lang="en-GB" dirty="0">
-                <a:latin typeface="Courier" pitchFamily="2" charset="0"/>
+                <a:latin typeface="Menlo" panose="020B0609030804020204" pitchFamily="49" charset="0"/>
+                <a:ea typeface="Menlo" panose="020B0609030804020204" pitchFamily="49" charset="0"/>
+                <a:cs typeface="Menlo" panose="020B0609030804020204" pitchFamily="49" charset="0"/>
               </a:rPr>
               <a:t>);</a:t>
             </a:r>
@@ -8077,7 +8317,9 @@
             </a:r>
             <a:r>
               <a:rPr lang="en-GB" dirty="0">
-                <a:latin typeface="Courier" pitchFamily="2" charset="0"/>
+                <a:latin typeface="Menlo" panose="020B0609030804020204" pitchFamily="49" charset="0"/>
+                <a:ea typeface="Menlo" panose="020B0609030804020204" pitchFamily="49" charset="0"/>
+                <a:cs typeface="Menlo" panose="020B0609030804020204" pitchFamily="49" charset="0"/>
               </a:rPr>
               <a:t>List</a:t>
             </a:r>
@@ -8087,7 +8329,9 @@
             </a:r>
             <a:r>
               <a:rPr lang="en-GB" dirty="0">
-                <a:latin typeface="Courier" pitchFamily="2" charset="0"/>
+                <a:latin typeface="Menlo" panose="020B0609030804020204" pitchFamily="49" charset="0"/>
+                <a:ea typeface="Menlo" panose="020B0609030804020204" pitchFamily="49" charset="0"/>
+                <a:cs typeface="Menlo" panose="020B0609030804020204" pitchFamily="49" charset="0"/>
               </a:rPr>
               <a:t>map() </a:t>
             </a:r>
@@ -8102,7 +8346,9 @@
           <a:p>
             <a:r>
               <a:rPr lang="en-GB" dirty="0">
-                <a:latin typeface="Courier" pitchFamily="2" charset="0"/>
+                <a:latin typeface="Menlo" panose="020B0609030804020204" pitchFamily="49" charset="0"/>
+                <a:ea typeface="Menlo" panose="020B0609030804020204" pitchFamily="49" charset="0"/>
+                <a:cs typeface="Menlo" panose="020B0609030804020204" pitchFamily="49" charset="0"/>
               </a:rPr>
               <a:t>map() </a:t>
             </a:r>
@@ -8112,73 +8358,103 @@
             </a:r>
             <a:r>
               <a:rPr lang="en-GB" dirty="0">
+                <a:latin typeface="Menlo" panose="020B0609030804020204" pitchFamily="49" charset="0"/>
+                <a:ea typeface="Menlo" panose="020B0609030804020204" pitchFamily="49" charset="0"/>
+                <a:cs typeface="Menlo" panose="020B0609030804020204" pitchFamily="49" charset="0"/>
+              </a:rPr>
+              <a:t>List</a:t>
+            </a:r>
+            <a:r>
+              <a:rPr lang="en-GB" dirty="0">
                 <a:latin typeface="Courier" pitchFamily="2" charset="0"/>
               </a:rPr>
-              <a:t>List:</a:t>
+              <a:t>:</a:t>
             </a:r>
           </a:p>
           <a:p>
             <a:pPr lvl="1"/>
             <a:r>
               <a:rPr lang="en-GB" dirty="0">
-                <a:latin typeface="Courier" pitchFamily="2" charset="0"/>
+                <a:latin typeface="Menlo" panose="020B0609030804020204" pitchFamily="49" charset="0"/>
+                <a:ea typeface="Menlo" panose="020B0609030804020204" pitchFamily="49" charset="0"/>
+                <a:cs typeface="Menlo" panose="020B0609030804020204" pitchFamily="49" charset="0"/>
               </a:rPr>
               <a:t>final </a:t>
             </a:r>
             <a:r>
               <a:rPr lang="en-GB" dirty="0" err="1">
-                <a:latin typeface="Courier" pitchFamily="2" charset="0"/>
+                <a:latin typeface="Menlo" panose="020B0609030804020204" pitchFamily="49" charset="0"/>
+                <a:ea typeface="Menlo" panose="020B0609030804020204" pitchFamily="49" charset="0"/>
+                <a:cs typeface="Menlo" panose="020B0609030804020204" pitchFamily="49" charset="0"/>
               </a:rPr>
               <a:t>mappedList</a:t>
             </a:r>
             <a:r>
               <a:rPr lang="en-GB" dirty="0">
-                <a:latin typeface="Courier" pitchFamily="2" charset="0"/>
+                <a:latin typeface="Menlo" panose="020B0609030804020204" pitchFamily="49" charset="0"/>
+                <a:ea typeface="Menlo" panose="020B0609030804020204" pitchFamily="49" charset="0"/>
+                <a:cs typeface="Menlo" panose="020B0609030804020204" pitchFamily="49" charset="0"/>
               </a:rPr>
               <a:t> = [1,2,3].map((element) {</a:t>
             </a:r>
             <a:br>
               <a:rPr lang="en-GB" dirty="0">
-                <a:latin typeface="Courier" pitchFamily="2" charset="0"/>
+                <a:latin typeface="Menlo" panose="020B0609030804020204" pitchFamily="49" charset="0"/>
+                <a:ea typeface="Menlo" panose="020B0609030804020204" pitchFamily="49" charset="0"/>
+                <a:cs typeface="Menlo" panose="020B0609030804020204" pitchFamily="49" charset="0"/>
               </a:rPr>
             </a:br>
             <a:r>
               <a:rPr lang="en-GB" dirty="0">
-                <a:latin typeface="Courier" pitchFamily="2" charset="0"/>
+                <a:latin typeface="Menlo" panose="020B0609030804020204" pitchFamily="49" charset="0"/>
+                <a:ea typeface="Menlo" panose="020B0609030804020204" pitchFamily="49" charset="0"/>
+                <a:cs typeface="Menlo" panose="020B0609030804020204" pitchFamily="49" charset="0"/>
               </a:rPr>
               <a:t>	return element * 2;</a:t>
             </a:r>
             <a:br>
               <a:rPr lang="en-GB" dirty="0">
-                <a:latin typeface="Courier" pitchFamily="2" charset="0"/>
+                <a:latin typeface="Menlo" panose="020B0609030804020204" pitchFamily="49" charset="0"/>
+                <a:ea typeface="Menlo" panose="020B0609030804020204" pitchFamily="49" charset="0"/>
+                <a:cs typeface="Menlo" panose="020B0609030804020204" pitchFamily="49" charset="0"/>
               </a:rPr>
             </a:br>
             <a:r>
               <a:rPr lang="en-GB" dirty="0">
-                <a:latin typeface="Courier" pitchFamily="2" charset="0"/>
+                <a:latin typeface="Menlo" panose="020B0609030804020204" pitchFamily="49" charset="0"/>
+                <a:ea typeface="Menlo" panose="020B0609030804020204" pitchFamily="49" charset="0"/>
+                <a:cs typeface="Menlo" panose="020B0609030804020204" pitchFamily="49" charset="0"/>
               </a:rPr>
               <a:t>});</a:t>
             </a:r>
             <a:br>
               <a:rPr lang="en-GB" dirty="0">
-                <a:latin typeface="Courier" pitchFamily="2" charset="0"/>
+                <a:latin typeface="Menlo" panose="020B0609030804020204" pitchFamily="49" charset="0"/>
+                <a:ea typeface="Menlo" panose="020B0609030804020204" pitchFamily="49" charset="0"/>
+                <a:cs typeface="Menlo" panose="020B0609030804020204" pitchFamily="49" charset="0"/>
               </a:rPr>
             </a:br>
             <a:r>
               <a:rPr lang="en-GB" dirty="0">
-                <a:latin typeface="Courier" pitchFamily="2" charset="0"/>
+                <a:latin typeface="Menlo" panose="020B0609030804020204" pitchFamily="49" charset="0"/>
+                <a:ea typeface="Menlo" panose="020B0609030804020204" pitchFamily="49" charset="0"/>
+                <a:cs typeface="Menlo" panose="020B0609030804020204" pitchFamily="49" charset="0"/>
               </a:rPr>
               <a:t>print('${</a:t>
             </a:r>
             <a:r>
               <a:rPr lang="en-GB" dirty="0" err="1">
-                <a:latin typeface="Courier" pitchFamily="2" charset="0"/>
+                <a:latin typeface="Menlo" panose="020B0609030804020204" pitchFamily="49" charset="0"/>
+                <a:ea typeface="Menlo" panose="020B0609030804020204" pitchFamily="49" charset="0"/>
+                <a:cs typeface="Menlo" panose="020B0609030804020204" pitchFamily="49" charset="0"/>
               </a:rPr>
               <a:t>mappedList</a:t>
             </a:r>
             <a:r>
               <a:rPr lang="en-GB" dirty="0">
-                <a:latin typeface="Courier" pitchFamily="2" charset="0"/>
+                <a:latin typeface="Menlo" panose="020B0609030804020204" pitchFamily="49" charset="0"/>
+                <a:ea typeface="Menlo" panose="020B0609030804020204" pitchFamily="49" charset="0"/>
+                <a:cs typeface="Menlo" panose="020B0609030804020204" pitchFamily="49" charset="0"/>
               </a:rPr>
               <a:t>}’); //This will print [2,4,6]</a:t>
             </a:r>
@@ -8304,32 +8580,62 @@
           <a:p>
             <a:r>
               <a:rPr lang="en-GB" dirty="0"/>
-              <a:t>A useful collection type in Dart is the Map type. A Map is an object that associates keys and values.</a:t>
-            </a:r>
-          </a:p>
-          <a:p>
+              <a:t>A useful collection type in Dart is the </a:t>
+            </a:r>
+            <a:r>
+              <a:rPr lang="en-GB" dirty="0">
+                <a:latin typeface="Menlo" panose="020B0609030804020204" pitchFamily="49" charset="0"/>
+                <a:ea typeface="Menlo" panose="020B0609030804020204" pitchFamily="49" charset="0"/>
+                <a:cs typeface="Menlo" panose="020B0609030804020204" pitchFamily="49" charset="0"/>
+              </a:rPr>
+              <a:t>Map</a:t>
+            </a:r>
             <a:r>
               <a:rPr lang="en-GB" dirty="0"/>
-              <a:t>Each key occurs only once, values can occur multiple times.</a:t>
+              <a:t> type. A </a:t>
+            </a:r>
+            <a:r>
+              <a:rPr lang="en-GB" dirty="0">
+                <a:latin typeface="Menlo" panose="020B0609030804020204" pitchFamily="49" charset="0"/>
+                <a:ea typeface="Menlo" panose="020B0609030804020204" pitchFamily="49" charset="0"/>
+                <a:cs typeface="Menlo" panose="020B0609030804020204" pitchFamily="49" charset="0"/>
+              </a:rPr>
+              <a:t>Map</a:t>
+            </a:r>
+            <a:r>
+              <a:rPr lang="en-GB" dirty="0"/>
+              <a:t> is an object that associates keys and values.</a:t>
+            </a:r>
+          </a:p>
+          <a:p>
+            <a:r>
+              <a:rPr lang="en-GB" dirty="0"/>
+              <a:t>Each key occurs only once; values can occur multiple times.</a:t>
             </a:r>
           </a:p>
           <a:p>
             <a:pPr lvl="1"/>
             <a:r>
               <a:rPr lang="en-GB" dirty="0">
-                <a:latin typeface="Courier" pitchFamily="2" charset="0"/>
+                <a:latin typeface="Menlo" panose="020B0609030804020204" pitchFamily="49" charset="0"/>
+                <a:ea typeface="Menlo" panose="020B0609030804020204" pitchFamily="49" charset="0"/>
+                <a:cs typeface="Menlo" panose="020B0609030804020204" pitchFamily="49" charset="0"/>
               </a:rPr>
               <a:t>var </a:t>
             </a:r>
             <a:r>
               <a:rPr lang="en-GB" dirty="0" err="1">
-                <a:latin typeface="Courier" pitchFamily="2" charset="0"/>
+                <a:latin typeface="Menlo" panose="020B0609030804020204" pitchFamily="49" charset="0"/>
+                <a:ea typeface="Menlo" panose="020B0609030804020204" pitchFamily="49" charset="0"/>
+                <a:cs typeface="Menlo" panose="020B0609030804020204" pitchFamily="49" charset="0"/>
               </a:rPr>
               <a:t>mapInferred</a:t>
             </a:r>
             <a:r>
               <a:rPr lang="en-GB" dirty="0">
-                <a:latin typeface="Courier" pitchFamily="2" charset="0"/>
+                <a:latin typeface="Menlo" panose="020B0609030804020204" pitchFamily="49" charset="0"/>
+                <a:ea typeface="Menlo" panose="020B0609030804020204" pitchFamily="49" charset="0"/>
+                <a:cs typeface="Menlo" panose="020B0609030804020204" pitchFamily="49" charset="0"/>
               </a:rPr>
               <a:t> = {2: 'helium’, 10: 'neon’, 18: 'argon’}; //Type inferred</a:t>
             </a:r>
@@ -8338,19 +8644,25 @@
             <a:pPr lvl="1"/>
             <a:r>
               <a:rPr lang="en-GB" dirty="0">
-                <a:latin typeface="Courier" pitchFamily="2" charset="0"/>
+                <a:latin typeface="Menlo" panose="020B0609030804020204" pitchFamily="49" charset="0"/>
+                <a:ea typeface="Menlo" panose="020B0609030804020204" pitchFamily="49" charset="0"/>
+                <a:cs typeface="Menlo" panose="020B0609030804020204" pitchFamily="49" charset="0"/>
               </a:rPr>
               <a:t>Map&lt;int, String&gt; </a:t>
             </a:r>
             <a:r>
               <a:rPr lang="en-GB" dirty="0" err="1">
-                <a:latin typeface="Courier" pitchFamily="2" charset="0"/>
+                <a:latin typeface="Menlo" panose="020B0609030804020204" pitchFamily="49" charset="0"/>
+                <a:ea typeface="Menlo" panose="020B0609030804020204" pitchFamily="49" charset="0"/>
+                <a:cs typeface="Menlo" panose="020B0609030804020204" pitchFamily="49" charset="0"/>
               </a:rPr>
               <a:t>mapNotInferred</a:t>
             </a:r>
             <a:r>
               <a:rPr lang="en-GB" dirty="0">
-                <a:latin typeface="Courier" pitchFamily="2" charset="0"/>
+                <a:latin typeface="Menlo" panose="020B0609030804020204" pitchFamily="49" charset="0"/>
+                <a:ea typeface="Menlo" panose="020B0609030804020204" pitchFamily="49" charset="0"/>
+                <a:cs typeface="Menlo" panose="020B0609030804020204" pitchFamily="49" charset="0"/>
               </a:rPr>
               <a:t> = {2: 'helium’, 10: 'neon’, 18: 'argon'}; //Type not inferred</a:t>
             </a:r>
@@ -8359,31 +8671,41 @@
             <a:pPr lvl="1"/>
             <a:r>
               <a:rPr lang="en-GB" dirty="0">
-                <a:latin typeface="Courier" pitchFamily="2" charset="0"/>
+                <a:latin typeface="Menlo" panose="020B0609030804020204" pitchFamily="49" charset="0"/>
+                <a:ea typeface="Menlo" panose="020B0609030804020204" pitchFamily="49" charset="0"/>
+                <a:cs typeface="Menlo" panose="020B0609030804020204" pitchFamily="49" charset="0"/>
               </a:rPr>
               <a:t>assert(</a:t>
             </a:r>
             <a:r>
               <a:rPr lang="en-GB" dirty="0" err="1">
-                <a:latin typeface="Courier" pitchFamily="2" charset="0"/>
+                <a:latin typeface="Menlo" panose="020B0609030804020204" pitchFamily="49" charset="0"/>
+                <a:ea typeface="Menlo" panose="020B0609030804020204" pitchFamily="49" charset="0"/>
+                <a:cs typeface="Menlo" panose="020B0609030804020204" pitchFamily="49" charset="0"/>
               </a:rPr>
               <a:t>mapInferred</a:t>
             </a:r>
             <a:r>
               <a:rPr lang="en-GB" dirty="0">
-                <a:latin typeface="Courier" pitchFamily="2" charset="0"/>
+                <a:latin typeface="Menlo" panose="020B0609030804020204" pitchFamily="49" charset="0"/>
+                <a:ea typeface="Menlo" panose="020B0609030804020204" pitchFamily="49" charset="0"/>
+                <a:cs typeface="Menlo" panose="020B0609030804020204" pitchFamily="49" charset="0"/>
               </a:rPr>
               <a:t> != </a:t>
             </a:r>
             <a:r>
               <a:rPr lang="en-GB" dirty="0" err="1">
-                <a:latin typeface="Courier" pitchFamily="2" charset="0"/>
+                <a:latin typeface="Menlo" panose="020B0609030804020204" pitchFamily="49" charset="0"/>
+                <a:ea typeface="Menlo" panose="020B0609030804020204" pitchFamily="49" charset="0"/>
+                <a:cs typeface="Menlo" panose="020B0609030804020204" pitchFamily="49" charset="0"/>
               </a:rPr>
               <a:t>mapNotInferred</a:t>
             </a:r>
             <a:r>
               <a:rPr lang="en-GB" dirty="0">
-                <a:latin typeface="Courier" pitchFamily="2" charset="0"/>
+                <a:latin typeface="Menlo" panose="020B0609030804020204" pitchFamily="49" charset="0"/>
+                <a:ea typeface="Menlo" panose="020B0609030804020204" pitchFamily="49" charset="0"/>
+                <a:cs typeface="Menlo" panose="020B0609030804020204" pitchFamily="49" charset="0"/>
               </a:rPr>
               <a:t>); //Again they are not equal!</a:t>
             </a:r>
@@ -8391,26 +8713,32 @@
           <a:p>
             <a:r>
               <a:rPr lang="en-GB" dirty="0"/>
-              <a:t>Elements of a Map can be accessed via the key.</a:t>
+              <a:t>Elements of a map can be accessed via the key.</a:t>
             </a:r>
           </a:p>
           <a:p>
             <a:pPr lvl="1"/>
             <a:r>
               <a:rPr lang="en-GB" dirty="0">
-                <a:latin typeface="Courier" pitchFamily="2" charset="0"/>
+                <a:latin typeface="Menlo" panose="020B0609030804020204" pitchFamily="49" charset="0"/>
+                <a:ea typeface="Menlo" panose="020B0609030804020204" pitchFamily="49" charset="0"/>
+                <a:cs typeface="Menlo" panose="020B0609030804020204" pitchFamily="49" charset="0"/>
               </a:rPr>
               <a:t>print(</a:t>
             </a:r>
             <a:r>
               <a:rPr lang="en-GB" dirty="0" err="1">
-                <a:latin typeface="Courier" pitchFamily="2" charset="0"/>
+                <a:latin typeface="Menlo" panose="020B0609030804020204" pitchFamily="49" charset="0"/>
+                <a:ea typeface="Menlo" panose="020B0609030804020204" pitchFamily="49" charset="0"/>
+                <a:cs typeface="Menlo" panose="020B0609030804020204" pitchFamily="49" charset="0"/>
               </a:rPr>
               <a:t>mapInferred</a:t>
             </a:r>
             <a:r>
               <a:rPr lang="en-GB" dirty="0">
-                <a:latin typeface="Courier" pitchFamily="2" charset="0"/>
+                <a:latin typeface="Menlo" panose="020B0609030804020204" pitchFamily="49" charset="0"/>
+                <a:ea typeface="Menlo" panose="020B0609030804020204" pitchFamily="49" charset="0"/>
+                <a:cs typeface="Menlo" panose="020B0609030804020204" pitchFamily="49" charset="0"/>
               </a:rPr>
               <a:t>[2]); //This will print 'helium'</a:t>
             </a:r>
@@ -8418,59 +8746,81 @@
           <a:p>
             <a:r>
               <a:rPr lang="en-GB" dirty="0"/>
-              <a:t>It is possible to add key-value pairs to the Map by simply</a:t>
+              <a:t>It is possible to add key-value pairs to the map by simply</a:t>
             </a:r>
           </a:p>
           <a:p>
             <a:pPr lvl="1"/>
             <a:r>
-              <a:rPr lang="en-GB" dirty="0" err="1"/>
+              <a:rPr lang="en-GB" dirty="0" err="1">
+                <a:latin typeface="Menlo" panose="020B0609030804020204" pitchFamily="49" charset="0"/>
+                <a:ea typeface="Menlo" panose="020B0609030804020204" pitchFamily="49" charset="0"/>
+                <a:cs typeface="Menlo" panose="020B0609030804020204" pitchFamily="49" charset="0"/>
+              </a:rPr>
               <a:t>mapInferred</a:t>
             </a:r>
             <a:r>
+              <a:rPr lang="en-GB" dirty="0">
+                <a:latin typeface="Menlo" panose="020B0609030804020204" pitchFamily="49" charset="0"/>
+                <a:ea typeface="Menlo" panose="020B0609030804020204" pitchFamily="49" charset="0"/>
+                <a:cs typeface="Menlo" panose="020B0609030804020204" pitchFamily="49" charset="0"/>
+              </a:rPr>
+              <a:t>[1] = 'hydrogen';</a:t>
+            </a:r>
+          </a:p>
+          <a:p>
+            <a:r>
               <a:rPr lang="en-GB" dirty="0"/>
-              <a:t>[1] = 'hydrogen';</a:t>
+              <a:t>Values of a map can be overwritten </a:t>
+            </a:r>
+          </a:p>
+          <a:p>
+            <a:pPr lvl="1"/>
+            <a:r>
+              <a:rPr lang="en-GB" dirty="0" err="1">
+                <a:latin typeface="Menlo" panose="020B0609030804020204" pitchFamily="49" charset="0"/>
+                <a:ea typeface="Menlo" panose="020B0609030804020204" pitchFamily="49" charset="0"/>
+                <a:cs typeface="Menlo" panose="020B0609030804020204" pitchFamily="49" charset="0"/>
+              </a:rPr>
+              <a:t>mapInferred</a:t>
+            </a:r>
+            <a:r>
+              <a:rPr lang="en-GB" dirty="0">
+                <a:latin typeface="Menlo" panose="020B0609030804020204" pitchFamily="49" charset="0"/>
+                <a:ea typeface="Menlo" panose="020B0609030804020204" pitchFamily="49" charset="0"/>
+                <a:cs typeface="Menlo" panose="020B0609030804020204" pitchFamily="49" charset="0"/>
+              </a:rPr>
+              <a:t>[1] = 'H';</a:t>
             </a:r>
           </a:p>
           <a:p>
             <a:r>
               <a:rPr lang="en-GB" dirty="0"/>
-              <a:t>Values of a Map can be overwritten </a:t>
-            </a:r>
-          </a:p>
-          <a:p>
-            <a:pPr lvl="1"/>
-            <a:r>
-              <a:rPr lang="en-GB" dirty="0" err="1"/>
-              <a:t>mapInferred</a:t>
-            </a:r>
-            <a:r>
-              <a:rPr lang="en-GB" dirty="0"/>
-              <a:t>[1] = 'H';</a:t>
-            </a:r>
-          </a:p>
-          <a:p>
-            <a:r>
-              <a:rPr lang="en-GB" dirty="0"/>
-              <a:t>Handy features are also present for Maps</a:t>
-            </a:r>
-          </a:p>
-          <a:p>
-            <a:r>
-              <a:rPr lang="en-GB" dirty="0">
-                <a:latin typeface="Courier" pitchFamily="2" charset="0"/>
+              <a:t>Handy features are also present for maps</a:t>
+            </a:r>
+          </a:p>
+          <a:p>
+            <a:r>
+              <a:rPr lang="en-GB" dirty="0">
+                <a:latin typeface="Menlo" panose="020B0609030804020204" pitchFamily="49" charset="0"/>
+                <a:ea typeface="Menlo" panose="020B0609030804020204" pitchFamily="49" charset="0"/>
+                <a:cs typeface="Menlo" panose="020B0609030804020204" pitchFamily="49" charset="0"/>
               </a:rPr>
               <a:t>print(</a:t>
             </a:r>
             <a:r>
               <a:rPr lang="en-GB" dirty="0" err="1">
-                <a:latin typeface="Courier" pitchFamily="2" charset="0"/>
+                <a:latin typeface="Menlo" panose="020B0609030804020204" pitchFamily="49" charset="0"/>
+                <a:ea typeface="Menlo" panose="020B0609030804020204" pitchFamily="49" charset="0"/>
+                <a:cs typeface="Menlo" panose="020B0609030804020204" pitchFamily="49" charset="0"/>
               </a:rPr>
               <a:t>mapInferred.length</a:t>
             </a:r>
             <a:r>
               <a:rPr lang="en-GB" dirty="0">
-                <a:latin typeface="Courier" pitchFamily="2" charset="0"/>
+                <a:latin typeface="Menlo" panose="020B0609030804020204" pitchFamily="49" charset="0"/>
+                <a:ea typeface="Menlo" panose="020B0609030804020204" pitchFamily="49" charset="0"/>
+                <a:cs typeface="Menlo" panose="020B0609030804020204" pitchFamily="49" charset="0"/>
               </a:rPr>
               <a:t>); //This will print the length of the Map</a:t>
             </a:r>
@@ -8478,19 +8828,25 @@
           <a:p>
             <a:r>
               <a:rPr lang="en-GB" dirty="0">
-                <a:latin typeface="Courier" pitchFamily="2" charset="0"/>
+                <a:latin typeface="Menlo" panose="020B0609030804020204" pitchFamily="49" charset="0"/>
+                <a:ea typeface="Menlo" panose="020B0609030804020204" pitchFamily="49" charset="0"/>
+                <a:cs typeface="Menlo" panose="020B0609030804020204" pitchFamily="49" charset="0"/>
               </a:rPr>
               <a:t>print(</a:t>
             </a:r>
             <a:r>
               <a:rPr lang="en-GB" dirty="0" err="1">
-                <a:latin typeface="Courier" pitchFamily="2" charset="0"/>
+                <a:latin typeface="Menlo" panose="020B0609030804020204" pitchFamily="49" charset="0"/>
+                <a:ea typeface="Menlo" panose="020B0609030804020204" pitchFamily="49" charset="0"/>
+                <a:cs typeface="Menlo" panose="020B0609030804020204" pitchFamily="49" charset="0"/>
               </a:rPr>
               <a:t>mapInferred.containsKey</a:t>
             </a:r>
             <a:r>
               <a:rPr lang="en-GB" dirty="0">
-                <a:latin typeface="Courier" pitchFamily="2" charset="0"/>
+                <a:latin typeface="Menlo" panose="020B0609030804020204" pitchFamily="49" charset="0"/>
+                <a:ea typeface="Menlo" panose="020B0609030804020204" pitchFamily="49" charset="0"/>
+                <a:cs typeface="Menlo" panose="020B0609030804020204" pitchFamily="49" charset="0"/>
               </a:rPr>
               <a:t>(2)); //This will check is a key exists in the Map</a:t>
             </a:r>
@@ -9371,43 +9727,57 @@
             </a:br>
             <a:r>
               <a:rPr lang="en-GB" i="1" dirty="0" err="1">
-                <a:latin typeface="Courier" pitchFamily="2" charset="0"/>
+                <a:latin typeface="Menlo" panose="020B0609030804020204" pitchFamily="49" charset="0"/>
+                <a:ea typeface="Menlo" panose="020B0609030804020204" pitchFamily="49" charset="0"/>
+                <a:cs typeface="Menlo" panose="020B0609030804020204" pitchFamily="49" charset="0"/>
               </a:rPr>
               <a:t>returnType</a:t>
             </a:r>
             <a:r>
               <a:rPr lang="en-GB" i="1" dirty="0">
-                <a:latin typeface="Courier" pitchFamily="2" charset="0"/>
+                <a:latin typeface="Menlo" panose="020B0609030804020204" pitchFamily="49" charset="0"/>
+                <a:ea typeface="Menlo" panose="020B0609030804020204" pitchFamily="49" charset="0"/>
+                <a:cs typeface="Menlo" panose="020B0609030804020204" pitchFamily="49" charset="0"/>
               </a:rPr>
               <a:t> </a:t>
             </a:r>
             <a:r>
               <a:rPr lang="en-GB" i="1" dirty="0" err="1">
-                <a:latin typeface="Courier" pitchFamily="2" charset="0"/>
+                <a:latin typeface="Menlo" panose="020B0609030804020204" pitchFamily="49" charset="0"/>
+                <a:ea typeface="Menlo" panose="020B0609030804020204" pitchFamily="49" charset="0"/>
+                <a:cs typeface="Menlo" panose="020B0609030804020204" pitchFamily="49" charset="0"/>
               </a:rPr>
               <a:t>functionName</a:t>
             </a:r>
             <a:r>
               <a:rPr lang="en-GB" i="1" dirty="0">
-                <a:latin typeface="Courier" pitchFamily="2" charset="0"/>
+                <a:latin typeface="Menlo" panose="020B0609030804020204" pitchFamily="49" charset="0"/>
+                <a:ea typeface="Menlo" panose="020B0609030804020204" pitchFamily="49" charset="0"/>
+                <a:cs typeface="Menlo" panose="020B0609030804020204" pitchFamily="49" charset="0"/>
               </a:rPr>
               <a:t>(typeParam1 nameParam1, typeParam2 nameParam2,…){</a:t>
             </a:r>
             <a:r>
               <a:rPr lang="en-GB" i="1" dirty="0" err="1">
-                <a:latin typeface="Courier" pitchFamily="2" charset="0"/>
+                <a:latin typeface="Menlo" panose="020B0609030804020204" pitchFamily="49" charset="0"/>
+                <a:ea typeface="Menlo" panose="020B0609030804020204" pitchFamily="49" charset="0"/>
+                <a:cs typeface="Menlo" panose="020B0609030804020204" pitchFamily="49" charset="0"/>
               </a:rPr>
               <a:t>functionBody</a:t>
             </a:r>
             <a:r>
               <a:rPr lang="en-GB" i="1" dirty="0">
-                <a:latin typeface="Courier" pitchFamily="2" charset="0"/>
+                <a:latin typeface="Menlo" panose="020B0609030804020204" pitchFamily="49" charset="0"/>
+                <a:ea typeface="Menlo" panose="020B0609030804020204" pitchFamily="49" charset="0"/>
+                <a:cs typeface="Menlo" panose="020B0609030804020204" pitchFamily="49" charset="0"/>
               </a:rPr>
               <a:t>}</a:t>
             </a:r>
             <a:r>
               <a:rPr lang="en-GB" dirty="0">
-                <a:latin typeface="Courier" pitchFamily="2" charset="0"/>
+                <a:latin typeface="Menlo" panose="020B0609030804020204" pitchFamily="49" charset="0"/>
+                <a:ea typeface="Menlo" panose="020B0609030804020204" pitchFamily="49" charset="0"/>
+                <a:cs typeface="Menlo" panose="020B0609030804020204" pitchFamily="49" charset="0"/>
               </a:rPr>
               <a:t>:</a:t>
             </a:r>
@@ -9416,109 +9786,147 @@
             <a:pPr lvl="1"/>
             <a:r>
               <a:rPr lang="en-GB" dirty="0">
-                <a:latin typeface="Courier" pitchFamily="2" charset="0"/>
+                <a:latin typeface="Menlo" panose="020B0609030804020204" pitchFamily="49" charset="0"/>
+                <a:ea typeface="Menlo" panose="020B0609030804020204" pitchFamily="49" charset="0"/>
+                <a:cs typeface="Menlo" panose="020B0609030804020204" pitchFamily="49" charset="0"/>
               </a:rPr>
               <a:t>double </a:t>
             </a:r>
             <a:r>
               <a:rPr lang="en-GB" dirty="0" err="1">
-                <a:latin typeface="Courier" pitchFamily="2" charset="0"/>
+                <a:latin typeface="Menlo" panose="020B0609030804020204" pitchFamily="49" charset="0"/>
+                <a:ea typeface="Menlo" panose="020B0609030804020204" pitchFamily="49" charset="0"/>
+                <a:cs typeface="Menlo" panose="020B0609030804020204" pitchFamily="49" charset="0"/>
               </a:rPr>
               <a:t>sumTwoNumbers</a:t>
             </a:r>
             <a:r>
               <a:rPr lang="en-GB" dirty="0">
-                <a:latin typeface="Courier" pitchFamily="2" charset="0"/>
+                <a:latin typeface="Menlo" panose="020B0609030804020204" pitchFamily="49" charset="0"/>
+                <a:ea typeface="Menlo" panose="020B0609030804020204" pitchFamily="49" charset="0"/>
+                <a:cs typeface="Menlo" panose="020B0609030804020204" pitchFamily="49" charset="0"/>
               </a:rPr>
               <a:t>(double a, double b){</a:t>
             </a:r>
             <a:br>
               <a:rPr lang="en-GB" dirty="0">
-                <a:latin typeface="Courier" pitchFamily="2" charset="0"/>
+                <a:latin typeface="Menlo" panose="020B0609030804020204" pitchFamily="49" charset="0"/>
+                <a:ea typeface="Menlo" panose="020B0609030804020204" pitchFamily="49" charset="0"/>
+                <a:cs typeface="Menlo" panose="020B0609030804020204" pitchFamily="49" charset="0"/>
               </a:rPr>
             </a:br>
             <a:r>
               <a:rPr lang="en-GB" dirty="0">
-                <a:latin typeface="Courier" pitchFamily="2" charset="0"/>
+                <a:latin typeface="Menlo" panose="020B0609030804020204" pitchFamily="49" charset="0"/>
+                <a:ea typeface="Menlo" panose="020B0609030804020204" pitchFamily="49" charset="0"/>
+                <a:cs typeface="Menlo" panose="020B0609030804020204" pitchFamily="49" charset="0"/>
               </a:rPr>
               <a:t>	return a + b;</a:t>
             </a:r>
             <a:br>
               <a:rPr lang="en-GB" dirty="0">
-                <a:latin typeface="Courier" pitchFamily="2" charset="0"/>
+                <a:latin typeface="Menlo" panose="020B0609030804020204" pitchFamily="49" charset="0"/>
+                <a:ea typeface="Menlo" panose="020B0609030804020204" pitchFamily="49" charset="0"/>
+                <a:cs typeface="Menlo" panose="020B0609030804020204" pitchFamily="49" charset="0"/>
               </a:rPr>
             </a:br>
             <a:r>
               <a:rPr lang="en-GB" dirty="0">
-                <a:latin typeface="Courier" pitchFamily="2" charset="0"/>
+                <a:latin typeface="Menlo" panose="020B0609030804020204" pitchFamily="49" charset="0"/>
+                <a:ea typeface="Menlo" panose="020B0609030804020204" pitchFamily="49" charset="0"/>
+                <a:cs typeface="Menlo" panose="020B0609030804020204" pitchFamily="49" charset="0"/>
               </a:rPr>
               <a:t>}//</a:t>
             </a:r>
             <a:r>
               <a:rPr lang="en-GB" dirty="0" err="1">
-                <a:latin typeface="Courier" pitchFamily="2" charset="0"/>
+                <a:latin typeface="Menlo" panose="020B0609030804020204" pitchFamily="49" charset="0"/>
+                <a:ea typeface="Menlo" panose="020B0609030804020204" pitchFamily="49" charset="0"/>
+                <a:cs typeface="Menlo" panose="020B0609030804020204" pitchFamily="49" charset="0"/>
               </a:rPr>
               <a:t>sumTwoNumbers</a:t>
             </a:r>
             <a:br>
               <a:rPr lang="en-GB" dirty="0">
-                <a:latin typeface="Courier" pitchFamily="2" charset="0"/>
+                <a:latin typeface="Menlo" panose="020B0609030804020204" pitchFamily="49" charset="0"/>
+                <a:ea typeface="Menlo" panose="020B0609030804020204" pitchFamily="49" charset="0"/>
+                <a:cs typeface="Menlo" panose="020B0609030804020204" pitchFamily="49" charset="0"/>
               </a:rPr>
             </a:br>
             <a:br>
               <a:rPr lang="en-GB" dirty="0">
-                <a:latin typeface="Courier" pitchFamily="2" charset="0"/>
+                <a:latin typeface="Menlo" panose="020B0609030804020204" pitchFamily="49" charset="0"/>
+                <a:ea typeface="Menlo" panose="020B0609030804020204" pitchFamily="49" charset="0"/>
+                <a:cs typeface="Menlo" panose="020B0609030804020204" pitchFamily="49" charset="0"/>
               </a:rPr>
             </a:br>
             <a:r>
               <a:rPr lang="en-GB" dirty="0">
-                <a:latin typeface="Courier" pitchFamily="2" charset="0"/>
+                <a:latin typeface="Menlo" panose="020B0609030804020204" pitchFamily="49" charset="0"/>
+                <a:ea typeface="Menlo" panose="020B0609030804020204" pitchFamily="49" charset="0"/>
+                <a:cs typeface="Menlo" panose="020B0609030804020204" pitchFamily="49" charset="0"/>
               </a:rPr>
               <a:t>void main(List&lt;String&gt; </a:t>
             </a:r>
             <a:r>
               <a:rPr lang="en-GB" dirty="0" err="1">
-                <a:latin typeface="Courier" pitchFamily="2" charset="0"/>
+                <a:latin typeface="Menlo" panose="020B0609030804020204" pitchFamily="49" charset="0"/>
+                <a:ea typeface="Menlo" panose="020B0609030804020204" pitchFamily="49" charset="0"/>
+                <a:cs typeface="Menlo" panose="020B0609030804020204" pitchFamily="49" charset="0"/>
               </a:rPr>
               <a:t>args</a:t>
             </a:r>
             <a:r>
               <a:rPr lang="en-GB" dirty="0">
-                <a:latin typeface="Courier" pitchFamily="2" charset="0"/>
+                <a:latin typeface="Menlo" panose="020B0609030804020204" pitchFamily="49" charset="0"/>
+                <a:ea typeface="Menlo" panose="020B0609030804020204" pitchFamily="49" charset="0"/>
+                <a:cs typeface="Menlo" panose="020B0609030804020204" pitchFamily="49" charset="0"/>
               </a:rPr>
               <a:t>) {</a:t>
             </a:r>
             <a:br>
               <a:rPr lang="en-GB" dirty="0">
-                <a:latin typeface="Courier" pitchFamily="2" charset="0"/>
+                <a:latin typeface="Menlo" panose="020B0609030804020204" pitchFamily="49" charset="0"/>
+                <a:ea typeface="Menlo" panose="020B0609030804020204" pitchFamily="49" charset="0"/>
+                <a:cs typeface="Menlo" panose="020B0609030804020204" pitchFamily="49" charset="0"/>
               </a:rPr>
             </a:br>
             <a:r>
               <a:rPr lang="en-GB" dirty="0">
-                <a:latin typeface="Courier" pitchFamily="2" charset="0"/>
+                <a:latin typeface="Menlo" panose="020B0609030804020204" pitchFamily="49" charset="0"/>
+                <a:ea typeface="Menlo" panose="020B0609030804020204" pitchFamily="49" charset="0"/>
+                <a:cs typeface="Menlo" panose="020B0609030804020204" pitchFamily="49" charset="0"/>
               </a:rPr>
               <a:t>	print(</a:t>
             </a:r>
             <a:r>
               <a:rPr lang="en-GB" dirty="0" err="1">
-                <a:latin typeface="Courier" pitchFamily="2" charset="0"/>
+                <a:latin typeface="Menlo" panose="020B0609030804020204" pitchFamily="49" charset="0"/>
+                <a:ea typeface="Menlo" panose="020B0609030804020204" pitchFamily="49" charset="0"/>
+                <a:cs typeface="Menlo" panose="020B0609030804020204" pitchFamily="49" charset="0"/>
               </a:rPr>
               <a:t>sumTwoNumbers</a:t>
             </a:r>
             <a:r>
               <a:rPr lang="en-GB" dirty="0">
-                <a:latin typeface="Courier" pitchFamily="2" charset="0"/>
+                <a:latin typeface="Menlo" panose="020B0609030804020204" pitchFamily="49" charset="0"/>
+                <a:ea typeface="Menlo" panose="020B0609030804020204" pitchFamily="49" charset="0"/>
+                <a:cs typeface="Menlo" panose="020B0609030804020204" pitchFamily="49" charset="0"/>
               </a:rPr>
               <a:t>(3,4)); //This will print '7.0'</a:t>
             </a:r>
             <a:br>
               <a:rPr lang="en-GB" dirty="0">
-                <a:latin typeface="Courier" pitchFamily="2" charset="0"/>
+                <a:latin typeface="Menlo" panose="020B0609030804020204" pitchFamily="49" charset="0"/>
+                <a:ea typeface="Menlo" panose="020B0609030804020204" pitchFamily="49" charset="0"/>
+                <a:cs typeface="Menlo" panose="020B0609030804020204" pitchFamily="49" charset="0"/>
               </a:rPr>
             </a:br>
             <a:r>
               <a:rPr lang="en-GB" dirty="0">
-                <a:latin typeface="Courier" pitchFamily="2" charset="0"/>
+                <a:latin typeface="Menlo" panose="020B0609030804020204" pitchFamily="49" charset="0"/>
+                <a:ea typeface="Menlo" panose="020B0609030804020204" pitchFamily="49" charset="0"/>
+                <a:cs typeface="Menlo" panose="020B0609030804020204" pitchFamily="49" charset="0"/>
               </a:rPr>
               <a:t>}//main</a:t>
             </a:r>
@@ -9532,145 +9940,205 @@
           <a:p>
             <a:r>
               <a:rPr lang="en-GB" dirty="0"/>
-              <a:t>Dart is truly object-oriented: even functions are objects of type Functions. This means that they can be an input of another function:</a:t>
+              <a:t>Dart is truly object-oriented: even functions are objects of type </a:t>
+            </a:r>
+            <a:r>
+              <a:rPr lang="en-GB" dirty="0">
+                <a:latin typeface="Menlo" panose="020B0609030804020204" pitchFamily="49" charset="0"/>
+                <a:ea typeface="Menlo" panose="020B0609030804020204" pitchFamily="49" charset="0"/>
+                <a:cs typeface="Menlo" panose="020B0609030804020204" pitchFamily="49" charset="0"/>
+              </a:rPr>
+              <a:t>Function</a:t>
+            </a:r>
+            <a:r>
+              <a:rPr lang="en-GB" dirty="0"/>
+              <a:t>. This means that they can be an input of another function:</a:t>
             </a:r>
           </a:p>
           <a:p>
             <a:pPr lvl="1"/>
             <a:r>
               <a:rPr lang="en-GB" dirty="0">
-                <a:latin typeface="Courier" pitchFamily="2" charset="0"/>
+                <a:latin typeface="Menlo" panose="020B0609030804020204" pitchFamily="49" charset="0"/>
+                <a:ea typeface="Menlo" panose="020B0609030804020204" pitchFamily="49" charset="0"/>
+                <a:cs typeface="Menlo" panose="020B0609030804020204" pitchFamily="49" charset="0"/>
               </a:rPr>
               <a:t>double </a:t>
             </a:r>
             <a:r>
               <a:rPr lang="en-GB" dirty="0" err="1">
-                <a:latin typeface="Courier" pitchFamily="2" charset="0"/>
+                <a:latin typeface="Menlo" panose="020B0609030804020204" pitchFamily="49" charset="0"/>
+                <a:ea typeface="Menlo" panose="020B0609030804020204" pitchFamily="49" charset="0"/>
+                <a:cs typeface="Menlo" panose="020B0609030804020204" pitchFamily="49" charset="0"/>
               </a:rPr>
               <a:t>doSomethingWithNumbers</a:t>
             </a:r>
             <a:r>
               <a:rPr lang="en-GB" dirty="0">
-                <a:latin typeface="Courier" pitchFamily="2" charset="0"/>
+                <a:latin typeface="Menlo" panose="020B0609030804020204" pitchFamily="49" charset="0"/>
+                <a:ea typeface="Menlo" panose="020B0609030804020204" pitchFamily="49" charset="0"/>
+                <a:cs typeface="Menlo" panose="020B0609030804020204" pitchFamily="49" charset="0"/>
               </a:rPr>
               <a:t>(Function foo, double a, double b){</a:t>
             </a:r>
             <a:br>
               <a:rPr lang="en-GB" dirty="0">
-                <a:latin typeface="Courier" pitchFamily="2" charset="0"/>
+                <a:latin typeface="Menlo" panose="020B0609030804020204" pitchFamily="49" charset="0"/>
+                <a:ea typeface="Menlo" panose="020B0609030804020204" pitchFamily="49" charset="0"/>
+                <a:cs typeface="Menlo" panose="020B0609030804020204" pitchFamily="49" charset="0"/>
               </a:rPr>
             </a:br>
             <a:r>
               <a:rPr lang="en-GB" dirty="0">
-                <a:latin typeface="Courier" pitchFamily="2" charset="0"/>
+                <a:latin typeface="Menlo" panose="020B0609030804020204" pitchFamily="49" charset="0"/>
+                <a:ea typeface="Menlo" panose="020B0609030804020204" pitchFamily="49" charset="0"/>
+                <a:cs typeface="Menlo" panose="020B0609030804020204" pitchFamily="49" charset="0"/>
               </a:rPr>
               <a:t>	return foo(</a:t>
             </a:r>
             <a:r>
               <a:rPr lang="en-GB" dirty="0" err="1">
-                <a:latin typeface="Courier" pitchFamily="2" charset="0"/>
+                <a:latin typeface="Menlo" panose="020B0609030804020204" pitchFamily="49" charset="0"/>
+                <a:ea typeface="Menlo" panose="020B0609030804020204" pitchFamily="49" charset="0"/>
+                <a:cs typeface="Menlo" panose="020B0609030804020204" pitchFamily="49" charset="0"/>
               </a:rPr>
               <a:t>a,b</a:t>
             </a:r>
             <a:r>
               <a:rPr lang="en-GB" dirty="0">
-                <a:latin typeface="Courier" pitchFamily="2" charset="0"/>
+                <a:latin typeface="Menlo" panose="020B0609030804020204" pitchFamily="49" charset="0"/>
+                <a:ea typeface="Menlo" panose="020B0609030804020204" pitchFamily="49" charset="0"/>
+                <a:cs typeface="Menlo" panose="020B0609030804020204" pitchFamily="49" charset="0"/>
               </a:rPr>
               <a:t>);</a:t>
             </a:r>
             <a:br>
               <a:rPr lang="en-GB" dirty="0">
-                <a:latin typeface="Courier" pitchFamily="2" charset="0"/>
+                <a:latin typeface="Menlo" panose="020B0609030804020204" pitchFamily="49" charset="0"/>
+                <a:ea typeface="Menlo" panose="020B0609030804020204" pitchFamily="49" charset="0"/>
+                <a:cs typeface="Menlo" panose="020B0609030804020204" pitchFamily="49" charset="0"/>
               </a:rPr>
             </a:br>
             <a:r>
               <a:rPr lang="en-GB" dirty="0">
-                <a:latin typeface="Courier" pitchFamily="2" charset="0"/>
+                <a:latin typeface="Menlo" panose="020B0609030804020204" pitchFamily="49" charset="0"/>
+                <a:ea typeface="Menlo" panose="020B0609030804020204" pitchFamily="49" charset="0"/>
+                <a:cs typeface="Menlo" panose="020B0609030804020204" pitchFamily="49" charset="0"/>
               </a:rPr>
               <a:t>}//</a:t>
             </a:r>
             <a:r>
               <a:rPr lang="en-GB" dirty="0" err="1">
-                <a:latin typeface="Courier" pitchFamily="2" charset="0"/>
+                <a:latin typeface="Menlo" panose="020B0609030804020204" pitchFamily="49" charset="0"/>
+                <a:ea typeface="Menlo" panose="020B0609030804020204" pitchFamily="49" charset="0"/>
+                <a:cs typeface="Menlo" panose="020B0609030804020204" pitchFamily="49" charset="0"/>
               </a:rPr>
               <a:t>doSomeThingWithNumbers</a:t>
             </a:r>
             <a:br>
               <a:rPr lang="en-GB" dirty="0">
-                <a:latin typeface="Courier" pitchFamily="2" charset="0"/>
+                <a:latin typeface="Menlo" panose="020B0609030804020204" pitchFamily="49" charset="0"/>
+                <a:ea typeface="Menlo" panose="020B0609030804020204" pitchFamily="49" charset="0"/>
+                <a:cs typeface="Menlo" panose="020B0609030804020204" pitchFamily="49" charset="0"/>
               </a:rPr>
             </a:br>
             <a:r>
               <a:rPr lang="en-GB" dirty="0">
-                <a:latin typeface="Courier" pitchFamily="2" charset="0"/>
+                <a:latin typeface="Menlo" panose="020B0609030804020204" pitchFamily="49" charset="0"/>
+                <a:ea typeface="Menlo" panose="020B0609030804020204" pitchFamily="49" charset="0"/>
+                <a:cs typeface="Menlo" panose="020B0609030804020204" pitchFamily="49" charset="0"/>
               </a:rPr>
               <a:t>void main(List&lt;String&gt; </a:t>
             </a:r>
             <a:r>
               <a:rPr lang="en-GB" dirty="0" err="1">
-                <a:latin typeface="Courier" pitchFamily="2" charset="0"/>
+                <a:latin typeface="Menlo" panose="020B0609030804020204" pitchFamily="49" charset="0"/>
+                <a:ea typeface="Menlo" panose="020B0609030804020204" pitchFamily="49" charset="0"/>
+                <a:cs typeface="Menlo" panose="020B0609030804020204" pitchFamily="49" charset="0"/>
               </a:rPr>
               <a:t>args</a:t>
             </a:r>
             <a:r>
               <a:rPr lang="en-GB" dirty="0">
-                <a:latin typeface="Courier" pitchFamily="2" charset="0"/>
+                <a:latin typeface="Menlo" panose="020B0609030804020204" pitchFamily="49" charset="0"/>
+                <a:ea typeface="Menlo" panose="020B0609030804020204" pitchFamily="49" charset="0"/>
+                <a:cs typeface="Menlo" panose="020B0609030804020204" pitchFamily="49" charset="0"/>
               </a:rPr>
               <a:t>) {</a:t>
             </a:r>
             <a:br>
               <a:rPr lang="en-GB" dirty="0">
-                <a:latin typeface="Courier" pitchFamily="2" charset="0"/>
+                <a:latin typeface="Menlo" panose="020B0609030804020204" pitchFamily="49" charset="0"/>
+                <a:ea typeface="Menlo" panose="020B0609030804020204" pitchFamily="49" charset="0"/>
+                <a:cs typeface="Menlo" panose="020B0609030804020204" pitchFamily="49" charset="0"/>
               </a:rPr>
             </a:br>
             <a:r>
               <a:rPr lang="en-GB" dirty="0">
-                <a:latin typeface="Courier" pitchFamily="2" charset="0"/>
+                <a:latin typeface="Menlo" panose="020B0609030804020204" pitchFamily="49" charset="0"/>
+                <a:ea typeface="Menlo" panose="020B0609030804020204" pitchFamily="49" charset="0"/>
+                <a:cs typeface="Menlo" panose="020B0609030804020204" pitchFamily="49" charset="0"/>
               </a:rPr>
               <a:t>	print(</a:t>
             </a:r>
             <a:r>
               <a:rPr lang="en-GB" dirty="0" err="1">
-                <a:latin typeface="Courier" pitchFamily="2" charset="0"/>
+                <a:latin typeface="Menlo" panose="020B0609030804020204" pitchFamily="49" charset="0"/>
+                <a:ea typeface="Menlo" panose="020B0609030804020204" pitchFamily="49" charset="0"/>
+                <a:cs typeface="Menlo" panose="020B0609030804020204" pitchFamily="49" charset="0"/>
               </a:rPr>
               <a:t>doSomethingWithNumbers</a:t>
             </a:r>
             <a:r>
               <a:rPr lang="en-GB" dirty="0">
-                <a:latin typeface="Courier" pitchFamily="2" charset="0"/>
+                <a:latin typeface="Menlo" panose="020B0609030804020204" pitchFamily="49" charset="0"/>
+                <a:ea typeface="Menlo" panose="020B0609030804020204" pitchFamily="49" charset="0"/>
+                <a:cs typeface="Menlo" panose="020B0609030804020204" pitchFamily="49" charset="0"/>
               </a:rPr>
               <a:t>(</a:t>
             </a:r>
             <a:r>
               <a:rPr lang="en-GB" dirty="0" err="1">
-                <a:latin typeface="Courier" pitchFamily="2" charset="0"/>
+                <a:latin typeface="Menlo" panose="020B0609030804020204" pitchFamily="49" charset="0"/>
+                <a:ea typeface="Menlo" panose="020B0609030804020204" pitchFamily="49" charset="0"/>
+                <a:cs typeface="Menlo" panose="020B0609030804020204" pitchFamily="49" charset="0"/>
               </a:rPr>
               <a:t>sumTwoNumbers</a:t>
             </a:r>
             <a:r>
               <a:rPr lang="en-GB" dirty="0">
-                <a:latin typeface="Courier" pitchFamily="2" charset="0"/>
+                <a:latin typeface="Menlo" panose="020B0609030804020204" pitchFamily="49" charset="0"/>
+                <a:ea typeface="Menlo" panose="020B0609030804020204" pitchFamily="49" charset="0"/>
+                <a:cs typeface="Menlo" panose="020B0609030804020204" pitchFamily="49" charset="0"/>
               </a:rPr>
               <a:t>, 3, 4)); //This will print '7.0'</a:t>
             </a:r>
             <a:br>
               <a:rPr lang="en-GB" dirty="0">
-                <a:latin typeface="Courier" pitchFamily="2" charset="0"/>
+                <a:latin typeface="Menlo" panose="020B0609030804020204" pitchFamily="49" charset="0"/>
+                <a:ea typeface="Menlo" panose="020B0609030804020204" pitchFamily="49" charset="0"/>
+                <a:cs typeface="Menlo" panose="020B0609030804020204" pitchFamily="49" charset="0"/>
               </a:rPr>
             </a:br>
             <a:r>
               <a:rPr lang="en-GB" dirty="0">
-                <a:latin typeface="Courier" pitchFamily="2" charset="0"/>
+                <a:latin typeface="Menlo" panose="020B0609030804020204" pitchFamily="49" charset="0"/>
+                <a:ea typeface="Menlo" panose="020B0609030804020204" pitchFamily="49" charset="0"/>
+                <a:cs typeface="Menlo" panose="020B0609030804020204" pitchFamily="49" charset="0"/>
               </a:rPr>
               <a:t>}//main</a:t>
             </a:r>
             <a:br>
               <a:rPr lang="en-GB" dirty="0">
-                <a:latin typeface="Courier" pitchFamily="2" charset="0"/>
+                <a:latin typeface="Menlo" panose="020B0609030804020204" pitchFamily="49" charset="0"/>
+                <a:ea typeface="Menlo" panose="020B0609030804020204" pitchFamily="49" charset="0"/>
+                <a:cs typeface="Menlo" panose="020B0609030804020204" pitchFamily="49" charset="0"/>
               </a:rPr>
             </a:br>
             <a:endParaRPr lang="en-GB" dirty="0">
-              <a:latin typeface="Courier" pitchFamily="2" charset="0"/>
+              <a:latin typeface="Menlo" panose="020B0609030804020204" pitchFamily="49" charset="0"/>
+              <a:ea typeface="Menlo" panose="020B0609030804020204" pitchFamily="49" charset="0"/>
+              <a:cs typeface="Menlo" panose="020B0609030804020204" pitchFamily="49" charset="0"/>
             </a:endParaRPr>
           </a:p>
           <a:p>
@@ -9683,100 +10151,134 @@
             <a:pPr lvl="1"/>
             <a:r>
               <a:rPr lang="en-GB" dirty="0">
-                <a:latin typeface="Courier" pitchFamily="2" charset="0"/>
+                <a:latin typeface="Menlo" panose="020B0609030804020204" pitchFamily="49" charset="0"/>
+                <a:ea typeface="Menlo" panose="020B0609030804020204" pitchFamily="49" charset="0"/>
+                <a:cs typeface="Menlo" panose="020B0609030804020204" pitchFamily="49" charset="0"/>
               </a:rPr>
               <a:t>double </a:t>
             </a:r>
             <a:r>
               <a:rPr lang="en-GB" dirty="0" err="1">
-                <a:latin typeface="Courier" pitchFamily="2" charset="0"/>
+                <a:latin typeface="Menlo" panose="020B0609030804020204" pitchFamily="49" charset="0"/>
+                <a:ea typeface="Menlo" panose="020B0609030804020204" pitchFamily="49" charset="0"/>
+                <a:cs typeface="Menlo" panose="020B0609030804020204" pitchFamily="49" charset="0"/>
               </a:rPr>
               <a:t>doSomethingWithNumbersArrow</a:t>
             </a:r>
             <a:r>
               <a:rPr lang="en-GB" dirty="0">
-                <a:latin typeface="Courier" pitchFamily="2" charset="0"/>
+                <a:latin typeface="Menlo" panose="020B0609030804020204" pitchFamily="49" charset="0"/>
+                <a:ea typeface="Menlo" panose="020B0609030804020204" pitchFamily="49" charset="0"/>
+                <a:cs typeface="Menlo" panose="020B0609030804020204" pitchFamily="49" charset="0"/>
               </a:rPr>
               <a:t>(Function foo, double a, double b) =&gt; foo(</a:t>
             </a:r>
             <a:r>
               <a:rPr lang="en-GB" dirty="0" err="1">
-                <a:latin typeface="Courier" pitchFamily="2" charset="0"/>
+                <a:latin typeface="Menlo" panose="020B0609030804020204" pitchFamily="49" charset="0"/>
+                <a:ea typeface="Menlo" panose="020B0609030804020204" pitchFamily="49" charset="0"/>
+                <a:cs typeface="Menlo" panose="020B0609030804020204" pitchFamily="49" charset="0"/>
               </a:rPr>
               <a:t>a,b</a:t>
             </a:r>
             <a:r>
               <a:rPr lang="en-GB" dirty="0">
-                <a:latin typeface="Courier" pitchFamily="2" charset="0"/>
+                <a:latin typeface="Menlo" panose="020B0609030804020204" pitchFamily="49" charset="0"/>
+                <a:ea typeface="Menlo" panose="020B0609030804020204" pitchFamily="49" charset="0"/>
+                <a:cs typeface="Menlo" panose="020B0609030804020204" pitchFamily="49" charset="0"/>
               </a:rPr>
               <a:t>);</a:t>
             </a:r>
             <a:br>
               <a:rPr lang="en-GB" dirty="0">
-                <a:latin typeface="Courier" pitchFamily="2" charset="0"/>
+                <a:latin typeface="Menlo" panose="020B0609030804020204" pitchFamily="49" charset="0"/>
+                <a:ea typeface="Menlo" panose="020B0609030804020204" pitchFamily="49" charset="0"/>
+                <a:cs typeface="Menlo" panose="020B0609030804020204" pitchFamily="49" charset="0"/>
               </a:rPr>
             </a:br>
             <a:r>
               <a:rPr lang="en-GB" dirty="0">
-                <a:latin typeface="Courier" pitchFamily="2" charset="0"/>
+                <a:latin typeface="Menlo" panose="020B0609030804020204" pitchFamily="49" charset="0"/>
+                <a:ea typeface="Menlo" panose="020B0609030804020204" pitchFamily="49" charset="0"/>
+                <a:cs typeface="Menlo" panose="020B0609030804020204" pitchFamily="49" charset="0"/>
               </a:rPr>
               <a:t>void main(List&lt;String&gt; </a:t>
             </a:r>
             <a:r>
               <a:rPr lang="en-GB" dirty="0" err="1">
-                <a:latin typeface="Courier" pitchFamily="2" charset="0"/>
+                <a:latin typeface="Menlo" panose="020B0609030804020204" pitchFamily="49" charset="0"/>
+                <a:ea typeface="Menlo" panose="020B0609030804020204" pitchFamily="49" charset="0"/>
+                <a:cs typeface="Menlo" panose="020B0609030804020204" pitchFamily="49" charset="0"/>
               </a:rPr>
               <a:t>args</a:t>
             </a:r>
             <a:r>
               <a:rPr lang="en-GB" dirty="0">
-                <a:latin typeface="Courier" pitchFamily="2" charset="0"/>
+                <a:latin typeface="Menlo" panose="020B0609030804020204" pitchFamily="49" charset="0"/>
+                <a:ea typeface="Menlo" panose="020B0609030804020204" pitchFamily="49" charset="0"/>
+                <a:cs typeface="Menlo" panose="020B0609030804020204" pitchFamily="49" charset="0"/>
               </a:rPr>
               <a:t>) {</a:t>
             </a:r>
             <a:br>
               <a:rPr lang="en-GB" dirty="0">
-                <a:latin typeface="Courier" pitchFamily="2" charset="0"/>
+                <a:latin typeface="Menlo" panose="020B0609030804020204" pitchFamily="49" charset="0"/>
+                <a:ea typeface="Menlo" panose="020B0609030804020204" pitchFamily="49" charset="0"/>
+                <a:cs typeface="Menlo" panose="020B0609030804020204" pitchFamily="49" charset="0"/>
               </a:rPr>
             </a:br>
             <a:r>
               <a:rPr lang="en-GB" dirty="0">
-                <a:latin typeface="Courier" pitchFamily="2" charset="0"/>
+                <a:latin typeface="Menlo" panose="020B0609030804020204" pitchFamily="49" charset="0"/>
+                <a:ea typeface="Menlo" panose="020B0609030804020204" pitchFamily="49" charset="0"/>
+                <a:cs typeface="Menlo" panose="020B0609030804020204" pitchFamily="49" charset="0"/>
               </a:rPr>
               <a:t>	print(</a:t>
             </a:r>
             <a:r>
               <a:rPr lang="en-GB" dirty="0" err="1">
-                <a:latin typeface="Courier" pitchFamily="2" charset="0"/>
+                <a:latin typeface="Menlo" panose="020B0609030804020204" pitchFamily="49" charset="0"/>
+                <a:ea typeface="Menlo" panose="020B0609030804020204" pitchFamily="49" charset="0"/>
+                <a:cs typeface="Menlo" panose="020B0609030804020204" pitchFamily="49" charset="0"/>
               </a:rPr>
               <a:t>doSomethingWithNumbersArrow</a:t>
             </a:r>
             <a:r>
               <a:rPr lang="en-GB" dirty="0">
-                <a:latin typeface="Courier" pitchFamily="2" charset="0"/>
+                <a:latin typeface="Menlo" panose="020B0609030804020204" pitchFamily="49" charset="0"/>
+                <a:ea typeface="Menlo" panose="020B0609030804020204" pitchFamily="49" charset="0"/>
+                <a:cs typeface="Menlo" panose="020B0609030804020204" pitchFamily="49" charset="0"/>
               </a:rPr>
               <a:t>(</a:t>
             </a:r>
             <a:r>
               <a:rPr lang="en-GB" dirty="0" err="1">
-                <a:latin typeface="Courier" pitchFamily="2" charset="0"/>
+                <a:latin typeface="Menlo" panose="020B0609030804020204" pitchFamily="49" charset="0"/>
+                <a:ea typeface="Menlo" panose="020B0609030804020204" pitchFamily="49" charset="0"/>
+                <a:cs typeface="Menlo" panose="020B0609030804020204" pitchFamily="49" charset="0"/>
               </a:rPr>
               <a:t>sumTwoNumbers</a:t>
             </a:r>
             <a:r>
               <a:rPr lang="en-GB" dirty="0">
-                <a:latin typeface="Courier" pitchFamily="2" charset="0"/>
+                <a:latin typeface="Menlo" panose="020B0609030804020204" pitchFamily="49" charset="0"/>
+                <a:ea typeface="Menlo" panose="020B0609030804020204" pitchFamily="49" charset="0"/>
+                <a:cs typeface="Menlo" panose="020B0609030804020204" pitchFamily="49" charset="0"/>
               </a:rPr>
               <a:t>, 3, 4)); //This will print '7.0'</a:t>
             </a:r>
             <a:br>
               <a:rPr lang="en-GB" dirty="0">
-                <a:latin typeface="Courier" pitchFamily="2" charset="0"/>
+                <a:latin typeface="Menlo" panose="020B0609030804020204" pitchFamily="49" charset="0"/>
+                <a:ea typeface="Menlo" panose="020B0609030804020204" pitchFamily="49" charset="0"/>
+                <a:cs typeface="Menlo" panose="020B0609030804020204" pitchFamily="49" charset="0"/>
               </a:rPr>
             </a:br>
             <a:r>
               <a:rPr lang="en-GB" dirty="0">
-                <a:latin typeface="Courier" pitchFamily="2" charset="0"/>
+                <a:latin typeface="Menlo" panose="020B0609030804020204" pitchFamily="49" charset="0"/>
+                <a:ea typeface="Menlo" panose="020B0609030804020204" pitchFamily="49" charset="0"/>
+                <a:cs typeface="Menlo" panose="020B0609030804020204" pitchFamily="49" charset="0"/>
               </a:rPr>
               <a:t>}//main</a:t>
             </a:r>
@@ -9959,66 +10461,88 @@
             </a:br>
             <a:r>
               <a:rPr lang="en-GB" i="1" dirty="0" err="1">
-                <a:latin typeface="Courier" pitchFamily="2" charset="0"/>
+                <a:latin typeface="Menlo" panose="020B0609030804020204" pitchFamily="49" charset="0"/>
+                <a:ea typeface="Menlo" panose="020B0609030804020204" pitchFamily="49" charset="0"/>
+                <a:cs typeface="Menlo" panose="020B0609030804020204" pitchFamily="49" charset="0"/>
               </a:rPr>
               <a:t>returnType</a:t>
             </a:r>
             <a:r>
               <a:rPr lang="en-GB" i="1" dirty="0">
-                <a:latin typeface="Courier" pitchFamily="2" charset="0"/>
+                <a:latin typeface="Menlo" panose="020B0609030804020204" pitchFamily="49" charset="0"/>
+                <a:ea typeface="Menlo" panose="020B0609030804020204" pitchFamily="49" charset="0"/>
+                <a:cs typeface="Menlo" panose="020B0609030804020204" pitchFamily="49" charset="0"/>
               </a:rPr>
               <a:t> </a:t>
             </a:r>
             <a:r>
               <a:rPr lang="en-GB" i="1" dirty="0" err="1">
-                <a:latin typeface="Courier" pitchFamily="2" charset="0"/>
+                <a:latin typeface="Menlo" panose="020B0609030804020204" pitchFamily="49" charset="0"/>
+                <a:ea typeface="Menlo" panose="020B0609030804020204" pitchFamily="49" charset="0"/>
+                <a:cs typeface="Menlo" panose="020B0609030804020204" pitchFamily="49" charset="0"/>
               </a:rPr>
               <a:t>functionName</a:t>
             </a:r>
             <a:r>
               <a:rPr lang="en-GB" i="1" dirty="0">
-                <a:latin typeface="Courier" pitchFamily="2" charset="0"/>
+                <a:latin typeface="Menlo" panose="020B0609030804020204" pitchFamily="49" charset="0"/>
+                <a:ea typeface="Menlo" panose="020B0609030804020204" pitchFamily="49" charset="0"/>
+                <a:cs typeface="Menlo" panose="020B0609030804020204" pitchFamily="49" charset="0"/>
               </a:rPr>
               <a:t>(typeParam1 nameParam1, typeParam2 nameParam2,…,</a:t>
             </a:r>
             <a:r>
               <a:rPr lang="en-GB" b="1" i="1" dirty="0">
-                <a:latin typeface="Courier" pitchFamily="2" charset="0"/>
+                <a:latin typeface="Menlo" panose="020B0609030804020204" pitchFamily="49" charset="0"/>
+                <a:ea typeface="Menlo" panose="020B0609030804020204" pitchFamily="49" charset="0"/>
+                <a:cs typeface="Menlo" panose="020B0609030804020204" pitchFamily="49" charset="0"/>
               </a:rPr>
               <a:t>{</a:t>
             </a:r>
             <a:r>
               <a:rPr lang="en-GB" i="1" dirty="0">
-                <a:latin typeface="Courier" pitchFamily="2" charset="0"/>
+                <a:latin typeface="Menlo" panose="020B0609030804020204" pitchFamily="49" charset="0"/>
+                <a:ea typeface="Menlo" panose="020B0609030804020204" pitchFamily="49" charset="0"/>
+                <a:cs typeface="Menlo" panose="020B0609030804020204" pitchFamily="49" charset="0"/>
               </a:rPr>
               <a:t>typeNamedParam1 nameNamedParam1,…</a:t>
             </a:r>
             <a:r>
               <a:rPr lang="en-GB" b="1" i="1" dirty="0">
-                <a:latin typeface="Courier" pitchFamily="2" charset="0"/>
+                <a:latin typeface="Menlo" panose="020B0609030804020204" pitchFamily="49" charset="0"/>
+                <a:ea typeface="Menlo" panose="020B0609030804020204" pitchFamily="49" charset="0"/>
+                <a:cs typeface="Menlo" panose="020B0609030804020204" pitchFamily="49" charset="0"/>
               </a:rPr>
               <a:t>}</a:t>
             </a:r>
             <a:r>
               <a:rPr lang="en-GB" i="1" dirty="0">
-                <a:latin typeface="Courier" pitchFamily="2" charset="0"/>
+                <a:latin typeface="Menlo" panose="020B0609030804020204" pitchFamily="49" charset="0"/>
+                <a:ea typeface="Menlo" panose="020B0609030804020204" pitchFamily="49" charset="0"/>
+                <a:cs typeface="Menlo" panose="020B0609030804020204" pitchFamily="49" charset="0"/>
               </a:rPr>
               <a:t>){</a:t>
             </a:r>
             <a:r>
               <a:rPr lang="en-GB" i="1" dirty="0" err="1">
-                <a:latin typeface="Courier" pitchFamily="2" charset="0"/>
+                <a:latin typeface="Menlo" panose="020B0609030804020204" pitchFamily="49" charset="0"/>
+                <a:ea typeface="Menlo" panose="020B0609030804020204" pitchFamily="49" charset="0"/>
+                <a:cs typeface="Menlo" panose="020B0609030804020204" pitchFamily="49" charset="0"/>
               </a:rPr>
               <a:t>functionBody</a:t>
             </a:r>
             <a:r>
               <a:rPr lang="en-GB" i="1" dirty="0">
-                <a:latin typeface="Courier" pitchFamily="2" charset="0"/>
+                <a:latin typeface="Menlo" panose="020B0609030804020204" pitchFamily="49" charset="0"/>
+                <a:ea typeface="Menlo" panose="020B0609030804020204" pitchFamily="49" charset="0"/>
+                <a:cs typeface="Menlo" panose="020B0609030804020204" pitchFamily="49" charset="0"/>
               </a:rPr>
               <a:t>}</a:t>
             </a:r>
             <a:endParaRPr lang="en-GB" dirty="0">
-              <a:latin typeface="Courier" pitchFamily="2" charset="0"/>
+              <a:latin typeface="Menlo" panose="020B0609030804020204" pitchFamily="49" charset="0"/>
+              <a:ea typeface="Menlo" panose="020B0609030804020204" pitchFamily="49" charset="0"/>
+              <a:cs typeface="Menlo" panose="020B0609030804020204" pitchFamily="49" charset="0"/>
             </a:endParaRPr>
           </a:p>
           <a:p>
@@ -10039,65 +10563,89 @@
             </a:br>
             <a:r>
               <a:rPr lang="en-GB" i="1" dirty="0" err="1">
-                <a:latin typeface="Courier" pitchFamily="2" charset="0"/>
+                <a:latin typeface="Menlo" panose="020B0609030804020204" pitchFamily="49" charset="0"/>
+                <a:ea typeface="Menlo" panose="020B0609030804020204" pitchFamily="49" charset="0"/>
+                <a:cs typeface="Menlo" panose="020B0609030804020204" pitchFamily="49" charset="0"/>
               </a:rPr>
               <a:t>returnType</a:t>
             </a:r>
             <a:r>
               <a:rPr lang="en-GB" i="1" dirty="0">
-                <a:latin typeface="Courier" pitchFamily="2" charset="0"/>
+                <a:latin typeface="Menlo" panose="020B0609030804020204" pitchFamily="49" charset="0"/>
+                <a:ea typeface="Menlo" panose="020B0609030804020204" pitchFamily="49" charset="0"/>
+                <a:cs typeface="Menlo" panose="020B0609030804020204" pitchFamily="49" charset="0"/>
               </a:rPr>
               <a:t> </a:t>
             </a:r>
             <a:r>
               <a:rPr lang="en-GB" i="1" dirty="0" err="1">
-                <a:latin typeface="Courier" pitchFamily="2" charset="0"/>
+                <a:latin typeface="Menlo" panose="020B0609030804020204" pitchFamily="49" charset="0"/>
+                <a:ea typeface="Menlo" panose="020B0609030804020204" pitchFamily="49" charset="0"/>
+                <a:cs typeface="Menlo" panose="020B0609030804020204" pitchFamily="49" charset="0"/>
               </a:rPr>
               <a:t>functionName</a:t>
             </a:r>
             <a:r>
               <a:rPr lang="en-GB" i="1" dirty="0">
-                <a:latin typeface="Courier" pitchFamily="2" charset="0"/>
+                <a:latin typeface="Menlo" panose="020B0609030804020204" pitchFamily="49" charset="0"/>
+                <a:ea typeface="Menlo" panose="020B0609030804020204" pitchFamily="49" charset="0"/>
+                <a:cs typeface="Menlo" panose="020B0609030804020204" pitchFamily="49" charset="0"/>
               </a:rPr>
               <a:t>(typeParam1 nameParam1, typeParam2 nameParam2,…,</a:t>
             </a:r>
             <a:r>
               <a:rPr lang="en-GB" b="1" i="1" dirty="0">
-                <a:latin typeface="Courier" pitchFamily="2" charset="0"/>
+                <a:latin typeface="Menlo" panose="020B0609030804020204" pitchFamily="49" charset="0"/>
+                <a:ea typeface="Menlo" panose="020B0609030804020204" pitchFamily="49" charset="0"/>
+                <a:cs typeface="Menlo" panose="020B0609030804020204" pitchFamily="49" charset="0"/>
               </a:rPr>
               <a:t>[</a:t>
             </a:r>
             <a:r>
               <a:rPr lang="en-GB" i="1" dirty="0">
-                <a:latin typeface="Courier" pitchFamily="2" charset="0"/>
+                <a:latin typeface="Menlo" panose="020B0609030804020204" pitchFamily="49" charset="0"/>
+                <a:ea typeface="Menlo" panose="020B0609030804020204" pitchFamily="49" charset="0"/>
+                <a:cs typeface="Menlo" panose="020B0609030804020204" pitchFamily="49" charset="0"/>
               </a:rPr>
               <a:t>typeOptPosParam1 nameOptPosParam1,…</a:t>
             </a:r>
             <a:r>
               <a:rPr lang="en-GB" b="1" i="1" dirty="0">
-                <a:latin typeface="Courier" pitchFamily="2" charset="0"/>
+                <a:latin typeface="Menlo" panose="020B0609030804020204" pitchFamily="49" charset="0"/>
+                <a:ea typeface="Menlo" panose="020B0609030804020204" pitchFamily="49" charset="0"/>
+                <a:cs typeface="Menlo" panose="020B0609030804020204" pitchFamily="49" charset="0"/>
               </a:rPr>
               <a:t>]</a:t>
             </a:r>
             <a:r>
               <a:rPr lang="en-GB" i="1" dirty="0">
-                <a:latin typeface="Courier" pitchFamily="2" charset="0"/>
+                <a:latin typeface="Menlo" panose="020B0609030804020204" pitchFamily="49" charset="0"/>
+                <a:ea typeface="Menlo" panose="020B0609030804020204" pitchFamily="49" charset="0"/>
+                <a:cs typeface="Menlo" panose="020B0609030804020204" pitchFamily="49" charset="0"/>
               </a:rPr>
               <a:t>){</a:t>
             </a:r>
             <a:r>
               <a:rPr lang="en-GB" i="1" dirty="0" err="1">
-                <a:latin typeface="Courier" pitchFamily="2" charset="0"/>
+                <a:latin typeface="Menlo" panose="020B0609030804020204" pitchFamily="49" charset="0"/>
+                <a:ea typeface="Menlo" panose="020B0609030804020204" pitchFamily="49" charset="0"/>
+                <a:cs typeface="Menlo" panose="020B0609030804020204" pitchFamily="49" charset="0"/>
               </a:rPr>
               <a:t>functionBody</a:t>
             </a:r>
             <a:r>
               <a:rPr lang="en-GB" i="1" dirty="0">
-                <a:latin typeface="Courier" pitchFamily="2" charset="0"/>
+                <a:latin typeface="Menlo" panose="020B0609030804020204" pitchFamily="49" charset="0"/>
+                <a:ea typeface="Menlo" panose="020B0609030804020204" pitchFamily="49" charset="0"/>
+                <a:cs typeface="Menlo" panose="020B0609030804020204" pitchFamily="49" charset="0"/>
               </a:rPr>
               <a:t>}</a:t>
             </a:r>
-            <a:endParaRPr lang="en-GB" dirty="0"/>
+            <a:endParaRPr lang="en-GB" dirty="0">
+              <a:latin typeface="Menlo" panose="020B0609030804020204" pitchFamily="49" charset="0"/>
+              <a:ea typeface="Menlo" panose="020B0609030804020204" pitchFamily="49" charset="0"/>
+              <a:cs typeface="Menlo" panose="020B0609030804020204" pitchFamily="49" charset="0"/>
+            </a:endParaRPr>
           </a:p>
           <a:p>
             <a:endParaRPr lang="en-GB" dirty="0"/>
@@ -10230,88 +10778,118 @@
             <a:pPr lvl="1"/>
             <a:r>
               <a:rPr lang="en-GB" dirty="0">
-                <a:latin typeface="Courier" pitchFamily="2" charset="0"/>
+                <a:latin typeface="Menlo" panose="020B0609030804020204" pitchFamily="49" charset="0"/>
+                <a:ea typeface="Menlo" panose="020B0609030804020204" pitchFamily="49" charset="0"/>
+                <a:cs typeface="Menlo" panose="020B0609030804020204" pitchFamily="49" charset="0"/>
               </a:rPr>
               <a:t>double </a:t>
             </a:r>
             <a:r>
               <a:rPr lang="en-GB" dirty="0" err="1">
-                <a:latin typeface="Courier" pitchFamily="2" charset="0"/>
+                <a:latin typeface="Menlo" panose="020B0609030804020204" pitchFamily="49" charset="0"/>
+                <a:ea typeface="Menlo" panose="020B0609030804020204" pitchFamily="49" charset="0"/>
+                <a:cs typeface="Menlo" panose="020B0609030804020204" pitchFamily="49" charset="0"/>
               </a:rPr>
               <a:t>doSomethingWithNumbersNamed</a:t>
             </a:r>
             <a:r>
               <a:rPr lang="en-GB" dirty="0">
-                <a:latin typeface="Courier" pitchFamily="2" charset="0"/>
+                <a:latin typeface="Menlo" panose="020B0609030804020204" pitchFamily="49" charset="0"/>
+                <a:ea typeface="Menlo" panose="020B0609030804020204" pitchFamily="49" charset="0"/>
+                <a:cs typeface="Menlo" panose="020B0609030804020204" pitchFamily="49" charset="0"/>
               </a:rPr>
               <a:t>(Function foo, {double? a, double? b}) =&gt; foo(</a:t>
             </a:r>
             <a:r>
               <a:rPr lang="en-GB" dirty="0" err="1">
-                <a:latin typeface="Courier" pitchFamily="2" charset="0"/>
+                <a:latin typeface="Menlo" panose="020B0609030804020204" pitchFamily="49" charset="0"/>
+                <a:ea typeface="Menlo" panose="020B0609030804020204" pitchFamily="49" charset="0"/>
+                <a:cs typeface="Menlo" panose="020B0609030804020204" pitchFamily="49" charset="0"/>
               </a:rPr>
               <a:t>a,b</a:t>
             </a:r>
             <a:r>
               <a:rPr lang="en-GB" dirty="0">
-                <a:latin typeface="Courier" pitchFamily="2" charset="0"/>
+                <a:latin typeface="Menlo" panose="020B0609030804020204" pitchFamily="49" charset="0"/>
+                <a:ea typeface="Menlo" panose="020B0609030804020204" pitchFamily="49" charset="0"/>
+                <a:cs typeface="Menlo" panose="020B0609030804020204" pitchFamily="49" charset="0"/>
               </a:rPr>
               <a:t>);</a:t>
             </a:r>
             <a:br>
               <a:rPr lang="en-GB" dirty="0">
-                <a:latin typeface="Courier" pitchFamily="2" charset="0"/>
+                <a:latin typeface="Menlo" panose="020B0609030804020204" pitchFamily="49" charset="0"/>
+                <a:ea typeface="Menlo" panose="020B0609030804020204" pitchFamily="49" charset="0"/>
+                <a:cs typeface="Menlo" panose="020B0609030804020204" pitchFamily="49" charset="0"/>
               </a:rPr>
             </a:br>
             <a:r>
               <a:rPr lang="en-GB" dirty="0">
-                <a:latin typeface="Courier" pitchFamily="2" charset="0"/>
+                <a:latin typeface="Menlo" panose="020B0609030804020204" pitchFamily="49" charset="0"/>
+                <a:ea typeface="Menlo" panose="020B0609030804020204" pitchFamily="49" charset="0"/>
+                <a:cs typeface="Menlo" panose="020B0609030804020204" pitchFamily="49" charset="0"/>
               </a:rPr>
               <a:t>void main(List&lt;String&gt; </a:t>
             </a:r>
             <a:r>
               <a:rPr lang="en-GB" dirty="0" err="1">
-                <a:latin typeface="Courier" pitchFamily="2" charset="0"/>
+                <a:latin typeface="Menlo" panose="020B0609030804020204" pitchFamily="49" charset="0"/>
+                <a:ea typeface="Menlo" panose="020B0609030804020204" pitchFamily="49" charset="0"/>
+                <a:cs typeface="Menlo" panose="020B0609030804020204" pitchFamily="49" charset="0"/>
               </a:rPr>
               <a:t>args</a:t>
             </a:r>
             <a:r>
               <a:rPr lang="en-GB" dirty="0">
-                <a:latin typeface="Courier" pitchFamily="2" charset="0"/>
+                <a:latin typeface="Menlo" panose="020B0609030804020204" pitchFamily="49" charset="0"/>
+                <a:ea typeface="Menlo" panose="020B0609030804020204" pitchFamily="49" charset="0"/>
+                <a:cs typeface="Menlo" panose="020B0609030804020204" pitchFamily="49" charset="0"/>
               </a:rPr>
               <a:t>) {</a:t>
             </a:r>
             <a:br>
               <a:rPr lang="en-GB" dirty="0">
-                <a:latin typeface="Courier" pitchFamily="2" charset="0"/>
+                <a:latin typeface="Menlo" panose="020B0609030804020204" pitchFamily="49" charset="0"/>
+                <a:ea typeface="Menlo" panose="020B0609030804020204" pitchFamily="49" charset="0"/>
+                <a:cs typeface="Menlo" panose="020B0609030804020204" pitchFamily="49" charset="0"/>
               </a:rPr>
             </a:br>
             <a:r>
               <a:rPr lang="en-GB" dirty="0">
-                <a:latin typeface="Courier" pitchFamily="2" charset="0"/>
+                <a:latin typeface="Menlo" panose="020B0609030804020204" pitchFamily="49" charset="0"/>
+                <a:ea typeface="Menlo" panose="020B0609030804020204" pitchFamily="49" charset="0"/>
+                <a:cs typeface="Menlo" panose="020B0609030804020204" pitchFamily="49" charset="0"/>
               </a:rPr>
               <a:t>	print(</a:t>
             </a:r>
             <a:r>
               <a:rPr lang="en-GB" dirty="0" err="1">
-                <a:latin typeface="Courier" pitchFamily="2" charset="0"/>
+                <a:latin typeface="Menlo" panose="020B0609030804020204" pitchFamily="49" charset="0"/>
+                <a:ea typeface="Menlo" panose="020B0609030804020204" pitchFamily="49" charset="0"/>
+                <a:cs typeface="Menlo" panose="020B0609030804020204" pitchFamily="49" charset="0"/>
               </a:rPr>
               <a:t>doSomethingWithNumbersNamed</a:t>
             </a:r>
             <a:r>
               <a:rPr lang="en-GB" dirty="0">
-                <a:latin typeface="Courier" pitchFamily="2" charset="0"/>
+                <a:latin typeface="Menlo" panose="020B0609030804020204" pitchFamily="49" charset="0"/>
+                <a:ea typeface="Menlo" panose="020B0609030804020204" pitchFamily="49" charset="0"/>
+                <a:cs typeface="Menlo" panose="020B0609030804020204" pitchFamily="49" charset="0"/>
               </a:rPr>
               <a:t>(sumTwoNumbers,a:3, b:4)); // This will print '7.0’</a:t>
             </a:r>
             <a:br>
               <a:rPr lang="en-GB" dirty="0">
-                <a:latin typeface="Courier" pitchFamily="2" charset="0"/>
+                <a:latin typeface="Menlo" panose="020B0609030804020204" pitchFamily="49" charset="0"/>
+                <a:ea typeface="Menlo" panose="020B0609030804020204" pitchFamily="49" charset="0"/>
+                <a:cs typeface="Menlo" panose="020B0609030804020204" pitchFamily="49" charset="0"/>
               </a:rPr>
             </a:br>
             <a:r>
               <a:rPr lang="en-GB" dirty="0">
-                <a:latin typeface="Courier" pitchFamily="2" charset="0"/>
+                <a:latin typeface="Menlo" panose="020B0609030804020204" pitchFamily="49" charset="0"/>
+                <a:ea typeface="Menlo" panose="020B0609030804020204" pitchFamily="49" charset="0"/>
+                <a:cs typeface="Menlo" panose="020B0609030804020204" pitchFamily="49" charset="0"/>
               </a:rPr>
               <a:t>}//main</a:t>
             </a:r>
@@ -10330,97 +10908,131 @@
             <a:pPr lvl="1"/>
             <a:r>
               <a:rPr lang="en-GB" dirty="0">
-                <a:latin typeface="Courier" pitchFamily="2" charset="0"/>
+                <a:latin typeface="Menlo" panose="020B0609030804020204" pitchFamily="49" charset="0"/>
+                <a:ea typeface="Menlo" panose="020B0609030804020204" pitchFamily="49" charset="0"/>
+                <a:cs typeface="Menlo" panose="020B0609030804020204" pitchFamily="49" charset="0"/>
               </a:rPr>
               <a:t>void main(List&lt;String&gt; </a:t>
             </a:r>
             <a:r>
               <a:rPr lang="en-GB" dirty="0" err="1">
-                <a:latin typeface="Courier" pitchFamily="2" charset="0"/>
+                <a:latin typeface="Menlo" panose="020B0609030804020204" pitchFamily="49" charset="0"/>
+                <a:ea typeface="Menlo" panose="020B0609030804020204" pitchFamily="49" charset="0"/>
+                <a:cs typeface="Menlo" panose="020B0609030804020204" pitchFamily="49" charset="0"/>
               </a:rPr>
               <a:t>args</a:t>
             </a:r>
             <a:r>
               <a:rPr lang="en-GB" dirty="0">
-                <a:latin typeface="Courier" pitchFamily="2" charset="0"/>
+                <a:latin typeface="Menlo" panose="020B0609030804020204" pitchFamily="49" charset="0"/>
+                <a:ea typeface="Menlo" panose="020B0609030804020204" pitchFamily="49" charset="0"/>
+                <a:cs typeface="Menlo" panose="020B0609030804020204" pitchFamily="49" charset="0"/>
               </a:rPr>
               <a:t>) {</a:t>
             </a:r>
             <a:br>
               <a:rPr lang="en-GB" dirty="0">
-                <a:latin typeface="Courier" pitchFamily="2" charset="0"/>
+                <a:latin typeface="Menlo" panose="020B0609030804020204" pitchFamily="49" charset="0"/>
+                <a:ea typeface="Menlo" panose="020B0609030804020204" pitchFamily="49" charset="0"/>
+                <a:cs typeface="Menlo" panose="020B0609030804020204" pitchFamily="49" charset="0"/>
               </a:rPr>
             </a:br>
             <a:r>
               <a:rPr lang="en-GB" dirty="0">
-                <a:latin typeface="Courier" pitchFamily="2" charset="0"/>
+                <a:latin typeface="Menlo" panose="020B0609030804020204" pitchFamily="49" charset="0"/>
+                <a:ea typeface="Menlo" panose="020B0609030804020204" pitchFamily="49" charset="0"/>
+                <a:cs typeface="Menlo" panose="020B0609030804020204" pitchFamily="49" charset="0"/>
               </a:rPr>
               <a:t>	try{</a:t>
             </a:r>
             <a:br>
               <a:rPr lang="en-GB" dirty="0">
-                <a:latin typeface="Courier" pitchFamily="2" charset="0"/>
+                <a:latin typeface="Menlo" panose="020B0609030804020204" pitchFamily="49" charset="0"/>
+                <a:ea typeface="Menlo" panose="020B0609030804020204" pitchFamily="49" charset="0"/>
+                <a:cs typeface="Menlo" panose="020B0609030804020204" pitchFamily="49" charset="0"/>
               </a:rPr>
             </a:br>
             <a:r>
               <a:rPr lang="en-GB" dirty="0">
-                <a:latin typeface="Courier" pitchFamily="2" charset="0"/>
+                <a:latin typeface="Menlo" panose="020B0609030804020204" pitchFamily="49" charset="0"/>
+                <a:ea typeface="Menlo" panose="020B0609030804020204" pitchFamily="49" charset="0"/>
+                <a:cs typeface="Menlo" panose="020B0609030804020204" pitchFamily="49" charset="0"/>
               </a:rPr>
               <a:t>		print(</a:t>
             </a:r>
             <a:r>
               <a:rPr lang="en-GB" dirty="0" err="1">
-                <a:latin typeface="Courier" pitchFamily="2" charset="0"/>
+                <a:latin typeface="Menlo" panose="020B0609030804020204" pitchFamily="49" charset="0"/>
+                <a:ea typeface="Menlo" panose="020B0609030804020204" pitchFamily="49" charset="0"/>
+                <a:cs typeface="Menlo" panose="020B0609030804020204" pitchFamily="49" charset="0"/>
               </a:rPr>
               <a:t>doSomethingWithNumbersNamed</a:t>
             </a:r>
             <a:r>
               <a:rPr lang="en-GB" dirty="0">
-                <a:latin typeface="Courier" pitchFamily="2" charset="0"/>
+                <a:latin typeface="Menlo" panose="020B0609030804020204" pitchFamily="49" charset="0"/>
+                <a:ea typeface="Menlo" panose="020B0609030804020204" pitchFamily="49" charset="0"/>
+                <a:cs typeface="Menlo" panose="020B0609030804020204" pitchFamily="49" charset="0"/>
               </a:rPr>
               <a:t>(sumTwoNumbers,a:3)); // This fails</a:t>
             </a:r>
             <a:br>
               <a:rPr lang="en-GB" dirty="0">
-                <a:latin typeface="Courier" pitchFamily="2" charset="0"/>
+                <a:latin typeface="Menlo" panose="020B0609030804020204" pitchFamily="49" charset="0"/>
+                <a:ea typeface="Menlo" panose="020B0609030804020204" pitchFamily="49" charset="0"/>
+                <a:cs typeface="Menlo" panose="020B0609030804020204" pitchFamily="49" charset="0"/>
               </a:rPr>
             </a:br>
             <a:r>
               <a:rPr lang="en-GB" dirty="0">
-                <a:latin typeface="Courier" pitchFamily="2" charset="0"/>
+                <a:latin typeface="Menlo" panose="020B0609030804020204" pitchFamily="49" charset="0"/>
+                <a:ea typeface="Menlo" panose="020B0609030804020204" pitchFamily="49" charset="0"/>
+                <a:cs typeface="Menlo" panose="020B0609030804020204" pitchFamily="49" charset="0"/>
               </a:rPr>
               <a:t>	}catch(e){</a:t>
             </a:r>
             <a:br>
               <a:rPr lang="en-GB" dirty="0">
-                <a:latin typeface="Courier" pitchFamily="2" charset="0"/>
+                <a:latin typeface="Menlo" panose="020B0609030804020204" pitchFamily="49" charset="0"/>
+                <a:ea typeface="Menlo" panose="020B0609030804020204" pitchFamily="49" charset="0"/>
+                <a:cs typeface="Menlo" panose="020B0609030804020204" pitchFamily="49" charset="0"/>
               </a:rPr>
             </a:br>
             <a:r>
               <a:rPr lang="en-GB" dirty="0">
-                <a:latin typeface="Courier" pitchFamily="2" charset="0"/>
+                <a:latin typeface="Menlo" panose="020B0609030804020204" pitchFamily="49" charset="0"/>
+                <a:ea typeface="Menlo" panose="020B0609030804020204" pitchFamily="49" charset="0"/>
+                <a:cs typeface="Menlo" panose="020B0609030804020204" pitchFamily="49" charset="0"/>
               </a:rPr>
               <a:t>		print('This fails because the default value of b is null.’);</a:t>
             </a:r>
             <a:br>
               <a:rPr lang="en-GB" dirty="0">
-                <a:latin typeface="Courier" pitchFamily="2" charset="0"/>
+                <a:latin typeface="Menlo" panose="020B0609030804020204" pitchFamily="49" charset="0"/>
+                <a:ea typeface="Menlo" panose="020B0609030804020204" pitchFamily="49" charset="0"/>
+                <a:cs typeface="Menlo" panose="020B0609030804020204" pitchFamily="49" charset="0"/>
               </a:rPr>
             </a:br>
             <a:r>
               <a:rPr lang="en-GB" dirty="0">
-                <a:latin typeface="Courier" pitchFamily="2" charset="0"/>
+                <a:latin typeface="Menlo" panose="020B0609030804020204" pitchFamily="49" charset="0"/>
+                <a:ea typeface="Menlo" panose="020B0609030804020204" pitchFamily="49" charset="0"/>
+                <a:cs typeface="Menlo" panose="020B0609030804020204" pitchFamily="49" charset="0"/>
               </a:rPr>
               <a:t>	}//catch</a:t>
             </a:r>
             <a:br>
               <a:rPr lang="en-GB" dirty="0">
-                <a:latin typeface="Courier" pitchFamily="2" charset="0"/>
+                <a:latin typeface="Menlo" panose="020B0609030804020204" pitchFamily="49" charset="0"/>
+                <a:ea typeface="Menlo" panose="020B0609030804020204" pitchFamily="49" charset="0"/>
+                <a:cs typeface="Menlo" panose="020B0609030804020204" pitchFamily="49" charset="0"/>
               </a:rPr>
             </a:br>
             <a:r>
               <a:rPr lang="en-GB" dirty="0">
-                <a:latin typeface="Courier" pitchFamily="2" charset="0"/>
+                <a:latin typeface="Menlo" panose="020B0609030804020204" pitchFamily="49" charset="0"/>
+                <a:ea typeface="Menlo" panose="020B0609030804020204" pitchFamily="49" charset="0"/>
+                <a:cs typeface="Menlo" panose="020B0609030804020204" pitchFamily="49" charset="0"/>
               </a:rPr>
               <a:t>}//main</a:t>
             </a:r>
@@ -10562,7 +11174,9 @@
             </a:r>
             <a:r>
               <a:rPr lang="en-GB" dirty="0">
-                <a:latin typeface="Courier" pitchFamily="2" charset="0"/>
+                <a:latin typeface="Menlo" panose="020B0609030804020204" pitchFamily="49" charset="0"/>
+                <a:ea typeface="Menlo" panose="020B0609030804020204" pitchFamily="49" charset="0"/>
+                <a:cs typeface="Menlo" panose="020B0609030804020204" pitchFamily="49" charset="0"/>
               </a:rPr>
               <a:t>required</a:t>
             </a:r>
@@ -10575,88 +11189,118 @@
             <a:pPr lvl="1"/>
             <a:r>
               <a:rPr lang="en-GB" dirty="0">
-                <a:latin typeface="Courier" pitchFamily="2" charset="0"/>
+                <a:latin typeface="Menlo" panose="020B0609030804020204" pitchFamily="49" charset="0"/>
+                <a:ea typeface="Menlo" panose="020B0609030804020204" pitchFamily="49" charset="0"/>
+                <a:cs typeface="Menlo" panose="020B0609030804020204" pitchFamily="49" charset="0"/>
               </a:rPr>
               <a:t>double </a:t>
             </a:r>
             <a:r>
               <a:rPr lang="en-GB" dirty="0" err="1">
-                <a:latin typeface="Courier" pitchFamily="2" charset="0"/>
+                <a:latin typeface="Menlo" panose="020B0609030804020204" pitchFamily="49" charset="0"/>
+                <a:ea typeface="Menlo" panose="020B0609030804020204" pitchFamily="49" charset="0"/>
+                <a:cs typeface="Menlo" panose="020B0609030804020204" pitchFamily="49" charset="0"/>
               </a:rPr>
               <a:t>sumTwoNumbersNamed</a:t>
             </a:r>
             <a:r>
               <a:rPr lang="en-GB" dirty="0">
-                <a:latin typeface="Courier" pitchFamily="2" charset="0"/>
+                <a:latin typeface="Menlo" panose="020B0609030804020204" pitchFamily="49" charset="0"/>
+                <a:ea typeface="Menlo" panose="020B0609030804020204" pitchFamily="49" charset="0"/>
+                <a:cs typeface="Menlo" panose="020B0609030804020204" pitchFamily="49" charset="0"/>
               </a:rPr>
               <a:t>({required double a, required double b}) =&gt; </a:t>
             </a:r>
             <a:r>
               <a:rPr lang="en-GB" dirty="0" err="1">
-                <a:latin typeface="Courier" pitchFamily="2" charset="0"/>
+                <a:latin typeface="Menlo" panose="020B0609030804020204" pitchFamily="49" charset="0"/>
+                <a:ea typeface="Menlo" panose="020B0609030804020204" pitchFamily="49" charset="0"/>
+                <a:cs typeface="Menlo" panose="020B0609030804020204" pitchFamily="49" charset="0"/>
               </a:rPr>
               <a:t>a+b</a:t>
             </a:r>
             <a:r>
               <a:rPr lang="en-GB" dirty="0">
-                <a:latin typeface="Courier" pitchFamily="2" charset="0"/>
+                <a:latin typeface="Menlo" panose="020B0609030804020204" pitchFamily="49" charset="0"/>
+                <a:ea typeface="Menlo" panose="020B0609030804020204" pitchFamily="49" charset="0"/>
+                <a:cs typeface="Menlo" panose="020B0609030804020204" pitchFamily="49" charset="0"/>
               </a:rPr>
               <a:t>;</a:t>
             </a:r>
             <a:br>
               <a:rPr lang="en-GB" dirty="0">
-                <a:latin typeface="Courier" pitchFamily="2" charset="0"/>
+                <a:latin typeface="Menlo" panose="020B0609030804020204" pitchFamily="49" charset="0"/>
+                <a:ea typeface="Menlo" panose="020B0609030804020204" pitchFamily="49" charset="0"/>
+                <a:cs typeface="Menlo" panose="020B0609030804020204" pitchFamily="49" charset="0"/>
               </a:rPr>
             </a:br>
             <a:r>
               <a:rPr lang="en-GB" dirty="0">
-                <a:latin typeface="Courier" pitchFamily="2" charset="0"/>
+                <a:latin typeface="Menlo" panose="020B0609030804020204" pitchFamily="49" charset="0"/>
+                <a:ea typeface="Menlo" panose="020B0609030804020204" pitchFamily="49" charset="0"/>
+                <a:cs typeface="Menlo" panose="020B0609030804020204" pitchFamily="49" charset="0"/>
               </a:rPr>
               <a:t>void main(List&lt;String&gt; </a:t>
             </a:r>
             <a:r>
               <a:rPr lang="en-GB" dirty="0" err="1">
-                <a:latin typeface="Courier" pitchFamily="2" charset="0"/>
+                <a:latin typeface="Menlo" panose="020B0609030804020204" pitchFamily="49" charset="0"/>
+                <a:ea typeface="Menlo" panose="020B0609030804020204" pitchFamily="49" charset="0"/>
+                <a:cs typeface="Menlo" panose="020B0609030804020204" pitchFamily="49" charset="0"/>
               </a:rPr>
               <a:t>args</a:t>
             </a:r>
             <a:r>
               <a:rPr lang="en-GB" dirty="0">
-                <a:latin typeface="Courier" pitchFamily="2" charset="0"/>
+                <a:latin typeface="Menlo" panose="020B0609030804020204" pitchFamily="49" charset="0"/>
+                <a:ea typeface="Menlo" panose="020B0609030804020204" pitchFamily="49" charset="0"/>
+                <a:cs typeface="Menlo" panose="020B0609030804020204" pitchFamily="49" charset="0"/>
               </a:rPr>
               <a:t>) {</a:t>
             </a:r>
             <a:br>
               <a:rPr lang="en-GB" dirty="0">
-                <a:latin typeface="Courier" pitchFamily="2" charset="0"/>
+                <a:latin typeface="Menlo" panose="020B0609030804020204" pitchFamily="49" charset="0"/>
+                <a:ea typeface="Menlo" panose="020B0609030804020204" pitchFamily="49" charset="0"/>
+                <a:cs typeface="Menlo" panose="020B0609030804020204" pitchFamily="49" charset="0"/>
               </a:rPr>
             </a:br>
             <a:r>
               <a:rPr lang="en-GB" dirty="0">
-                <a:latin typeface="Courier" pitchFamily="2" charset="0"/>
+                <a:latin typeface="Menlo" panose="020B0609030804020204" pitchFamily="49" charset="0"/>
+                <a:ea typeface="Menlo" panose="020B0609030804020204" pitchFamily="49" charset="0"/>
+                <a:cs typeface="Menlo" panose="020B0609030804020204" pitchFamily="49" charset="0"/>
               </a:rPr>
               <a:t>	print(</a:t>
             </a:r>
             <a:r>
               <a:rPr lang="en-GB" dirty="0" err="1">
-                <a:latin typeface="Courier" pitchFamily="2" charset="0"/>
+                <a:latin typeface="Menlo" panose="020B0609030804020204" pitchFamily="49" charset="0"/>
+                <a:ea typeface="Menlo" panose="020B0609030804020204" pitchFamily="49" charset="0"/>
+                <a:cs typeface="Menlo" panose="020B0609030804020204" pitchFamily="49" charset="0"/>
               </a:rPr>
               <a:t>sumTwoNumbersNamed</a:t>
             </a:r>
             <a:r>
               <a:rPr lang="en-GB" dirty="0">
-                <a:latin typeface="Courier" pitchFamily="2" charset="0"/>
+                <a:latin typeface="Menlo" panose="020B0609030804020204" pitchFamily="49" charset="0"/>
+                <a:ea typeface="Menlo" panose="020B0609030804020204" pitchFamily="49" charset="0"/>
+                <a:cs typeface="Menlo" panose="020B0609030804020204" pitchFamily="49" charset="0"/>
               </a:rPr>
               <a:t>(a:3, b:4)); // This will print '7.0’</a:t>
             </a:r>
             <a:br>
               <a:rPr lang="en-GB" dirty="0">
-                <a:latin typeface="Courier" pitchFamily="2" charset="0"/>
+                <a:latin typeface="Menlo" panose="020B0609030804020204" pitchFamily="49" charset="0"/>
+                <a:ea typeface="Menlo" panose="020B0609030804020204" pitchFamily="49" charset="0"/>
+                <a:cs typeface="Menlo" panose="020B0609030804020204" pitchFamily="49" charset="0"/>
               </a:rPr>
             </a:br>
             <a:r>
               <a:rPr lang="en-GB" dirty="0">
-                <a:latin typeface="Courier" pitchFamily="2" charset="0"/>
+                <a:latin typeface="Menlo" panose="020B0609030804020204" pitchFamily="49" charset="0"/>
+                <a:ea typeface="Menlo" panose="020B0609030804020204" pitchFamily="49" charset="0"/>
+                <a:cs typeface="Menlo" panose="020B0609030804020204" pitchFamily="49" charset="0"/>
               </a:rPr>
               <a:t>}//main</a:t>
             </a:r>
@@ -10677,88 +11321,118 @@
             <a:pPr lvl="1"/>
             <a:r>
               <a:rPr lang="en-GB" dirty="0">
-                <a:latin typeface="Courier" pitchFamily="2" charset="0"/>
+                <a:latin typeface="Menlo" panose="020B0609030804020204" pitchFamily="49" charset="0"/>
+                <a:ea typeface="Menlo" panose="020B0609030804020204" pitchFamily="49" charset="0"/>
+                <a:cs typeface="Menlo" panose="020B0609030804020204" pitchFamily="49" charset="0"/>
               </a:rPr>
               <a:t>double </a:t>
             </a:r>
             <a:r>
               <a:rPr lang="en-GB" dirty="0" err="1">
-                <a:latin typeface="Courier" pitchFamily="2" charset="0"/>
+                <a:latin typeface="Menlo" panose="020B0609030804020204" pitchFamily="49" charset="0"/>
+                <a:ea typeface="Menlo" panose="020B0609030804020204" pitchFamily="49" charset="0"/>
+                <a:cs typeface="Menlo" panose="020B0609030804020204" pitchFamily="49" charset="0"/>
               </a:rPr>
               <a:t>sumTwoNumbersDefaultNamed</a:t>
             </a:r>
             <a:r>
               <a:rPr lang="en-GB" dirty="0">
-                <a:latin typeface="Courier" pitchFamily="2" charset="0"/>
+                <a:latin typeface="Menlo" panose="020B0609030804020204" pitchFamily="49" charset="0"/>
+                <a:ea typeface="Menlo" panose="020B0609030804020204" pitchFamily="49" charset="0"/>
+                <a:cs typeface="Menlo" panose="020B0609030804020204" pitchFamily="49" charset="0"/>
               </a:rPr>
               <a:t>({required double a, double b = 0}) =&gt; </a:t>
             </a:r>
             <a:r>
               <a:rPr lang="en-GB" dirty="0" err="1">
-                <a:latin typeface="Courier" pitchFamily="2" charset="0"/>
+                <a:latin typeface="Menlo" panose="020B0609030804020204" pitchFamily="49" charset="0"/>
+                <a:ea typeface="Menlo" panose="020B0609030804020204" pitchFamily="49" charset="0"/>
+                <a:cs typeface="Menlo" panose="020B0609030804020204" pitchFamily="49" charset="0"/>
               </a:rPr>
               <a:t>a+b</a:t>
             </a:r>
             <a:r>
               <a:rPr lang="en-GB" dirty="0">
-                <a:latin typeface="Courier" pitchFamily="2" charset="0"/>
+                <a:latin typeface="Menlo" panose="020B0609030804020204" pitchFamily="49" charset="0"/>
+                <a:ea typeface="Menlo" panose="020B0609030804020204" pitchFamily="49" charset="0"/>
+                <a:cs typeface="Menlo" panose="020B0609030804020204" pitchFamily="49" charset="0"/>
               </a:rPr>
               <a:t>;</a:t>
             </a:r>
             <a:br>
               <a:rPr lang="en-GB" dirty="0">
-                <a:latin typeface="Courier" pitchFamily="2" charset="0"/>
+                <a:latin typeface="Menlo" panose="020B0609030804020204" pitchFamily="49" charset="0"/>
+                <a:ea typeface="Menlo" panose="020B0609030804020204" pitchFamily="49" charset="0"/>
+                <a:cs typeface="Menlo" panose="020B0609030804020204" pitchFamily="49" charset="0"/>
               </a:rPr>
             </a:br>
             <a:r>
               <a:rPr lang="en-GB" dirty="0">
-                <a:latin typeface="Courier" pitchFamily="2" charset="0"/>
+                <a:latin typeface="Menlo" panose="020B0609030804020204" pitchFamily="49" charset="0"/>
+                <a:ea typeface="Menlo" panose="020B0609030804020204" pitchFamily="49" charset="0"/>
+                <a:cs typeface="Menlo" panose="020B0609030804020204" pitchFamily="49" charset="0"/>
               </a:rPr>
               <a:t>void main(List&lt;String&gt; </a:t>
             </a:r>
             <a:r>
               <a:rPr lang="en-GB" dirty="0" err="1">
-                <a:latin typeface="Courier" pitchFamily="2" charset="0"/>
+                <a:latin typeface="Menlo" panose="020B0609030804020204" pitchFamily="49" charset="0"/>
+                <a:ea typeface="Menlo" panose="020B0609030804020204" pitchFamily="49" charset="0"/>
+                <a:cs typeface="Menlo" panose="020B0609030804020204" pitchFamily="49" charset="0"/>
               </a:rPr>
               <a:t>args</a:t>
             </a:r>
             <a:r>
               <a:rPr lang="en-GB" dirty="0">
-                <a:latin typeface="Courier" pitchFamily="2" charset="0"/>
+                <a:latin typeface="Menlo" panose="020B0609030804020204" pitchFamily="49" charset="0"/>
+                <a:ea typeface="Menlo" panose="020B0609030804020204" pitchFamily="49" charset="0"/>
+                <a:cs typeface="Menlo" panose="020B0609030804020204" pitchFamily="49" charset="0"/>
               </a:rPr>
               <a:t>) {</a:t>
             </a:r>
             <a:br>
               <a:rPr lang="en-GB" dirty="0">
-                <a:latin typeface="Courier" pitchFamily="2" charset="0"/>
+                <a:latin typeface="Menlo" panose="020B0609030804020204" pitchFamily="49" charset="0"/>
+                <a:ea typeface="Menlo" panose="020B0609030804020204" pitchFamily="49" charset="0"/>
+                <a:cs typeface="Menlo" panose="020B0609030804020204" pitchFamily="49" charset="0"/>
               </a:rPr>
             </a:br>
             <a:r>
               <a:rPr lang="en-GB" dirty="0">
-                <a:latin typeface="Courier" pitchFamily="2" charset="0"/>
+                <a:latin typeface="Menlo" panose="020B0609030804020204" pitchFamily="49" charset="0"/>
+                <a:ea typeface="Menlo" panose="020B0609030804020204" pitchFamily="49" charset="0"/>
+                <a:cs typeface="Menlo" panose="020B0609030804020204" pitchFamily="49" charset="0"/>
               </a:rPr>
               <a:t>	print(</a:t>
             </a:r>
             <a:r>
               <a:rPr lang="en-GB" dirty="0" err="1">
-                <a:latin typeface="Courier" pitchFamily="2" charset="0"/>
+                <a:latin typeface="Menlo" panose="020B0609030804020204" pitchFamily="49" charset="0"/>
+                <a:ea typeface="Menlo" panose="020B0609030804020204" pitchFamily="49" charset="0"/>
+                <a:cs typeface="Menlo" panose="020B0609030804020204" pitchFamily="49" charset="0"/>
               </a:rPr>
               <a:t>sumTwoNumbersDefaultNamed</a:t>
             </a:r>
             <a:r>
               <a:rPr lang="en-GB" dirty="0">
-                <a:latin typeface="Courier" pitchFamily="2" charset="0"/>
+                <a:latin typeface="Menlo" panose="020B0609030804020204" pitchFamily="49" charset="0"/>
+                <a:ea typeface="Menlo" panose="020B0609030804020204" pitchFamily="49" charset="0"/>
+                <a:cs typeface="Menlo" panose="020B0609030804020204" pitchFamily="49" charset="0"/>
               </a:rPr>
               <a:t>(a:3)); // This will print ‘3.0’</a:t>
             </a:r>
             <a:br>
               <a:rPr lang="en-GB" dirty="0">
-                <a:latin typeface="Courier" pitchFamily="2" charset="0"/>
+                <a:latin typeface="Menlo" panose="020B0609030804020204" pitchFamily="49" charset="0"/>
+                <a:ea typeface="Menlo" panose="020B0609030804020204" pitchFamily="49" charset="0"/>
+                <a:cs typeface="Menlo" panose="020B0609030804020204" pitchFamily="49" charset="0"/>
               </a:rPr>
             </a:br>
             <a:r>
               <a:rPr lang="en-GB" dirty="0">
-                <a:latin typeface="Courier" pitchFamily="2" charset="0"/>
+                <a:latin typeface="Menlo" panose="020B0609030804020204" pitchFamily="49" charset="0"/>
+                <a:ea typeface="Menlo" panose="020B0609030804020204" pitchFamily="49" charset="0"/>
+                <a:cs typeface="Menlo" panose="020B0609030804020204" pitchFamily="49" charset="0"/>
               </a:rPr>
               <a:t>}//main</a:t>
             </a:r>
@@ -10901,160 +11575,216 @@
             <a:pPr lvl="1"/>
             <a:r>
               <a:rPr lang="en-GB" dirty="0">
-                <a:latin typeface="Courier" pitchFamily="2" charset="0"/>
+                <a:latin typeface="Menlo" panose="020B0609030804020204" pitchFamily="49" charset="0"/>
+                <a:ea typeface="Menlo" panose="020B0609030804020204" pitchFamily="49" charset="0"/>
+                <a:cs typeface="Menlo" panose="020B0609030804020204" pitchFamily="49" charset="0"/>
               </a:rPr>
               <a:t>String </a:t>
             </a:r>
             <a:r>
               <a:rPr lang="en-GB" dirty="0" err="1">
-                <a:latin typeface="Courier" pitchFamily="2" charset="0"/>
+                <a:latin typeface="Menlo" panose="020B0609030804020204" pitchFamily="49" charset="0"/>
+                <a:ea typeface="Menlo" panose="020B0609030804020204" pitchFamily="49" charset="0"/>
+                <a:cs typeface="Menlo" panose="020B0609030804020204" pitchFamily="49" charset="0"/>
               </a:rPr>
               <a:t>sayHi</a:t>
             </a:r>
             <a:r>
               <a:rPr lang="en-GB" dirty="0">
-                <a:latin typeface="Courier" pitchFamily="2" charset="0"/>
+                <a:latin typeface="Menlo" panose="020B0609030804020204" pitchFamily="49" charset="0"/>
+                <a:ea typeface="Menlo" panose="020B0609030804020204" pitchFamily="49" charset="0"/>
+                <a:cs typeface="Menlo" panose="020B0609030804020204" pitchFamily="49" charset="0"/>
               </a:rPr>
               <a:t>([String? name]){</a:t>
             </a:r>
             <a:br>
               <a:rPr lang="en-GB" dirty="0">
-                <a:latin typeface="Courier" pitchFamily="2" charset="0"/>
+                <a:latin typeface="Menlo" panose="020B0609030804020204" pitchFamily="49" charset="0"/>
+                <a:ea typeface="Menlo" panose="020B0609030804020204" pitchFamily="49" charset="0"/>
+                <a:cs typeface="Menlo" panose="020B0609030804020204" pitchFamily="49" charset="0"/>
               </a:rPr>
             </a:br>
             <a:r>
               <a:rPr lang="en-GB" dirty="0">
-                <a:latin typeface="Courier" pitchFamily="2" charset="0"/>
+                <a:latin typeface="Menlo" panose="020B0609030804020204" pitchFamily="49" charset="0"/>
+                <a:ea typeface="Menlo" panose="020B0609030804020204" pitchFamily="49" charset="0"/>
+                <a:cs typeface="Menlo" panose="020B0609030804020204" pitchFamily="49" charset="0"/>
               </a:rPr>
               <a:t>	if(name != null){</a:t>
             </a:r>
             <a:br>
               <a:rPr lang="en-GB" dirty="0">
-                <a:latin typeface="Courier" pitchFamily="2" charset="0"/>
+                <a:latin typeface="Menlo" panose="020B0609030804020204" pitchFamily="49" charset="0"/>
+                <a:ea typeface="Menlo" panose="020B0609030804020204" pitchFamily="49" charset="0"/>
+                <a:cs typeface="Menlo" panose="020B0609030804020204" pitchFamily="49" charset="0"/>
               </a:rPr>
             </a:br>
             <a:r>
               <a:rPr lang="en-GB" dirty="0">
-                <a:latin typeface="Courier" pitchFamily="2" charset="0"/>
+                <a:latin typeface="Menlo" panose="020B0609030804020204" pitchFamily="49" charset="0"/>
+                <a:ea typeface="Menlo" panose="020B0609030804020204" pitchFamily="49" charset="0"/>
+                <a:cs typeface="Menlo" panose="020B0609030804020204" pitchFamily="49" charset="0"/>
               </a:rPr>
               <a:t>		return 'Hi ' + name + ‘!’;</a:t>
             </a:r>
             <a:br>
               <a:rPr lang="en-GB" dirty="0">
-                <a:latin typeface="Courier" pitchFamily="2" charset="0"/>
+                <a:latin typeface="Menlo" panose="020B0609030804020204" pitchFamily="49" charset="0"/>
+                <a:ea typeface="Menlo" panose="020B0609030804020204" pitchFamily="49" charset="0"/>
+                <a:cs typeface="Menlo" panose="020B0609030804020204" pitchFamily="49" charset="0"/>
               </a:rPr>
             </a:br>
             <a:r>
               <a:rPr lang="en-GB" dirty="0">
-                <a:latin typeface="Courier" pitchFamily="2" charset="0"/>
+                <a:latin typeface="Menlo" panose="020B0609030804020204" pitchFamily="49" charset="0"/>
+                <a:ea typeface="Menlo" panose="020B0609030804020204" pitchFamily="49" charset="0"/>
+                <a:cs typeface="Menlo" panose="020B0609030804020204" pitchFamily="49" charset="0"/>
               </a:rPr>
               <a:t>	}//if</a:t>
             </a:r>
             <a:br>
               <a:rPr lang="en-GB" dirty="0">
-                <a:latin typeface="Courier" pitchFamily="2" charset="0"/>
+                <a:latin typeface="Menlo" panose="020B0609030804020204" pitchFamily="49" charset="0"/>
+                <a:ea typeface="Menlo" panose="020B0609030804020204" pitchFamily="49" charset="0"/>
+                <a:cs typeface="Menlo" panose="020B0609030804020204" pitchFamily="49" charset="0"/>
               </a:rPr>
             </a:br>
             <a:r>
               <a:rPr lang="en-GB" dirty="0">
-                <a:latin typeface="Courier" pitchFamily="2" charset="0"/>
+                <a:latin typeface="Menlo" panose="020B0609030804020204" pitchFamily="49" charset="0"/>
+                <a:ea typeface="Menlo" panose="020B0609030804020204" pitchFamily="49" charset="0"/>
+                <a:cs typeface="Menlo" panose="020B0609030804020204" pitchFamily="49" charset="0"/>
               </a:rPr>
               <a:t>	return ‘Hi!’;</a:t>
             </a:r>
             <a:br>
               <a:rPr lang="en-GB" dirty="0">
-                <a:latin typeface="Courier" pitchFamily="2" charset="0"/>
+                <a:latin typeface="Menlo" panose="020B0609030804020204" pitchFamily="49" charset="0"/>
+                <a:ea typeface="Menlo" panose="020B0609030804020204" pitchFamily="49" charset="0"/>
+                <a:cs typeface="Menlo" panose="020B0609030804020204" pitchFamily="49" charset="0"/>
               </a:rPr>
             </a:br>
             <a:r>
               <a:rPr lang="en-GB" dirty="0">
-                <a:latin typeface="Courier" pitchFamily="2" charset="0"/>
+                <a:latin typeface="Menlo" panose="020B0609030804020204" pitchFamily="49" charset="0"/>
+                <a:ea typeface="Menlo" panose="020B0609030804020204" pitchFamily="49" charset="0"/>
+                <a:cs typeface="Menlo" panose="020B0609030804020204" pitchFamily="49" charset="0"/>
               </a:rPr>
               <a:t>}//</a:t>
             </a:r>
             <a:r>
               <a:rPr lang="en-GB" dirty="0" err="1">
-                <a:latin typeface="Courier" pitchFamily="2" charset="0"/>
+                <a:latin typeface="Menlo" panose="020B0609030804020204" pitchFamily="49" charset="0"/>
+                <a:ea typeface="Menlo" panose="020B0609030804020204" pitchFamily="49" charset="0"/>
+                <a:cs typeface="Menlo" panose="020B0609030804020204" pitchFamily="49" charset="0"/>
               </a:rPr>
               <a:t>sayHi</a:t>
             </a:r>
             <a:br>
               <a:rPr lang="en-GB" dirty="0">
-                <a:latin typeface="Courier" pitchFamily="2" charset="0"/>
+                <a:latin typeface="Menlo" panose="020B0609030804020204" pitchFamily="49" charset="0"/>
+                <a:ea typeface="Menlo" panose="020B0609030804020204" pitchFamily="49" charset="0"/>
+                <a:cs typeface="Menlo" panose="020B0609030804020204" pitchFamily="49" charset="0"/>
               </a:rPr>
             </a:br>
             <a:r>
               <a:rPr lang="en-GB" dirty="0">
-                <a:latin typeface="Courier" pitchFamily="2" charset="0"/>
+                <a:latin typeface="Menlo" panose="020B0609030804020204" pitchFamily="49" charset="0"/>
+                <a:ea typeface="Menlo" panose="020B0609030804020204" pitchFamily="49" charset="0"/>
+                <a:cs typeface="Menlo" panose="020B0609030804020204" pitchFamily="49" charset="0"/>
               </a:rPr>
               <a:t>void main(List&lt;String&gt; </a:t>
             </a:r>
             <a:r>
               <a:rPr lang="en-GB" dirty="0" err="1">
-                <a:latin typeface="Courier" pitchFamily="2" charset="0"/>
+                <a:latin typeface="Menlo" panose="020B0609030804020204" pitchFamily="49" charset="0"/>
+                <a:ea typeface="Menlo" panose="020B0609030804020204" pitchFamily="49" charset="0"/>
+                <a:cs typeface="Menlo" panose="020B0609030804020204" pitchFamily="49" charset="0"/>
               </a:rPr>
               <a:t>args</a:t>
             </a:r>
             <a:r>
               <a:rPr lang="en-GB" dirty="0">
-                <a:latin typeface="Courier" pitchFamily="2" charset="0"/>
+                <a:latin typeface="Menlo" panose="020B0609030804020204" pitchFamily="49" charset="0"/>
+                <a:ea typeface="Menlo" panose="020B0609030804020204" pitchFamily="49" charset="0"/>
+                <a:cs typeface="Menlo" panose="020B0609030804020204" pitchFamily="49" charset="0"/>
               </a:rPr>
               <a:t>) {</a:t>
             </a:r>
             <a:br>
               <a:rPr lang="en-GB" dirty="0">
-                <a:latin typeface="Courier" pitchFamily="2" charset="0"/>
+                <a:latin typeface="Menlo" panose="020B0609030804020204" pitchFamily="49" charset="0"/>
+                <a:ea typeface="Menlo" panose="020B0609030804020204" pitchFamily="49" charset="0"/>
+                <a:cs typeface="Menlo" panose="020B0609030804020204" pitchFamily="49" charset="0"/>
               </a:rPr>
             </a:br>
             <a:r>
               <a:rPr lang="en-GB" dirty="0">
-                <a:latin typeface="Courier" pitchFamily="2" charset="0"/>
+                <a:latin typeface="Menlo" panose="020B0609030804020204" pitchFamily="49" charset="0"/>
+                <a:ea typeface="Menlo" panose="020B0609030804020204" pitchFamily="49" charset="0"/>
+                <a:cs typeface="Menlo" panose="020B0609030804020204" pitchFamily="49" charset="0"/>
               </a:rPr>
               <a:t>	print(</a:t>
             </a:r>
             <a:r>
               <a:rPr lang="en-GB" dirty="0" err="1">
-                <a:latin typeface="Courier" pitchFamily="2" charset="0"/>
+                <a:latin typeface="Menlo" panose="020B0609030804020204" pitchFamily="49" charset="0"/>
+                <a:ea typeface="Menlo" panose="020B0609030804020204" pitchFamily="49" charset="0"/>
+                <a:cs typeface="Menlo" panose="020B0609030804020204" pitchFamily="49" charset="0"/>
               </a:rPr>
               <a:t>sayHi</a:t>
             </a:r>
             <a:r>
               <a:rPr lang="en-GB" dirty="0">
-                <a:latin typeface="Courier" pitchFamily="2" charset="0"/>
+                <a:latin typeface="Menlo" panose="020B0609030804020204" pitchFamily="49" charset="0"/>
+                <a:ea typeface="Menlo" panose="020B0609030804020204" pitchFamily="49" charset="0"/>
+                <a:cs typeface="Menlo" panose="020B0609030804020204" pitchFamily="49" charset="0"/>
               </a:rPr>
               <a:t>()); //This will print 'Hi!’</a:t>
             </a:r>
             <a:br>
               <a:rPr lang="en-GB" dirty="0">
-                <a:latin typeface="Courier" pitchFamily="2" charset="0"/>
+                <a:latin typeface="Menlo" panose="020B0609030804020204" pitchFamily="49" charset="0"/>
+                <a:ea typeface="Menlo" panose="020B0609030804020204" pitchFamily="49" charset="0"/>
+                <a:cs typeface="Menlo" panose="020B0609030804020204" pitchFamily="49" charset="0"/>
               </a:rPr>
             </a:br>
             <a:r>
               <a:rPr lang="en-GB" dirty="0">
-                <a:latin typeface="Courier" pitchFamily="2" charset="0"/>
+                <a:latin typeface="Menlo" panose="020B0609030804020204" pitchFamily="49" charset="0"/>
+                <a:ea typeface="Menlo" panose="020B0609030804020204" pitchFamily="49" charset="0"/>
+                <a:cs typeface="Menlo" panose="020B0609030804020204" pitchFamily="49" charset="0"/>
               </a:rPr>
               <a:t>	print(</a:t>
             </a:r>
             <a:r>
               <a:rPr lang="en-GB" dirty="0" err="1">
-                <a:latin typeface="Courier" pitchFamily="2" charset="0"/>
+                <a:latin typeface="Menlo" panose="020B0609030804020204" pitchFamily="49" charset="0"/>
+                <a:ea typeface="Menlo" panose="020B0609030804020204" pitchFamily="49" charset="0"/>
+                <a:cs typeface="Menlo" panose="020B0609030804020204" pitchFamily="49" charset="0"/>
               </a:rPr>
               <a:t>sayHi</a:t>
             </a:r>
             <a:r>
               <a:rPr lang="en-GB" dirty="0">
-                <a:latin typeface="Courier" pitchFamily="2" charset="0"/>
+                <a:latin typeface="Menlo" panose="020B0609030804020204" pitchFamily="49" charset="0"/>
+                <a:ea typeface="Menlo" panose="020B0609030804020204" pitchFamily="49" charset="0"/>
+                <a:cs typeface="Menlo" panose="020B0609030804020204" pitchFamily="49" charset="0"/>
               </a:rPr>
               <a:t>('Paul')); //This will print 'Hi Paul!'</a:t>
             </a:r>
             <a:br>
               <a:rPr lang="en-GB" dirty="0">
-                <a:latin typeface="Courier" pitchFamily="2" charset="0"/>
+                <a:latin typeface="Menlo" panose="020B0609030804020204" pitchFamily="49" charset="0"/>
+                <a:ea typeface="Menlo" panose="020B0609030804020204" pitchFamily="49" charset="0"/>
+                <a:cs typeface="Menlo" panose="020B0609030804020204" pitchFamily="49" charset="0"/>
               </a:rPr>
             </a:br>
             <a:r>
               <a:rPr lang="en-GB" dirty="0">
-                <a:latin typeface="Courier" pitchFamily="2" charset="0"/>
+                <a:latin typeface="Menlo" panose="020B0609030804020204" pitchFamily="49" charset="0"/>
+                <a:ea typeface="Menlo" panose="020B0609030804020204" pitchFamily="49" charset="0"/>
+                <a:cs typeface="Menlo" panose="020B0609030804020204" pitchFamily="49" charset="0"/>
               </a:rPr>
               <a:t>}//main</a:t>
             </a:r>
@@ -11069,99 +11799,133 @@
             <a:pPr lvl="1"/>
             <a:r>
               <a:rPr lang="en-GB" dirty="0">
-                <a:latin typeface="Courier" pitchFamily="2" charset="0"/>
+                <a:latin typeface="Menlo" panose="020B0609030804020204" pitchFamily="49" charset="0"/>
+                <a:ea typeface="Menlo" panose="020B0609030804020204" pitchFamily="49" charset="0"/>
+                <a:cs typeface="Menlo" panose="020B0609030804020204" pitchFamily="49" charset="0"/>
               </a:rPr>
               <a:t>String </a:t>
             </a:r>
             <a:r>
               <a:rPr lang="en-GB" dirty="0" err="1">
-                <a:latin typeface="Courier" pitchFamily="2" charset="0"/>
+                <a:latin typeface="Menlo" panose="020B0609030804020204" pitchFamily="49" charset="0"/>
+                <a:ea typeface="Menlo" panose="020B0609030804020204" pitchFamily="49" charset="0"/>
+                <a:cs typeface="Menlo" panose="020B0609030804020204" pitchFamily="49" charset="0"/>
               </a:rPr>
               <a:t>sayHiDefault</a:t>
             </a:r>
             <a:r>
               <a:rPr lang="en-GB" dirty="0">
-                <a:latin typeface="Courier" pitchFamily="2" charset="0"/>
+                <a:latin typeface="Menlo" panose="020B0609030804020204" pitchFamily="49" charset="0"/>
+                <a:ea typeface="Menlo" panose="020B0609030804020204" pitchFamily="49" charset="0"/>
+                <a:cs typeface="Menlo" panose="020B0609030804020204" pitchFamily="49" charset="0"/>
               </a:rPr>
               <a:t>([String name = ‘’]) =&gt; 'Hi ' + name;</a:t>
             </a:r>
             <a:br>
               <a:rPr lang="en-GB" dirty="0">
-                <a:latin typeface="Courier" pitchFamily="2" charset="0"/>
+                <a:latin typeface="Menlo" panose="020B0609030804020204" pitchFamily="49" charset="0"/>
+                <a:ea typeface="Menlo" panose="020B0609030804020204" pitchFamily="49" charset="0"/>
+                <a:cs typeface="Menlo" panose="020B0609030804020204" pitchFamily="49" charset="0"/>
               </a:rPr>
             </a:br>
             <a:r>
               <a:rPr lang="en-GB" dirty="0">
-                <a:latin typeface="Courier" pitchFamily="2" charset="0"/>
+                <a:latin typeface="Menlo" panose="020B0609030804020204" pitchFamily="49" charset="0"/>
+                <a:ea typeface="Menlo" panose="020B0609030804020204" pitchFamily="49" charset="0"/>
+                <a:cs typeface="Menlo" panose="020B0609030804020204" pitchFamily="49" charset="0"/>
               </a:rPr>
               <a:t>void main(List&lt;String&gt; </a:t>
             </a:r>
             <a:r>
               <a:rPr lang="en-GB" dirty="0" err="1">
-                <a:latin typeface="Courier" pitchFamily="2" charset="0"/>
+                <a:latin typeface="Menlo" panose="020B0609030804020204" pitchFamily="49" charset="0"/>
+                <a:ea typeface="Menlo" panose="020B0609030804020204" pitchFamily="49" charset="0"/>
+                <a:cs typeface="Menlo" panose="020B0609030804020204" pitchFamily="49" charset="0"/>
               </a:rPr>
               <a:t>args</a:t>
             </a:r>
             <a:r>
               <a:rPr lang="en-GB" dirty="0">
-                <a:latin typeface="Courier" pitchFamily="2" charset="0"/>
+                <a:latin typeface="Menlo" panose="020B0609030804020204" pitchFamily="49" charset="0"/>
+                <a:ea typeface="Menlo" panose="020B0609030804020204" pitchFamily="49" charset="0"/>
+                <a:cs typeface="Menlo" panose="020B0609030804020204" pitchFamily="49" charset="0"/>
               </a:rPr>
               <a:t>) {</a:t>
             </a:r>
             <a:br>
               <a:rPr lang="en-GB" dirty="0">
-                <a:latin typeface="Courier" pitchFamily="2" charset="0"/>
+                <a:latin typeface="Menlo" panose="020B0609030804020204" pitchFamily="49" charset="0"/>
+                <a:ea typeface="Menlo" panose="020B0609030804020204" pitchFamily="49" charset="0"/>
+                <a:cs typeface="Menlo" panose="020B0609030804020204" pitchFamily="49" charset="0"/>
               </a:rPr>
             </a:br>
             <a:r>
               <a:rPr lang="en-GB" dirty="0">
-                <a:latin typeface="Courier" pitchFamily="2" charset="0"/>
+                <a:latin typeface="Menlo" panose="020B0609030804020204" pitchFamily="49" charset="0"/>
+                <a:ea typeface="Menlo" panose="020B0609030804020204" pitchFamily="49" charset="0"/>
+                <a:cs typeface="Menlo" panose="020B0609030804020204" pitchFamily="49" charset="0"/>
               </a:rPr>
               <a:t>	print(</a:t>
             </a:r>
             <a:r>
               <a:rPr lang="en-GB" dirty="0" err="1">
-                <a:latin typeface="Courier" pitchFamily="2" charset="0"/>
+                <a:latin typeface="Menlo" panose="020B0609030804020204" pitchFamily="49" charset="0"/>
+                <a:ea typeface="Menlo" panose="020B0609030804020204" pitchFamily="49" charset="0"/>
+                <a:cs typeface="Menlo" panose="020B0609030804020204" pitchFamily="49" charset="0"/>
               </a:rPr>
               <a:t>sayHiDefault</a:t>
             </a:r>
             <a:r>
               <a:rPr lang="en-GB" dirty="0">
-                <a:latin typeface="Courier" pitchFamily="2" charset="0"/>
+                <a:latin typeface="Menlo" panose="020B0609030804020204" pitchFamily="49" charset="0"/>
+                <a:ea typeface="Menlo" panose="020B0609030804020204" pitchFamily="49" charset="0"/>
+                <a:cs typeface="Menlo" panose="020B0609030804020204" pitchFamily="49" charset="0"/>
               </a:rPr>
               <a:t>()); //This will print 'Hi’</a:t>
             </a:r>
             <a:br>
               <a:rPr lang="en-GB" dirty="0">
-                <a:latin typeface="Courier" pitchFamily="2" charset="0"/>
+                <a:latin typeface="Menlo" panose="020B0609030804020204" pitchFamily="49" charset="0"/>
+                <a:ea typeface="Menlo" panose="020B0609030804020204" pitchFamily="49" charset="0"/>
+                <a:cs typeface="Menlo" panose="020B0609030804020204" pitchFamily="49" charset="0"/>
               </a:rPr>
             </a:br>
             <a:r>
               <a:rPr lang="en-GB" dirty="0">
-                <a:latin typeface="Courier" pitchFamily="2" charset="0"/>
+                <a:latin typeface="Menlo" panose="020B0609030804020204" pitchFamily="49" charset="0"/>
+                <a:ea typeface="Menlo" panose="020B0609030804020204" pitchFamily="49" charset="0"/>
+                <a:cs typeface="Menlo" panose="020B0609030804020204" pitchFamily="49" charset="0"/>
               </a:rPr>
               <a:t>	print(</a:t>
             </a:r>
             <a:r>
               <a:rPr lang="en-GB" dirty="0" err="1">
-                <a:latin typeface="Courier" pitchFamily="2" charset="0"/>
+                <a:latin typeface="Menlo" panose="020B0609030804020204" pitchFamily="49" charset="0"/>
+                <a:ea typeface="Menlo" panose="020B0609030804020204" pitchFamily="49" charset="0"/>
+                <a:cs typeface="Menlo" panose="020B0609030804020204" pitchFamily="49" charset="0"/>
               </a:rPr>
               <a:t>sayHiDefault</a:t>
             </a:r>
             <a:r>
               <a:rPr lang="en-GB" dirty="0">
-                <a:latin typeface="Courier" pitchFamily="2" charset="0"/>
+                <a:latin typeface="Menlo" panose="020B0609030804020204" pitchFamily="49" charset="0"/>
+                <a:ea typeface="Menlo" panose="020B0609030804020204" pitchFamily="49" charset="0"/>
+                <a:cs typeface="Menlo" panose="020B0609030804020204" pitchFamily="49" charset="0"/>
               </a:rPr>
               <a:t>('Paul')); //This will print 'Hi Paul'</a:t>
             </a:r>
             <a:br>
               <a:rPr lang="en-GB" dirty="0">
-                <a:latin typeface="Courier" pitchFamily="2" charset="0"/>
+                <a:latin typeface="Menlo" panose="020B0609030804020204" pitchFamily="49" charset="0"/>
+                <a:ea typeface="Menlo" panose="020B0609030804020204" pitchFamily="49" charset="0"/>
+                <a:cs typeface="Menlo" panose="020B0609030804020204" pitchFamily="49" charset="0"/>
               </a:rPr>
             </a:br>
             <a:r>
               <a:rPr lang="en-GB" dirty="0">
-                <a:latin typeface="Courier" pitchFamily="2" charset="0"/>
+                <a:latin typeface="Menlo" panose="020B0609030804020204" pitchFamily="49" charset="0"/>
+                <a:ea typeface="Menlo" panose="020B0609030804020204" pitchFamily="49" charset="0"/>
+                <a:cs typeface="Menlo" panose="020B0609030804020204" pitchFamily="49" charset="0"/>
               </a:rPr>
               <a:t>}//main</a:t>
             </a:r>
@@ -12052,47 +12816,63 @@
             </a:pPr>
             <a:r>
               <a:rPr lang="en-GB" dirty="0">
-                <a:latin typeface="Courier" pitchFamily="2" charset="0"/>
+                <a:latin typeface="Menlo" panose="020B0609030804020204" pitchFamily="49" charset="0"/>
+                <a:ea typeface="Menlo" panose="020B0609030804020204" pitchFamily="49" charset="0"/>
+                <a:cs typeface="Menlo" panose="020B0609030804020204" pitchFamily="49" charset="0"/>
               </a:rPr>
               <a:t>import '</a:t>
             </a:r>
             <a:r>
               <a:rPr lang="en-GB" dirty="0" err="1">
-                <a:latin typeface="Courier" pitchFamily="2" charset="0"/>
+                <a:latin typeface="Menlo" panose="020B0609030804020204" pitchFamily="49" charset="0"/>
+                <a:ea typeface="Menlo" panose="020B0609030804020204" pitchFamily="49" charset="0"/>
+                <a:cs typeface="Menlo" panose="020B0609030804020204" pitchFamily="49" charset="0"/>
               </a:rPr>
               <a:t>dart:math</a:t>
             </a:r>
             <a:r>
               <a:rPr lang="en-GB" dirty="0">
-                <a:latin typeface="Courier" pitchFamily="2" charset="0"/>
+                <a:latin typeface="Menlo" panose="020B0609030804020204" pitchFamily="49" charset="0"/>
+                <a:ea typeface="Menlo" panose="020B0609030804020204" pitchFamily="49" charset="0"/>
+                <a:cs typeface="Menlo" panose="020B0609030804020204" pitchFamily="49" charset="0"/>
               </a:rPr>
               <a:t>’;</a:t>
             </a:r>
             <a:br>
               <a:rPr lang="en-GB" dirty="0">
-                <a:latin typeface="Courier" pitchFamily="2" charset="0"/>
+                <a:latin typeface="Menlo" panose="020B0609030804020204" pitchFamily="49" charset="0"/>
+                <a:ea typeface="Menlo" panose="020B0609030804020204" pitchFamily="49" charset="0"/>
+                <a:cs typeface="Menlo" panose="020B0609030804020204" pitchFamily="49" charset="0"/>
               </a:rPr>
             </a:br>
             <a:br>
               <a:rPr lang="en-GB" dirty="0">
-                <a:latin typeface="Courier" pitchFamily="2" charset="0"/>
+                <a:latin typeface="Menlo" panose="020B0609030804020204" pitchFamily="49" charset="0"/>
+                <a:ea typeface="Menlo" panose="020B0609030804020204" pitchFamily="49" charset="0"/>
+                <a:cs typeface="Menlo" panose="020B0609030804020204" pitchFamily="49" charset="0"/>
               </a:rPr>
             </a:br>
             <a:r>
               <a:rPr lang="en-GB" dirty="0">
-                <a:latin typeface="Courier" pitchFamily="2" charset="0"/>
+                <a:latin typeface="Menlo" panose="020B0609030804020204" pitchFamily="49" charset="0"/>
+                <a:ea typeface="Menlo" panose="020B0609030804020204" pitchFamily="49" charset="0"/>
+                <a:cs typeface="Menlo" panose="020B0609030804020204" pitchFamily="49" charset="0"/>
               </a:rPr>
               <a:t>void main(List&lt;String&gt; </a:t>
             </a:r>
             <a:r>
               <a:rPr lang="en-GB" dirty="0" err="1">
-                <a:latin typeface="Courier" pitchFamily="2" charset="0"/>
+                <a:latin typeface="Menlo" panose="020B0609030804020204" pitchFamily="49" charset="0"/>
+                <a:ea typeface="Menlo" panose="020B0609030804020204" pitchFamily="49" charset="0"/>
+                <a:cs typeface="Menlo" panose="020B0609030804020204" pitchFamily="49" charset="0"/>
               </a:rPr>
               <a:t>args</a:t>
             </a:r>
             <a:r>
               <a:rPr lang="en-GB" dirty="0">
-                <a:latin typeface="Courier" pitchFamily="2" charset="0"/>
+                <a:latin typeface="Menlo" panose="020B0609030804020204" pitchFamily="49" charset="0"/>
+                <a:ea typeface="Menlo" panose="020B0609030804020204" pitchFamily="49" charset="0"/>
+                <a:cs typeface="Menlo" panose="020B0609030804020204" pitchFamily="49" charset="0"/>
               </a:rPr>
               <a:t>) {</a:t>
             </a:r>
@@ -12103,12 +12883,16 @@
             </a:pPr>
             <a:br>
               <a:rPr lang="en-GB" dirty="0">
-                <a:latin typeface="Courier" pitchFamily="2" charset="0"/>
+                <a:latin typeface="Menlo" panose="020B0609030804020204" pitchFamily="49" charset="0"/>
+                <a:ea typeface="Menlo" panose="020B0609030804020204" pitchFamily="49" charset="0"/>
+                <a:cs typeface="Menlo" panose="020B0609030804020204" pitchFamily="49" charset="0"/>
               </a:rPr>
             </a:br>
             <a:r>
               <a:rPr lang="en-GB" dirty="0">
-                <a:latin typeface="Courier" pitchFamily="2" charset="0"/>
+                <a:latin typeface="Menlo" panose="020B0609030804020204" pitchFamily="49" charset="0"/>
+                <a:ea typeface="Menlo" panose="020B0609030804020204" pitchFamily="49" charset="0"/>
+                <a:cs typeface="Menlo" panose="020B0609030804020204" pitchFamily="49" charset="0"/>
               </a:rPr>
               <a:t>double a = 4;</a:t>
             </a:r>
@@ -12119,7 +12903,9 @@
             </a:pPr>
             <a:r>
               <a:rPr lang="en-GB" dirty="0">
-                <a:latin typeface="Courier" pitchFamily="2" charset="0"/>
+                <a:latin typeface="Menlo" panose="020B0609030804020204" pitchFamily="49" charset="0"/>
+                <a:ea typeface="Menlo" panose="020B0609030804020204" pitchFamily="49" charset="0"/>
+                <a:cs typeface="Menlo" panose="020B0609030804020204" pitchFamily="49" charset="0"/>
               </a:rPr>
               <a:t>double b = 5;</a:t>
             </a:r>
@@ -12130,12 +12916,16 @@
             </a:pPr>
             <a:br>
               <a:rPr lang="en-GB" dirty="0">
-                <a:latin typeface="Courier" pitchFamily="2" charset="0"/>
+                <a:latin typeface="Menlo" panose="020B0609030804020204" pitchFamily="49" charset="0"/>
+                <a:ea typeface="Menlo" panose="020B0609030804020204" pitchFamily="49" charset="0"/>
+                <a:cs typeface="Menlo" panose="020B0609030804020204" pitchFamily="49" charset="0"/>
               </a:rPr>
             </a:br>
             <a:r>
               <a:rPr lang="en-GB" dirty="0">
-                <a:latin typeface="Courier" pitchFamily="2" charset="0"/>
+                <a:latin typeface="Menlo" panose="020B0609030804020204" pitchFamily="49" charset="0"/>
+                <a:ea typeface="Menlo" panose="020B0609030804020204" pitchFamily="49" charset="0"/>
+                <a:cs typeface="Menlo" panose="020B0609030804020204" pitchFamily="49" charset="0"/>
               </a:rPr>
               <a:t>// --- Arithmetic operators</a:t>
             </a:r>
@@ -12146,19 +12936,25 @@
             </a:pPr>
             <a:r>
               <a:rPr lang="en-GB" dirty="0">
-                <a:latin typeface="Courier" pitchFamily="2" charset="0"/>
+                <a:latin typeface="Menlo" panose="020B0609030804020204" pitchFamily="49" charset="0"/>
+                <a:ea typeface="Menlo" panose="020B0609030804020204" pitchFamily="49" charset="0"/>
+                <a:cs typeface="Menlo" panose="020B0609030804020204" pitchFamily="49" charset="0"/>
               </a:rPr>
               <a:t>print(</a:t>
             </a:r>
             <a:r>
               <a:rPr lang="en-GB" dirty="0" err="1">
-                <a:latin typeface="Courier" pitchFamily="2" charset="0"/>
+                <a:latin typeface="Menlo" panose="020B0609030804020204" pitchFamily="49" charset="0"/>
+                <a:ea typeface="Menlo" panose="020B0609030804020204" pitchFamily="49" charset="0"/>
+                <a:cs typeface="Menlo" panose="020B0609030804020204" pitchFamily="49" charset="0"/>
               </a:rPr>
               <a:t>a+b</a:t>
             </a:r>
             <a:r>
               <a:rPr lang="en-GB" dirty="0">
-                <a:latin typeface="Courier" pitchFamily="2" charset="0"/>
+                <a:latin typeface="Menlo" panose="020B0609030804020204" pitchFamily="49" charset="0"/>
+                <a:ea typeface="Menlo" panose="020B0609030804020204" pitchFamily="49" charset="0"/>
+                <a:cs typeface="Menlo" panose="020B0609030804020204" pitchFamily="49" charset="0"/>
               </a:rPr>
               <a:t>); //Add: this will print '9.0'</a:t>
             </a:r>
@@ -12169,7 +12965,9 @@
             </a:pPr>
             <a:r>
               <a:rPr lang="en-GB" dirty="0">
-                <a:latin typeface="Courier" pitchFamily="2" charset="0"/>
+                <a:latin typeface="Menlo" panose="020B0609030804020204" pitchFamily="49" charset="0"/>
+                <a:ea typeface="Menlo" panose="020B0609030804020204" pitchFamily="49" charset="0"/>
+                <a:cs typeface="Menlo" panose="020B0609030804020204" pitchFamily="49" charset="0"/>
               </a:rPr>
               <a:t>print(a-b); //Subtract: this will print '-1.0'</a:t>
             </a:r>
@@ -12180,7 +12978,9 @@
             </a:pPr>
             <a:r>
               <a:rPr lang="en-GB" dirty="0">
-                <a:latin typeface="Courier" pitchFamily="2" charset="0"/>
+                <a:latin typeface="Menlo" panose="020B0609030804020204" pitchFamily="49" charset="0"/>
+                <a:ea typeface="Menlo" panose="020B0609030804020204" pitchFamily="49" charset="0"/>
+                <a:cs typeface="Menlo" panose="020B0609030804020204" pitchFamily="49" charset="0"/>
               </a:rPr>
               <a:t>print(a*b); //Multiply: this will print '20.0'</a:t>
             </a:r>
@@ -12191,7 +12991,9 @@
             </a:pPr>
             <a:r>
               <a:rPr lang="en-GB" dirty="0">
-                <a:latin typeface="Courier" pitchFamily="2" charset="0"/>
+                <a:latin typeface="Menlo" panose="020B0609030804020204" pitchFamily="49" charset="0"/>
+                <a:ea typeface="Menlo" panose="020B0609030804020204" pitchFamily="49" charset="0"/>
+                <a:cs typeface="Menlo" panose="020B0609030804020204" pitchFamily="49" charset="0"/>
               </a:rPr>
               <a:t>print(a/b); //Divide: this will print '0.8'</a:t>
             </a:r>
@@ -12202,7 +13004,9 @@
             </a:pPr>
             <a:r>
               <a:rPr lang="en-GB" dirty="0">
-                <a:latin typeface="Courier" pitchFamily="2" charset="0"/>
+                <a:latin typeface="Menlo" panose="020B0609030804020204" pitchFamily="49" charset="0"/>
+                <a:ea typeface="Menlo" panose="020B0609030804020204" pitchFamily="49" charset="0"/>
+                <a:cs typeface="Menlo" panose="020B0609030804020204" pitchFamily="49" charset="0"/>
               </a:rPr>
               <a:t>print(a~/b); //Integer division: this will print '0'</a:t>
             </a:r>
@@ -12213,19 +13017,25 @@
             </a:pPr>
             <a:r>
               <a:rPr lang="en-GB" dirty="0">
-                <a:latin typeface="Courier" pitchFamily="2" charset="0"/>
+                <a:latin typeface="Menlo" panose="020B0609030804020204" pitchFamily="49" charset="0"/>
+                <a:ea typeface="Menlo" panose="020B0609030804020204" pitchFamily="49" charset="0"/>
+                <a:cs typeface="Menlo" panose="020B0609030804020204" pitchFamily="49" charset="0"/>
               </a:rPr>
               <a:t>print(</a:t>
             </a:r>
             <a:r>
               <a:rPr lang="en-GB" dirty="0" err="1">
-                <a:latin typeface="Courier" pitchFamily="2" charset="0"/>
+                <a:latin typeface="Menlo" panose="020B0609030804020204" pitchFamily="49" charset="0"/>
+                <a:ea typeface="Menlo" panose="020B0609030804020204" pitchFamily="49" charset="0"/>
+                <a:cs typeface="Menlo" panose="020B0609030804020204" pitchFamily="49" charset="0"/>
               </a:rPr>
               <a:t>a%b</a:t>
             </a:r>
             <a:r>
               <a:rPr lang="en-GB" dirty="0">
-                <a:latin typeface="Courier" pitchFamily="2" charset="0"/>
+                <a:latin typeface="Menlo" panose="020B0609030804020204" pitchFamily="49" charset="0"/>
+                <a:ea typeface="Menlo" panose="020B0609030804020204" pitchFamily="49" charset="0"/>
+                <a:cs typeface="Menlo" panose="020B0609030804020204" pitchFamily="49" charset="0"/>
               </a:rPr>
               <a:t>); //Remainder of the division: this will print '4.0'</a:t>
             </a:r>
@@ -12236,24 +13046,32 @@
             </a:pPr>
             <a:br>
               <a:rPr lang="en-GB" dirty="0">
-                <a:latin typeface="Courier" pitchFamily="2" charset="0"/>
+                <a:latin typeface="Menlo" panose="020B0609030804020204" pitchFamily="49" charset="0"/>
+                <a:ea typeface="Menlo" panose="020B0609030804020204" pitchFamily="49" charset="0"/>
+                <a:cs typeface="Menlo" panose="020B0609030804020204" pitchFamily="49" charset="0"/>
               </a:rPr>
             </a:br>
             <a:r>
               <a:rPr lang="en-GB" dirty="0">
-                <a:latin typeface="Courier" pitchFamily="2" charset="0"/>
+                <a:latin typeface="Menlo" panose="020B0609030804020204" pitchFamily="49" charset="0"/>
+                <a:ea typeface="Menlo" panose="020B0609030804020204" pitchFamily="49" charset="0"/>
+                <a:cs typeface="Menlo" panose="020B0609030804020204" pitchFamily="49" charset="0"/>
               </a:rPr>
               <a:t>// --- Arithmetic operations using the </a:t>
             </a:r>
             <a:r>
               <a:rPr lang="en-GB" dirty="0" err="1">
-                <a:latin typeface="Courier" pitchFamily="2" charset="0"/>
+                <a:latin typeface="Menlo" panose="020B0609030804020204" pitchFamily="49" charset="0"/>
+                <a:ea typeface="Menlo" panose="020B0609030804020204" pitchFamily="49" charset="0"/>
+                <a:cs typeface="Menlo" panose="020B0609030804020204" pitchFamily="49" charset="0"/>
               </a:rPr>
               <a:t>dart:math</a:t>
             </a:r>
             <a:r>
               <a:rPr lang="en-GB" dirty="0">
-                <a:latin typeface="Courier" pitchFamily="2" charset="0"/>
+                <a:latin typeface="Menlo" panose="020B0609030804020204" pitchFamily="49" charset="0"/>
+                <a:ea typeface="Menlo" panose="020B0609030804020204" pitchFamily="49" charset="0"/>
+                <a:cs typeface="Menlo" panose="020B0609030804020204" pitchFamily="49" charset="0"/>
               </a:rPr>
               <a:t> library</a:t>
             </a:r>
@@ -12264,19 +13082,25 @@
             </a:pPr>
             <a:r>
               <a:rPr lang="en-GB" dirty="0">
-                <a:latin typeface="Courier" pitchFamily="2" charset="0"/>
+                <a:latin typeface="Menlo" panose="020B0609030804020204" pitchFamily="49" charset="0"/>
+                <a:ea typeface="Menlo" panose="020B0609030804020204" pitchFamily="49" charset="0"/>
+                <a:cs typeface="Menlo" panose="020B0609030804020204" pitchFamily="49" charset="0"/>
               </a:rPr>
               <a:t>print(pow(</a:t>
             </a:r>
             <a:r>
               <a:rPr lang="en-GB" dirty="0" err="1">
-                <a:latin typeface="Courier" pitchFamily="2" charset="0"/>
+                <a:latin typeface="Menlo" panose="020B0609030804020204" pitchFamily="49" charset="0"/>
+                <a:ea typeface="Menlo" panose="020B0609030804020204" pitchFamily="49" charset="0"/>
+                <a:cs typeface="Menlo" panose="020B0609030804020204" pitchFamily="49" charset="0"/>
               </a:rPr>
               <a:t>a,b</a:t>
             </a:r>
             <a:r>
               <a:rPr lang="en-GB" dirty="0">
-                <a:latin typeface="Courier" pitchFamily="2" charset="0"/>
+                <a:latin typeface="Menlo" panose="020B0609030804020204" pitchFamily="49" charset="0"/>
+                <a:ea typeface="Menlo" panose="020B0609030804020204" pitchFamily="49" charset="0"/>
+                <a:cs typeface="Menlo" panose="020B0609030804020204" pitchFamily="49" charset="0"/>
               </a:rPr>
               <a:t>)); //Elevate: this will print '1024.0'</a:t>
             </a:r>
@@ -12287,7 +13111,9 @@
             </a:pPr>
             <a:r>
               <a:rPr lang="en-GB" dirty="0">
-                <a:latin typeface="Courier" pitchFamily="2" charset="0"/>
+                <a:latin typeface="Menlo" panose="020B0609030804020204" pitchFamily="49" charset="0"/>
+                <a:ea typeface="Menlo" panose="020B0609030804020204" pitchFamily="49" charset="0"/>
+                <a:cs typeface="Menlo" panose="020B0609030804020204" pitchFamily="49" charset="0"/>
               </a:rPr>
               <a:t>print(log(a)); //Logarithm: this will print '1.38...'</a:t>
             </a:r>
@@ -12298,7 +13124,9 @@
             </a:pPr>
             <a:r>
               <a:rPr lang="en-GB" dirty="0">
-                <a:latin typeface="Courier" pitchFamily="2" charset="0"/>
+                <a:latin typeface="Menlo" panose="020B0609030804020204" pitchFamily="49" charset="0"/>
+                <a:ea typeface="Menlo" panose="020B0609030804020204" pitchFamily="49" charset="0"/>
+                <a:cs typeface="Menlo" panose="020B0609030804020204" pitchFamily="49" charset="0"/>
               </a:rPr>
               <a:t>print(pi); //This will print the PI constant</a:t>
             </a:r>
@@ -12308,7 +13136,9 @@
               <a:buNone/>
             </a:pPr>
             <a:endParaRPr lang="en-GB" dirty="0">
-              <a:latin typeface="Courier" pitchFamily="2" charset="0"/>
+              <a:latin typeface="Menlo" panose="020B0609030804020204" pitchFamily="49" charset="0"/>
+              <a:ea typeface="Menlo" panose="020B0609030804020204" pitchFamily="49" charset="0"/>
+              <a:cs typeface="Menlo" panose="020B0609030804020204" pitchFamily="49" charset="0"/>
             </a:endParaRPr>
           </a:p>
           <a:p>
@@ -12317,7 +13147,9 @@
             </a:pPr>
             <a:r>
               <a:rPr lang="en-GB" dirty="0">
-                <a:latin typeface="Courier" pitchFamily="2" charset="0"/>
+                <a:latin typeface="Menlo" panose="020B0609030804020204" pitchFamily="49" charset="0"/>
+                <a:ea typeface="Menlo" panose="020B0609030804020204" pitchFamily="49" charset="0"/>
+                <a:cs typeface="Menlo" panose="020B0609030804020204" pitchFamily="49" charset="0"/>
               </a:rPr>
               <a:t>}//main</a:t>
             </a:r>
@@ -12327,7 +13159,9 @@
               <a:buNone/>
             </a:pPr>
             <a:endParaRPr lang="en-GB" dirty="0">
-              <a:latin typeface="Courier" pitchFamily="2" charset="0"/>
+              <a:latin typeface="Menlo" panose="020B0609030804020204" pitchFamily="49" charset="0"/>
+              <a:ea typeface="Menlo" panose="020B0609030804020204" pitchFamily="49" charset="0"/>
+              <a:cs typeface="Menlo" panose="020B0609030804020204" pitchFamily="49" charset="0"/>
             </a:endParaRPr>
           </a:p>
           <a:p>
@@ -12462,19 +13296,25 @@
             </a:pPr>
             <a:r>
               <a:rPr lang="en-GB" dirty="0">
-                <a:latin typeface="Courier" pitchFamily="2" charset="0"/>
+                <a:latin typeface="Menlo" panose="020B0609030804020204" pitchFamily="49" charset="0"/>
+                <a:ea typeface="Menlo" panose="020B0609030804020204" pitchFamily="49" charset="0"/>
+                <a:cs typeface="Menlo" panose="020B0609030804020204" pitchFamily="49" charset="0"/>
               </a:rPr>
               <a:t>void main(List&lt;String&gt; </a:t>
             </a:r>
             <a:r>
               <a:rPr lang="en-GB" dirty="0" err="1">
-                <a:latin typeface="Courier" pitchFamily="2" charset="0"/>
+                <a:latin typeface="Menlo" panose="020B0609030804020204" pitchFamily="49" charset="0"/>
+                <a:ea typeface="Menlo" panose="020B0609030804020204" pitchFamily="49" charset="0"/>
+                <a:cs typeface="Menlo" panose="020B0609030804020204" pitchFamily="49" charset="0"/>
               </a:rPr>
               <a:t>args</a:t>
             </a:r>
             <a:r>
               <a:rPr lang="en-GB" dirty="0">
-                <a:latin typeface="Courier" pitchFamily="2" charset="0"/>
+                <a:latin typeface="Menlo" panose="020B0609030804020204" pitchFamily="49" charset="0"/>
+                <a:ea typeface="Menlo" panose="020B0609030804020204" pitchFamily="49" charset="0"/>
+                <a:cs typeface="Menlo" panose="020B0609030804020204" pitchFamily="49" charset="0"/>
               </a:rPr>
               <a:t>) {</a:t>
             </a:r>
@@ -12484,7 +13324,9 @@
               <a:buNone/>
             </a:pPr>
             <a:endParaRPr lang="en-GB" dirty="0">
-              <a:latin typeface="Courier" pitchFamily="2" charset="0"/>
+              <a:latin typeface="Menlo" panose="020B0609030804020204" pitchFamily="49" charset="0"/>
+              <a:ea typeface="Menlo" panose="020B0609030804020204" pitchFamily="49" charset="0"/>
+              <a:cs typeface="Menlo" panose="020B0609030804020204" pitchFamily="49" charset="0"/>
             </a:endParaRPr>
           </a:p>
           <a:p>
@@ -12493,7 +13335,9 @@
             </a:pPr>
             <a:r>
               <a:rPr lang="en-GB" dirty="0">
-                <a:latin typeface="Courier" pitchFamily="2" charset="0"/>
+                <a:latin typeface="Menlo" panose="020B0609030804020204" pitchFamily="49" charset="0"/>
+                <a:ea typeface="Menlo" panose="020B0609030804020204" pitchFamily="49" charset="0"/>
+                <a:cs typeface="Menlo" panose="020B0609030804020204" pitchFamily="49" charset="0"/>
               </a:rPr>
               <a:t>int m = 0;</a:t>
             </a:r>
@@ -12504,7 +13348,9 @@
             </a:pPr>
             <a:r>
               <a:rPr lang="en-GB" dirty="0">
-                <a:latin typeface="Courier" pitchFamily="2" charset="0"/>
+                <a:latin typeface="Menlo" panose="020B0609030804020204" pitchFamily="49" charset="0"/>
+                <a:ea typeface="Menlo" panose="020B0609030804020204" pitchFamily="49" charset="0"/>
+                <a:cs typeface="Menlo" panose="020B0609030804020204" pitchFamily="49" charset="0"/>
               </a:rPr>
               <a:t>int n = 0;</a:t>
             </a:r>
@@ -12515,7 +13361,9 @@
             </a:pPr>
             <a:r>
               <a:rPr lang="en-GB" dirty="0">
-                <a:latin typeface="Courier" pitchFamily="2" charset="0"/>
+                <a:latin typeface="Menlo" panose="020B0609030804020204" pitchFamily="49" charset="0"/>
+                <a:ea typeface="Menlo" panose="020B0609030804020204" pitchFamily="49" charset="0"/>
+                <a:cs typeface="Menlo" panose="020B0609030804020204" pitchFamily="49" charset="0"/>
               </a:rPr>
               <a:t>n = m++; //First assigns to n the value of m, then it increments m</a:t>
             </a:r>
@@ -12526,7 +13374,9 @@
             </a:pPr>
             <a:r>
               <a:rPr lang="en-GB" dirty="0">
-                <a:latin typeface="Courier" pitchFamily="2" charset="0"/>
+                <a:latin typeface="Menlo" panose="020B0609030804020204" pitchFamily="49" charset="0"/>
+                <a:ea typeface="Menlo" panose="020B0609030804020204" pitchFamily="49" charset="0"/>
+                <a:cs typeface="Menlo" panose="020B0609030804020204" pitchFamily="49" charset="0"/>
               </a:rPr>
               <a:t>print(m); //This will print '1'</a:t>
             </a:r>
@@ -12537,7 +13387,9 @@
             </a:pPr>
             <a:r>
               <a:rPr lang="en-GB" dirty="0">
-                <a:latin typeface="Courier" pitchFamily="2" charset="0"/>
+                <a:latin typeface="Menlo" panose="020B0609030804020204" pitchFamily="49" charset="0"/>
+                <a:ea typeface="Menlo" panose="020B0609030804020204" pitchFamily="49" charset="0"/>
+                <a:cs typeface="Menlo" panose="020B0609030804020204" pitchFamily="49" charset="0"/>
               </a:rPr>
               <a:t>print(n); //This will print '0'</a:t>
             </a:r>
@@ -12547,7 +13399,9 @@
               <a:buNone/>
             </a:pPr>
             <a:endParaRPr lang="en-GB" dirty="0">
-              <a:latin typeface="Courier" pitchFamily="2" charset="0"/>
+              <a:latin typeface="Menlo" panose="020B0609030804020204" pitchFamily="49" charset="0"/>
+              <a:ea typeface="Menlo" panose="020B0609030804020204" pitchFamily="49" charset="0"/>
+              <a:cs typeface="Menlo" panose="020B0609030804020204" pitchFamily="49" charset="0"/>
             </a:endParaRPr>
           </a:p>
           <a:p>
@@ -12556,7 +13410,9 @@
             </a:pPr>
             <a:r>
               <a:rPr lang="en-GB" dirty="0">
-                <a:latin typeface="Courier" pitchFamily="2" charset="0"/>
+                <a:latin typeface="Menlo" panose="020B0609030804020204" pitchFamily="49" charset="0"/>
+                <a:ea typeface="Menlo" panose="020B0609030804020204" pitchFamily="49" charset="0"/>
+                <a:cs typeface="Menlo" panose="020B0609030804020204" pitchFamily="49" charset="0"/>
               </a:rPr>
               <a:t>n = ++m; //First increments the value of m, then assigns to n the value of m</a:t>
             </a:r>
@@ -12567,7 +13423,9 @@
             </a:pPr>
             <a:r>
               <a:rPr lang="en-GB" dirty="0">
-                <a:latin typeface="Courier" pitchFamily="2" charset="0"/>
+                <a:latin typeface="Menlo" panose="020B0609030804020204" pitchFamily="49" charset="0"/>
+                <a:ea typeface="Menlo" panose="020B0609030804020204" pitchFamily="49" charset="0"/>
+                <a:cs typeface="Menlo" panose="020B0609030804020204" pitchFamily="49" charset="0"/>
               </a:rPr>
               <a:t>print(m); //This will print '2'</a:t>
             </a:r>
@@ -12578,7 +13436,9 @@
             </a:pPr>
             <a:r>
               <a:rPr lang="en-GB" dirty="0">
-                <a:latin typeface="Courier" pitchFamily="2" charset="0"/>
+                <a:latin typeface="Menlo" panose="020B0609030804020204" pitchFamily="49" charset="0"/>
+                <a:ea typeface="Menlo" panose="020B0609030804020204" pitchFamily="49" charset="0"/>
+                <a:cs typeface="Menlo" panose="020B0609030804020204" pitchFamily="49" charset="0"/>
               </a:rPr>
               <a:t>print(n); //This will print '2’</a:t>
             </a:r>
@@ -12588,7 +13448,9 @@
               <a:buNone/>
             </a:pPr>
             <a:endParaRPr lang="en-GB" dirty="0">
-              <a:latin typeface="Courier" pitchFamily="2" charset="0"/>
+              <a:latin typeface="Menlo" panose="020B0609030804020204" pitchFamily="49" charset="0"/>
+              <a:ea typeface="Menlo" panose="020B0609030804020204" pitchFamily="49" charset="0"/>
+              <a:cs typeface="Menlo" panose="020B0609030804020204" pitchFamily="49" charset="0"/>
             </a:endParaRPr>
           </a:p>
           <a:p>
@@ -12597,7 +13459,9 @@
             </a:pPr>
             <a:r>
               <a:rPr lang="en-GB" dirty="0">
-                <a:latin typeface="Courier" pitchFamily="2" charset="0"/>
+                <a:latin typeface="Menlo" panose="020B0609030804020204" pitchFamily="49" charset="0"/>
+                <a:ea typeface="Menlo" panose="020B0609030804020204" pitchFamily="49" charset="0"/>
+                <a:cs typeface="Menlo" panose="020B0609030804020204" pitchFamily="49" charset="0"/>
               </a:rPr>
               <a:t>}//main</a:t>
             </a:r>
@@ -12607,7 +13471,9 @@
               <a:buNone/>
             </a:pPr>
             <a:endParaRPr lang="en-GB" dirty="0">
-              <a:latin typeface="Courier" pitchFamily="2" charset="0"/>
+              <a:latin typeface="Menlo" panose="020B0609030804020204" pitchFamily="49" charset="0"/>
+              <a:ea typeface="Menlo" panose="020B0609030804020204" pitchFamily="49" charset="0"/>
+              <a:cs typeface="Menlo" panose="020B0609030804020204" pitchFamily="49" charset="0"/>
             </a:endParaRPr>
           </a:p>
           <a:p>
@@ -12615,7 +13481,9 @@
               <a:buNone/>
             </a:pPr>
             <a:endParaRPr lang="en-GB" dirty="0">
-              <a:latin typeface="Courier" pitchFamily="2" charset="0"/>
+              <a:latin typeface="Menlo" panose="020B0609030804020204" pitchFamily="49" charset="0"/>
+              <a:ea typeface="Menlo" panose="020B0609030804020204" pitchFamily="49" charset="0"/>
+              <a:cs typeface="Menlo" panose="020B0609030804020204" pitchFamily="49" charset="0"/>
             </a:endParaRPr>
           </a:p>
         </p:txBody>
@@ -12972,30 +13840,40 @@
             </a:pPr>
             <a:r>
               <a:rPr lang="en-GB" dirty="0">
-                <a:latin typeface="Courier" pitchFamily="2" charset="0"/>
+                <a:latin typeface="Menlo" panose="020B0609030804020204" pitchFamily="49" charset="0"/>
+                <a:ea typeface="Menlo" panose="020B0609030804020204" pitchFamily="49" charset="0"/>
+                <a:cs typeface="Menlo" panose="020B0609030804020204" pitchFamily="49" charset="0"/>
               </a:rPr>
               <a:t>void main(List&lt;String&gt; </a:t>
             </a:r>
             <a:r>
               <a:rPr lang="en-GB" dirty="0" err="1">
-                <a:latin typeface="Courier" pitchFamily="2" charset="0"/>
+                <a:latin typeface="Menlo" panose="020B0609030804020204" pitchFamily="49" charset="0"/>
+                <a:ea typeface="Menlo" panose="020B0609030804020204" pitchFamily="49" charset="0"/>
+                <a:cs typeface="Menlo" panose="020B0609030804020204" pitchFamily="49" charset="0"/>
               </a:rPr>
               <a:t>args</a:t>
             </a:r>
             <a:r>
               <a:rPr lang="en-GB" dirty="0">
-                <a:latin typeface="Courier" pitchFamily="2" charset="0"/>
+                <a:latin typeface="Menlo" panose="020B0609030804020204" pitchFamily="49" charset="0"/>
+                <a:ea typeface="Menlo" panose="020B0609030804020204" pitchFamily="49" charset="0"/>
+                <a:cs typeface="Menlo" panose="020B0609030804020204" pitchFamily="49" charset="0"/>
               </a:rPr>
               <a:t>) {</a:t>
             </a:r>
             <a:br>
               <a:rPr lang="en-GB" dirty="0">
-                <a:latin typeface="Courier" pitchFamily="2" charset="0"/>
+                <a:latin typeface="Menlo" panose="020B0609030804020204" pitchFamily="49" charset="0"/>
+                <a:ea typeface="Menlo" panose="020B0609030804020204" pitchFamily="49" charset="0"/>
+                <a:cs typeface="Menlo" panose="020B0609030804020204" pitchFamily="49" charset="0"/>
               </a:rPr>
             </a:br>
             <a:r>
               <a:rPr lang="en-GB" dirty="0">
-                <a:latin typeface="Courier" pitchFamily="2" charset="0"/>
+                <a:latin typeface="Menlo" panose="020B0609030804020204" pitchFamily="49" charset="0"/>
+                <a:ea typeface="Menlo" panose="020B0609030804020204" pitchFamily="49" charset="0"/>
+                <a:cs typeface="Menlo" panose="020B0609030804020204" pitchFamily="49" charset="0"/>
               </a:rPr>
               <a:t>  </a:t>
             </a:r>
@@ -13006,7 +13884,9 @@
             </a:pPr>
             <a:r>
               <a:rPr lang="en-GB" dirty="0">
-                <a:latin typeface="Courier" pitchFamily="2" charset="0"/>
+                <a:latin typeface="Menlo" panose="020B0609030804020204" pitchFamily="49" charset="0"/>
+                <a:ea typeface="Menlo" panose="020B0609030804020204" pitchFamily="49" charset="0"/>
+                <a:cs typeface="Menlo" panose="020B0609030804020204" pitchFamily="49" charset="0"/>
               </a:rPr>
               <a:t>  int x = 0;</a:t>
             </a:r>
@@ -13017,7 +13897,9 @@
             </a:pPr>
             <a:r>
               <a:rPr lang="en-GB" dirty="0">
-                <a:latin typeface="Courier" pitchFamily="2" charset="0"/>
+                <a:latin typeface="Menlo" panose="020B0609030804020204" pitchFamily="49" charset="0"/>
+                <a:ea typeface="Menlo" panose="020B0609030804020204" pitchFamily="49" charset="0"/>
+                <a:cs typeface="Menlo" panose="020B0609030804020204" pitchFamily="49" charset="0"/>
               </a:rPr>
               <a:t>  int y = 1;</a:t>
             </a:r>
@@ -13028,7 +13910,9 @@
             </a:pPr>
             <a:r>
               <a:rPr lang="en-GB" dirty="0">
-                <a:latin typeface="Courier" pitchFamily="2" charset="0"/>
+                <a:latin typeface="Menlo" panose="020B0609030804020204" pitchFamily="49" charset="0"/>
+                <a:ea typeface="Menlo" panose="020B0609030804020204" pitchFamily="49" charset="0"/>
+                <a:cs typeface="Menlo" panose="020B0609030804020204" pitchFamily="49" charset="0"/>
               </a:rPr>
               <a:t>  print(x == y); //This will print 'false'</a:t>
             </a:r>
@@ -13039,7 +13923,9 @@
             </a:pPr>
             <a:r>
               <a:rPr lang="en-GB" dirty="0">
-                <a:latin typeface="Courier" pitchFamily="2" charset="0"/>
+                <a:latin typeface="Menlo" panose="020B0609030804020204" pitchFamily="49" charset="0"/>
+                <a:ea typeface="Menlo" panose="020B0609030804020204" pitchFamily="49" charset="0"/>
+                <a:cs typeface="Menlo" panose="020B0609030804020204" pitchFamily="49" charset="0"/>
               </a:rPr>
               <a:t>  print(x != y); //This will print 'true'</a:t>
             </a:r>
@@ -13050,7 +13936,9 @@
             </a:pPr>
             <a:r>
               <a:rPr lang="en-GB" dirty="0">
-                <a:latin typeface="Courier" pitchFamily="2" charset="0"/>
+                <a:latin typeface="Menlo" panose="020B0609030804020204" pitchFamily="49" charset="0"/>
+                <a:ea typeface="Menlo" panose="020B0609030804020204" pitchFamily="49" charset="0"/>
+                <a:cs typeface="Menlo" panose="020B0609030804020204" pitchFamily="49" charset="0"/>
               </a:rPr>
               <a:t>  print(x &gt; y); //This will print 'false'</a:t>
             </a:r>
@@ -13061,7 +13949,9 @@
             </a:pPr>
             <a:r>
               <a:rPr lang="en-GB" dirty="0">
-                <a:latin typeface="Courier" pitchFamily="2" charset="0"/>
+                <a:latin typeface="Menlo" panose="020B0609030804020204" pitchFamily="49" charset="0"/>
+                <a:ea typeface="Menlo" panose="020B0609030804020204" pitchFamily="49" charset="0"/>
+                <a:cs typeface="Menlo" panose="020B0609030804020204" pitchFamily="49" charset="0"/>
               </a:rPr>
               <a:t>  print(x &lt; y); //This will print 'true'</a:t>
             </a:r>
@@ -13072,7 +13962,9 @@
             </a:pPr>
             <a:r>
               <a:rPr lang="en-GB" dirty="0">
-                <a:latin typeface="Courier" pitchFamily="2" charset="0"/>
+                <a:latin typeface="Menlo" panose="020B0609030804020204" pitchFamily="49" charset="0"/>
+                <a:ea typeface="Menlo" panose="020B0609030804020204" pitchFamily="49" charset="0"/>
+                <a:cs typeface="Menlo" panose="020B0609030804020204" pitchFamily="49" charset="0"/>
               </a:rPr>
               <a:t>  print(x &gt;= y); //This will print 'false'</a:t>
             </a:r>
@@ -13083,7 +13975,9 @@
             </a:pPr>
             <a:r>
               <a:rPr lang="en-GB" dirty="0">
-                <a:latin typeface="Courier" pitchFamily="2" charset="0"/>
+                <a:latin typeface="Menlo" panose="020B0609030804020204" pitchFamily="49" charset="0"/>
+                <a:ea typeface="Menlo" panose="020B0609030804020204" pitchFamily="49" charset="0"/>
+                <a:cs typeface="Menlo" panose="020B0609030804020204" pitchFamily="49" charset="0"/>
               </a:rPr>
               <a:t>  print(x &lt;= y); //This will print 'true’</a:t>
             </a:r>
@@ -13093,7 +13987,9 @@
               <a:buNone/>
             </a:pPr>
             <a:endParaRPr lang="en-GB" dirty="0">
-              <a:latin typeface="Courier" pitchFamily="2" charset="0"/>
+              <a:latin typeface="Menlo" panose="020B0609030804020204" pitchFamily="49" charset="0"/>
+              <a:ea typeface="Menlo" panose="020B0609030804020204" pitchFamily="49" charset="0"/>
+              <a:cs typeface="Menlo" panose="020B0609030804020204" pitchFamily="49" charset="0"/>
             </a:endParaRPr>
           </a:p>
           <a:p>
@@ -13102,7 +13998,9 @@
             </a:pPr>
             <a:r>
               <a:rPr lang="en-GB" dirty="0">
-                <a:latin typeface="Courier" pitchFamily="2" charset="0"/>
+                <a:latin typeface="Menlo" panose="020B0609030804020204" pitchFamily="49" charset="0"/>
+                <a:ea typeface="Menlo" panose="020B0609030804020204" pitchFamily="49" charset="0"/>
+                <a:cs typeface="Menlo" panose="020B0609030804020204" pitchFamily="49" charset="0"/>
               </a:rPr>
               <a:t>}//main</a:t>
             </a:r>
@@ -13112,7 +14010,9 @@
               <a:buNone/>
             </a:pPr>
             <a:endParaRPr lang="en-GB" dirty="0">
-              <a:latin typeface="Courier" pitchFamily="2" charset="0"/>
+              <a:latin typeface="Menlo" panose="020B0609030804020204" pitchFamily="49" charset="0"/>
+              <a:ea typeface="Menlo" panose="020B0609030804020204" pitchFamily="49" charset="0"/>
+              <a:cs typeface="Menlo" panose="020B0609030804020204" pitchFamily="49" charset="0"/>
             </a:endParaRPr>
           </a:p>
           <a:p>
@@ -13120,7 +14020,9 @@
               <a:buNone/>
             </a:pPr>
             <a:endParaRPr lang="en-GB" dirty="0">
-              <a:latin typeface="Courier" pitchFamily="2" charset="0"/>
+              <a:latin typeface="Menlo" panose="020B0609030804020204" pitchFamily="49" charset="0"/>
+              <a:ea typeface="Menlo" panose="020B0609030804020204" pitchFamily="49" charset="0"/>
+              <a:cs typeface="Menlo" panose="020B0609030804020204" pitchFamily="49" charset="0"/>
             </a:endParaRPr>
           </a:p>
         </p:txBody>
@@ -13247,30 +14149,40 @@
             </a:pPr>
             <a:r>
               <a:rPr lang="en-GB" dirty="0">
-                <a:latin typeface="Courier" pitchFamily="2" charset="0"/>
+                <a:latin typeface="Menlo" panose="020B0609030804020204" pitchFamily="49" charset="0"/>
+                <a:ea typeface="Menlo" panose="020B0609030804020204" pitchFamily="49" charset="0"/>
+                <a:cs typeface="Menlo" panose="020B0609030804020204" pitchFamily="49" charset="0"/>
               </a:rPr>
               <a:t>void main(List&lt;String&gt; </a:t>
             </a:r>
             <a:r>
               <a:rPr lang="en-GB" dirty="0" err="1">
-                <a:latin typeface="Courier" pitchFamily="2" charset="0"/>
+                <a:latin typeface="Menlo" panose="020B0609030804020204" pitchFamily="49" charset="0"/>
+                <a:ea typeface="Menlo" panose="020B0609030804020204" pitchFamily="49" charset="0"/>
+                <a:cs typeface="Menlo" panose="020B0609030804020204" pitchFamily="49" charset="0"/>
               </a:rPr>
               <a:t>args</a:t>
             </a:r>
             <a:r>
               <a:rPr lang="en-GB" dirty="0">
-                <a:latin typeface="Courier" pitchFamily="2" charset="0"/>
+                <a:latin typeface="Menlo" panose="020B0609030804020204" pitchFamily="49" charset="0"/>
+                <a:ea typeface="Menlo" panose="020B0609030804020204" pitchFamily="49" charset="0"/>
+                <a:cs typeface="Menlo" panose="020B0609030804020204" pitchFamily="49" charset="0"/>
               </a:rPr>
               <a:t>) {</a:t>
             </a:r>
             <a:br>
               <a:rPr lang="en-GB" dirty="0">
-                <a:latin typeface="Courier" pitchFamily="2" charset="0"/>
+                <a:latin typeface="Menlo" panose="020B0609030804020204" pitchFamily="49" charset="0"/>
+                <a:ea typeface="Menlo" panose="020B0609030804020204" pitchFamily="49" charset="0"/>
+                <a:cs typeface="Menlo" panose="020B0609030804020204" pitchFamily="49" charset="0"/>
               </a:rPr>
             </a:br>
             <a:r>
               <a:rPr lang="en-GB" dirty="0">
-                <a:latin typeface="Courier" pitchFamily="2" charset="0"/>
+                <a:latin typeface="Menlo" panose="020B0609030804020204" pitchFamily="49" charset="0"/>
+                <a:ea typeface="Menlo" panose="020B0609030804020204" pitchFamily="49" charset="0"/>
+                <a:cs typeface="Menlo" panose="020B0609030804020204" pitchFamily="49" charset="0"/>
               </a:rPr>
               <a:t>  </a:t>
             </a:r>
@@ -13281,7 +14193,9 @@
             </a:pPr>
             <a:r>
               <a:rPr lang="en-GB" dirty="0">
-                <a:latin typeface="Courier" pitchFamily="2" charset="0"/>
+                <a:latin typeface="Menlo" panose="020B0609030804020204" pitchFamily="49" charset="0"/>
+                <a:ea typeface="Menlo" panose="020B0609030804020204" pitchFamily="49" charset="0"/>
+                <a:cs typeface="Menlo" panose="020B0609030804020204" pitchFamily="49" charset="0"/>
               </a:rPr>
               <a:t>  bool flag1 = true;</a:t>
             </a:r>
@@ -13292,7 +14206,9 @@
             </a:pPr>
             <a:r>
               <a:rPr lang="en-GB" dirty="0">
-                <a:latin typeface="Courier" pitchFamily="2" charset="0"/>
+                <a:latin typeface="Menlo" panose="020B0609030804020204" pitchFamily="49" charset="0"/>
+                <a:ea typeface="Menlo" panose="020B0609030804020204" pitchFamily="49" charset="0"/>
+                <a:cs typeface="Menlo" panose="020B0609030804020204" pitchFamily="49" charset="0"/>
               </a:rPr>
               <a:t>  bool flag2 = false;</a:t>
             </a:r>
@@ -13303,7 +14219,9 @@
             </a:pPr>
             <a:r>
               <a:rPr lang="en-GB" dirty="0">
-                <a:latin typeface="Courier" pitchFamily="2" charset="0"/>
+                <a:latin typeface="Menlo" panose="020B0609030804020204" pitchFamily="49" charset="0"/>
+                <a:ea typeface="Menlo" panose="020B0609030804020204" pitchFamily="49" charset="0"/>
+                <a:cs typeface="Menlo" panose="020B0609030804020204" pitchFamily="49" charset="0"/>
               </a:rPr>
               <a:t>  print(flag1 &amp;&amp; flag2); //AND: This will print 'false'</a:t>
             </a:r>
@@ -13314,7 +14232,9 @@
             </a:pPr>
             <a:r>
               <a:rPr lang="en-GB" dirty="0">
-                <a:latin typeface="Courier" pitchFamily="2" charset="0"/>
+                <a:latin typeface="Menlo" panose="020B0609030804020204" pitchFamily="49" charset="0"/>
+                <a:ea typeface="Menlo" panose="020B0609030804020204" pitchFamily="49" charset="0"/>
+                <a:cs typeface="Menlo" panose="020B0609030804020204" pitchFamily="49" charset="0"/>
               </a:rPr>
               <a:t>  print(flag1 || flag2); //OR: This will print 'true'</a:t>
             </a:r>
@@ -13325,7 +14245,9 @@
             </a:pPr>
             <a:r>
               <a:rPr lang="en-GB" dirty="0">
-                <a:latin typeface="Courier" pitchFamily="2" charset="0"/>
+                <a:latin typeface="Menlo" panose="020B0609030804020204" pitchFamily="49" charset="0"/>
+                <a:ea typeface="Menlo" panose="020B0609030804020204" pitchFamily="49" charset="0"/>
+                <a:cs typeface="Menlo" panose="020B0609030804020204" pitchFamily="49" charset="0"/>
               </a:rPr>
               <a:t>  print(!flag1); //NOT: This will print 'false'</a:t>
             </a:r>
@@ -13336,7 +14258,9 @@
             </a:pPr>
             <a:r>
               <a:rPr lang="en-GB" dirty="0">
-                <a:latin typeface="Courier" pitchFamily="2" charset="0"/>
+                <a:latin typeface="Menlo" panose="020B0609030804020204" pitchFamily="49" charset="0"/>
+                <a:ea typeface="Menlo" panose="020B0609030804020204" pitchFamily="49" charset="0"/>
+                <a:cs typeface="Menlo" panose="020B0609030804020204" pitchFamily="49" charset="0"/>
               </a:rPr>
               <a:t>  print(flag1 ? 'Hello' : 'World'); //Ternary operator: 	This will print 'Hello’</a:t>
             </a:r>
@@ -13346,7 +14270,9 @@
               <a:buNone/>
             </a:pPr>
             <a:endParaRPr lang="en-GB" dirty="0">
-              <a:latin typeface="Courier" pitchFamily="2" charset="0"/>
+              <a:latin typeface="Menlo" panose="020B0609030804020204" pitchFamily="49" charset="0"/>
+              <a:ea typeface="Menlo" panose="020B0609030804020204" pitchFamily="49" charset="0"/>
+              <a:cs typeface="Menlo" panose="020B0609030804020204" pitchFamily="49" charset="0"/>
             </a:endParaRPr>
           </a:p>
           <a:p>
@@ -13355,7 +14281,9 @@
             </a:pPr>
             <a:r>
               <a:rPr lang="en-GB" dirty="0">
-                <a:latin typeface="Courier" pitchFamily="2" charset="0"/>
+                <a:latin typeface="Menlo" panose="020B0609030804020204" pitchFamily="49" charset="0"/>
+                <a:ea typeface="Menlo" panose="020B0609030804020204" pitchFamily="49" charset="0"/>
+                <a:cs typeface="Menlo" panose="020B0609030804020204" pitchFamily="49" charset="0"/>
               </a:rPr>
               <a:t>}//main</a:t>
             </a:r>
@@ -13365,7 +14293,9 @@
               <a:buNone/>
             </a:pPr>
             <a:endParaRPr lang="en-GB" dirty="0">
-              <a:latin typeface="Courier" pitchFamily="2" charset="0"/>
+              <a:latin typeface="Menlo" panose="020B0609030804020204" pitchFamily="49" charset="0"/>
+              <a:ea typeface="Menlo" panose="020B0609030804020204" pitchFamily="49" charset="0"/>
+              <a:cs typeface="Menlo" panose="020B0609030804020204" pitchFamily="49" charset="0"/>
             </a:endParaRPr>
           </a:p>
           <a:p>
@@ -13373,7 +14303,9 @@
               <a:buNone/>
             </a:pPr>
             <a:endParaRPr lang="en-GB" dirty="0">
-              <a:latin typeface="Courier" pitchFamily="2" charset="0"/>
+              <a:latin typeface="Menlo" panose="020B0609030804020204" pitchFamily="49" charset="0"/>
+              <a:ea typeface="Menlo" panose="020B0609030804020204" pitchFamily="49" charset="0"/>
+              <a:cs typeface="Menlo" panose="020B0609030804020204" pitchFamily="49" charset="0"/>
             </a:endParaRPr>
           </a:p>
         </p:txBody>
@@ -13500,30 +14432,40 @@
             </a:pPr>
             <a:r>
               <a:rPr lang="en-GB" dirty="0">
-                <a:latin typeface="Courier" pitchFamily="2" charset="0"/>
+                <a:latin typeface="Menlo" panose="020B0609030804020204" pitchFamily="49" charset="0"/>
+                <a:ea typeface="Menlo" panose="020B0609030804020204" pitchFamily="49" charset="0"/>
+                <a:cs typeface="Menlo" panose="020B0609030804020204" pitchFamily="49" charset="0"/>
               </a:rPr>
               <a:t>void main(List&lt;String&gt; </a:t>
             </a:r>
             <a:r>
               <a:rPr lang="en-GB" dirty="0" err="1">
-                <a:latin typeface="Courier" pitchFamily="2" charset="0"/>
+                <a:latin typeface="Menlo" panose="020B0609030804020204" pitchFamily="49" charset="0"/>
+                <a:ea typeface="Menlo" panose="020B0609030804020204" pitchFamily="49" charset="0"/>
+                <a:cs typeface="Menlo" panose="020B0609030804020204" pitchFamily="49" charset="0"/>
               </a:rPr>
               <a:t>args</a:t>
             </a:r>
             <a:r>
               <a:rPr lang="en-GB" dirty="0">
-                <a:latin typeface="Courier" pitchFamily="2" charset="0"/>
+                <a:latin typeface="Menlo" panose="020B0609030804020204" pitchFamily="49" charset="0"/>
+                <a:ea typeface="Menlo" panose="020B0609030804020204" pitchFamily="49" charset="0"/>
+                <a:cs typeface="Menlo" panose="020B0609030804020204" pitchFamily="49" charset="0"/>
               </a:rPr>
               <a:t>) {</a:t>
             </a:r>
             <a:br>
               <a:rPr lang="en-GB" dirty="0">
-                <a:latin typeface="Courier" pitchFamily="2" charset="0"/>
+                <a:latin typeface="Menlo" panose="020B0609030804020204" pitchFamily="49" charset="0"/>
+                <a:ea typeface="Menlo" panose="020B0609030804020204" pitchFamily="49" charset="0"/>
+                <a:cs typeface="Menlo" panose="020B0609030804020204" pitchFamily="49" charset="0"/>
               </a:rPr>
             </a:br>
             <a:r>
               <a:rPr lang="en-GB" dirty="0">
-                <a:latin typeface="Courier" pitchFamily="2" charset="0"/>
+                <a:latin typeface="Menlo" panose="020B0609030804020204" pitchFamily="49" charset="0"/>
+                <a:ea typeface="Menlo" panose="020B0609030804020204" pitchFamily="49" charset="0"/>
+                <a:cs typeface="Menlo" panose="020B0609030804020204" pitchFamily="49" charset="0"/>
               </a:rPr>
               <a:t>  </a:t>
             </a:r>
@@ -13534,7 +14476,9 @@
             </a:pPr>
             <a:r>
               <a:rPr lang="en-GB" dirty="0">
-                <a:latin typeface="Courier" pitchFamily="2" charset="0"/>
+                <a:latin typeface="Menlo" panose="020B0609030804020204" pitchFamily="49" charset="0"/>
+                <a:ea typeface="Menlo" panose="020B0609030804020204" pitchFamily="49" charset="0"/>
+                <a:cs typeface="Menlo" panose="020B0609030804020204" pitchFamily="49" charset="0"/>
               </a:rPr>
               <a:t>  double c = 0;</a:t>
             </a:r>
@@ -13545,7 +14489,9 @@
             </a:pPr>
             <a:r>
               <a:rPr lang="en-GB" dirty="0">
-                <a:latin typeface="Courier" pitchFamily="2" charset="0"/>
+                <a:latin typeface="Menlo" panose="020B0609030804020204" pitchFamily="49" charset="0"/>
+                <a:ea typeface="Menlo" panose="020B0609030804020204" pitchFamily="49" charset="0"/>
+                <a:cs typeface="Menlo" panose="020B0609030804020204" pitchFamily="49" charset="0"/>
               </a:rPr>
               <a:t>  print(c is double); //This will print ‘true'</a:t>
             </a:r>
@@ -13556,53 +14502,54 @@
             </a:pPr>
             <a:r>
               <a:rPr lang="en-GB" dirty="0">
-                <a:latin typeface="Courier" pitchFamily="2" charset="0"/>
-              </a:rPr>
-              <a:t>  print(c is! double); //This will print </a:t>
-            </a:r>
-            <a:r>
-              <a:rPr lang="en-GB">
-                <a:latin typeface="Courier" pitchFamily="2" charset="0"/>
-              </a:rPr>
-              <a:t>‘false’</a:t>
-            </a:r>
+                <a:latin typeface="Menlo" panose="020B0609030804020204" pitchFamily="49" charset="0"/>
+                <a:ea typeface="Menlo" panose="020B0609030804020204" pitchFamily="49" charset="0"/>
+                <a:cs typeface="Menlo" panose="020B0609030804020204" pitchFamily="49" charset="0"/>
+              </a:rPr>
+              <a:t>  print(c is! double); //This will print ‘false’</a:t>
+            </a:r>
+          </a:p>
+          <a:p>
+            <a:pPr marL="0" indent="0">
+              <a:buNone/>
+            </a:pPr>
             <a:endParaRPr lang="en-GB" dirty="0">
-              <a:latin typeface="Courier" pitchFamily="2" charset="0"/>
+              <a:latin typeface="Menlo" panose="020B0609030804020204" pitchFamily="49" charset="0"/>
+              <a:ea typeface="Menlo" panose="020B0609030804020204" pitchFamily="49" charset="0"/>
+              <a:cs typeface="Menlo" panose="020B0609030804020204" pitchFamily="49" charset="0"/>
             </a:endParaRPr>
           </a:p>
           <a:p>
             <a:pPr marL="0" indent="0">
               <a:buNone/>
             </a:pPr>
+            <a:r>
+              <a:rPr lang="en-GB" dirty="0">
+                <a:latin typeface="Menlo" panose="020B0609030804020204" pitchFamily="49" charset="0"/>
+                <a:ea typeface="Menlo" panose="020B0609030804020204" pitchFamily="49" charset="0"/>
+                <a:cs typeface="Menlo" panose="020B0609030804020204" pitchFamily="49" charset="0"/>
+              </a:rPr>
+              <a:t>}//main</a:t>
+            </a:r>
+          </a:p>
+          <a:p>
+            <a:pPr marL="0" indent="0">
+              <a:buNone/>
+            </a:pPr>
             <a:endParaRPr lang="en-GB" dirty="0">
-              <a:latin typeface="Courier" pitchFamily="2" charset="0"/>
+              <a:latin typeface="Menlo" panose="020B0609030804020204" pitchFamily="49" charset="0"/>
+              <a:ea typeface="Menlo" panose="020B0609030804020204" pitchFamily="49" charset="0"/>
+              <a:cs typeface="Menlo" panose="020B0609030804020204" pitchFamily="49" charset="0"/>
             </a:endParaRPr>
           </a:p>
           <a:p>
-            <a:pPr marL="0" indent="0">
-              <a:buNone/>
-            </a:pPr>
-            <a:r>
-              <a:rPr lang="en-GB" dirty="0">
-                <a:latin typeface="Courier" pitchFamily="2" charset="0"/>
-              </a:rPr>
-              <a:t>}//main</a:t>
-            </a:r>
-          </a:p>
-          <a:p>
-            <a:pPr marL="0" indent="0">
+            <a:pPr marL="457200" lvl="1" indent="0">
               <a:buNone/>
             </a:pPr>
             <a:endParaRPr lang="en-GB" dirty="0">
-              <a:latin typeface="Courier" pitchFamily="2" charset="0"/>
-            </a:endParaRPr>
-          </a:p>
-          <a:p>
-            <a:pPr marL="457200" lvl="1" indent="0">
-              <a:buNone/>
-            </a:pPr>
-            <a:endParaRPr lang="en-GB" dirty="0">
-              <a:latin typeface="Courier" pitchFamily="2" charset="0"/>
+              <a:latin typeface="Menlo" panose="020B0609030804020204" pitchFamily="49" charset="0"/>
+              <a:ea typeface="Menlo" panose="020B0609030804020204" pitchFamily="49" charset="0"/>
+              <a:cs typeface="Menlo" panose="020B0609030804020204" pitchFamily="49" charset="0"/>
             </a:endParaRPr>
           </a:p>
         </p:txBody>
@@ -14432,19 +15379,25 @@
             </a:pPr>
             <a:r>
               <a:rPr lang="en-GB" dirty="0">
-                <a:latin typeface="Courier" pitchFamily="2" charset="0"/>
+                <a:latin typeface="Menlo" panose="020B0609030804020204" pitchFamily="49" charset="0"/>
+                <a:ea typeface="Menlo" panose="020B0609030804020204" pitchFamily="49" charset="0"/>
+                <a:cs typeface="Menlo" panose="020B0609030804020204" pitchFamily="49" charset="0"/>
               </a:rPr>
               <a:t>void main(List&lt;String&gt; </a:t>
             </a:r>
             <a:r>
               <a:rPr lang="en-GB" dirty="0" err="1">
-                <a:latin typeface="Courier" pitchFamily="2" charset="0"/>
+                <a:latin typeface="Menlo" panose="020B0609030804020204" pitchFamily="49" charset="0"/>
+                <a:ea typeface="Menlo" panose="020B0609030804020204" pitchFamily="49" charset="0"/>
+                <a:cs typeface="Menlo" panose="020B0609030804020204" pitchFamily="49" charset="0"/>
               </a:rPr>
               <a:t>args</a:t>
             </a:r>
             <a:r>
               <a:rPr lang="en-GB" dirty="0">
-                <a:latin typeface="Courier" pitchFamily="2" charset="0"/>
+                <a:latin typeface="Menlo" panose="020B0609030804020204" pitchFamily="49" charset="0"/>
+                <a:ea typeface="Menlo" panose="020B0609030804020204" pitchFamily="49" charset="0"/>
+                <a:cs typeface="Menlo" panose="020B0609030804020204" pitchFamily="49" charset="0"/>
               </a:rPr>
               <a:t>) {</a:t>
             </a:r>
@@ -14455,7 +15408,9 @@
             </a:pPr>
             <a:r>
               <a:rPr lang="en-GB" dirty="0">
-                <a:latin typeface="Courier" pitchFamily="2" charset="0"/>
+                <a:latin typeface="Menlo" panose="020B0609030804020204" pitchFamily="49" charset="0"/>
+                <a:ea typeface="Menlo" panose="020B0609030804020204" pitchFamily="49" charset="0"/>
+                <a:cs typeface="Menlo" panose="020B0609030804020204" pitchFamily="49" charset="0"/>
               </a:rPr>
               <a:t>	</a:t>
             </a:r>
@@ -14466,7 +15421,9 @@
             </a:pPr>
             <a:r>
               <a:rPr lang="en-GB" dirty="0">
-                <a:latin typeface="Courier" pitchFamily="2" charset="0"/>
+                <a:latin typeface="Menlo" panose="020B0609030804020204" pitchFamily="49" charset="0"/>
+                <a:ea typeface="Menlo" panose="020B0609030804020204" pitchFamily="49" charset="0"/>
+                <a:cs typeface="Menlo" panose="020B0609030804020204" pitchFamily="49" charset="0"/>
               </a:rPr>
               <a:t>//The following will print</a:t>
             </a:r>
@@ -14477,7 +15434,9 @@
             </a:pPr>
             <a:r>
               <a:rPr lang="en-GB" dirty="0">
-                <a:latin typeface="Courier" pitchFamily="2" charset="0"/>
+                <a:latin typeface="Menlo" panose="020B0609030804020204" pitchFamily="49" charset="0"/>
+                <a:ea typeface="Menlo" panose="020B0609030804020204" pitchFamily="49" charset="0"/>
+                <a:cs typeface="Menlo" panose="020B0609030804020204" pitchFamily="49" charset="0"/>
               </a:rPr>
               <a:t>//a has 0 value.</a:t>
             </a:r>
@@ -14488,7 +15447,9 @@
             </a:pPr>
             <a:r>
               <a:rPr lang="en-GB" dirty="0">
-                <a:latin typeface="Courier" pitchFamily="2" charset="0"/>
+                <a:latin typeface="Menlo" panose="020B0609030804020204" pitchFamily="49" charset="0"/>
+                <a:ea typeface="Menlo" panose="020B0609030804020204" pitchFamily="49" charset="0"/>
+                <a:cs typeface="Menlo" panose="020B0609030804020204" pitchFamily="49" charset="0"/>
               </a:rPr>
               <a:t>int a = 0;</a:t>
             </a:r>
@@ -14499,19 +15460,25 @@
             </a:pPr>
             <a:r>
               <a:rPr lang="en-GB" b="1" dirty="0">
-                <a:latin typeface="Courier" pitchFamily="2" charset="0"/>
+                <a:latin typeface="Menlo" panose="020B0609030804020204" pitchFamily="49" charset="0"/>
+                <a:ea typeface="Menlo" panose="020B0609030804020204" pitchFamily="49" charset="0"/>
+                <a:cs typeface="Menlo" panose="020B0609030804020204" pitchFamily="49" charset="0"/>
               </a:rPr>
               <a:t>if(</a:t>
             </a:r>
             <a:r>
               <a:rPr lang="en-GB" dirty="0">
-                <a:latin typeface="Courier" pitchFamily="2" charset="0"/>
+                <a:latin typeface="Menlo" panose="020B0609030804020204" pitchFamily="49" charset="0"/>
+                <a:ea typeface="Menlo" panose="020B0609030804020204" pitchFamily="49" charset="0"/>
+                <a:cs typeface="Menlo" panose="020B0609030804020204" pitchFamily="49" charset="0"/>
               </a:rPr>
               <a:t>a == 0</a:t>
             </a:r>
             <a:r>
               <a:rPr lang="en-GB" b="1" dirty="0">
-                <a:latin typeface="Courier" pitchFamily="2" charset="0"/>
+                <a:latin typeface="Menlo" panose="020B0609030804020204" pitchFamily="49" charset="0"/>
+                <a:ea typeface="Menlo" panose="020B0609030804020204" pitchFamily="49" charset="0"/>
+                <a:cs typeface="Menlo" panose="020B0609030804020204" pitchFamily="49" charset="0"/>
               </a:rPr>
               <a:t>){</a:t>
             </a:r>
@@ -14522,7 +15489,9 @@
             </a:pPr>
             <a:r>
               <a:rPr lang="en-GB" dirty="0">
-                <a:latin typeface="Courier" pitchFamily="2" charset="0"/>
+                <a:latin typeface="Menlo" panose="020B0609030804020204" pitchFamily="49" charset="0"/>
+                <a:ea typeface="Menlo" panose="020B0609030804020204" pitchFamily="49" charset="0"/>
+                <a:cs typeface="Menlo" panose="020B0609030804020204" pitchFamily="49" charset="0"/>
               </a:rPr>
               <a:t>	print('a has 0 value.');</a:t>
             </a:r>
@@ -14533,19 +15502,25 @@
             </a:pPr>
             <a:r>
               <a:rPr lang="en-GB" b="1" dirty="0">
-                <a:latin typeface="Courier" pitchFamily="2" charset="0"/>
+                <a:latin typeface="Menlo" panose="020B0609030804020204" pitchFamily="49" charset="0"/>
+                <a:ea typeface="Menlo" panose="020B0609030804020204" pitchFamily="49" charset="0"/>
+                <a:cs typeface="Menlo" panose="020B0609030804020204" pitchFamily="49" charset="0"/>
               </a:rPr>
               <a:t>} else if(</a:t>
             </a:r>
             <a:r>
               <a:rPr lang="en-GB" dirty="0">
-                <a:latin typeface="Courier" pitchFamily="2" charset="0"/>
+                <a:latin typeface="Menlo" panose="020B0609030804020204" pitchFamily="49" charset="0"/>
+                <a:ea typeface="Menlo" panose="020B0609030804020204" pitchFamily="49" charset="0"/>
+                <a:cs typeface="Menlo" panose="020B0609030804020204" pitchFamily="49" charset="0"/>
               </a:rPr>
               <a:t>a &lt; 0</a:t>
             </a:r>
             <a:r>
               <a:rPr lang="en-GB" b="1" dirty="0">
-                <a:latin typeface="Courier" pitchFamily="2" charset="0"/>
+                <a:latin typeface="Menlo" panose="020B0609030804020204" pitchFamily="49" charset="0"/>
+                <a:ea typeface="Menlo" panose="020B0609030804020204" pitchFamily="49" charset="0"/>
+                <a:cs typeface="Menlo" panose="020B0609030804020204" pitchFamily="49" charset="0"/>
               </a:rPr>
               <a:t>){</a:t>
             </a:r>
@@ -14556,7 +15531,9 @@
             </a:pPr>
             <a:r>
               <a:rPr lang="en-GB" dirty="0">
-                <a:latin typeface="Courier" pitchFamily="2" charset="0"/>
+                <a:latin typeface="Menlo" panose="020B0609030804020204" pitchFamily="49" charset="0"/>
+                <a:ea typeface="Menlo" panose="020B0609030804020204" pitchFamily="49" charset="0"/>
+                <a:cs typeface="Menlo" panose="020B0609030804020204" pitchFamily="49" charset="0"/>
               </a:rPr>
               <a:t>	print('a is negative.');</a:t>
             </a:r>
@@ -14567,7 +15544,9 @@
             </a:pPr>
             <a:r>
               <a:rPr lang="en-GB" b="1" dirty="0">
-                <a:latin typeface="Courier" pitchFamily="2" charset="0"/>
+                <a:latin typeface="Menlo" panose="020B0609030804020204" pitchFamily="49" charset="0"/>
+                <a:ea typeface="Menlo" panose="020B0609030804020204" pitchFamily="49" charset="0"/>
+                <a:cs typeface="Menlo" panose="020B0609030804020204" pitchFamily="49" charset="0"/>
               </a:rPr>
               <a:t>} else {</a:t>
             </a:r>
@@ -14578,7 +15557,9 @@
             </a:pPr>
             <a:r>
               <a:rPr lang="en-GB" dirty="0">
-                <a:latin typeface="Courier" pitchFamily="2" charset="0"/>
+                <a:latin typeface="Menlo" panose="020B0609030804020204" pitchFamily="49" charset="0"/>
+                <a:ea typeface="Menlo" panose="020B0609030804020204" pitchFamily="49" charset="0"/>
+                <a:cs typeface="Menlo" panose="020B0609030804020204" pitchFamily="49" charset="0"/>
               </a:rPr>
               <a:t>	print('a is positive.');</a:t>
             </a:r>
@@ -14589,7 +15570,9 @@
             </a:pPr>
             <a:r>
               <a:rPr lang="en-GB" b="1" dirty="0">
-                <a:latin typeface="Courier" pitchFamily="2" charset="0"/>
+                <a:latin typeface="Menlo" panose="020B0609030804020204" pitchFamily="49" charset="0"/>
+                <a:ea typeface="Menlo" panose="020B0609030804020204" pitchFamily="49" charset="0"/>
+                <a:cs typeface="Menlo" panose="020B0609030804020204" pitchFamily="49" charset="0"/>
               </a:rPr>
               <a:t>}//if-else</a:t>
             </a:r>
@@ -14599,7 +15582,9 @@
               <a:buNone/>
             </a:pPr>
             <a:endParaRPr lang="en-GB" dirty="0">
-              <a:latin typeface="Courier" pitchFamily="2" charset="0"/>
+              <a:latin typeface="Menlo" panose="020B0609030804020204" pitchFamily="49" charset="0"/>
+              <a:ea typeface="Menlo" panose="020B0609030804020204" pitchFamily="49" charset="0"/>
+              <a:cs typeface="Menlo" panose="020B0609030804020204" pitchFamily="49" charset="0"/>
             </a:endParaRPr>
           </a:p>
           <a:p>
@@ -14608,7 +15593,9 @@
             </a:pPr>
             <a:r>
               <a:rPr lang="en-GB" dirty="0">
-                <a:latin typeface="Courier" pitchFamily="2" charset="0"/>
+                <a:latin typeface="Menlo" panose="020B0609030804020204" pitchFamily="49" charset="0"/>
+                <a:ea typeface="Menlo" panose="020B0609030804020204" pitchFamily="49" charset="0"/>
+                <a:cs typeface="Menlo" panose="020B0609030804020204" pitchFamily="49" charset="0"/>
               </a:rPr>
               <a:t>}//main</a:t>
             </a:r>
@@ -14618,7 +15605,9 @@
               <a:buNone/>
             </a:pPr>
             <a:endParaRPr lang="en-GB" dirty="0">
-              <a:latin typeface="Courier" pitchFamily="2" charset="0"/>
+              <a:latin typeface="Menlo" panose="020B0609030804020204" pitchFamily="49" charset="0"/>
+              <a:ea typeface="Menlo" panose="020B0609030804020204" pitchFamily="49" charset="0"/>
+              <a:cs typeface="Menlo" panose="020B0609030804020204" pitchFamily="49" charset="0"/>
             </a:endParaRPr>
           </a:p>
           <a:p>
@@ -14626,7 +15615,9 @@
               <a:buNone/>
             </a:pPr>
             <a:endParaRPr lang="en-GB" dirty="0">
-              <a:latin typeface="Courier" pitchFamily="2" charset="0"/>
+              <a:latin typeface="Menlo" panose="020B0609030804020204" pitchFamily="49" charset="0"/>
+              <a:ea typeface="Menlo" panose="020B0609030804020204" pitchFamily="49" charset="0"/>
+              <a:cs typeface="Menlo" panose="020B0609030804020204" pitchFamily="49" charset="0"/>
             </a:endParaRPr>
           </a:p>
         </p:txBody>
@@ -14849,8 +15840,9 @@
             </a:pPr>
             <a:r>
               <a:rPr lang="en-IT" sz="1600" b="1" dirty="0">
-                <a:latin typeface="Courier" pitchFamily="2" charset="0"/>
-                <a:ea typeface="Palatino" pitchFamily="2" charset="77"/>
+                <a:latin typeface="Menlo" panose="020B0609030804020204" pitchFamily="49" charset="0"/>
+                <a:ea typeface="Menlo" panose="020B0609030804020204" pitchFamily="49" charset="0"/>
+                <a:cs typeface="Menlo" panose="020B0609030804020204" pitchFamily="49" charset="0"/>
               </a:rPr>
               <a:t>if(c1){</a:t>
             </a:r>
@@ -14861,8 +15853,9 @@
             </a:pPr>
             <a:r>
               <a:rPr lang="en-IT" sz="1600" b="1" dirty="0">
-                <a:latin typeface="Courier" pitchFamily="2" charset="0"/>
-                <a:ea typeface="Palatino" pitchFamily="2" charset="77"/>
+                <a:latin typeface="Menlo" panose="020B0609030804020204" pitchFamily="49" charset="0"/>
+                <a:ea typeface="Menlo" panose="020B0609030804020204" pitchFamily="49" charset="0"/>
+                <a:cs typeface="Menlo" panose="020B0609030804020204" pitchFamily="49" charset="0"/>
               </a:rPr>
               <a:t>  run this if c1 is true;</a:t>
             </a:r>
@@ -14873,8 +15866,9 @@
             </a:pPr>
             <a:r>
               <a:rPr lang="en-IT" sz="1600" b="1" dirty="0">
-                <a:latin typeface="Courier" pitchFamily="2" charset="0"/>
-                <a:ea typeface="Palatino" pitchFamily="2" charset="77"/>
+                <a:latin typeface="Menlo" panose="020B0609030804020204" pitchFamily="49" charset="0"/>
+                <a:ea typeface="Menlo" panose="020B0609030804020204" pitchFamily="49" charset="0"/>
+                <a:cs typeface="Menlo" panose="020B0609030804020204" pitchFamily="49" charset="0"/>
               </a:rPr>
               <a:t>} else if(c2){</a:t>
             </a:r>
@@ -14885,8 +15879,9 @@
             </a:pPr>
             <a:r>
               <a:rPr lang="en-IT" sz="1600" b="1" dirty="0">
-                <a:latin typeface="Courier" pitchFamily="2" charset="0"/>
-                <a:ea typeface="Palatino" pitchFamily="2" charset="77"/>
+                <a:latin typeface="Menlo" panose="020B0609030804020204" pitchFamily="49" charset="0"/>
+                <a:ea typeface="Menlo" panose="020B0609030804020204" pitchFamily="49" charset="0"/>
+                <a:cs typeface="Menlo" panose="020B0609030804020204" pitchFamily="49" charset="0"/>
               </a:rPr>
               <a:t>  run this if c2 is true;</a:t>
             </a:r>
@@ -14897,8 +15892,9 @@
             </a:pPr>
             <a:r>
               <a:rPr lang="en-IT" sz="1600" b="1" dirty="0">
-                <a:latin typeface="Courier" pitchFamily="2" charset="0"/>
-                <a:ea typeface="Palatino" pitchFamily="2" charset="77"/>
+                <a:latin typeface="Menlo" panose="020B0609030804020204" pitchFamily="49" charset="0"/>
+                <a:ea typeface="Menlo" panose="020B0609030804020204" pitchFamily="49" charset="0"/>
+                <a:cs typeface="Menlo" panose="020B0609030804020204" pitchFamily="49" charset="0"/>
               </a:rPr>
               <a:t>} else {</a:t>
             </a:r>
@@ -14909,8 +15905,9 @@
             </a:pPr>
             <a:r>
               <a:rPr lang="en-IT" sz="1600" b="1" dirty="0">
-                <a:latin typeface="Courier" pitchFamily="2" charset="0"/>
-                <a:ea typeface="Palatino" pitchFamily="2" charset="77"/>
+                <a:latin typeface="Menlo" panose="020B0609030804020204" pitchFamily="49" charset="0"/>
+                <a:ea typeface="Menlo" panose="020B0609030804020204" pitchFamily="49" charset="0"/>
+                <a:cs typeface="Menlo" panose="020B0609030804020204" pitchFamily="49" charset="0"/>
               </a:rPr>
               <a:t>  run this otherwise;</a:t>
             </a:r>
@@ -14921,14 +15918,16 @@
             </a:pPr>
             <a:r>
               <a:rPr lang="en-IT" sz="1600" b="1" dirty="0">
-                <a:latin typeface="Courier" pitchFamily="2" charset="0"/>
-                <a:ea typeface="Palatino" pitchFamily="2" charset="77"/>
+                <a:latin typeface="Menlo" panose="020B0609030804020204" pitchFamily="49" charset="0"/>
+                <a:ea typeface="Menlo" panose="020B0609030804020204" pitchFamily="49" charset="0"/>
+                <a:cs typeface="Menlo" panose="020B0609030804020204" pitchFamily="49" charset="0"/>
               </a:rPr>
               <a:t>}</a:t>
             </a:r>
             <a:endParaRPr lang="en-IT" sz="1600" dirty="0">
-              <a:latin typeface="Courier" pitchFamily="2" charset="0"/>
-              <a:ea typeface="Palatino" pitchFamily="2" charset="77"/>
+              <a:latin typeface="Menlo" panose="020B0609030804020204" pitchFamily="49" charset="0"/>
+              <a:ea typeface="Menlo" panose="020B0609030804020204" pitchFamily="49" charset="0"/>
+              <a:cs typeface="Menlo" panose="020B0609030804020204" pitchFamily="49" charset="0"/>
             </a:endParaRPr>
           </a:p>
         </p:txBody>
@@ -15055,19 +16054,25 @@
             </a:pPr>
             <a:r>
               <a:rPr lang="en-GB" dirty="0">
-                <a:latin typeface="Courier" pitchFamily="2" charset="0"/>
+                <a:latin typeface="Menlo" panose="020B0609030804020204" pitchFamily="49" charset="0"/>
+                <a:ea typeface="Menlo" panose="020B0609030804020204" pitchFamily="49" charset="0"/>
+                <a:cs typeface="Menlo" panose="020B0609030804020204" pitchFamily="49" charset="0"/>
               </a:rPr>
               <a:t>void main(List&lt;String&gt; </a:t>
             </a:r>
             <a:r>
               <a:rPr lang="en-GB" dirty="0" err="1">
-                <a:latin typeface="Courier" pitchFamily="2" charset="0"/>
+                <a:latin typeface="Menlo" panose="020B0609030804020204" pitchFamily="49" charset="0"/>
+                <a:ea typeface="Menlo" panose="020B0609030804020204" pitchFamily="49" charset="0"/>
+                <a:cs typeface="Menlo" panose="020B0609030804020204" pitchFamily="49" charset="0"/>
               </a:rPr>
               <a:t>args</a:t>
             </a:r>
             <a:r>
               <a:rPr lang="en-GB" dirty="0">
-                <a:latin typeface="Courier" pitchFamily="2" charset="0"/>
+                <a:latin typeface="Menlo" panose="020B0609030804020204" pitchFamily="49" charset="0"/>
+                <a:ea typeface="Menlo" panose="020B0609030804020204" pitchFamily="49" charset="0"/>
+                <a:cs typeface="Menlo" panose="020B0609030804020204" pitchFamily="49" charset="0"/>
               </a:rPr>
               <a:t>) {</a:t>
             </a:r>
@@ -15077,7 +16082,9 @@
               <a:buNone/>
             </a:pPr>
             <a:endParaRPr lang="en-GB" dirty="0">
-              <a:latin typeface="Courier" pitchFamily="2" charset="0"/>
+              <a:latin typeface="Menlo" panose="020B0609030804020204" pitchFamily="49" charset="0"/>
+              <a:ea typeface="Menlo" panose="020B0609030804020204" pitchFamily="49" charset="0"/>
+              <a:cs typeface="Menlo" panose="020B0609030804020204" pitchFamily="49" charset="0"/>
             </a:endParaRPr>
           </a:p>
           <a:p>
@@ -15086,7 +16093,9 @@
             </a:pPr>
             <a:r>
               <a:rPr lang="en-GB" dirty="0">
-                <a:latin typeface="Courier" pitchFamily="2" charset="0"/>
+                <a:latin typeface="Menlo" panose="020B0609030804020204" pitchFamily="49" charset="0"/>
+                <a:ea typeface="Menlo" panose="020B0609030804020204" pitchFamily="49" charset="0"/>
+                <a:cs typeface="Menlo" panose="020B0609030804020204" pitchFamily="49" charset="0"/>
               </a:rPr>
               <a:t>//The following will print</a:t>
             </a:r>
@@ -15097,7 +16106,9 @@
             </a:pPr>
             <a:r>
               <a:rPr lang="en-GB" dirty="0">
-                <a:latin typeface="Courier" pitchFamily="2" charset="0"/>
+                <a:latin typeface="Menlo" panose="020B0609030804020204" pitchFamily="49" charset="0"/>
+                <a:ea typeface="Menlo" panose="020B0609030804020204" pitchFamily="49" charset="0"/>
+                <a:cs typeface="Menlo" panose="020B0609030804020204" pitchFamily="49" charset="0"/>
               </a:rPr>
               <a:t>//1</a:t>
             </a:r>
@@ -15108,7 +16119,9 @@
             </a:pPr>
             <a:r>
               <a:rPr lang="en-GB" dirty="0">
-                <a:latin typeface="Courier" pitchFamily="2" charset="0"/>
+                <a:latin typeface="Menlo" panose="020B0609030804020204" pitchFamily="49" charset="0"/>
+                <a:ea typeface="Menlo" panose="020B0609030804020204" pitchFamily="49" charset="0"/>
+                <a:cs typeface="Menlo" panose="020B0609030804020204" pitchFamily="49" charset="0"/>
               </a:rPr>
               <a:t>//2</a:t>
             </a:r>
@@ -15119,7 +16132,9 @@
             </a:pPr>
             <a:r>
               <a:rPr lang="en-GB" dirty="0">
-                <a:latin typeface="Courier" pitchFamily="2" charset="0"/>
+                <a:latin typeface="Menlo" panose="020B0609030804020204" pitchFamily="49" charset="0"/>
+                <a:ea typeface="Menlo" panose="020B0609030804020204" pitchFamily="49" charset="0"/>
+                <a:cs typeface="Menlo" panose="020B0609030804020204" pitchFamily="49" charset="0"/>
               </a:rPr>
               <a:t>//3</a:t>
             </a:r>
@@ -15130,7 +16145,9 @@
             </a:pPr>
             <a:r>
               <a:rPr lang="en-GB" dirty="0">
-                <a:latin typeface="Courier" pitchFamily="2" charset="0"/>
+                <a:latin typeface="Menlo" panose="020B0609030804020204" pitchFamily="49" charset="0"/>
+                <a:ea typeface="Menlo" panose="020B0609030804020204" pitchFamily="49" charset="0"/>
+                <a:cs typeface="Menlo" panose="020B0609030804020204" pitchFamily="49" charset="0"/>
               </a:rPr>
               <a:t>var list = [1,2,3];</a:t>
             </a:r>
@@ -15141,67 +16158,89 @@
             </a:pPr>
             <a:r>
               <a:rPr lang="en-GB" b="1" dirty="0">
-                <a:latin typeface="Courier" pitchFamily="2" charset="0"/>
+                <a:latin typeface="Menlo" panose="020B0609030804020204" pitchFamily="49" charset="0"/>
+                <a:ea typeface="Menlo" panose="020B0609030804020204" pitchFamily="49" charset="0"/>
+                <a:cs typeface="Menlo" panose="020B0609030804020204" pitchFamily="49" charset="0"/>
               </a:rPr>
               <a:t>for (</a:t>
             </a:r>
             <a:r>
               <a:rPr lang="en-GB" dirty="0">
-                <a:latin typeface="Courier" pitchFamily="2" charset="0"/>
+                <a:latin typeface="Menlo" panose="020B0609030804020204" pitchFamily="49" charset="0"/>
+                <a:ea typeface="Menlo" panose="020B0609030804020204" pitchFamily="49" charset="0"/>
+                <a:cs typeface="Menlo" panose="020B0609030804020204" pitchFamily="49" charset="0"/>
               </a:rPr>
               <a:t>var </a:t>
             </a:r>
             <a:r>
               <a:rPr lang="en-GB" dirty="0" err="1">
-                <a:latin typeface="Courier" pitchFamily="2" charset="0"/>
+                <a:latin typeface="Menlo" panose="020B0609030804020204" pitchFamily="49" charset="0"/>
+                <a:ea typeface="Menlo" panose="020B0609030804020204" pitchFamily="49" charset="0"/>
+                <a:cs typeface="Menlo" panose="020B0609030804020204" pitchFamily="49" charset="0"/>
               </a:rPr>
               <a:t>i</a:t>
             </a:r>
             <a:r>
               <a:rPr lang="en-GB" dirty="0">
-                <a:latin typeface="Courier" pitchFamily="2" charset="0"/>
+                <a:latin typeface="Menlo" panose="020B0609030804020204" pitchFamily="49" charset="0"/>
+                <a:ea typeface="Menlo" panose="020B0609030804020204" pitchFamily="49" charset="0"/>
+                <a:cs typeface="Menlo" panose="020B0609030804020204" pitchFamily="49" charset="0"/>
               </a:rPr>
               <a:t> = 0; </a:t>
             </a:r>
             <a:r>
               <a:rPr lang="en-GB" dirty="0" err="1">
-                <a:latin typeface="Courier" pitchFamily="2" charset="0"/>
+                <a:latin typeface="Menlo" panose="020B0609030804020204" pitchFamily="49" charset="0"/>
+                <a:ea typeface="Menlo" panose="020B0609030804020204" pitchFamily="49" charset="0"/>
+                <a:cs typeface="Menlo" panose="020B0609030804020204" pitchFamily="49" charset="0"/>
               </a:rPr>
               <a:t>i</a:t>
             </a:r>
             <a:r>
               <a:rPr lang="en-GB" dirty="0">
-                <a:latin typeface="Courier" pitchFamily="2" charset="0"/>
+                <a:latin typeface="Menlo" panose="020B0609030804020204" pitchFamily="49" charset="0"/>
+                <a:ea typeface="Menlo" panose="020B0609030804020204" pitchFamily="49" charset="0"/>
+                <a:cs typeface="Menlo" panose="020B0609030804020204" pitchFamily="49" charset="0"/>
               </a:rPr>
               <a:t> &lt; </a:t>
             </a:r>
             <a:r>
               <a:rPr lang="en-GB" dirty="0" err="1">
-                <a:latin typeface="Courier" pitchFamily="2" charset="0"/>
+                <a:latin typeface="Menlo" panose="020B0609030804020204" pitchFamily="49" charset="0"/>
+                <a:ea typeface="Menlo" panose="020B0609030804020204" pitchFamily="49" charset="0"/>
+                <a:cs typeface="Menlo" panose="020B0609030804020204" pitchFamily="49" charset="0"/>
               </a:rPr>
               <a:t>list.length</a:t>
             </a:r>
             <a:r>
               <a:rPr lang="en-GB" dirty="0">
-                <a:latin typeface="Courier" pitchFamily="2" charset="0"/>
+                <a:latin typeface="Menlo" panose="020B0609030804020204" pitchFamily="49" charset="0"/>
+                <a:ea typeface="Menlo" panose="020B0609030804020204" pitchFamily="49" charset="0"/>
+                <a:cs typeface="Menlo" panose="020B0609030804020204" pitchFamily="49" charset="0"/>
               </a:rPr>
               <a:t>; </a:t>
             </a:r>
             <a:r>
               <a:rPr lang="en-GB" dirty="0" err="1">
-                <a:latin typeface="Courier" pitchFamily="2" charset="0"/>
+                <a:latin typeface="Menlo" panose="020B0609030804020204" pitchFamily="49" charset="0"/>
+                <a:ea typeface="Menlo" panose="020B0609030804020204" pitchFamily="49" charset="0"/>
+                <a:cs typeface="Menlo" panose="020B0609030804020204" pitchFamily="49" charset="0"/>
               </a:rPr>
               <a:t>i</a:t>
             </a:r>
             <a:r>
               <a:rPr lang="en-GB" dirty="0">
-                <a:latin typeface="Courier" pitchFamily="2" charset="0"/>
+                <a:latin typeface="Menlo" panose="020B0609030804020204" pitchFamily="49" charset="0"/>
+                <a:ea typeface="Menlo" panose="020B0609030804020204" pitchFamily="49" charset="0"/>
+                <a:cs typeface="Menlo" panose="020B0609030804020204" pitchFamily="49" charset="0"/>
               </a:rPr>
               <a:t>++</a:t>
             </a:r>
             <a:r>
               <a:rPr lang="en-GB" b="1" dirty="0">
-                <a:latin typeface="Courier" pitchFamily="2" charset="0"/>
+                <a:latin typeface="Menlo" panose="020B0609030804020204" pitchFamily="49" charset="0"/>
+                <a:ea typeface="Menlo" panose="020B0609030804020204" pitchFamily="49" charset="0"/>
+                <a:cs typeface="Menlo" panose="020B0609030804020204" pitchFamily="49" charset="0"/>
               </a:rPr>
               <a:t>) {</a:t>
             </a:r>
@@ -15212,19 +16251,25 @@
             </a:pPr>
             <a:r>
               <a:rPr lang="en-GB" dirty="0">
-                <a:latin typeface="Courier" pitchFamily="2" charset="0"/>
+                <a:latin typeface="Menlo" panose="020B0609030804020204" pitchFamily="49" charset="0"/>
+                <a:ea typeface="Menlo" panose="020B0609030804020204" pitchFamily="49" charset="0"/>
+                <a:cs typeface="Menlo" panose="020B0609030804020204" pitchFamily="49" charset="0"/>
               </a:rPr>
               <a:t>	print(list[</a:t>
             </a:r>
             <a:r>
               <a:rPr lang="en-GB" dirty="0" err="1">
-                <a:latin typeface="Courier" pitchFamily="2" charset="0"/>
+                <a:latin typeface="Menlo" panose="020B0609030804020204" pitchFamily="49" charset="0"/>
+                <a:ea typeface="Menlo" panose="020B0609030804020204" pitchFamily="49" charset="0"/>
+                <a:cs typeface="Menlo" panose="020B0609030804020204" pitchFamily="49" charset="0"/>
               </a:rPr>
               <a:t>i</a:t>
             </a:r>
             <a:r>
               <a:rPr lang="en-GB" dirty="0">
-                <a:latin typeface="Courier" pitchFamily="2" charset="0"/>
+                <a:latin typeface="Menlo" panose="020B0609030804020204" pitchFamily="49" charset="0"/>
+                <a:ea typeface="Menlo" panose="020B0609030804020204" pitchFamily="49" charset="0"/>
+                <a:cs typeface="Menlo" panose="020B0609030804020204" pitchFamily="49" charset="0"/>
               </a:rPr>
               <a:t>]);</a:t>
             </a:r>
@@ -15235,7 +16280,9 @@
             </a:pPr>
             <a:r>
               <a:rPr lang="en-GB" b="1" dirty="0">
-                <a:latin typeface="Courier" pitchFamily="2" charset="0"/>
+                <a:latin typeface="Menlo" panose="020B0609030804020204" pitchFamily="49" charset="0"/>
+                <a:ea typeface="Menlo" panose="020B0609030804020204" pitchFamily="49" charset="0"/>
+                <a:cs typeface="Menlo" panose="020B0609030804020204" pitchFamily="49" charset="0"/>
               </a:rPr>
               <a:t>}//for</a:t>
             </a:r>
@@ -15246,12 +16293,16 @@
             </a:pPr>
             <a:br>
               <a:rPr lang="en-GB" dirty="0">
-                <a:latin typeface="Courier" pitchFamily="2" charset="0"/>
+                <a:latin typeface="Menlo" panose="020B0609030804020204" pitchFamily="49" charset="0"/>
+                <a:ea typeface="Menlo" panose="020B0609030804020204" pitchFamily="49" charset="0"/>
+                <a:cs typeface="Menlo" panose="020B0609030804020204" pitchFamily="49" charset="0"/>
               </a:rPr>
             </a:br>
             <a:r>
               <a:rPr lang="en-GB" dirty="0">
-                <a:latin typeface="Courier" pitchFamily="2" charset="0"/>
+                <a:latin typeface="Menlo" panose="020B0609030804020204" pitchFamily="49" charset="0"/>
+                <a:ea typeface="Menlo" panose="020B0609030804020204" pitchFamily="49" charset="0"/>
+                <a:cs typeface="Menlo" panose="020B0609030804020204" pitchFamily="49" charset="0"/>
               </a:rPr>
               <a:t>//The following will print</a:t>
             </a:r>
@@ -15262,7 +16313,9 @@
             </a:pPr>
             <a:r>
               <a:rPr lang="en-GB" dirty="0">
-                <a:latin typeface="Courier" pitchFamily="2" charset="0"/>
+                <a:latin typeface="Menlo" panose="020B0609030804020204" pitchFamily="49" charset="0"/>
+                <a:ea typeface="Menlo" panose="020B0609030804020204" pitchFamily="49" charset="0"/>
+                <a:cs typeface="Menlo" panose="020B0609030804020204" pitchFamily="49" charset="0"/>
               </a:rPr>
               <a:t>//1</a:t>
             </a:r>
@@ -15273,7 +16326,9 @@
             </a:pPr>
             <a:r>
               <a:rPr lang="en-GB" dirty="0">
-                <a:latin typeface="Courier" pitchFamily="2" charset="0"/>
+                <a:latin typeface="Menlo" panose="020B0609030804020204" pitchFamily="49" charset="0"/>
+                <a:ea typeface="Menlo" panose="020B0609030804020204" pitchFamily="49" charset="0"/>
+                <a:cs typeface="Menlo" panose="020B0609030804020204" pitchFamily="49" charset="0"/>
               </a:rPr>
               <a:t>//2</a:t>
             </a:r>
@@ -15284,7 +16339,9 @@
             </a:pPr>
             <a:r>
               <a:rPr lang="en-GB" dirty="0">
-                <a:latin typeface="Courier" pitchFamily="2" charset="0"/>
+                <a:latin typeface="Menlo" panose="020B0609030804020204" pitchFamily="49" charset="0"/>
+                <a:ea typeface="Menlo" panose="020B0609030804020204" pitchFamily="49" charset="0"/>
+                <a:cs typeface="Menlo" panose="020B0609030804020204" pitchFamily="49" charset="0"/>
               </a:rPr>
               <a:t>//3</a:t>
             </a:r>
@@ -15295,43 +16352,57 @@
             </a:pPr>
             <a:r>
               <a:rPr lang="en-GB" b="1" dirty="0">
-                <a:latin typeface="Courier" pitchFamily="2" charset="0"/>
+                <a:latin typeface="Menlo" panose="020B0609030804020204" pitchFamily="49" charset="0"/>
+                <a:ea typeface="Menlo" panose="020B0609030804020204" pitchFamily="49" charset="0"/>
+                <a:cs typeface="Menlo" panose="020B0609030804020204" pitchFamily="49" charset="0"/>
               </a:rPr>
               <a:t>for (</a:t>
             </a:r>
             <a:r>
               <a:rPr lang="en-GB" dirty="0">
-                <a:latin typeface="Courier" pitchFamily="2" charset="0"/>
+                <a:latin typeface="Menlo" panose="020B0609030804020204" pitchFamily="49" charset="0"/>
+                <a:ea typeface="Menlo" panose="020B0609030804020204" pitchFamily="49" charset="0"/>
+                <a:cs typeface="Menlo" panose="020B0609030804020204" pitchFamily="49" charset="0"/>
               </a:rPr>
               <a:t>var </a:t>
             </a:r>
             <a:r>
               <a:rPr lang="en-GB" b="1" dirty="0">
-                <a:latin typeface="Courier" pitchFamily="2" charset="0"/>
+                <a:latin typeface="Menlo" panose="020B0609030804020204" pitchFamily="49" charset="0"/>
+                <a:ea typeface="Menlo" panose="020B0609030804020204" pitchFamily="49" charset="0"/>
+                <a:cs typeface="Menlo" panose="020B0609030804020204" pitchFamily="49" charset="0"/>
               </a:rPr>
               <a:t>item</a:t>
             </a:r>
             <a:r>
               <a:rPr lang="en-GB" dirty="0">
-                <a:latin typeface="Courier" pitchFamily="2" charset="0"/>
+                <a:latin typeface="Menlo" panose="020B0609030804020204" pitchFamily="49" charset="0"/>
+                <a:ea typeface="Menlo" panose="020B0609030804020204" pitchFamily="49" charset="0"/>
+                <a:cs typeface="Menlo" panose="020B0609030804020204" pitchFamily="49" charset="0"/>
               </a:rPr>
               <a:t> </a:t>
             </a:r>
             <a:r>
               <a:rPr lang="en-GB" b="1" dirty="0">
-                <a:latin typeface="Courier" pitchFamily="2" charset="0"/>
+                <a:latin typeface="Menlo" panose="020B0609030804020204" pitchFamily="49" charset="0"/>
+                <a:ea typeface="Menlo" panose="020B0609030804020204" pitchFamily="49" charset="0"/>
+                <a:cs typeface="Menlo" panose="020B0609030804020204" pitchFamily="49" charset="0"/>
               </a:rPr>
               <a:t>in</a:t>
             </a:r>
             <a:r>
               <a:rPr lang="en-GB" dirty="0">
-                <a:latin typeface="Courier" pitchFamily="2" charset="0"/>
+                <a:latin typeface="Menlo" panose="020B0609030804020204" pitchFamily="49" charset="0"/>
+                <a:ea typeface="Menlo" panose="020B0609030804020204" pitchFamily="49" charset="0"/>
+                <a:cs typeface="Menlo" panose="020B0609030804020204" pitchFamily="49" charset="0"/>
               </a:rPr>
               <a:t> list</a:t>
             </a:r>
             <a:r>
               <a:rPr lang="en-GB" b="1" dirty="0">
-                <a:latin typeface="Courier" pitchFamily="2" charset="0"/>
+                <a:latin typeface="Menlo" panose="020B0609030804020204" pitchFamily="49" charset="0"/>
+                <a:ea typeface="Menlo" panose="020B0609030804020204" pitchFamily="49" charset="0"/>
+                <a:cs typeface="Menlo" panose="020B0609030804020204" pitchFamily="49" charset="0"/>
               </a:rPr>
               <a:t>) {</a:t>
             </a:r>
@@ -15342,7 +16413,9 @@
             </a:pPr>
             <a:r>
               <a:rPr lang="en-GB" dirty="0">
-                <a:latin typeface="Courier" pitchFamily="2" charset="0"/>
+                <a:latin typeface="Menlo" panose="020B0609030804020204" pitchFamily="49" charset="0"/>
+                <a:ea typeface="Menlo" panose="020B0609030804020204" pitchFamily="49" charset="0"/>
+                <a:cs typeface="Menlo" panose="020B0609030804020204" pitchFamily="49" charset="0"/>
               </a:rPr>
               <a:t>	print(item);</a:t>
             </a:r>
@@ -15353,7 +16426,9 @@
             </a:pPr>
             <a:r>
               <a:rPr lang="en-GB" b="1" dirty="0">
-                <a:latin typeface="Courier" pitchFamily="2" charset="0"/>
+                <a:latin typeface="Menlo" panose="020B0609030804020204" pitchFamily="49" charset="0"/>
+                <a:ea typeface="Menlo" panose="020B0609030804020204" pitchFamily="49" charset="0"/>
+                <a:cs typeface="Menlo" panose="020B0609030804020204" pitchFamily="49" charset="0"/>
               </a:rPr>
               <a:t>}//for</a:t>
             </a:r>
@@ -15364,11 +16439,15 @@
             </a:pPr>
             <a:br>
               <a:rPr lang="en-GB" dirty="0">
-                <a:latin typeface="Courier" pitchFamily="2" charset="0"/>
+                <a:latin typeface="Menlo" panose="020B0609030804020204" pitchFamily="49" charset="0"/>
+                <a:ea typeface="Menlo" panose="020B0609030804020204" pitchFamily="49" charset="0"/>
+                <a:cs typeface="Menlo" panose="020B0609030804020204" pitchFamily="49" charset="0"/>
               </a:rPr>
             </a:br>
             <a:endParaRPr lang="en-GB" dirty="0">
-              <a:latin typeface="Courier" pitchFamily="2" charset="0"/>
+              <a:latin typeface="Menlo" panose="020B0609030804020204" pitchFamily="49" charset="0"/>
+              <a:ea typeface="Menlo" panose="020B0609030804020204" pitchFamily="49" charset="0"/>
+              <a:cs typeface="Menlo" panose="020B0609030804020204" pitchFamily="49" charset="0"/>
             </a:endParaRPr>
           </a:p>
           <a:p>
@@ -15377,7 +16456,9 @@
             </a:pPr>
             <a:r>
               <a:rPr lang="en-GB" dirty="0">
-                <a:latin typeface="Courier" pitchFamily="2" charset="0"/>
+                <a:latin typeface="Menlo" panose="020B0609030804020204" pitchFamily="49" charset="0"/>
+                <a:ea typeface="Menlo" panose="020B0609030804020204" pitchFamily="49" charset="0"/>
+                <a:cs typeface="Menlo" panose="020B0609030804020204" pitchFamily="49" charset="0"/>
               </a:rPr>
               <a:t>}//main</a:t>
             </a:r>
@@ -15387,7 +16468,9 @@
               <a:buNone/>
             </a:pPr>
             <a:endParaRPr lang="en-GB" dirty="0">
-              <a:latin typeface="Courier" pitchFamily="2" charset="0"/>
+              <a:latin typeface="Menlo" panose="020B0609030804020204" pitchFamily="49" charset="0"/>
+              <a:ea typeface="Menlo" panose="020B0609030804020204" pitchFamily="49" charset="0"/>
+              <a:cs typeface="Menlo" panose="020B0609030804020204" pitchFamily="49" charset="0"/>
             </a:endParaRPr>
           </a:p>
           <a:p>
@@ -15395,7 +16478,9 @@
               <a:buNone/>
             </a:pPr>
             <a:endParaRPr lang="en-GB" dirty="0">
-              <a:latin typeface="Courier" pitchFamily="2" charset="0"/>
+              <a:latin typeface="Menlo" panose="020B0609030804020204" pitchFamily="49" charset="0"/>
+              <a:ea typeface="Menlo" panose="020B0609030804020204" pitchFamily="49" charset="0"/>
+              <a:cs typeface="Menlo" panose="020B0609030804020204" pitchFamily="49" charset="0"/>
             </a:endParaRPr>
           </a:p>
         </p:txBody>
@@ -15522,19 +16607,25 @@
             </a:pPr>
             <a:r>
               <a:rPr lang="en-GB" dirty="0">
-                <a:latin typeface="Courier" pitchFamily="2" charset="0"/>
+                <a:latin typeface="Menlo" panose="020B0609030804020204" pitchFamily="49" charset="0"/>
+                <a:ea typeface="Menlo" panose="020B0609030804020204" pitchFamily="49" charset="0"/>
+                <a:cs typeface="Menlo" panose="020B0609030804020204" pitchFamily="49" charset="0"/>
               </a:rPr>
               <a:t>void main(List&lt;String&gt; </a:t>
             </a:r>
             <a:r>
               <a:rPr lang="en-GB" dirty="0" err="1">
-                <a:latin typeface="Courier" pitchFamily="2" charset="0"/>
+                <a:latin typeface="Menlo" panose="020B0609030804020204" pitchFamily="49" charset="0"/>
+                <a:ea typeface="Menlo" panose="020B0609030804020204" pitchFamily="49" charset="0"/>
+                <a:cs typeface="Menlo" panose="020B0609030804020204" pitchFamily="49" charset="0"/>
               </a:rPr>
               <a:t>args</a:t>
             </a:r>
             <a:r>
               <a:rPr lang="en-GB" dirty="0">
-                <a:latin typeface="Courier" pitchFamily="2" charset="0"/>
+                <a:latin typeface="Menlo" panose="020B0609030804020204" pitchFamily="49" charset="0"/>
+                <a:ea typeface="Menlo" panose="020B0609030804020204" pitchFamily="49" charset="0"/>
+                <a:cs typeface="Menlo" panose="020B0609030804020204" pitchFamily="49" charset="0"/>
               </a:rPr>
               <a:t>) {</a:t>
             </a:r>
@@ -15544,7 +16635,9 @@
               <a:buNone/>
             </a:pPr>
             <a:endParaRPr lang="en-GB" dirty="0">
-              <a:latin typeface="Courier" pitchFamily="2" charset="0"/>
+              <a:latin typeface="Menlo" panose="020B0609030804020204" pitchFamily="49" charset="0"/>
+              <a:ea typeface="Menlo" panose="020B0609030804020204" pitchFamily="49" charset="0"/>
+              <a:cs typeface="Menlo" panose="020B0609030804020204" pitchFamily="49" charset="0"/>
             </a:endParaRPr>
           </a:p>
           <a:p>
@@ -15553,7 +16646,9 @@
             </a:pPr>
             <a:r>
               <a:rPr lang="en-GB" dirty="0">
-                <a:latin typeface="Courier" pitchFamily="2" charset="0"/>
+                <a:latin typeface="Menlo" panose="020B0609030804020204" pitchFamily="49" charset="0"/>
+                <a:ea typeface="Menlo" panose="020B0609030804020204" pitchFamily="49" charset="0"/>
+                <a:cs typeface="Menlo" panose="020B0609030804020204" pitchFamily="49" charset="0"/>
               </a:rPr>
               <a:t>//The following will print</a:t>
             </a:r>
@@ -15564,7 +16659,9 @@
             </a:pPr>
             <a:r>
               <a:rPr lang="en-GB" dirty="0">
-                <a:latin typeface="Courier" pitchFamily="2" charset="0"/>
+                <a:latin typeface="Menlo" panose="020B0609030804020204" pitchFamily="49" charset="0"/>
+                <a:ea typeface="Menlo" panose="020B0609030804020204" pitchFamily="49" charset="0"/>
+                <a:cs typeface="Menlo" panose="020B0609030804020204" pitchFamily="49" charset="0"/>
               </a:rPr>
               <a:t>//3</a:t>
             </a:r>
@@ -15575,7 +16672,9 @@
             </a:pPr>
             <a:r>
               <a:rPr lang="en-GB" dirty="0">
-                <a:latin typeface="Courier" pitchFamily="2" charset="0"/>
+                <a:latin typeface="Menlo" panose="020B0609030804020204" pitchFamily="49" charset="0"/>
+                <a:ea typeface="Menlo" panose="020B0609030804020204" pitchFamily="49" charset="0"/>
+                <a:cs typeface="Menlo" panose="020B0609030804020204" pitchFamily="49" charset="0"/>
               </a:rPr>
               <a:t>//2</a:t>
             </a:r>
@@ -15586,7 +16685,9 @@
             </a:pPr>
             <a:r>
               <a:rPr lang="en-GB" dirty="0">
-                <a:latin typeface="Courier" pitchFamily="2" charset="0"/>
+                <a:latin typeface="Menlo" panose="020B0609030804020204" pitchFamily="49" charset="0"/>
+                <a:ea typeface="Menlo" panose="020B0609030804020204" pitchFamily="49" charset="0"/>
+                <a:cs typeface="Menlo" panose="020B0609030804020204" pitchFamily="49" charset="0"/>
               </a:rPr>
               <a:t>//1</a:t>
             </a:r>
@@ -15597,7 +16698,9 @@
             </a:pPr>
             <a:r>
               <a:rPr lang="en-GB" dirty="0">
-                <a:latin typeface="Courier" pitchFamily="2" charset="0"/>
+                <a:latin typeface="Menlo" panose="020B0609030804020204" pitchFamily="49" charset="0"/>
+                <a:ea typeface="Menlo" panose="020B0609030804020204" pitchFamily="49" charset="0"/>
+                <a:cs typeface="Menlo" panose="020B0609030804020204" pitchFamily="49" charset="0"/>
               </a:rPr>
               <a:t>var n = 3;</a:t>
             </a:r>
@@ -15608,19 +16711,25 @@
             </a:pPr>
             <a:r>
               <a:rPr lang="en-GB" b="1" dirty="0">
-                <a:latin typeface="Courier" pitchFamily="2" charset="0"/>
+                <a:latin typeface="Menlo" panose="020B0609030804020204" pitchFamily="49" charset="0"/>
+                <a:ea typeface="Menlo" panose="020B0609030804020204" pitchFamily="49" charset="0"/>
+                <a:cs typeface="Menlo" panose="020B0609030804020204" pitchFamily="49" charset="0"/>
               </a:rPr>
               <a:t>while(</a:t>
             </a:r>
             <a:r>
               <a:rPr lang="en-GB" dirty="0">
-                <a:latin typeface="Courier" pitchFamily="2" charset="0"/>
+                <a:latin typeface="Menlo" panose="020B0609030804020204" pitchFamily="49" charset="0"/>
+                <a:ea typeface="Menlo" panose="020B0609030804020204" pitchFamily="49" charset="0"/>
+                <a:cs typeface="Menlo" panose="020B0609030804020204" pitchFamily="49" charset="0"/>
               </a:rPr>
               <a:t>n&gt;0</a:t>
             </a:r>
             <a:r>
               <a:rPr lang="en-GB" b="1" dirty="0">
-                <a:latin typeface="Courier" pitchFamily="2" charset="0"/>
+                <a:latin typeface="Menlo" panose="020B0609030804020204" pitchFamily="49" charset="0"/>
+                <a:ea typeface="Menlo" panose="020B0609030804020204" pitchFamily="49" charset="0"/>
+                <a:cs typeface="Menlo" panose="020B0609030804020204" pitchFamily="49" charset="0"/>
               </a:rPr>
               <a:t>){</a:t>
             </a:r>
@@ -15631,7 +16740,9 @@
             </a:pPr>
             <a:r>
               <a:rPr lang="en-GB" dirty="0">
-                <a:latin typeface="Courier" pitchFamily="2" charset="0"/>
+                <a:latin typeface="Menlo" panose="020B0609030804020204" pitchFamily="49" charset="0"/>
+                <a:ea typeface="Menlo" panose="020B0609030804020204" pitchFamily="49" charset="0"/>
+                <a:cs typeface="Menlo" panose="020B0609030804020204" pitchFamily="49" charset="0"/>
               </a:rPr>
               <a:t>print(n);</a:t>
             </a:r>
@@ -15642,7 +16753,9 @@
             </a:pPr>
             <a:r>
               <a:rPr lang="en-GB" dirty="0">
-                <a:latin typeface="Courier" pitchFamily="2" charset="0"/>
+                <a:latin typeface="Menlo" panose="020B0609030804020204" pitchFamily="49" charset="0"/>
+                <a:ea typeface="Menlo" panose="020B0609030804020204" pitchFamily="49" charset="0"/>
+                <a:cs typeface="Menlo" panose="020B0609030804020204" pitchFamily="49" charset="0"/>
               </a:rPr>
               <a:t>n--;</a:t>
             </a:r>
@@ -15653,7 +16766,9 @@
             </a:pPr>
             <a:r>
               <a:rPr lang="en-GB" b="1" dirty="0">
-                <a:latin typeface="Courier" pitchFamily="2" charset="0"/>
+                <a:latin typeface="Menlo" panose="020B0609030804020204" pitchFamily="49" charset="0"/>
+                <a:ea typeface="Menlo" panose="020B0609030804020204" pitchFamily="49" charset="0"/>
+                <a:cs typeface="Menlo" panose="020B0609030804020204" pitchFamily="49" charset="0"/>
               </a:rPr>
               <a:t>}//while</a:t>
             </a:r>
@@ -15663,7 +16778,9 @@
               <a:buNone/>
             </a:pPr>
             <a:endParaRPr lang="en-GB" dirty="0">
-              <a:latin typeface="Courier" pitchFamily="2" charset="0"/>
+              <a:latin typeface="Menlo" panose="020B0609030804020204" pitchFamily="49" charset="0"/>
+              <a:ea typeface="Menlo" panose="020B0609030804020204" pitchFamily="49" charset="0"/>
+              <a:cs typeface="Menlo" panose="020B0609030804020204" pitchFamily="49" charset="0"/>
             </a:endParaRPr>
           </a:p>
           <a:p>
@@ -15672,7 +16789,9 @@
             </a:pPr>
             <a:r>
               <a:rPr lang="en-GB" dirty="0">
-                <a:latin typeface="Courier" pitchFamily="2" charset="0"/>
+                <a:latin typeface="Menlo" panose="020B0609030804020204" pitchFamily="49" charset="0"/>
+                <a:ea typeface="Menlo" panose="020B0609030804020204" pitchFamily="49" charset="0"/>
+                <a:cs typeface="Menlo" panose="020B0609030804020204" pitchFamily="49" charset="0"/>
               </a:rPr>
               <a:t>}//main</a:t>
             </a:r>
@@ -15682,7 +16801,9 @@
               <a:buNone/>
             </a:pPr>
             <a:endParaRPr lang="en-GB" dirty="0">
-              <a:latin typeface="Courier" pitchFamily="2" charset="0"/>
+              <a:latin typeface="Menlo" panose="020B0609030804020204" pitchFamily="49" charset="0"/>
+              <a:ea typeface="Menlo" panose="020B0609030804020204" pitchFamily="49" charset="0"/>
+              <a:cs typeface="Menlo" panose="020B0609030804020204" pitchFamily="49" charset="0"/>
             </a:endParaRPr>
           </a:p>
           <a:p>
@@ -15690,7 +16811,9 @@
               <a:buNone/>
             </a:pPr>
             <a:endParaRPr lang="en-GB" dirty="0">
-              <a:latin typeface="Courier" pitchFamily="2" charset="0"/>
+              <a:latin typeface="Menlo" panose="020B0609030804020204" pitchFamily="49" charset="0"/>
+              <a:ea typeface="Menlo" panose="020B0609030804020204" pitchFamily="49" charset="0"/>
+              <a:cs typeface="Menlo" panose="020B0609030804020204" pitchFamily="49" charset="0"/>
             </a:endParaRPr>
           </a:p>
         </p:txBody>
@@ -16061,19 +17184,25 @@
             </a:pPr>
             <a:r>
               <a:rPr lang="en-GB" dirty="0">
-                <a:latin typeface="Courier" pitchFamily="2" charset="0"/>
+                <a:latin typeface="Menlo" panose="020B0609030804020204" pitchFamily="49" charset="0"/>
+                <a:ea typeface="Menlo" panose="020B0609030804020204" pitchFamily="49" charset="0"/>
+                <a:cs typeface="Menlo" panose="020B0609030804020204" pitchFamily="49" charset="0"/>
               </a:rPr>
               <a:t>void main(List&lt;String&gt; </a:t>
             </a:r>
             <a:r>
               <a:rPr lang="en-GB" dirty="0" err="1">
-                <a:latin typeface="Courier" pitchFamily="2" charset="0"/>
+                <a:latin typeface="Menlo" panose="020B0609030804020204" pitchFamily="49" charset="0"/>
+                <a:ea typeface="Menlo" panose="020B0609030804020204" pitchFamily="49" charset="0"/>
+                <a:cs typeface="Menlo" panose="020B0609030804020204" pitchFamily="49" charset="0"/>
               </a:rPr>
               <a:t>args</a:t>
             </a:r>
             <a:r>
               <a:rPr lang="en-GB" dirty="0">
-                <a:latin typeface="Courier" pitchFamily="2" charset="0"/>
+                <a:latin typeface="Menlo" panose="020B0609030804020204" pitchFamily="49" charset="0"/>
+                <a:ea typeface="Menlo" panose="020B0609030804020204" pitchFamily="49" charset="0"/>
+                <a:cs typeface="Menlo" panose="020B0609030804020204" pitchFamily="49" charset="0"/>
               </a:rPr>
               <a:t>) {</a:t>
             </a:r>
@@ -16083,7 +17212,9 @@
               <a:buNone/>
             </a:pPr>
             <a:endParaRPr lang="en-GB" dirty="0">
-              <a:latin typeface="Courier" pitchFamily="2" charset="0"/>
+              <a:latin typeface="Menlo" panose="020B0609030804020204" pitchFamily="49" charset="0"/>
+              <a:ea typeface="Menlo" panose="020B0609030804020204" pitchFamily="49" charset="0"/>
+              <a:cs typeface="Menlo" panose="020B0609030804020204" pitchFamily="49" charset="0"/>
             </a:endParaRPr>
           </a:p>
           <a:p>
@@ -16092,7 +17223,9 @@
             </a:pPr>
             <a:r>
               <a:rPr lang="en-GB" dirty="0">
-                <a:latin typeface="Courier" pitchFamily="2" charset="0"/>
+                <a:latin typeface="Menlo" panose="020B0609030804020204" pitchFamily="49" charset="0"/>
+                <a:ea typeface="Menlo" panose="020B0609030804020204" pitchFamily="49" charset="0"/>
+                <a:cs typeface="Menlo" panose="020B0609030804020204" pitchFamily="49" charset="0"/>
               </a:rPr>
               <a:t>//The following will print</a:t>
             </a:r>
@@ -16103,7 +17236,9 @@
             </a:pPr>
             <a:r>
               <a:rPr lang="en-GB" dirty="0">
-                <a:latin typeface="Courier" pitchFamily="2" charset="0"/>
+                <a:latin typeface="Menlo" panose="020B0609030804020204" pitchFamily="49" charset="0"/>
+                <a:ea typeface="Menlo" panose="020B0609030804020204" pitchFamily="49" charset="0"/>
+                <a:cs typeface="Menlo" panose="020B0609030804020204" pitchFamily="49" charset="0"/>
               </a:rPr>
               <a:t>//3</a:t>
             </a:r>
@@ -16114,7 +17249,9 @@
             </a:pPr>
             <a:r>
               <a:rPr lang="en-GB" dirty="0">
-                <a:latin typeface="Courier" pitchFamily="2" charset="0"/>
+                <a:latin typeface="Menlo" panose="020B0609030804020204" pitchFamily="49" charset="0"/>
+                <a:ea typeface="Menlo" panose="020B0609030804020204" pitchFamily="49" charset="0"/>
+                <a:cs typeface="Menlo" panose="020B0609030804020204" pitchFamily="49" charset="0"/>
               </a:rPr>
               <a:t>//2</a:t>
             </a:r>
@@ -16125,7 +17262,9 @@
             </a:pPr>
             <a:r>
               <a:rPr lang="en-GB" dirty="0">
-                <a:latin typeface="Courier" pitchFamily="2" charset="0"/>
+                <a:latin typeface="Menlo" panose="020B0609030804020204" pitchFamily="49" charset="0"/>
+                <a:ea typeface="Menlo" panose="020B0609030804020204" pitchFamily="49" charset="0"/>
+                <a:cs typeface="Menlo" panose="020B0609030804020204" pitchFamily="49" charset="0"/>
               </a:rPr>
               <a:t>//1</a:t>
             </a:r>
@@ -16136,7 +17275,9 @@
             </a:pPr>
             <a:r>
               <a:rPr lang="en-GB" dirty="0">
-                <a:latin typeface="Courier" pitchFamily="2" charset="0"/>
+                <a:latin typeface="Menlo" panose="020B0609030804020204" pitchFamily="49" charset="0"/>
+                <a:ea typeface="Menlo" panose="020B0609030804020204" pitchFamily="49" charset="0"/>
+                <a:cs typeface="Menlo" panose="020B0609030804020204" pitchFamily="49" charset="0"/>
               </a:rPr>
               <a:t>var m = 3;</a:t>
             </a:r>
@@ -16147,7 +17288,9 @@
             </a:pPr>
             <a:r>
               <a:rPr lang="en-GB" b="1" dirty="0">
-                <a:latin typeface="Courier" pitchFamily="2" charset="0"/>
+                <a:latin typeface="Menlo" panose="020B0609030804020204" pitchFamily="49" charset="0"/>
+                <a:ea typeface="Menlo" panose="020B0609030804020204" pitchFamily="49" charset="0"/>
+                <a:cs typeface="Menlo" panose="020B0609030804020204" pitchFamily="49" charset="0"/>
               </a:rPr>
               <a:t>do{</a:t>
             </a:r>
@@ -16158,7 +17301,9 @@
             </a:pPr>
             <a:r>
               <a:rPr lang="en-GB" dirty="0">
-                <a:latin typeface="Courier" pitchFamily="2" charset="0"/>
+                <a:latin typeface="Menlo" panose="020B0609030804020204" pitchFamily="49" charset="0"/>
+                <a:ea typeface="Menlo" panose="020B0609030804020204" pitchFamily="49" charset="0"/>
+                <a:cs typeface="Menlo" panose="020B0609030804020204" pitchFamily="49" charset="0"/>
               </a:rPr>
               <a:t>	print(m);</a:t>
             </a:r>
@@ -16169,7 +17314,9 @@
             </a:pPr>
             <a:r>
               <a:rPr lang="en-GB" dirty="0">
-                <a:latin typeface="Courier" pitchFamily="2" charset="0"/>
+                <a:latin typeface="Menlo" panose="020B0609030804020204" pitchFamily="49" charset="0"/>
+                <a:ea typeface="Menlo" panose="020B0609030804020204" pitchFamily="49" charset="0"/>
+                <a:cs typeface="Menlo" panose="020B0609030804020204" pitchFamily="49" charset="0"/>
               </a:rPr>
               <a:t>	m--;</a:t>
             </a:r>
@@ -16180,19 +17327,25 @@
             </a:pPr>
             <a:r>
               <a:rPr lang="en-GB" b="1" dirty="0">
-                <a:latin typeface="Courier" pitchFamily="2" charset="0"/>
+                <a:latin typeface="Menlo" panose="020B0609030804020204" pitchFamily="49" charset="0"/>
+                <a:ea typeface="Menlo" panose="020B0609030804020204" pitchFamily="49" charset="0"/>
+                <a:cs typeface="Menlo" panose="020B0609030804020204" pitchFamily="49" charset="0"/>
               </a:rPr>
               <a:t>}while(</a:t>
             </a:r>
             <a:r>
               <a:rPr lang="en-GB" dirty="0">
-                <a:latin typeface="Courier" pitchFamily="2" charset="0"/>
+                <a:latin typeface="Menlo" panose="020B0609030804020204" pitchFamily="49" charset="0"/>
+                <a:ea typeface="Menlo" panose="020B0609030804020204" pitchFamily="49" charset="0"/>
+                <a:cs typeface="Menlo" panose="020B0609030804020204" pitchFamily="49" charset="0"/>
               </a:rPr>
               <a:t>m&gt;0</a:t>
             </a:r>
             <a:r>
               <a:rPr lang="en-GB" b="1" dirty="0">
-                <a:latin typeface="Courier" pitchFamily="2" charset="0"/>
+                <a:latin typeface="Menlo" panose="020B0609030804020204" pitchFamily="49" charset="0"/>
+                <a:ea typeface="Menlo" panose="020B0609030804020204" pitchFamily="49" charset="0"/>
+                <a:cs typeface="Menlo" panose="020B0609030804020204" pitchFamily="49" charset="0"/>
               </a:rPr>
               <a:t>);</a:t>
             </a:r>
@@ -16202,7 +17355,9 @@
               <a:buNone/>
             </a:pPr>
             <a:endParaRPr lang="en-GB" dirty="0">
-              <a:latin typeface="Courier" pitchFamily="2" charset="0"/>
+              <a:latin typeface="Menlo" panose="020B0609030804020204" pitchFamily="49" charset="0"/>
+              <a:ea typeface="Menlo" panose="020B0609030804020204" pitchFamily="49" charset="0"/>
+              <a:cs typeface="Menlo" panose="020B0609030804020204" pitchFamily="49" charset="0"/>
             </a:endParaRPr>
           </a:p>
           <a:p>
@@ -16211,7 +17366,9 @@
             </a:pPr>
             <a:r>
               <a:rPr lang="en-GB" dirty="0">
-                <a:latin typeface="Courier" pitchFamily="2" charset="0"/>
+                <a:latin typeface="Menlo" panose="020B0609030804020204" pitchFamily="49" charset="0"/>
+                <a:ea typeface="Menlo" panose="020B0609030804020204" pitchFamily="49" charset="0"/>
+                <a:cs typeface="Menlo" panose="020B0609030804020204" pitchFamily="49" charset="0"/>
               </a:rPr>
               <a:t>}//main</a:t>
             </a:r>
@@ -16221,7 +17378,9 @@
               <a:buNone/>
             </a:pPr>
             <a:endParaRPr lang="en-GB" dirty="0">
-              <a:latin typeface="Courier" pitchFamily="2" charset="0"/>
+              <a:latin typeface="Menlo" panose="020B0609030804020204" pitchFamily="49" charset="0"/>
+              <a:ea typeface="Menlo" panose="020B0609030804020204" pitchFamily="49" charset="0"/>
+              <a:cs typeface="Menlo" panose="020B0609030804020204" pitchFamily="49" charset="0"/>
             </a:endParaRPr>
           </a:p>
           <a:p>
@@ -16229,7 +17388,9 @@
               <a:buNone/>
             </a:pPr>
             <a:endParaRPr lang="en-GB" dirty="0">
-              <a:latin typeface="Courier" pitchFamily="2" charset="0"/>
+              <a:latin typeface="Menlo" panose="020B0609030804020204" pitchFamily="49" charset="0"/>
+              <a:ea typeface="Menlo" panose="020B0609030804020204" pitchFamily="49" charset="0"/>
+              <a:cs typeface="Menlo" panose="020B0609030804020204" pitchFamily="49" charset="0"/>
             </a:endParaRPr>
           </a:p>
         </p:txBody>
@@ -16600,19 +17761,25 @@
             </a:pPr>
             <a:r>
               <a:rPr lang="en-GB" dirty="0">
-                <a:latin typeface="Courier" pitchFamily="2" charset="0"/>
+                <a:latin typeface="Menlo" panose="020B0609030804020204" pitchFamily="49" charset="0"/>
+                <a:ea typeface="Menlo" panose="020B0609030804020204" pitchFamily="49" charset="0"/>
+                <a:cs typeface="Menlo" panose="020B0609030804020204" pitchFamily="49" charset="0"/>
               </a:rPr>
               <a:t>void main(List&lt;String&gt; </a:t>
             </a:r>
             <a:r>
               <a:rPr lang="en-GB" dirty="0" err="1">
-                <a:latin typeface="Courier" pitchFamily="2" charset="0"/>
+                <a:latin typeface="Menlo" panose="020B0609030804020204" pitchFamily="49" charset="0"/>
+                <a:ea typeface="Menlo" panose="020B0609030804020204" pitchFamily="49" charset="0"/>
+                <a:cs typeface="Menlo" panose="020B0609030804020204" pitchFamily="49" charset="0"/>
               </a:rPr>
               <a:t>args</a:t>
             </a:r>
             <a:r>
               <a:rPr lang="en-GB" dirty="0">
-                <a:latin typeface="Courier" pitchFamily="2" charset="0"/>
+                <a:latin typeface="Menlo" panose="020B0609030804020204" pitchFamily="49" charset="0"/>
+                <a:ea typeface="Menlo" panose="020B0609030804020204" pitchFamily="49" charset="0"/>
+                <a:cs typeface="Menlo" panose="020B0609030804020204" pitchFamily="49" charset="0"/>
               </a:rPr>
               <a:t>) {</a:t>
             </a:r>
@@ -16623,12 +17790,16 @@
             </a:pPr>
             <a:br>
               <a:rPr lang="en-GB" dirty="0">
-                <a:latin typeface="Courier" pitchFamily="2" charset="0"/>
+                <a:latin typeface="Menlo" panose="020B0609030804020204" pitchFamily="49" charset="0"/>
+                <a:ea typeface="Menlo" panose="020B0609030804020204" pitchFamily="49" charset="0"/>
+                <a:cs typeface="Menlo" panose="020B0609030804020204" pitchFamily="49" charset="0"/>
               </a:rPr>
             </a:br>
             <a:r>
               <a:rPr lang="en-GB" dirty="0">
-                <a:latin typeface="Courier" pitchFamily="2" charset="0"/>
+                <a:latin typeface="Menlo" panose="020B0609030804020204" pitchFamily="49" charset="0"/>
+                <a:ea typeface="Menlo" panose="020B0609030804020204" pitchFamily="49" charset="0"/>
+                <a:cs typeface="Menlo" panose="020B0609030804020204" pitchFamily="49" charset="0"/>
               </a:rPr>
               <a:t>//The following will print</a:t>
             </a:r>
@@ -16639,7 +17810,9 @@
             </a:pPr>
             <a:r>
               <a:rPr lang="en-GB" dirty="0">
-                <a:latin typeface="Courier" pitchFamily="2" charset="0"/>
+                <a:latin typeface="Menlo" panose="020B0609030804020204" pitchFamily="49" charset="0"/>
+                <a:ea typeface="Menlo" panose="020B0609030804020204" pitchFamily="49" charset="0"/>
+                <a:cs typeface="Menlo" panose="020B0609030804020204" pitchFamily="49" charset="0"/>
               </a:rPr>
               <a:t>//5</a:t>
             </a:r>
@@ -16650,7 +17823,9 @@
             </a:pPr>
             <a:r>
               <a:rPr lang="en-GB" dirty="0">
-                <a:latin typeface="Courier" pitchFamily="2" charset="0"/>
+                <a:latin typeface="Menlo" panose="020B0609030804020204" pitchFamily="49" charset="0"/>
+                <a:ea typeface="Menlo" panose="020B0609030804020204" pitchFamily="49" charset="0"/>
+                <a:cs typeface="Menlo" panose="020B0609030804020204" pitchFamily="49" charset="0"/>
               </a:rPr>
               <a:t>//4</a:t>
             </a:r>
@@ -16661,7 +17836,9 @@
             </a:pPr>
             <a:r>
               <a:rPr lang="en-GB" dirty="0">
-                <a:latin typeface="Courier" pitchFamily="2" charset="0"/>
+                <a:latin typeface="Menlo" panose="020B0609030804020204" pitchFamily="49" charset="0"/>
+                <a:ea typeface="Menlo" panose="020B0609030804020204" pitchFamily="49" charset="0"/>
+                <a:cs typeface="Menlo" panose="020B0609030804020204" pitchFamily="49" charset="0"/>
               </a:rPr>
               <a:t>var x = 5;</a:t>
             </a:r>
@@ -16672,7 +17849,9 @@
             </a:pPr>
             <a:r>
               <a:rPr lang="en-GB" dirty="0">
-                <a:latin typeface="Courier" pitchFamily="2" charset="0"/>
+                <a:latin typeface="Menlo" panose="020B0609030804020204" pitchFamily="49" charset="0"/>
+                <a:ea typeface="Menlo" panose="020B0609030804020204" pitchFamily="49" charset="0"/>
+                <a:cs typeface="Menlo" panose="020B0609030804020204" pitchFamily="49" charset="0"/>
               </a:rPr>
               <a:t>while(x&gt;0){</a:t>
             </a:r>
@@ -16683,7 +17862,9 @@
             </a:pPr>
             <a:r>
               <a:rPr lang="en-GB" dirty="0">
-                <a:latin typeface="Courier" pitchFamily="2" charset="0"/>
+                <a:latin typeface="Menlo" panose="020B0609030804020204" pitchFamily="49" charset="0"/>
+                <a:ea typeface="Menlo" panose="020B0609030804020204" pitchFamily="49" charset="0"/>
+                <a:cs typeface="Menlo" panose="020B0609030804020204" pitchFamily="49" charset="0"/>
               </a:rPr>
               <a:t>	print(x);</a:t>
             </a:r>
@@ -16694,7 +17875,9 @@
             </a:pPr>
             <a:r>
               <a:rPr lang="en-GB" dirty="0">
-                <a:latin typeface="Courier" pitchFamily="2" charset="0"/>
+                <a:latin typeface="Menlo" panose="020B0609030804020204" pitchFamily="49" charset="0"/>
+                <a:ea typeface="Menlo" panose="020B0609030804020204" pitchFamily="49" charset="0"/>
+                <a:cs typeface="Menlo" panose="020B0609030804020204" pitchFamily="49" charset="0"/>
               </a:rPr>
               <a:t>	x--;</a:t>
             </a:r>
@@ -16705,7 +17888,9 @@
             </a:pPr>
             <a:r>
               <a:rPr lang="en-GB" dirty="0">
-                <a:latin typeface="Courier" pitchFamily="2" charset="0"/>
+                <a:latin typeface="Menlo" panose="020B0609030804020204" pitchFamily="49" charset="0"/>
+                <a:ea typeface="Menlo" panose="020B0609030804020204" pitchFamily="49" charset="0"/>
+                <a:cs typeface="Menlo" panose="020B0609030804020204" pitchFamily="49" charset="0"/>
               </a:rPr>
               <a:t>	if(x == 3){</a:t>
             </a:r>
@@ -16716,13 +17901,17 @@
             </a:pPr>
             <a:r>
               <a:rPr lang="en-GB" dirty="0">
-                <a:latin typeface="Courier" pitchFamily="2" charset="0"/>
+                <a:latin typeface="Menlo" panose="020B0609030804020204" pitchFamily="49" charset="0"/>
+                <a:ea typeface="Menlo" panose="020B0609030804020204" pitchFamily="49" charset="0"/>
+                <a:cs typeface="Menlo" panose="020B0609030804020204" pitchFamily="49" charset="0"/>
               </a:rPr>
               <a:t>		</a:t>
             </a:r>
             <a:r>
               <a:rPr lang="en-GB" b="1" dirty="0">
-                <a:latin typeface="Courier" pitchFamily="2" charset="0"/>
+                <a:latin typeface="Menlo" panose="020B0609030804020204" pitchFamily="49" charset="0"/>
+                <a:ea typeface="Menlo" panose="020B0609030804020204" pitchFamily="49" charset="0"/>
+                <a:cs typeface="Menlo" panose="020B0609030804020204" pitchFamily="49" charset="0"/>
               </a:rPr>
               <a:t>break;</a:t>
             </a:r>
@@ -16733,7 +17922,9 @@
             </a:pPr>
             <a:r>
               <a:rPr lang="en-GB" dirty="0">
-                <a:latin typeface="Courier" pitchFamily="2" charset="0"/>
+                <a:latin typeface="Menlo" panose="020B0609030804020204" pitchFamily="49" charset="0"/>
+                <a:ea typeface="Menlo" panose="020B0609030804020204" pitchFamily="49" charset="0"/>
+                <a:cs typeface="Menlo" panose="020B0609030804020204" pitchFamily="49" charset="0"/>
               </a:rPr>
               <a:t>	}//if </a:t>
             </a:r>
@@ -16744,7 +17935,9 @@
             </a:pPr>
             <a:r>
               <a:rPr lang="en-GB" dirty="0">
-                <a:latin typeface="Courier" pitchFamily="2" charset="0"/>
+                <a:latin typeface="Menlo" panose="020B0609030804020204" pitchFamily="49" charset="0"/>
+                <a:ea typeface="Menlo" panose="020B0609030804020204" pitchFamily="49" charset="0"/>
+                <a:cs typeface="Menlo" panose="020B0609030804020204" pitchFamily="49" charset="0"/>
               </a:rPr>
               <a:t>}//while</a:t>
             </a:r>
@@ -16754,7 +17947,9 @@
               <a:buNone/>
             </a:pPr>
             <a:endParaRPr lang="en-GB" dirty="0">
-              <a:latin typeface="Courier" pitchFamily="2" charset="0"/>
+              <a:latin typeface="Menlo" panose="020B0609030804020204" pitchFamily="49" charset="0"/>
+              <a:ea typeface="Menlo" panose="020B0609030804020204" pitchFamily="49" charset="0"/>
+              <a:cs typeface="Menlo" panose="020B0609030804020204" pitchFamily="49" charset="0"/>
             </a:endParaRPr>
           </a:p>
           <a:p>
@@ -16763,7 +17958,9 @@
             </a:pPr>
             <a:r>
               <a:rPr lang="en-GB" dirty="0">
-                <a:latin typeface="Courier" pitchFamily="2" charset="0"/>
+                <a:latin typeface="Menlo" panose="020B0609030804020204" pitchFamily="49" charset="0"/>
+                <a:ea typeface="Menlo" panose="020B0609030804020204" pitchFamily="49" charset="0"/>
+                <a:cs typeface="Menlo" panose="020B0609030804020204" pitchFamily="49" charset="0"/>
               </a:rPr>
               <a:t>}//main</a:t>
             </a:r>
@@ -16773,7 +17970,9 @@
               <a:buNone/>
             </a:pPr>
             <a:endParaRPr lang="en-GB" dirty="0">
-              <a:latin typeface="Courier" pitchFamily="2" charset="0"/>
+              <a:latin typeface="Menlo" panose="020B0609030804020204" pitchFamily="49" charset="0"/>
+              <a:ea typeface="Menlo" panose="020B0609030804020204" pitchFamily="49" charset="0"/>
+              <a:cs typeface="Menlo" panose="020B0609030804020204" pitchFamily="49" charset="0"/>
             </a:endParaRPr>
           </a:p>
           <a:p>
@@ -16781,7 +17980,9 @@
               <a:buNone/>
             </a:pPr>
             <a:endParaRPr lang="en-GB" dirty="0">
-              <a:latin typeface="Courier" pitchFamily="2" charset="0"/>
+              <a:latin typeface="Menlo" panose="020B0609030804020204" pitchFamily="49" charset="0"/>
+              <a:ea typeface="Menlo" panose="020B0609030804020204" pitchFamily="49" charset="0"/>
+              <a:cs typeface="Menlo" panose="020B0609030804020204" pitchFamily="49" charset="0"/>
             </a:endParaRPr>
           </a:p>
         </p:txBody>
@@ -17145,19 +18346,25 @@
             </a:pPr>
             <a:r>
               <a:rPr lang="en-GB" dirty="0">
-                <a:latin typeface="Courier" pitchFamily="2" charset="0"/>
+                <a:latin typeface="Menlo" panose="020B0609030804020204" pitchFamily="49" charset="0"/>
+                <a:ea typeface="Menlo" panose="020B0609030804020204" pitchFamily="49" charset="0"/>
+                <a:cs typeface="Menlo" panose="020B0609030804020204" pitchFamily="49" charset="0"/>
               </a:rPr>
               <a:t>void main(List&lt;String&gt; </a:t>
             </a:r>
             <a:r>
               <a:rPr lang="en-GB" dirty="0" err="1">
-                <a:latin typeface="Courier" pitchFamily="2" charset="0"/>
+                <a:latin typeface="Menlo" panose="020B0609030804020204" pitchFamily="49" charset="0"/>
+                <a:ea typeface="Menlo" panose="020B0609030804020204" pitchFamily="49" charset="0"/>
+                <a:cs typeface="Menlo" panose="020B0609030804020204" pitchFamily="49" charset="0"/>
               </a:rPr>
               <a:t>args</a:t>
             </a:r>
             <a:r>
               <a:rPr lang="en-GB" dirty="0">
-                <a:latin typeface="Courier" pitchFamily="2" charset="0"/>
+                <a:latin typeface="Menlo" panose="020B0609030804020204" pitchFamily="49" charset="0"/>
+                <a:ea typeface="Menlo" panose="020B0609030804020204" pitchFamily="49" charset="0"/>
+                <a:cs typeface="Menlo" panose="020B0609030804020204" pitchFamily="49" charset="0"/>
               </a:rPr>
               <a:t>) {</a:t>
             </a:r>
@@ -17168,12 +18375,16 @@
             </a:pPr>
             <a:br>
               <a:rPr lang="en-GB" dirty="0">
-                <a:latin typeface="Courier" pitchFamily="2" charset="0"/>
+                <a:latin typeface="Menlo" panose="020B0609030804020204" pitchFamily="49" charset="0"/>
+                <a:ea typeface="Menlo" panose="020B0609030804020204" pitchFamily="49" charset="0"/>
+                <a:cs typeface="Menlo" panose="020B0609030804020204" pitchFamily="49" charset="0"/>
               </a:rPr>
             </a:br>
             <a:r>
               <a:rPr lang="en-GB" dirty="0">
-                <a:latin typeface="Courier" pitchFamily="2" charset="0"/>
+                <a:latin typeface="Menlo" panose="020B0609030804020204" pitchFamily="49" charset="0"/>
+                <a:ea typeface="Menlo" panose="020B0609030804020204" pitchFamily="49" charset="0"/>
+                <a:cs typeface="Menlo" panose="020B0609030804020204" pitchFamily="49" charset="0"/>
               </a:rPr>
               <a:t>//The following will print</a:t>
             </a:r>
@@ -17184,7 +18395,9 @@
             </a:pPr>
             <a:r>
               <a:rPr lang="en-GB" dirty="0">
-                <a:latin typeface="Courier" pitchFamily="2" charset="0"/>
+                <a:latin typeface="Menlo" panose="020B0609030804020204" pitchFamily="49" charset="0"/>
+                <a:ea typeface="Menlo" panose="020B0609030804020204" pitchFamily="49" charset="0"/>
+                <a:cs typeface="Menlo" panose="020B0609030804020204" pitchFamily="49" charset="0"/>
               </a:rPr>
               <a:t>//5</a:t>
             </a:r>
@@ -17195,7 +18408,9 @@
             </a:pPr>
             <a:r>
               <a:rPr lang="en-GB" dirty="0">
-                <a:latin typeface="Courier" pitchFamily="2" charset="0"/>
+                <a:latin typeface="Menlo" panose="020B0609030804020204" pitchFamily="49" charset="0"/>
+                <a:ea typeface="Menlo" panose="020B0609030804020204" pitchFamily="49" charset="0"/>
+                <a:cs typeface="Menlo" panose="020B0609030804020204" pitchFamily="49" charset="0"/>
               </a:rPr>
               <a:t>//3</a:t>
             </a:r>
@@ -17206,7 +18421,9 @@
             </a:pPr>
             <a:r>
               <a:rPr lang="en-GB" dirty="0">
-                <a:latin typeface="Courier" pitchFamily="2" charset="0"/>
+                <a:latin typeface="Menlo" panose="020B0609030804020204" pitchFamily="49" charset="0"/>
+                <a:ea typeface="Menlo" panose="020B0609030804020204" pitchFamily="49" charset="0"/>
+                <a:cs typeface="Menlo" panose="020B0609030804020204" pitchFamily="49" charset="0"/>
               </a:rPr>
               <a:t>//1</a:t>
             </a:r>
@@ -17217,7 +18434,9 @@
             </a:pPr>
             <a:r>
               <a:rPr lang="en-GB" dirty="0">
-                <a:latin typeface="Courier" pitchFamily="2" charset="0"/>
+                <a:latin typeface="Menlo" panose="020B0609030804020204" pitchFamily="49" charset="0"/>
+                <a:ea typeface="Menlo" panose="020B0609030804020204" pitchFamily="49" charset="0"/>
+                <a:cs typeface="Menlo" panose="020B0609030804020204" pitchFamily="49" charset="0"/>
               </a:rPr>
               <a:t>int y = 6;</a:t>
             </a:r>
@@ -17228,7 +18447,9 @@
             </a:pPr>
             <a:r>
               <a:rPr lang="en-GB" dirty="0">
-                <a:latin typeface="Courier" pitchFamily="2" charset="0"/>
+                <a:latin typeface="Menlo" panose="020B0609030804020204" pitchFamily="49" charset="0"/>
+                <a:ea typeface="Menlo" panose="020B0609030804020204" pitchFamily="49" charset="0"/>
+                <a:cs typeface="Menlo" panose="020B0609030804020204" pitchFamily="49" charset="0"/>
               </a:rPr>
               <a:t>while(y&gt;0){</a:t>
             </a:r>
@@ -17239,7 +18460,9 @@
             </a:pPr>
             <a:r>
               <a:rPr lang="en-GB" dirty="0">
-                <a:latin typeface="Courier" pitchFamily="2" charset="0"/>
+                <a:latin typeface="Menlo" panose="020B0609030804020204" pitchFamily="49" charset="0"/>
+                <a:ea typeface="Menlo" panose="020B0609030804020204" pitchFamily="49" charset="0"/>
+                <a:cs typeface="Menlo" panose="020B0609030804020204" pitchFamily="49" charset="0"/>
               </a:rPr>
               <a:t>	y--;</a:t>
             </a:r>
@@ -17250,12 +18473,16 @@
             </a:pPr>
             <a:br>
               <a:rPr lang="en-GB" dirty="0">
-                <a:latin typeface="Courier" pitchFamily="2" charset="0"/>
+                <a:latin typeface="Menlo" panose="020B0609030804020204" pitchFamily="49" charset="0"/>
+                <a:ea typeface="Menlo" panose="020B0609030804020204" pitchFamily="49" charset="0"/>
+                <a:cs typeface="Menlo" panose="020B0609030804020204" pitchFamily="49" charset="0"/>
               </a:rPr>
             </a:br>
             <a:r>
               <a:rPr lang="en-GB" dirty="0">
-                <a:latin typeface="Courier" pitchFamily="2" charset="0"/>
+                <a:latin typeface="Menlo" panose="020B0609030804020204" pitchFamily="49" charset="0"/>
+                <a:ea typeface="Menlo" panose="020B0609030804020204" pitchFamily="49" charset="0"/>
+                <a:cs typeface="Menlo" panose="020B0609030804020204" pitchFamily="49" charset="0"/>
               </a:rPr>
               <a:t>	if(y % 2 == 0){</a:t>
             </a:r>
@@ -17266,13 +18493,17 @@
             </a:pPr>
             <a:r>
               <a:rPr lang="en-GB" dirty="0">
-                <a:latin typeface="Courier" pitchFamily="2" charset="0"/>
+                <a:latin typeface="Menlo" panose="020B0609030804020204" pitchFamily="49" charset="0"/>
+                <a:ea typeface="Menlo" panose="020B0609030804020204" pitchFamily="49" charset="0"/>
+                <a:cs typeface="Menlo" panose="020B0609030804020204" pitchFamily="49" charset="0"/>
               </a:rPr>
               <a:t>		</a:t>
             </a:r>
             <a:r>
               <a:rPr lang="en-GB" b="1" dirty="0">
-                <a:latin typeface="Courier" pitchFamily="2" charset="0"/>
+                <a:latin typeface="Menlo" panose="020B0609030804020204" pitchFamily="49" charset="0"/>
+                <a:ea typeface="Menlo" panose="020B0609030804020204" pitchFamily="49" charset="0"/>
+                <a:cs typeface="Menlo" panose="020B0609030804020204" pitchFamily="49" charset="0"/>
               </a:rPr>
               <a:t>continue;</a:t>
             </a:r>
@@ -17283,7 +18514,9 @@
             </a:pPr>
             <a:r>
               <a:rPr lang="en-GB" dirty="0">
-                <a:latin typeface="Courier" pitchFamily="2" charset="0"/>
+                <a:latin typeface="Menlo" panose="020B0609030804020204" pitchFamily="49" charset="0"/>
+                <a:ea typeface="Menlo" panose="020B0609030804020204" pitchFamily="49" charset="0"/>
+                <a:cs typeface="Menlo" panose="020B0609030804020204" pitchFamily="49" charset="0"/>
               </a:rPr>
               <a:t>	}else{</a:t>
             </a:r>
@@ -17294,7 +18527,9 @@
             </a:pPr>
             <a:r>
               <a:rPr lang="en-GB" dirty="0">
-                <a:latin typeface="Courier" pitchFamily="2" charset="0"/>
+                <a:latin typeface="Menlo" panose="020B0609030804020204" pitchFamily="49" charset="0"/>
+                <a:ea typeface="Menlo" panose="020B0609030804020204" pitchFamily="49" charset="0"/>
+                <a:cs typeface="Menlo" panose="020B0609030804020204" pitchFamily="49" charset="0"/>
               </a:rPr>
               <a:t>		print(y);</a:t>
             </a:r>
@@ -17305,7 +18540,9 @@
             </a:pPr>
             <a:r>
               <a:rPr lang="en-GB" dirty="0">
-                <a:latin typeface="Courier" pitchFamily="2" charset="0"/>
+                <a:latin typeface="Menlo" panose="020B0609030804020204" pitchFamily="49" charset="0"/>
+                <a:ea typeface="Menlo" panose="020B0609030804020204" pitchFamily="49" charset="0"/>
+                <a:cs typeface="Menlo" panose="020B0609030804020204" pitchFamily="49" charset="0"/>
               </a:rPr>
               <a:t>	}//if-else</a:t>
             </a:r>
@@ -17316,7 +18553,9 @@
             </a:pPr>
             <a:r>
               <a:rPr lang="en-GB" dirty="0">
-                <a:latin typeface="Courier" pitchFamily="2" charset="0"/>
+                <a:latin typeface="Menlo" panose="020B0609030804020204" pitchFamily="49" charset="0"/>
+                <a:ea typeface="Menlo" panose="020B0609030804020204" pitchFamily="49" charset="0"/>
+                <a:cs typeface="Menlo" panose="020B0609030804020204" pitchFamily="49" charset="0"/>
               </a:rPr>
               <a:t>}//while</a:t>
             </a:r>
@@ -17326,7 +18565,9 @@
               <a:buNone/>
             </a:pPr>
             <a:endParaRPr lang="en-GB" dirty="0">
-              <a:latin typeface="Courier" pitchFamily="2" charset="0"/>
+              <a:latin typeface="Menlo" panose="020B0609030804020204" pitchFamily="49" charset="0"/>
+              <a:ea typeface="Menlo" panose="020B0609030804020204" pitchFamily="49" charset="0"/>
+              <a:cs typeface="Menlo" panose="020B0609030804020204" pitchFamily="49" charset="0"/>
             </a:endParaRPr>
           </a:p>
           <a:p>
@@ -17335,7 +18576,9 @@
             </a:pPr>
             <a:r>
               <a:rPr lang="en-GB" dirty="0">
-                <a:latin typeface="Courier" pitchFamily="2" charset="0"/>
+                <a:latin typeface="Menlo" panose="020B0609030804020204" pitchFamily="49" charset="0"/>
+                <a:ea typeface="Menlo" panose="020B0609030804020204" pitchFamily="49" charset="0"/>
+                <a:cs typeface="Menlo" panose="020B0609030804020204" pitchFamily="49" charset="0"/>
               </a:rPr>
               <a:t>}//main</a:t>
             </a:r>
@@ -17345,7 +18588,9 @@
               <a:buNone/>
             </a:pPr>
             <a:endParaRPr lang="en-GB" dirty="0">
-              <a:latin typeface="Courier" pitchFamily="2" charset="0"/>
+              <a:latin typeface="Menlo" panose="020B0609030804020204" pitchFamily="49" charset="0"/>
+              <a:ea typeface="Menlo" panose="020B0609030804020204" pitchFamily="49" charset="0"/>
+              <a:cs typeface="Menlo" panose="020B0609030804020204" pitchFamily="49" charset="0"/>
             </a:endParaRPr>
           </a:p>
           <a:p>
@@ -17353,7 +18598,9 @@
               <a:buNone/>
             </a:pPr>
             <a:endParaRPr lang="en-GB" dirty="0">
-              <a:latin typeface="Courier" pitchFamily="2" charset="0"/>
+              <a:latin typeface="Menlo" panose="020B0609030804020204" pitchFamily="49" charset="0"/>
+              <a:ea typeface="Menlo" panose="020B0609030804020204" pitchFamily="49" charset="0"/>
+              <a:cs typeface="Menlo" panose="020B0609030804020204" pitchFamily="49" charset="0"/>
             </a:endParaRPr>
           </a:p>
         </p:txBody>
@@ -17480,19 +18727,25 @@
             </a:pPr>
             <a:r>
               <a:rPr lang="en-GB" dirty="0">
-                <a:latin typeface="Courier" pitchFamily="2" charset="0"/>
+                <a:latin typeface="Menlo" panose="020B0609030804020204" pitchFamily="49" charset="0"/>
+                <a:ea typeface="Menlo" panose="020B0609030804020204" pitchFamily="49" charset="0"/>
+                <a:cs typeface="Menlo" panose="020B0609030804020204" pitchFamily="49" charset="0"/>
               </a:rPr>
               <a:t>void main(List&lt;String&gt; </a:t>
             </a:r>
             <a:r>
               <a:rPr lang="en-GB" dirty="0" err="1">
-                <a:latin typeface="Courier" pitchFamily="2" charset="0"/>
+                <a:latin typeface="Menlo" panose="020B0609030804020204" pitchFamily="49" charset="0"/>
+                <a:ea typeface="Menlo" panose="020B0609030804020204" pitchFamily="49" charset="0"/>
+                <a:cs typeface="Menlo" panose="020B0609030804020204" pitchFamily="49" charset="0"/>
               </a:rPr>
               <a:t>args</a:t>
             </a:r>
             <a:r>
               <a:rPr lang="en-GB" dirty="0">
-                <a:latin typeface="Courier" pitchFamily="2" charset="0"/>
+                <a:latin typeface="Menlo" panose="020B0609030804020204" pitchFamily="49" charset="0"/>
+                <a:ea typeface="Menlo" panose="020B0609030804020204" pitchFamily="49" charset="0"/>
+                <a:cs typeface="Menlo" panose="020B0609030804020204" pitchFamily="49" charset="0"/>
               </a:rPr>
               <a:t>) {</a:t>
             </a:r>
@@ -17503,12 +18756,16 @@
             </a:pPr>
             <a:br>
               <a:rPr lang="en-GB" dirty="0">
-                <a:latin typeface="Courier" pitchFamily="2" charset="0"/>
+                <a:latin typeface="Menlo" panose="020B0609030804020204" pitchFamily="49" charset="0"/>
+                <a:ea typeface="Menlo" panose="020B0609030804020204" pitchFamily="49" charset="0"/>
+                <a:cs typeface="Menlo" panose="020B0609030804020204" pitchFamily="49" charset="0"/>
               </a:rPr>
             </a:br>
             <a:r>
               <a:rPr lang="en-GB" dirty="0">
-                <a:latin typeface="Courier" pitchFamily="2" charset="0"/>
+                <a:latin typeface="Menlo" panose="020B0609030804020204" pitchFamily="49" charset="0"/>
+                <a:ea typeface="Menlo" panose="020B0609030804020204" pitchFamily="49" charset="0"/>
+                <a:cs typeface="Menlo" panose="020B0609030804020204" pitchFamily="49" charset="0"/>
               </a:rPr>
               <a:t>//The following will print</a:t>
             </a:r>
@@ -17519,7 +18776,9 @@
             </a:pPr>
             <a:r>
               <a:rPr lang="en-GB" dirty="0">
-                <a:latin typeface="Courier" pitchFamily="2" charset="0"/>
+                <a:latin typeface="Menlo" panose="020B0609030804020204" pitchFamily="49" charset="0"/>
+                <a:ea typeface="Menlo" panose="020B0609030804020204" pitchFamily="49" charset="0"/>
+                <a:cs typeface="Menlo" panose="020B0609030804020204" pitchFamily="49" charset="0"/>
               </a:rPr>
               <a:t>//Open the gate!</a:t>
             </a:r>
@@ -17530,7 +18789,9 @@
             </a:pPr>
             <a:r>
               <a:rPr lang="en-GB" dirty="0">
-                <a:latin typeface="Courier" pitchFamily="2" charset="0"/>
+                <a:latin typeface="Menlo" panose="020B0609030804020204" pitchFamily="49" charset="0"/>
+                <a:ea typeface="Menlo" panose="020B0609030804020204" pitchFamily="49" charset="0"/>
+                <a:cs typeface="Menlo" panose="020B0609030804020204" pitchFamily="49" charset="0"/>
               </a:rPr>
               <a:t>var command = 'OPEN';</a:t>
             </a:r>
@@ -17541,19 +18802,25 @@
             </a:pPr>
             <a:r>
               <a:rPr lang="en-GB" b="1" dirty="0">
-                <a:latin typeface="Courier" pitchFamily="2" charset="0"/>
+                <a:latin typeface="Menlo" panose="020B0609030804020204" pitchFamily="49" charset="0"/>
+                <a:ea typeface="Menlo" panose="020B0609030804020204" pitchFamily="49" charset="0"/>
+                <a:cs typeface="Menlo" panose="020B0609030804020204" pitchFamily="49" charset="0"/>
               </a:rPr>
               <a:t>switch (</a:t>
             </a:r>
             <a:r>
               <a:rPr lang="en-GB" dirty="0">
-                <a:latin typeface="Courier" pitchFamily="2" charset="0"/>
+                <a:latin typeface="Menlo" panose="020B0609030804020204" pitchFamily="49" charset="0"/>
+                <a:ea typeface="Menlo" panose="020B0609030804020204" pitchFamily="49" charset="0"/>
+                <a:cs typeface="Menlo" panose="020B0609030804020204" pitchFamily="49" charset="0"/>
               </a:rPr>
               <a:t>command</a:t>
             </a:r>
             <a:r>
               <a:rPr lang="en-GB" b="1" dirty="0">
-                <a:latin typeface="Courier" pitchFamily="2" charset="0"/>
+                <a:latin typeface="Menlo" panose="020B0609030804020204" pitchFamily="49" charset="0"/>
+                <a:ea typeface="Menlo" panose="020B0609030804020204" pitchFamily="49" charset="0"/>
+                <a:cs typeface="Menlo" panose="020B0609030804020204" pitchFamily="49" charset="0"/>
               </a:rPr>
               <a:t>) {</a:t>
             </a:r>
@@ -17564,19 +18831,25 @@
             </a:pPr>
             <a:r>
               <a:rPr lang="en-GB" dirty="0">
-                <a:latin typeface="Courier" pitchFamily="2" charset="0"/>
+                <a:latin typeface="Menlo" panose="020B0609030804020204" pitchFamily="49" charset="0"/>
+                <a:ea typeface="Menlo" panose="020B0609030804020204" pitchFamily="49" charset="0"/>
+                <a:cs typeface="Menlo" panose="020B0609030804020204" pitchFamily="49" charset="0"/>
               </a:rPr>
               <a:t>	</a:t>
             </a:r>
             <a:r>
               <a:rPr lang="en-GB" b="1" dirty="0">
-                <a:latin typeface="Courier" pitchFamily="2" charset="0"/>
+                <a:latin typeface="Menlo" panose="020B0609030804020204" pitchFamily="49" charset="0"/>
+                <a:ea typeface="Menlo" panose="020B0609030804020204" pitchFamily="49" charset="0"/>
+                <a:cs typeface="Menlo" panose="020B0609030804020204" pitchFamily="49" charset="0"/>
               </a:rPr>
               <a:t>case</a:t>
             </a:r>
             <a:r>
               <a:rPr lang="en-GB" dirty="0">
-                <a:latin typeface="Courier" pitchFamily="2" charset="0"/>
+                <a:latin typeface="Menlo" panose="020B0609030804020204" pitchFamily="49" charset="0"/>
+                <a:ea typeface="Menlo" panose="020B0609030804020204" pitchFamily="49" charset="0"/>
+                <a:cs typeface="Menlo" panose="020B0609030804020204" pitchFamily="49" charset="0"/>
               </a:rPr>
               <a:t> 'OPEN’:</a:t>
             </a:r>
@@ -17587,7 +18860,9 @@
             </a:pPr>
             <a:r>
               <a:rPr lang="en-GB" dirty="0">
-                <a:latin typeface="Courier" pitchFamily="2" charset="0"/>
+                <a:latin typeface="Menlo" panose="020B0609030804020204" pitchFamily="49" charset="0"/>
+                <a:ea typeface="Menlo" panose="020B0609030804020204" pitchFamily="49" charset="0"/>
+                <a:cs typeface="Menlo" panose="020B0609030804020204" pitchFamily="49" charset="0"/>
               </a:rPr>
               <a:t>		print('Open the gate!’);</a:t>
             </a:r>
@@ -17598,13 +18873,17 @@
             </a:pPr>
             <a:r>
               <a:rPr lang="en-GB" dirty="0">
-                <a:latin typeface="Courier" pitchFamily="2" charset="0"/>
+                <a:latin typeface="Menlo" panose="020B0609030804020204" pitchFamily="49" charset="0"/>
+                <a:ea typeface="Menlo" panose="020B0609030804020204" pitchFamily="49" charset="0"/>
+                <a:cs typeface="Menlo" panose="020B0609030804020204" pitchFamily="49" charset="0"/>
               </a:rPr>
               <a:t>		</a:t>
             </a:r>
             <a:r>
               <a:rPr lang="en-GB" b="1" dirty="0">
-                <a:latin typeface="Courier" pitchFamily="2" charset="0"/>
+                <a:latin typeface="Menlo" panose="020B0609030804020204" pitchFamily="49" charset="0"/>
+                <a:ea typeface="Menlo" panose="020B0609030804020204" pitchFamily="49" charset="0"/>
+                <a:cs typeface="Menlo" panose="020B0609030804020204" pitchFamily="49" charset="0"/>
               </a:rPr>
               <a:t>break;</a:t>
             </a:r>
@@ -17615,25 +18894,33 @@
             </a:pPr>
             <a:r>
               <a:rPr lang="en-GB" dirty="0">
-                <a:latin typeface="Courier" pitchFamily="2" charset="0"/>
+                <a:latin typeface="Menlo" panose="020B0609030804020204" pitchFamily="49" charset="0"/>
+                <a:ea typeface="Menlo" panose="020B0609030804020204" pitchFamily="49" charset="0"/>
+                <a:cs typeface="Menlo" panose="020B0609030804020204" pitchFamily="49" charset="0"/>
               </a:rPr>
               <a:t>	</a:t>
             </a:r>
             <a:r>
               <a:rPr lang="en-GB" b="1" dirty="0">
-                <a:latin typeface="Courier" pitchFamily="2" charset="0"/>
+                <a:latin typeface="Menlo" panose="020B0609030804020204" pitchFamily="49" charset="0"/>
+                <a:ea typeface="Menlo" panose="020B0609030804020204" pitchFamily="49" charset="0"/>
+                <a:cs typeface="Menlo" panose="020B0609030804020204" pitchFamily="49" charset="0"/>
               </a:rPr>
               <a:t>case</a:t>
             </a:r>
             <a:r>
               <a:rPr lang="en-GB" dirty="0">
-                <a:latin typeface="Courier" pitchFamily="2" charset="0"/>
+                <a:latin typeface="Menlo" panose="020B0609030804020204" pitchFamily="49" charset="0"/>
+                <a:ea typeface="Menlo" panose="020B0609030804020204" pitchFamily="49" charset="0"/>
+                <a:cs typeface="Menlo" panose="020B0609030804020204" pitchFamily="49" charset="0"/>
               </a:rPr>
               <a:t> 'CLOSE’</a:t>
             </a:r>
             <a:r>
               <a:rPr lang="en-GB" b="1" dirty="0">
-                <a:latin typeface="Courier" pitchFamily="2" charset="0"/>
+                <a:latin typeface="Menlo" panose="020B0609030804020204" pitchFamily="49" charset="0"/>
+                <a:ea typeface="Menlo" panose="020B0609030804020204" pitchFamily="49" charset="0"/>
+                <a:cs typeface="Menlo" panose="020B0609030804020204" pitchFamily="49" charset="0"/>
               </a:rPr>
               <a:t>:</a:t>
             </a:r>
@@ -17644,7 +18931,9 @@
             </a:pPr>
             <a:r>
               <a:rPr lang="en-GB" dirty="0">
-                <a:latin typeface="Courier" pitchFamily="2" charset="0"/>
+                <a:latin typeface="Menlo" panose="020B0609030804020204" pitchFamily="49" charset="0"/>
+                <a:ea typeface="Menlo" panose="020B0609030804020204" pitchFamily="49" charset="0"/>
+                <a:cs typeface="Menlo" panose="020B0609030804020204" pitchFamily="49" charset="0"/>
               </a:rPr>
               <a:t>		print('Close the gate!’);</a:t>
             </a:r>
@@ -17655,13 +18944,17 @@
             </a:pPr>
             <a:r>
               <a:rPr lang="en-GB" dirty="0">
-                <a:latin typeface="Courier" pitchFamily="2" charset="0"/>
+                <a:latin typeface="Menlo" panose="020B0609030804020204" pitchFamily="49" charset="0"/>
+                <a:ea typeface="Menlo" panose="020B0609030804020204" pitchFamily="49" charset="0"/>
+                <a:cs typeface="Menlo" panose="020B0609030804020204" pitchFamily="49" charset="0"/>
               </a:rPr>
               <a:t>		</a:t>
             </a:r>
             <a:r>
               <a:rPr lang="en-GB" b="1" dirty="0">
-                <a:latin typeface="Courier" pitchFamily="2" charset="0"/>
+                <a:latin typeface="Menlo" panose="020B0609030804020204" pitchFamily="49" charset="0"/>
+                <a:ea typeface="Menlo" panose="020B0609030804020204" pitchFamily="49" charset="0"/>
+                <a:cs typeface="Menlo" panose="020B0609030804020204" pitchFamily="49" charset="0"/>
               </a:rPr>
               <a:t>break;</a:t>
             </a:r>
@@ -17672,7 +18965,9 @@
             </a:pPr>
             <a:r>
               <a:rPr lang="en-GB" b="1" dirty="0">
-                <a:latin typeface="Courier" pitchFamily="2" charset="0"/>
+                <a:latin typeface="Menlo" panose="020B0609030804020204" pitchFamily="49" charset="0"/>
+                <a:ea typeface="Menlo" panose="020B0609030804020204" pitchFamily="49" charset="0"/>
+                <a:cs typeface="Menlo" panose="020B0609030804020204" pitchFamily="49" charset="0"/>
               </a:rPr>
               <a:t>}//switch-case</a:t>
             </a:r>
@@ -17683,12 +18978,16 @@
             </a:pPr>
             <a:br>
               <a:rPr lang="en-GB" dirty="0">
-                <a:latin typeface="Courier" pitchFamily="2" charset="0"/>
+                <a:latin typeface="Menlo" panose="020B0609030804020204" pitchFamily="49" charset="0"/>
+                <a:ea typeface="Menlo" panose="020B0609030804020204" pitchFamily="49" charset="0"/>
+                <a:cs typeface="Menlo" panose="020B0609030804020204" pitchFamily="49" charset="0"/>
               </a:rPr>
             </a:br>
             <a:r>
               <a:rPr lang="en-GB" dirty="0">
-                <a:latin typeface="Courier" pitchFamily="2" charset="0"/>
+                <a:latin typeface="Menlo" panose="020B0609030804020204" pitchFamily="49" charset="0"/>
+                <a:ea typeface="Menlo" panose="020B0609030804020204" pitchFamily="49" charset="0"/>
+                <a:cs typeface="Menlo" panose="020B0609030804020204" pitchFamily="49" charset="0"/>
               </a:rPr>
               <a:t>}//main</a:t>
             </a:r>
@@ -17698,7 +18997,9 @@
               <a:buNone/>
             </a:pPr>
             <a:endParaRPr lang="en-GB" dirty="0">
-              <a:latin typeface="Courier" pitchFamily="2" charset="0"/>
+              <a:latin typeface="Menlo" panose="020B0609030804020204" pitchFamily="49" charset="0"/>
+              <a:ea typeface="Menlo" panose="020B0609030804020204" pitchFamily="49" charset="0"/>
+              <a:cs typeface="Menlo" panose="020B0609030804020204" pitchFamily="49" charset="0"/>
             </a:endParaRPr>
           </a:p>
           <a:p>
@@ -17706,7 +19007,9 @@
               <a:buNone/>
             </a:pPr>
             <a:endParaRPr lang="en-GB" dirty="0">
-              <a:latin typeface="Courier" pitchFamily="2" charset="0"/>
+              <a:latin typeface="Menlo" panose="020B0609030804020204" pitchFamily="49" charset="0"/>
+              <a:ea typeface="Menlo" panose="020B0609030804020204" pitchFamily="49" charset="0"/>
+              <a:cs typeface="Menlo" panose="020B0609030804020204" pitchFamily="49" charset="0"/>
             </a:endParaRPr>
           </a:p>
         </p:txBody>
@@ -17833,19 +19136,25 @@
             </a:pPr>
             <a:r>
               <a:rPr lang="en-GB" dirty="0">
-                <a:latin typeface="Courier" pitchFamily="2" charset="0"/>
+                <a:latin typeface="Menlo" panose="020B0609030804020204" pitchFamily="49" charset="0"/>
+                <a:ea typeface="Menlo" panose="020B0609030804020204" pitchFamily="49" charset="0"/>
+                <a:cs typeface="Menlo" panose="020B0609030804020204" pitchFamily="49" charset="0"/>
               </a:rPr>
               <a:t>void main(List&lt;String&gt; </a:t>
             </a:r>
             <a:r>
               <a:rPr lang="en-GB" dirty="0" err="1">
-                <a:latin typeface="Courier" pitchFamily="2" charset="0"/>
+                <a:latin typeface="Menlo" panose="020B0609030804020204" pitchFamily="49" charset="0"/>
+                <a:ea typeface="Menlo" panose="020B0609030804020204" pitchFamily="49" charset="0"/>
+                <a:cs typeface="Menlo" panose="020B0609030804020204" pitchFamily="49" charset="0"/>
               </a:rPr>
               <a:t>args</a:t>
             </a:r>
             <a:r>
               <a:rPr lang="en-GB" dirty="0">
-                <a:latin typeface="Courier" pitchFamily="2" charset="0"/>
+                <a:latin typeface="Menlo" panose="020B0609030804020204" pitchFamily="49" charset="0"/>
+                <a:ea typeface="Menlo" panose="020B0609030804020204" pitchFamily="49" charset="0"/>
+                <a:cs typeface="Menlo" panose="020B0609030804020204" pitchFamily="49" charset="0"/>
               </a:rPr>
               <a:t>) {</a:t>
             </a:r>
@@ -17855,7 +19164,9 @@
               <a:buNone/>
             </a:pPr>
             <a:endParaRPr lang="en-GB" dirty="0">
-              <a:latin typeface="Courier" pitchFamily="2" charset="0"/>
+              <a:latin typeface="Menlo" panose="020B0609030804020204" pitchFamily="49" charset="0"/>
+              <a:ea typeface="Menlo" panose="020B0609030804020204" pitchFamily="49" charset="0"/>
+              <a:cs typeface="Menlo" panose="020B0609030804020204" pitchFamily="49" charset="0"/>
             </a:endParaRPr>
           </a:p>
           <a:p>
@@ -17864,7 +19175,9 @@
             </a:pPr>
             <a:r>
               <a:rPr lang="en-GB" dirty="0">
-                <a:latin typeface="Courier" pitchFamily="2" charset="0"/>
+                <a:latin typeface="Menlo" panose="020B0609030804020204" pitchFamily="49" charset="0"/>
+                <a:ea typeface="Menlo" panose="020B0609030804020204" pitchFamily="49" charset="0"/>
+                <a:cs typeface="Menlo" panose="020B0609030804020204" pitchFamily="49" charset="0"/>
               </a:rPr>
               <a:t>// --- Exceptions, try-catch-finally</a:t>
             </a:r>
@@ -17875,7 +19188,9 @@
             </a:pPr>
             <a:r>
               <a:rPr lang="en-GB" dirty="0">
-                <a:latin typeface="Courier" pitchFamily="2" charset="0"/>
+                <a:latin typeface="Menlo" panose="020B0609030804020204" pitchFamily="49" charset="0"/>
+                <a:ea typeface="Menlo" panose="020B0609030804020204" pitchFamily="49" charset="0"/>
+                <a:cs typeface="Menlo" panose="020B0609030804020204" pitchFamily="49" charset="0"/>
               </a:rPr>
               <a:t>//The following will print</a:t>
             </a:r>
@@ -17886,7 +19201,9 @@
             </a:pPr>
             <a:r>
               <a:rPr lang="en-GB" dirty="0">
-                <a:latin typeface="Courier" pitchFamily="2" charset="0"/>
+                <a:latin typeface="Menlo" panose="020B0609030804020204" pitchFamily="49" charset="0"/>
+                <a:ea typeface="Menlo" panose="020B0609030804020204" pitchFamily="49" charset="0"/>
+                <a:cs typeface="Menlo" panose="020B0609030804020204" pitchFamily="49" charset="0"/>
               </a:rPr>
               <a:t>//Impossible to parse!</a:t>
             </a:r>
@@ -17897,7 +19214,9 @@
             </a:pPr>
             <a:r>
               <a:rPr lang="en-GB" dirty="0">
-                <a:latin typeface="Courier" pitchFamily="2" charset="0"/>
+                <a:latin typeface="Menlo" panose="020B0609030804020204" pitchFamily="49" charset="0"/>
+                <a:ea typeface="Menlo" panose="020B0609030804020204" pitchFamily="49" charset="0"/>
+                <a:cs typeface="Menlo" panose="020B0609030804020204" pitchFamily="49" charset="0"/>
               </a:rPr>
               <a:t>//Try to correct the code.</a:t>
             </a:r>
@@ -17908,12 +19227,16 @@
             </a:pPr>
             <a:br>
               <a:rPr lang="en-GB" dirty="0">
-                <a:latin typeface="Courier" pitchFamily="2" charset="0"/>
+                <a:latin typeface="Menlo" panose="020B0609030804020204" pitchFamily="49" charset="0"/>
+                <a:ea typeface="Menlo" panose="020B0609030804020204" pitchFamily="49" charset="0"/>
+                <a:cs typeface="Menlo" panose="020B0609030804020204" pitchFamily="49" charset="0"/>
               </a:rPr>
             </a:br>
             <a:r>
               <a:rPr lang="en-GB" dirty="0">
-                <a:latin typeface="Courier" pitchFamily="2" charset="0"/>
+                <a:latin typeface="Menlo" panose="020B0609030804020204" pitchFamily="49" charset="0"/>
+                <a:ea typeface="Menlo" panose="020B0609030804020204" pitchFamily="49" charset="0"/>
+                <a:cs typeface="Menlo" panose="020B0609030804020204" pitchFamily="49" charset="0"/>
               </a:rPr>
               <a:t>String s = 'A string.';</a:t>
             </a:r>
@@ -17924,7 +19247,9 @@
             </a:pPr>
             <a:r>
               <a:rPr lang="en-GB" b="1" dirty="0">
-                <a:latin typeface="Courier" pitchFamily="2" charset="0"/>
+                <a:latin typeface="Menlo" panose="020B0609030804020204" pitchFamily="49" charset="0"/>
+                <a:ea typeface="Menlo" panose="020B0609030804020204" pitchFamily="49" charset="0"/>
+                <a:cs typeface="Menlo" panose="020B0609030804020204" pitchFamily="49" charset="0"/>
               </a:rPr>
               <a:t>try{</a:t>
             </a:r>
@@ -17935,19 +19260,25 @@
             </a:pPr>
             <a:r>
               <a:rPr lang="en-GB" dirty="0">
-                <a:latin typeface="Courier" pitchFamily="2" charset="0"/>
+                <a:latin typeface="Menlo" panose="020B0609030804020204" pitchFamily="49" charset="0"/>
+                <a:ea typeface="Menlo" panose="020B0609030804020204" pitchFamily="49" charset="0"/>
+                <a:cs typeface="Menlo" panose="020B0609030804020204" pitchFamily="49" charset="0"/>
               </a:rPr>
               <a:t>	var n = </a:t>
             </a:r>
             <a:r>
               <a:rPr lang="en-GB" dirty="0" err="1">
-                <a:latin typeface="Courier" pitchFamily="2" charset="0"/>
+                <a:latin typeface="Menlo" panose="020B0609030804020204" pitchFamily="49" charset="0"/>
+                <a:ea typeface="Menlo" panose="020B0609030804020204" pitchFamily="49" charset="0"/>
+                <a:cs typeface="Menlo" panose="020B0609030804020204" pitchFamily="49" charset="0"/>
               </a:rPr>
               <a:t>int.parse</a:t>
             </a:r>
             <a:r>
               <a:rPr lang="en-GB" dirty="0">
-                <a:latin typeface="Courier" pitchFamily="2" charset="0"/>
+                <a:latin typeface="Menlo" panose="020B0609030804020204" pitchFamily="49" charset="0"/>
+                <a:ea typeface="Menlo" panose="020B0609030804020204" pitchFamily="49" charset="0"/>
+                <a:cs typeface="Menlo" panose="020B0609030804020204" pitchFamily="49" charset="0"/>
               </a:rPr>
               <a:t>(s);</a:t>
             </a:r>
@@ -17958,25 +19289,33 @@
             </a:pPr>
             <a:r>
               <a:rPr lang="en-GB" b="1" dirty="0">
-                <a:latin typeface="Courier" pitchFamily="2" charset="0"/>
+                <a:latin typeface="Menlo" panose="020B0609030804020204" pitchFamily="49" charset="0"/>
+                <a:ea typeface="Menlo" panose="020B0609030804020204" pitchFamily="49" charset="0"/>
+                <a:cs typeface="Menlo" panose="020B0609030804020204" pitchFamily="49" charset="0"/>
               </a:rPr>
               <a:t>} on </a:t>
             </a:r>
             <a:r>
               <a:rPr lang="en-GB" dirty="0" err="1">
-                <a:latin typeface="Courier" pitchFamily="2" charset="0"/>
+                <a:latin typeface="Menlo" panose="020B0609030804020204" pitchFamily="49" charset="0"/>
+                <a:ea typeface="Menlo" panose="020B0609030804020204" pitchFamily="49" charset="0"/>
+                <a:cs typeface="Menlo" panose="020B0609030804020204" pitchFamily="49" charset="0"/>
               </a:rPr>
               <a:t>FormatException</a:t>
             </a:r>
             <a:r>
               <a:rPr lang="en-GB" dirty="0">
-                <a:latin typeface="Courier" pitchFamily="2" charset="0"/>
+                <a:latin typeface="Menlo" panose="020B0609030804020204" pitchFamily="49" charset="0"/>
+                <a:ea typeface="Menlo" panose="020B0609030804020204" pitchFamily="49" charset="0"/>
+                <a:cs typeface="Menlo" panose="020B0609030804020204" pitchFamily="49" charset="0"/>
               </a:rPr>
               <a:t> </a:t>
             </a:r>
             <a:r>
               <a:rPr lang="en-GB" b="1" dirty="0">
-                <a:latin typeface="Courier" pitchFamily="2" charset="0"/>
+                <a:latin typeface="Menlo" panose="020B0609030804020204" pitchFamily="49" charset="0"/>
+                <a:ea typeface="Menlo" panose="020B0609030804020204" pitchFamily="49" charset="0"/>
+                <a:cs typeface="Menlo" panose="020B0609030804020204" pitchFamily="49" charset="0"/>
               </a:rPr>
               <a:t>catch (e) {</a:t>
             </a:r>
@@ -17987,7 +19326,9 @@
             </a:pPr>
             <a:r>
               <a:rPr lang="en-GB" dirty="0">
-                <a:latin typeface="Courier" pitchFamily="2" charset="0"/>
+                <a:latin typeface="Menlo" panose="020B0609030804020204" pitchFamily="49" charset="0"/>
+                <a:ea typeface="Menlo" panose="020B0609030804020204" pitchFamily="49" charset="0"/>
+                <a:cs typeface="Menlo" panose="020B0609030804020204" pitchFamily="49" charset="0"/>
               </a:rPr>
               <a:t>	print('Impossible to parse!');</a:t>
             </a:r>
@@ -17998,7 +19339,9 @@
             </a:pPr>
             <a:r>
               <a:rPr lang="en-GB" b="1" dirty="0">
-                <a:latin typeface="Courier" pitchFamily="2" charset="0"/>
+                <a:latin typeface="Menlo" panose="020B0609030804020204" pitchFamily="49" charset="0"/>
+                <a:ea typeface="Menlo" panose="020B0609030804020204" pitchFamily="49" charset="0"/>
+                <a:cs typeface="Menlo" panose="020B0609030804020204" pitchFamily="49" charset="0"/>
               </a:rPr>
               <a:t>} catch (e) {</a:t>
             </a:r>
@@ -18009,18 +19352,24 @@
             </a:pPr>
             <a:r>
               <a:rPr lang="en-GB" dirty="0">
-                <a:latin typeface="Courier" pitchFamily="2" charset="0"/>
+                <a:latin typeface="Menlo" panose="020B0609030804020204" pitchFamily="49" charset="0"/>
+                <a:ea typeface="Menlo" panose="020B0609030804020204" pitchFamily="49" charset="0"/>
+                <a:cs typeface="Menlo" panose="020B0609030804020204" pitchFamily="49" charset="0"/>
               </a:rPr>
               <a:t>	// No specified type, handles all other than </a:t>
             </a:r>
             <a:r>
               <a:rPr lang="en-GB" dirty="0" err="1">
-                <a:latin typeface="Courier" pitchFamily="2" charset="0"/>
+                <a:latin typeface="Menlo" panose="020B0609030804020204" pitchFamily="49" charset="0"/>
+                <a:ea typeface="Menlo" panose="020B0609030804020204" pitchFamily="49" charset="0"/>
+                <a:cs typeface="Menlo" panose="020B0609030804020204" pitchFamily="49" charset="0"/>
               </a:rPr>
               <a:t>FormatException</a:t>
             </a:r>
             <a:endParaRPr lang="en-GB" dirty="0">
-              <a:latin typeface="Courier" pitchFamily="2" charset="0"/>
+              <a:latin typeface="Menlo" panose="020B0609030804020204" pitchFamily="49" charset="0"/>
+              <a:ea typeface="Menlo" panose="020B0609030804020204" pitchFamily="49" charset="0"/>
+              <a:cs typeface="Menlo" panose="020B0609030804020204" pitchFamily="49" charset="0"/>
             </a:endParaRPr>
           </a:p>
           <a:p>
@@ -18029,7 +19378,9 @@
             </a:pPr>
             <a:r>
               <a:rPr lang="en-GB" dirty="0">
-                <a:latin typeface="Courier" pitchFamily="2" charset="0"/>
+                <a:latin typeface="Menlo" panose="020B0609030804020204" pitchFamily="49" charset="0"/>
+                <a:ea typeface="Menlo" panose="020B0609030804020204" pitchFamily="49" charset="0"/>
+                <a:cs typeface="Menlo" panose="020B0609030804020204" pitchFamily="49" charset="0"/>
               </a:rPr>
               <a:t>	print('Something really unknown: $e’);</a:t>
             </a:r>
@@ -18040,7 +19391,9 @@
             </a:pPr>
             <a:r>
               <a:rPr lang="en-GB" b="1" dirty="0">
-                <a:latin typeface="Courier" pitchFamily="2" charset="0"/>
+                <a:latin typeface="Menlo" panose="020B0609030804020204" pitchFamily="49" charset="0"/>
+                <a:ea typeface="Menlo" panose="020B0609030804020204" pitchFamily="49" charset="0"/>
+                <a:cs typeface="Menlo" panose="020B0609030804020204" pitchFamily="49" charset="0"/>
               </a:rPr>
               <a:t>} finally {</a:t>
             </a:r>
@@ -18051,7 +19404,9 @@
             </a:pPr>
             <a:r>
               <a:rPr lang="en-GB" dirty="0">
-                <a:latin typeface="Courier" pitchFamily="2" charset="0"/>
+                <a:latin typeface="Menlo" panose="020B0609030804020204" pitchFamily="49" charset="0"/>
+                <a:ea typeface="Menlo" panose="020B0609030804020204" pitchFamily="49" charset="0"/>
+                <a:cs typeface="Menlo" panose="020B0609030804020204" pitchFamily="49" charset="0"/>
               </a:rPr>
               <a:t>	//This is run no matter what.</a:t>
             </a:r>
@@ -18062,7 +19417,9 @@
             </a:pPr>
             <a:r>
               <a:rPr lang="en-GB" dirty="0">
-                <a:latin typeface="Courier" pitchFamily="2" charset="0"/>
+                <a:latin typeface="Menlo" panose="020B0609030804020204" pitchFamily="49" charset="0"/>
+                <a:ea typeface="Menlo" panose="020B0609030804020204" pitchFamily="49" charset="0"/>
+                <a:cs typeface="Menlo" panose="020B0609030804020204" pitchFamily="49" charset="0"/>
               </a:rPr>
               <a:t>	print(Bye!');</a:t>
             </a:r>
@@ -18073,7 +19430,9 @@
             </a:pPr>
             <a:r>
               <a:rPr lang="en-GB" b="1" dirty="0">
-                <a:latin typeface="Courier" pitchFamily="2" charset="0"/>
+                <a:latin typeface="Menlo" panose="020B0609030804020204" pitchFamily="49" charset="0"/>
+                <a:ea typeface="Menlo" panose="020B0609030804020204" pitchFamily="49" charset="0"/>
+                <a:cs typeface="Menlo" panose="020B0609030804020204" pitchFamily="49" charset="0"/>
               </a:rPr>
               <a:t>}//try-catch-finally</a:t>
             </a:r>
@@ -18083,7 +19442,9 @@
               <a:buNone/>
             </a:pPr>
             <a:endParaRPr lang="en-GB" dirty="0">
-              <a:latin typeface="Courier" pitchFamily="2" charset="0"/>
+              <a:latin typeface="Menlo" panose="020B0609030804020204" pitchFamily="49" charset="0"/>
+              <a:ea typeface="Menlo" panose="020B0609030804020204" pitchFamily="49" charset="0"/>
+              <a:cs typeface="Menlo" panose="020B0609030804020204" pitchFamily="49" charset="0"/>
             </a:endParaRPr>
           </a:p>
           <a:p>
@@ -18092,7 +19453,9 @@
             </a:pPr>
             <a:r>
               <a:rPr lang="en-GB" dirty="0">
-                <a:latin typeface="Courier" pitchFamily="2" charset="0"/>
+                <a:latin typeface="Menlo" panose="020B0609030804020204" pitchFamily="49" charset="0"/>
+                <a:ea typeface="Menlo" panose="020B0609030804020204" pitchFamily="49" charset="0"/>
+                <a:cs typeface="Menlo" panose="020B0609030804020204" pitchFamily="49" charset="0"/>
               </a:rPr>
               <a:t>}//main</a:t>
             </a:r>
@@ -18102,7 +19465,9 @@
               <a:buNone/>
             </a:pPr>
             <a:endParaRPr lang="en-GB" dirty="0">
-              <a:latin typeface="Courier" pitchFamily="2" charset="0"/>
+              <a:latin typeface="Menlo" panose="020B0609030804020204" pitchFamily="49" charset="0"/>
+              <a:ea typeface="Menlo" panose="020B0609030804020204" pitchFamily="49" charset="0"/>
+              <a:cs typeface="Menlo" panose="020B0609030804020204" pitchFamily="49" charset="0"/>
             </a:endParaRPr>
           </a:p>
           <a:p>
@@ -18110,7 +19475,9 @@
               <a:buNone/>
             </a:pPr>
             <a:endParaRPr lang="en-GB" dirty="0">
-              <a:latin typeface="Courier" pitchFamily="2" charset="0"/>
+              <a:latin typeface="Menlo" panose="020B0609030804020204" pitchFamily="49" charset="0"/>
+              <a:ea typeface="Menlo" panose="020B0609030804020204" pitchFamily="49" charset="0"/>
+              <a:cs typeface="Menlo" panose="020B0609030804020204" pitchFamily="49" charset="0"/>
             </a:endParaRPr>
           </a:p>
         </p:txBody>
@@ -18743,9 +20110,18 @@
           <a:lstStyle/>
           <a:p>
             <a:r>
-              <a:rPr lang="en-IT" dirty="0"/>
-              <a:t>Exercise 01.01</a:t>
-            </a:r>
+              <a:rPr lang="en-IT"/>
+              <a:t>Exercise </a:t>
+            </a:r>
+            <a:r>
+              <a:rPr lang="en-US" dirty="0"/>
+              <a:t>0</a:t>
+            </a:r>
+            <a:r>
+              <a:rPr lang="en-IT"/>
+              <a:t>1</a:t>
+            </a:r>
+            <a:endParaRPr lang="en-IT" dirty="0"/>
           </a:p>
           <a:p>
             <a:pPr lvl="1"/>
@@ -18785,7 +20161,7 @@
           <a:p>
             <a:r>
               <a:rPr lang="en-GB" dirty="0"/>
-              <a:t>Exercise 01.02 </a:t>
+              <a:t>Exercise 02</a:t>
             </a:r>
           </a:p>
           <a:p>
@@ -18830,7 +20206,7 @@
           <a:p>
             <a:r>
               <a:rPr lang="en-GB" dirty="0"/>
-              <a:t>Exercise 01.03 </a:t>
+              <a:t>Exercise 03 </a:t>
             </a:r>
           </a:p>
           <a:p>
@@ -18843,7 +20219,7 @@
           <a:p>
             <a:r>
               <a:rPr lang="en-GB" dirty="0"/>
-              <a:t>Exercise 01.04</a:t>
+              <a:t>Exercise 04</a:t>
             </a:r>
           </a:p>
           <a:p>
@@ -18879,9 +20255,14 @@
           </a:p>
           <a:p>
             <a:r>
-              <a:rPr lang="en-IT" dirty="0"/>
-              <a:t>Exercise 01.05</a:t>
-            </a:r>
+              <a:rPr lang="en-IT"/>
+              <a:t>Exercise </a:t>
+            </a:r>
+            <a:r>
+              <a:rPr lang="en-US" dirty="0"/>
+              <a:t>05</a:t>
+            </a:r>
+            <a:endParaRPr lang="en-IT" dirty="0"/>
           </a:p>
           <a:p>
             <a:pPr lvl="1" fontAlgn="base"/>
@@ -19077,9 +20458,14 @@
           <a:lstStyle/>
           <a:p>
             <a:r>
-              <a:rPr lang="en-IT" dirty="0"/>
-              <a:t>Exercise 01.06</a:t>
-            </a:r>
+              <a:rPr lang="en-IT"/>
+              <a:t>Exercise </a:t>
+            </a:r>
+            <a:r>
+              <a:rPr lang="en-US" dirty="0"/>
+              <a:t>06</a:t>
+            </a:r>
+            <a:endParaRPr lang="en-IT" dirty="0"/>
           </a:p>
           <a:p>
             <a:pPr lvl="1"/>
@@ -19099,7 +20485,7 @@
           <a:p>
             <a:r>
               <a:rPr lang="en-GB" dirty="0"/>
-              <a:t>Exercise 01.07 </a:t>
+              <a:t>Exercise 07 </a:t>
             </a:r>
           </a:p>
           <a:p>
@@ -19128,7 +20514,7 @@
           <a:p>
             <a:r>
               <a:rPr lang="en-GB" dirty="0"/>
-              <a:t>Exercise 01.08 </a:t>
+              <a:t>Exercise 08 </a:t>
             </a:r>
           </a:p>
           <a:p>
@@ -19186,7 +20572,7 @@
           <a:p>
             <a:r>
               <a:rPr lang="en-GB" dirty="0"/>
-              <a:t>Exercise 01.09</a:t>
+              <a:t>Exercise 09</a:t>
             </a:r>
           </a:p>
           <a:p>
@@ -19325,9 +20711,10 @@
           <a:lstStyle/>
           <a:p>
             <a:r>
-              <a:rPr lang="en-IT" dirty="0"/>
-              <a:t>Exercise 01.10</a:t>
-            </a:r>
+              <a:rPr lang="en-IT"/>
+              <a:t>Exercise 10</a:t>
+            </a:r>
+            <a:endParaRPr lang="en-IT" dirty="0"/>
           </a:p>
           <a:p>
             <a:pPr lvl="1"/>
@@ -20563,18 +21950,27 @@
           <a:p>
             <a:pPr lvl="1"/>
             <a:r>
-              <a:rPr lang="en-GB" dirty="0">
+              <a:rPr lang="en-US" dirty="0">
+                <a:latin typeface="Menlo" panose="020B0609030804020204" pitchFamily="49" charset="0"/>
+                <a:ea typeface="Menlo" panose="020B0609030804020204" pitchFamily="49" charset="0"/>
+                <a:cs typeface="Menlo" panose="020B0609030804020204" pitchFamily="49" charset="0"/>
+              </a:rPr>
+              <a:t>ma</a:t>
+            </a:r>
+            <a:r>
+              <a:rPr lang="en-IT">
+                <a:latin typeface="Menlo" panose="020B0609030804020204" pitchFamily="49" charset="0"/>
+                <a:ea typeface="Menlo" panose="020B0609030804020204" pitchFamily="49" charset="0"/>
+                <a:cs typeface="Menlo" panose="020B0609030804020204" pitchFamily="49" charset="0"/>
+              </a:rPr>
+              <a:t>in</a:t>
+            </a:r>
+            <a:r>
+              <a:rPr lang="en-IT">
                 <a:latin typeface="Courier" pitchFamily="2" charset="0"/>
                 <a:ea typeface="Palatino" pitchFamily="2" charset="77"/>
               </a:rPr>
-              <a:t>m</a:t>
-            </a:r>
-            <a:r>
-              <a:rPr lang="en-IT" dirty="0">
-                <a:latin typeface="Courier" pitchFamily="2" charset="0"/>
-                <a:ea typeface="Palatino" pitchFamily="2" charset="77"/>
-              </a:rPr>
-              <a:t>ain </a:t>
+              <a:t> </a:t>
             </a:r>
             <a:r>
               <a:rPr lang="en-IT" dirty="0">
@@ -20592,37 +21988,59 @@
           <a:p>
             <a:pPr lvl="1"/>
             <a:r>
-              <a:rPr lang="en-GB" dirty="0">
+              <a:rPr lang="en-US" dirty="0">
+                <a:latin typeface="Menlo" panose="020B0609030804020204" pitchFamily="49" charset="0"/>
+                <a:ea typeface="Menlo" panose="020B0609030804020204" pitchFamily="49" charset="0"/>
+                <a:cs typeface="Menlo" panose="020B0609030804020204" pitchFamily="49" charset="0"/>
+              </a:rPr>
+              <a:t>ma</a:t>
+            </a:r>
+            <a:r>
+              <a:rPr lang="en-IT">
+                <a:latin typeface="Menlo" panose="020B0609030804020204" pitchFamily="49" charset="0"/>
+                <a:ea typeface="Menlo" panose="020B0609030804020204" pitchFamily="49" charset="0"/>
+                <a:cs typeface="Menlo" panose="020B0609030804020204" pitchFamily="49" charset="0"/>
+              </a:rPr>
+              <a:t>in</a:t>
+            </a:r>
+            <a:r>
+              <a:rPr lang="en-IT">
                 <a:latin typeface="Courier" pitchFamily="2" charset="0"/>
                 <a:ea typeface="Palatino" pitchFamily="2" charset="77"/>
               </a:rPr>
-              <a:t>m</a:t>
-            </a:r>
-            <a:r>
-              <a:rPr lang="en-IT" dirty="0">
-                <a:latin typeface="Courier" pitchFamily="2" charset="0"/>
-                <a:ea typeface="Palatino" pitchFamily="2" charset="77"/>
-              </a:rPr>
-              <a:t>ain </a:t>
+              <a:t> </a:t>
             </a:r>
             <a:r>
               <a:rPr lang="en-IT" dirty="0">
                 <a:ea typeface="Palatino" pitchFamily="2" charset="77"/>
               </a:rPr>
-              <a:t>is a function an accepts a </a:t>
+              <a:t>is a function an accepts </a:t>
+            </a:r>
+            <a:r>
+              <a:rPr lang="en-IT">
+                <a:ea typeface="Palatino" pitchFamily="2" charset="77"/>
+              </a:rPr>
+              <a:t>a </a:t>
             </a:r>
             <a:r>
               <a:rPr lang="en-IT" dirty="0">
-                <a:latin typeface="Courier" pitchFamily="2" charset="0"/>
+                <a:latin typeface="Menlo" panose="020B0609030804020204" pitchFamily="49" charset="0"/>
+                <a:ea typeface="Menlo" panose="020B0609030804020204" pitchFamily="49" charset="0"/>
+                <a:cs typeface="Menlo" panose="020B0609030804020204" pitchFamily="49" charset="0"/>
+              </a:rPr>
+              <a:t>List</a:t>
+            </a:r>
+            <a:r>
+              <a:rPr lang="en-IT">
                 <a:ea typeface="Palatino" pitchFamily="2" charset="77"/>
               </a:rPr>
-              <a:t>List</a:t>
+              <a:t> </a:t>
             </a:r>
             <a:r>
               <a:rPr lang="en-IT" dirty="0">
                 <a:ea typeface="Palatino" pitchFamily="2" charset="77"/>
               </a:rPr>
-              <a:t> of strings</a:t>
+              <a:t>of strings</a:t>
             </a:r>
           </a:p>
           <a:p>
@@ -20653,12 +22071,19 @@
               <a:rPr lang="en-IT" dirty="0">
                 <a:ea typeface="Palatino" pitchFamily="2" charset="77"/>
               </a:rPr>
-              <a:t>It all starts from a </a:t>
+              <a:t>It all starts from </a:t>
+            </a:r>
+            <a:r>
+              <a:rPr lang="en-IT">
+                <a:ea typeface="Palatino" pitchFamily="2" charset="77"/>
+              </a:rPr>
+              <a:t>a </a:t>
             </a:r>
             <a:r>
               <a:rPr lang="en-IT" dirty="0">
-                <a:latin typeface="Courier" pitchFamily="2" charset="0"/>
-                <a:ea typeface="Palatino" pitchFamily="2" charset="77"/>
+                <a:latin typeface="Menlo" panose="020B0609030804020204" pitchFamily="49" charset="0"/>
+                <a:ea typeface="Menlo" panose="020B0609030804020204" pitchFamily="49" charset="0"/>
+                <a:cs typeface="Menlo" panose="020B0609030804020204" pitchFamily="49" charset="0"/>
               </a:rPr>
               <a:t>main</a:t>
             </a:r>
@@ -20675,8 +22100,9 @@
             <a:pPr lvl="1"/>
             <a:r>
               <a:rPr lang="en-GB" dirty="0">
-                <a:latin typeface="Courier" pitchFamily="2" charset="0"/>
-                <a:ea typeface="Palatino" pitchFamily="2" charset="77"/>
+                <a:latin typeface="Menlo" panose="020B0609030804020204" pitchFamily="49" charset="0"/>
+                <a:ea typeface="Menlo" panose="020B0609030804020204" pitchFamily="49" charset="0"/>
+                <a:cs typeface="Menlo" panose="020B0609030804020204" pitchFamily="49" charset="0"/>
               </a:rPr>
               <a:t>print() </a:t>
             </a:r>
@@ -20697,15 +22123,17 @@
             <a:pPr lvl="1"/>
             <a:r>
               <a:rPr lang="en-GB" dirty="0">
-                <a:latin typeface="Courier" pitchFamily="2" charset="0"/>
-                <a:ea typeface="Palatino" pitchFamily="2" charset="77"/>
+                <a:latin typeface="Menlo" panose="020B0609030804020204" pitchFamily="49" charset="0"/>
+                <a:ea typeface="Menlo" panose="020B0609030804020204" pitchFamily="49" charset="0"/>
+                <a:cs typeface="Menlo" panose="020B0609030804020204" pitchFamily="49" charset="0"/>
               </a:rPr>
               <a:t>// This is a comment</a:t>
             </a:r>
             <a:r>
               <a:rPr lang="en-IT" dirty="0">
-                <a:latin typeface="Courier" pitchFamily="2" charset="0"/>
-                <a:ea typeface="Palatino" pitchFamily="2" charset="77"/>
+                <a:latin typeface="Menlo" panose="020B0609030804020204" pitchFamily="49" charset="0"/>
+                <a:ea typeface="Menlo" panose="020B0609030804020204" pitchFamily="49" charset="0"/>
+                <a:cs typeface="Menlo" panose="020B0609030804020204" pitchFamily="49" charset="0"/>
               </a:rPr>
               <a:t> </a:t>
             </a:r>
@@ -21365,7 +22793,9 @@
           <a:p>
             <a:r>
               <a:rPr lang="en-GB" b="1" dirty="0">
-                <a:latin typeface="Courier" pitchFamily="2" charset="0"/>
+                <a:latin typeface="Menlo" panose="020B0609030804020204" pitchFamily="49" charset="0"/>
+                <a:ea typeface="Menlo" panose="020B0609030804020204" pitchFamily="49" charset="0"/>
+                <a:cs typeface="Menlo" panose="020B0609030804020204" pitchFamily="49" charset="0"/>
               </a:rPr>
               <a:t>var</a:t>
             </a:r>
@@ -21384,19 +22814,25 @@
             <a:pPr lvl="1"/>
             <a:r>
               <a:rPr lang="en-GB" dirty="0">
-                <a:latin typeface="Courier" pitchFamily="2" charset="0"/>
+                <a:latin typeface="Menlo" panose="020B0609030804020204" pitchFamily="49" charset="0"/>
+                <a:ea typeface="Menlo" panose="020B0609030804020204" pitchFamily="49" charset="0"/>
+                <a:cs typeface="Menlo" panose="020B0609030804020204" pitchFamily="49" charset="0"/>
               </a:rPr>
               <a:t>var number = 42; // number contains a </a:t>
             </a:r>
             <a:r>
               <a:rPr lang="en-GB" b="1" dirty="0">
-                <a:latin typeface="Courier" pitchFamily="2" charset="0"/>
+                <a:latin typeface="Menlo" panose="020B0609030804020204" pitchFamily="49" charset="0"/>
+                <a:ea typeface="Menlo" panose="020B0609030804020204" pitchFamily="49" charset="0"/>
+                <a:cs typeface="Menlo" panose="020B0609030804020204" pitchFamily="49" charset="0"/>
               </a:rPr>
               <a:t>reference</a:t>
             </a:r>
             <a:r>
               <a:rPr lang="en-GB" dirty="0">
-                <a:latin typeface="Courier" pitchFamily="2" charset="0"/>
+                <a:latin typeface="Menlo" panose="020B0609030804020204" pitchFamily="49" charset="0"/>
+                <a:ea typeface="Menlo" panose="020B0609030804020204" pitchFamily="49" charset="0"/>
+                <a:cs typeface="Menlo" panose="020B0609030804020204" pitchFamily="49" charset="0"/>
               </a:rPr>
               <a:t> to a number object with value 42</a:t>
             </a:r>
@@ -21404,7 +22840,9 @@
           <a:p>
             <a:r>
               <a:rPr lang="en-GB" b="1" dirty="0">
-                <a:latin typeface="Courier" pitchFamily="2" charset="0"/>
+                <a:latin typeface="Menlo" panose="020B0609030804020204" pitchFamily="49" charset="0"/>
+                <a:ea typeface="Menlo" panose="020B0609030804020204" pitchFamily="49" charset="0"/>
+                <a:cs typeface="Menlo" panose="020B0609030804020204" pitchFamily="49" charset="0"/>
               </a:rPr>
               <a:t>final</a:t>
             </a:r>
@@ -21417,7 +22855,9 @@
             <a:pPr lvl="1"/>
             <a:r>
               <a:rPr lang="en-GB" dirty="0">
-                <a:latin typeface="Courier" pitchFamily="2" charset="0"/>
+                <a:latin typeface="Menlo" panose="020B0609030804020204" pitchFamily="49" charset="0"/>
+                <a:ea typeface="Menlo" panose="020B0609030804020204" pitchFamily="49" charset="0"/>
+                <a:cs typeface="Menlo" panose="020B0609030804020204" pitchFamily="49" charset="0"/>
               </a:rPr>
               <a:t>final name = 'Bob';</a:t>
             </a:r>
@@ -21425,7 +22865,9 @@
           <a:p>
             <a:r>
               <a:rPr lang="en-GB" b="1" dirty="0" err="1">
-                <a:latin typeface="Courier" pitchFamily="2" charset="0"/>
+                <a:latin typeface="Menlo" panose="020B0609030804020204" pitchFamily="49" charset="0"/>
+                <a:ea typeface="Menlo" panose="020B0609030804020204" pitchFamily="49" charset="0"/>
+                <a:cs typeface="Menlo" panose="020B0609030804020204" pitchFamily="49" charset="0"/>
               </a:rPr>
               <a:t>const</a:t>
             </a:r>
@@ -21438,13 +22880,17 @@
             <a:pPr lvl="1"/>
             <a:r>
               <a:rPr lang="en-GB" dirty="0" err="1">
-                <a:latin typeface="Courier" pitchFamily="2" charset="0"/>
+                <a:latin typeface="Menlo" panose="020B0609030804020204" pitchFamily="49" charset="0"/>
+                <a:ea typeface="Menlo" panose="020B0609030804020204" pitchFamily="49" charset="0"/>
+                <a:cs typeface="Menlo" panose="020B0609030804020204" pitchFamily="49" charset="0"/>
               </a:rPr>
               <a:t>const</a:t>
             </a:r>
             <a:r>
               <a:rPr lang="en-GB" dirty="0">
-                <a:latin typeface="Courier" pitchFamily="2" charset="0"/>
+                <a:latin typeface="Menlo" panose="020B0609030804020204" pitchFamily="49" charset="0"/>
+                <a:ea typeface="Menlo" panose="020B0609030804020204" pitchFamily="49" charset="0"/>
+                <a:cs typeface="Menlo" panose="020B0609030804020204" pitchFamily="49" charset="0"/>
               </a:rPr>
               <a:t> pi = 3.14;</a:t>
             </a:r>
@@ -21477,23 +22923,28 @@
             <a:pPr lvl="1"/>
             <a:r>
               <a:rPr lang="en-GB" dirty="0">
-                <a:latin typeface="Courier" pitchFamily="2" charset="0"/>
+                <a:latin typeface="Menlo" panose="020B0609030804020204" pitchFamily="49" charset="0"/>
+                <a:ea typeface="Menlo" panose="020B0609030804020204" pitchFamily="49" charset="0"/>
+                <a:cs typeface="Menlo" panose="020B0609030804020204" pitchFamily="49" charset="0"/>
               </a:rPr>
               <a:t>final String </a:t>
             </a:r>
             <a:r>
               <a:rPr lang="en-GB" dirty="0" err="1">
-                <a:latin typeface="Courier" pitchFamily="2" charset="0"/>
+                <a:latin typeface="Menlo" panose="020B0609030804020204" pitchFamily="49" charset="0"/>
+                <a:ea typeface="Menlo" panose="020B0609030804020204" pitchFamily="49" charset="0"/>
+                <a:cs typeface="Menlo" panose="020B0609030804020204" pitchFamily="49" charset="0"/>
               </a:rPr>
               <a:t>anotherName</a:t>
             </a:r>
             <a:r>
               <a:rPr lang="en-GB" dirty="0">
-                <a:latin typeface="Courier" pitchFamily="2" charset="0"/>
+                <a:latin typeface="Menlo" panose="020B0609030804020204" pitchFamily="49" charset="0"/>
+                <a:ea typeface="Menlo" panose="020B0609030804020204" pitchFamily="49" charset="0"/>
+                <a:cs typeface="Menlo" panose="020B0609030804020204" pitchFamily="49" charset="0"/>
               </a:rPr>
               <a:t> = 'Jack'; //This will be a constant String</a:t>
             </a:r>
-            <a:endParaRPr lang="en-GB" dirty="0"/>
           </a:p>
         </p:txBody>
       </p:sp>
